--- a/tunjunying/plan_v2.pptx
+++ b/tunjunying/plan_v2.pptx
@@ -5509,7 +5509,7 @@
         </p:nvGraphicFramePr>
         <p:xfrm>
           <a:off x="274320" y="1280160"/>
-          <a:ext cx="11612880" cy="3200400"/>
+          <a:ext cx="11612880" cy="3657600"/>
         </p:xfrm>
         <a:graphic>
           <a:graphicData uri="http://schemas.openxmlformats.org/drawingml/2006/table">
@@ -5524,7 +5524,7 @@
                 <a:gridCol w="3017520"/>
                 <a:gridCol w="2926080"/>
               </a:tblGrid>
-              <a:tr h="640080">
+              <a:tr h="609600">
                 <a:tc>
                   <a:txBody>
                     <a:bodyPr/>
@@ -5641,7 +5641,7 @@
                   </a:tcPr>
                 </a:tc>
               </a:tr>
-              <a:tr h="640080">
+              <a:tr h="609600">
                 <a:tc>
                   <a:txBody>
                     <a:bodyPr/>
@@ -5770,7 +5770,7 @@
                   </a:tcPr>
                 </a:tc>
               </a:tr>
-              <a:tr h="640080">
+              <a:tr h="609600">
                 <a:tc>
                   <a:txBody>
                     <a:bodyPr/>
@@ -5899,7 +5899,7 @@
                   </a:tcPr>
                 </a:tc>
               </a:tr>
-              <a:tr h="640080">
+              <a:tr h="609600">
                 <a:tc>
                   <a:txBody>
                     <a:bodyPr/>
@@ -5913,7 +5913,7 @@
                         </a:defRPr>
                       </a:pPr>
                       <a:r>
-                        <a:t>张爱军</a:t>
+                        <a:t>小江支书</a:t>
                       </a:r>
                     </a:p>
                   </a:txBody>
@@ -5936,7 +5936,7 @@
                         </a:defRPr>
                       </a:pPr>
                       <a:r>
-                        <a:t>特产锚点</a:t>
+                        <a:t>正能量+文化</a:t>
                       </a:r>
                     </a:p>
                   </a:txBody>
@@ -5959,11 +5959,11 @@
                         </a:defRPr>
                       </a:pPr>
                       <a:r>
-                        <a:t>105作品</a:t>
+                        <a:t>34作品</a:t>
                       </a:r>
                       <a:br/>
                       <a:r>
-                        <a:t>678万赞</a:t>
+                        <a:t>77万赞</a:t>
                       </a:r>
                     </a:p>
                   </a:txBody>
@@ -5986,11 +5986,11 @@
                         </a:defRPr>
                       </a:pPr>
                       <a:r>
-                        <a:t>苹果品牌溢价</a:t>
+                        <a:t>少而精人设沉淀</a:t>
                       </a:r>
                       <a:br/>
                       <a:r>
-                        <a:t>产地旅游导流</a:t>
+                        <a:t>长期信任变现</a:t>
                       </a:r>
                     </a:p>
                   </a:txBody>
@@ -6013,11 +6013,11 @@
                         </a:defRPr>
                       </a:pPr>
                       <a:r>
-                        <a:t>「苹果第一镇」=产品锚</a:t>
+                        <a:t>34条=高粘性</a:t>
                       </a:r>
                       <a:br/>
                       <a:r>
-                        <a:t>不需要解释就懂</a:t>
+                        <a:t>重质不重量</a:t>
                       </a:r>
                     </a:p>
                   </a:txBody>
@@ -6028,7 +6028,136 @@
                   </a:tcPr>
                 </a:tc>
               </a:tr>
-              <a:tr h="640080">
+              <a:tr h="609600">
+                <a:tc>
+                  <a:txBody>
+                    <a:bodyPr/>
+                    <a:lstStyle/>
+                    <a:p>
+                      <a:pPr>
+                        <a:defRPr sz="1100">
+                          <a:solidFill>
+                            <a:srgbClr val="CCCCCC"/>
+                          </a:solidFill>
+                        </a:defRPr>
+                      </a:pPr>
+                      <a:r>
+                        <a:t>张爱军</a:t>
+                      </a:r>
+                    </a:p>
+                  </a:txBody>
+                  <a:tcPr>
+                    <a:solidFill>
+                      <a:srgbClr val="1A1A1A"/>
+                    </a:solidFill>
+                  </a:tcPr>
+                </a:tc>
+                <a:tc>
+                  <a:txBody>
+                    <a:bodyPr/>
+                    <a:lstStyle/>
+                    <a:p>
+                      <a:pPr>
+                        <a:defRPr sz="1100">
+                          <a:solidFill>
+                            <a:srgbClr val="CCCCCC"/>
+                          </a:solidFill>
+                        </a:defRPr>
+                      </a:pPr>
+                      <a:r>
+                        <a:t>特产锚点</a:t>
+                      </a:r>
+                    </a:p>
+                  </a:txBody>
+                  <a:tcPr>
+                    <a:solidFill>
+                      <a:srgbClr val="1A1A1A"/>
+                    </a:solidFill>
+                  </a:tcPr>
+                </a:tc>
+                <a:tc>
+                  <a:txBody>
+                    <a:bodyPr/>
+                    <a:lstStyle/>
+                    <a:p>
+                      <a:pPr>
+                        <a:defRPr sz="1100">
+                          <a:solidFill>
+                            <a:srgbClr val="CCCCCC"/>
+                          </a:solidFill>
+                        </a:defRPr>
+                      </a:pPr>
+                      <a:r>
+                        <a:t>105作品</a:t>
+                      </a:r>
+                      <a:br/>
+                      <a:r>
+                        <a:t>678万赞</a:t>
+                      </a:r>
+                    </a:p>
+                  </a:txBody>
+                  <a:tcPr>
+                    <a:solidFill>
+                      <a:srgbClr val="1A1A1A"/>
+                    </a:solidFill>
+                  </a:tcPr>
+                </a:tc>
+                <a:tc>
+                  <a:txBody>
+                    <a:bodyPr/>
+                    <a:lstStyle/>
+                    <a:p>
+                      <a:pPr>
+                        <a:defRPr sz="1100">
+                          <a:solidFill>
+                            <a:srgbClr val="CCCCCC"/>
+                          </a:solidFill>
+                        </a:defRPr>
+                      </a:pPr>
+                      <a:r>
+                        <a:t>苹果品牌溢价</a:t>
+                      </a:r>
+                      <a:br/>
+                      <a:r>
+                        <a:t>产地旅游导流</a:t>
+                      </a:r>
+                    </a:p>
+                  </a:txBody>
+                  <a:tcPr>
+                    <a:solidFill>
+                      <a:srgbClr val="1A1A1A"/>
+                    </a:solidFill>
+                  </a:tcPr>
+                </a:tc>
+                <a:tc>
+                  <a:txBody>
+                    <a:bodyPr/>
+                    <a:lstStyle/>
+                    <a:p>
+                      <a:pPr>
+                        <a:defRPr sz="1100">
+                          <a:solidFill>
+                            <a:srgbClr val="CCCCCC"/>
+                          </a:solidFill>
+                        </a:defRPr>
+                      </a:pPr>
+                      <a:r>
+                        <a:t>「苹果第一镇」=产品锚</a:t>
+                      </a:r>
+                      <a:br/>
+                      <a:r>
+                        <a:t>不需要解释就懂</a:t>
+                      </a:r>
+                    </a:p>
+                  </a:txBody>
+                  <a:tcPr>
+                    <a:solidFill>
+                      <a:srgbClr val="1A1A1A"/>
+                    </a:solidFill>
+                  </a:tcPr>
+                </a:tc>
+              </a:tr>
+              <a:tr h="609600">
                 <a:tc>
                   <a:txBody>
                     <a:bodyPr/>
@@ -6138,11 +6267,11 @@
                         </a:defRPr>
                       </a:pPr>
                       <a:r>
-                        <a:t>冠军村壁垒</a:t>
+                        <a:t>4类竞品空白</a:t>
                       </a:r>
                       <a:br/>
                       <a:r>
-                        <a:t>天花板远高于农产品</a:t>
+                        <a:t>天花板远超农产品</a:t>
                       </a:r>
                     </a:p>
                   </a:txBody>
@@ -6204,7 +6333,7 @@
               </a:defRPr>
             </a:pPr>
             <a:r>
-              <a:t>三者共同点：都靠农产品变现，天花板 = 带货GMV</a:t>
+              <a:t>四个对标号共同点：都靠农产品/直播变现，天花板 = 带货GMV</a:t>
             </a:r>
             <a:br/>
             <a:r>
@@ -6221,8 +6350,8 @@
         </p:nvSpPr>
         <p:spPr>
           <a:xfrm>
-            <a:off x="274320" y="5669280"/>
-            <a:ext cx="5577840" cy="1005840"/>
+            <a:off x="274320" y="5303520"/>
+            <a:ext cx="5577840" cy="914400"/>
           </a:xfrm>
           <a:prstGeom prst="rect">
             <a:avLst/>
@@ -6290,8 +6419,8 @@
         </p:nvSpPr>
         <p:spPr>
           <a:xfrm>
-            <a:off x="6217920" y="5669280"/>
-            <a:ext cx="5669280" cy="1005840"/>
+            <a:off x="6217920" y="5303520"/>
+            <a:ext cx="5669280" cy="914400"/>
           </a:xfrm>
           <a:prstGeom prst="rect">
             <a:avLst/>
@@ -6346,7 +6475,7 @@
               </a:defRPr>
             </a:pPr>
             <a:r>
-              <a:t>延庆首个村级体育公园 · 多条冠军奖杯 · 军屯文化+足球IP · 赛事→研学→文旅阶梯变现</a:t>
+              <a:t>延庆首个村级体育公园 · 多条冠军奖杯 · 军屯文化+足球IP · 4类竞品均未切入体育赛道</a:t>
             </a:r>
           </a:p>
         </p:txBody>
@@ -8122,7 +8251,7 @@
             </a:r>
             <a:br/>
             <a:r>
-              <a:t>• 每周刷3个同类对标账号</a:t>
+              <a:t>• 每周刷4个同类对标账号</a:t>
             </a:r>
             <a:br/>
             <a:r>

--- a/tunjunying/plan_v2.pptx
+++ b/tunjunying/plan_v2.pptx
@@ -16,6 +16,10 @@
     <p:sldId id="264" r:id="rId15"/>
     <p:sldId id="265" r:id="rId16"/>
     <p:sldId id="266" r:id="rId17"/>
+    <p:sldId id="267" r:id="rId18"/>
+    <p:sldId id="268" r:id="rId19"/>
+    <p:sldId id="269" r:id="rId20"/>
+    <p:sldId id="270" r:id="rId21"/>
   </p:sldIdLst>
   <p:sldSz cx="12191695" cy="6858000" type="screen4x3"/>
   <p:notesSz cx="6858000" cy="9144000"/>
@@ -3114,8 +3118,8 @@
         </p:nvSpPr>
         <p:spPr>
           <a:xfrm>
-            <a:off x="914400" y="1828800"/>
-            <a:ext cx="10332720" cy="1371600"/>
+            <a:off x="914400" y="1371600"/>
+            <a:ext cx="10332720" cy="1097280"/>
           </a:xfrm>
           <a:prstGeom prst="rect">
             <a:avLst/>
@@ -3129,14 +3133,14 @@
           <a:lstStyle/>
           <a:p>
             <a:pPr algn="ctr">
-              <a:defRPr sz="4800" b="1">
-                <a:solidFill>
-                  <a:srgbClr val="E8A817"/>
-                </a:solidFill>
-              </a:defRPr>
-            </a:pPr>
-            <a:r>
-              <a:t>屯军营村·王健支书</a:t>
+              <a:defRPr sz="4400" b="1">
+                <a:solidFill>
+                  <a:srgbClr val="D4A017"/>
+                </a:solidFill>
+              </a:defRPr>
+            </a:pPr>
+            <a:r>
+              <a:t>屯军营村 · 王健支书</a:t>
             </a:r>
           </a:p>
         </p:txBody>
@@ -3149,8 +3153,8 @@
         </p:nvSpPr>
         <p:spPr>
           <a:xfrm>
-            <a:off x="914400" y="3017520"/>
-            <a:ext cx="10332720" cy="731520"/>
+            <a:off x="914400" y="2560320"/>
+            <a:ext cx="10332720" cy="640080"/>
           </a:xfrm>
           <a:prstGeom prst="rect">
             <a:avLst/>
@@ -3184,42 +3188,7 @@
         </p:nvSpPr>
         <p:spPr>
           <a:xfrm>
-            <a:off x="914400" y="3840480"/>
-            <a:ext cx="10332720" cy="548640"/>
-          </a:xfrm>
-          <a:prstGeom prst="rect">
-            <a:avLst/>
-          </a:prstGeom>
-          <a:noFill/>
-        </p:spPr>
-        <p:txBody>
-          <a:bodyPr wrap="square">
-            <a:spAutoFit/>
-          </a:bodyPr>
-          <a:lstStyle/>
-          <a:p>
-            <a:pPr algn="ctr">
-              <a:defRPr sz="2000" b="0">
-                <a:solidFill>
-                  <a:srgbClr val="AAAACC"/>
-                </a:solidFill>
-              </a:defRPr>
-            </a:pPr>
-            <a:r>
-              <a:t>以足球为魂 · 以冠军为名</a:t>
-            </a:r>
-          </a:p>
-        </p:txBody>
-      </p:sp>
-      <p:sp>
-        <p:nvSpPr>
-          <p:cNvPr id="5" name="TextBox 4"/>
-          <p:cNvSpPr txBox="1"/>
-          <p:nvPr/>
-        </p:nvSpPr>
-        <p:spPr>
-          <a:xfrm>
-            <a:off x="914400" y="5760720"/>
+            <a:off x="914400" y="3291840"/>
             <a:ext cx="10332720" cy="457200"/>
           </a:xfrm>
           <a:prstGeom prst="rect">
@@ -3234,14 +3203,49 @@
           <a:lstStyle/>
           <a:p>
             <a:pPr algn="ctr">
-              <a:defRPr sz="1400" b="0">
+              <a:defRPr sz="1800" b="0">
+                <a:solidFill>
+                  <a:srgbClr val="AAAACC"/>
+                </a:solidFill>
+              </a:defRPr>
+            </a:pPr>
+            <a:r>
+              <a:t>以足球为魂 · 以冠军为名</a:t>
+            </a:r>
+          </a:p>
+        </p:txBody>
+      </p:sp>
+      <p:sp>
+        <p:nvSpPr>
+          <p:cNvPr id="5" name="TextBox 4"/>
+          <p:cNvSpPr txBox="1"/>
+          <p:nvPr/>
+        </p:nvSpPr>
+        <p:spPr>
+          <a:xfrm>
+            <a:off x="914400" y="5303520"/>
+            <a:ext cx="10332720" cy="457200"/>
+          </a:xfrm>
+          <a:prstGeom prst="rect">
+            <a:avLst/>
+          </a:prstGeom>
+          <a:noFill/>
+        </p:spPr>
+        <p:txBody>
+          <a:bodyPr wrap="square">
+            <a:spAutoFit/>
+          </a:bodyPr>
+          <a:lstStyle/>
+          <a:p>
+            <a:pPr algn="ctr">
+              <a:defRPr sz="1300" b="0">
                 <a:solidFill>
                   <a:srgbClr val="666666"/>
                 </a:solidFill>
               </a:defRPr>
             </a:pPr>
             <a:r>
-              <a:t>2026年6月 | 24条脚本 · 8周计划 · 变现路径</a:t>
+              <a:t>2026年6月  |  24条脚本 · 8周执行计划 · 4阶变现路径</a:t>
             </a:r>
           </a:p>
         </p:txBody>
@@ -3272,8 +3276,8 @@
         </p:nvSpPr>
         <p:spPr>
           <a:xfrm>
-            <a:off x="457200" y="274320"/>
-            <a:ext cx="4572000" cy="731520"/>
+            <a:off x="457200" y="365760"/>
+            <a:ext cx="7315200" cy="640080"/>
           </a:xfrm>
           <a:prstGeom prst="rect">
             <a:avLst/>
@@ -3289,12 +3293,1991 @@
             <a:pPr algn="l">
               <a:defRPr sz="3000" b="1">
                 <a:solidFill>
-                  <a:srgbClr val="1A5C2A"/>
-                </a:solidFill>
-              </a:defRPr>
-            </a:pPr>
-            <a:r>
-              <a:t>八周执行节奏</a:t>
+                  <a:srgbClr val="2D5016"/>
+                </a:solidFill>
+              </a:defRPr>
+            </a:pPr>
+            <a:r>
+              <a:t>03  各阶段盈利明细</a:t>
+            </a:r>
+          </a:p>
+        </p:txBody>
+      </p:sp>
+      <p:graphicFrame>
+        <p:nvGraphicFramePr>
+          <p:cNvPr id="3" name="Table 2"/>
+          <p:cNvGraphicFramePr>
+            <a:graphicFrameLocks noGrp="1"/>
+          </p:cNvGraphicFramePr>
+          <p:nvPr/>
+        </p:nvGraphicFramePr>
+        <p:xfrm>
+          <a:off x="274320" y="1188720"/>
+          <a:ext cx="11612880" cy="3657600"/>
+        </p:xfrm>
+        <a:graphic>
+          <a:graphicData uri="http://schemas.openxmlformats.org/drawingml/2006/table">
+            <a:tbl>
+              <a:tblPr firstRow="1" bandRow="1">
+                <a:tableStyleId>{5C22544A-7EE6-4342-B048-85BDC9FD1C3A}</a:tableStyleId>
+              </a:tblPr>
+              <a:tblGrid>
+                <a:gridCol w="1645920"/>
+                <a:gridCol w="1645920"/>
+                <a:gridCol w="3200400"/>
+                <a:gridCol w="2560320"/>
+                <a:gridCol w="2560320"/>
+              </a:tblGrid>
+              <a:tr h="731520">
+                <a:tc>
+                  <a:txBody>
+                    <a:bodyPr/>
+                    <a:lstStyle/>
+                    <a:p>
+                      <a:pPr>
+                        <a:defRPr sz="1100" b="1">
+                          <a:solidFill>
+                            <a:srgbClr val="FFFFFF"/>
+                          </a:solidFill>
+                        </a:defRPr>
+                      </a:pPr>
+                      <a:r>
+                        <a:t>阶段</a:t>
+                      </a:r>
+                    </a:p>
+                  </a:txBody>
+                  <a:tcPr>
+                    <a:solidFill>
+                      <a:srgbClr val="2D5016"/>
+                    </a:solidFill>
+                  </a:tcPr>
+                </a:tc>
+                <a:tc>
+                  <a:txBody>
+                    <a:bodyPr/>
+                    <a:lstStyle/>
+                    <a:p>
+                      <a:pPr>
+                        <a:defRPr sz="1100" b="1">
+                          <a:solidFill>
+                            <a:srgbClr val="FFFFFF"/>
+                          </a:solidFill>
+                        </a:defRPr>
+                      </a:pPr>
+                      <a:r>
+                        <a:t>时间</a:t>
+                      </a:r>
+                    </a:p>
+                  </a:txBody>
+                  <a:tcPr>
+                    <a:solidFill>
+                      <a:srgbClr val="2D5016"/>
+                    </a:solidFill>
+                  </a:tcPr>
+                </a:tc>
+                <a:tc>
+                  <a:txBody>
+                    <a:bodyPr/>
+                    <a:lstStyle/>
+                    <a:p>
+                      <a:pPr>
+                        <a:defRPr sz="1100" b="1">
+                          <a:solidFill>
+                            <a:srgbClr val="FFFFFF"/>
+                          </a:solidFill>
+                        </a:defRPr>
+                      </a:pPr>
+                      <a:r>
+                        <a:t>变现方式</a:t>
+                      </a:r>
+                    </a:p>
+                  </a:txBody>
+                  <a:tcPr>
+                    <a:solidFill>
+                      <a:srgbClr val="2D5016"/>
+                    </a:solidFill>
+                  </a:tcPr>
+                </a:tc>
+                <a:tc>
+                  <a:txBody>
+                    <a:bodyPr/>
+                    <a:lstStyle/>
+                    <a:p>
+                      <a:pPr>
+                        <a:defRPr sz="1100" b="1">
+                          <a:solidFill>
+                            <a:srgbClr val="FFFFFF"/>
+                          </a:solidFill>
+                        </a:defRPr>
+                      </a:pPr>
+                      <a:r>
+                        <a:t>预估收入</a:t>
+                      </a:r>
+                    </a:p>
+                  </a:txBody>
+                  <a:tcPr>
+                    <a:solidFill>
+                      <a:srgbClr val="2D5016"/>
+                    </a:solidFill>
+                  </a:tcPr>
+                </a:tc>
+                <a:tc>
+                  <a:txBody>
+                    <a:bodyPr/>
+                    <a:lstStyle/>
+                    <a:p>
+                      <a:pPr>
+                        <a:defRPr sz="1100" b="1">
+                          <a:solidFill>
+                            <a:srgbClr val="FFFFFF"/>
+                          </a:solidFill>
+                        </a:defRPr>
+                      </a:pPr>
+                      <a:r>
+                        <a:t>启动条件</a:t>
+                      </a:r>
+                    </a:p>
+                  </a:txBody>
+                  <a:tcPr>
+                    <a:solidFill>
+                      <a:srgbClr val="2D5016"/>
+                    </a:solidFill>
+                  </a:tcPr>
+                </a:tc>
+              </a:tr>
+              <a:tr h="731520">
+                <a:tc>
+                  <a:txBody>
+                    <a:bodyPr/>
+                    <a:lstStyle/>
+                    <a:p>
+                      <a:pPr>
+                        <a:defRPr sz="1000">
+                          <a:solidFill>
+                            <a:srgbClr val="333333"/>
+                          </a:solidFill>
+                        </a:defRPr>
+                      </a:pPr>
+                      <a:r>
+                        <a:t>内容期</a:t>
+                      </a:r>
+                    </a:p>
+                  </a:txBody>
+                  <a:tcPr/>
+                </a:tc>
+                <a:tc>
+                  <a:txBody>
+                    <a:bodyPr/>
+                    <a:lstStyle/>
+                    <a:p>
+                      <a:pPr>
+                        <a:defRPr sz="1000">
+                          <a:solidFill>
+                            <a:srgbClr val="333333"/>
+                          </a:solidFill>
+                        </a:defRPr>
+                      </a:pPr>
+                      <a:r>
+                        <a:t>月1-3</a:t>
+                      </a:r>
+                    </a:p>
+                  </a:txBody>
+                  <a:tcPr/>
+                </a:tc>
+                <a:tc>
+                  <a:txBody>
+                    <a:bodyPr/>
+                    <a:lstStyle/>
+                    <a:p>
+                      <a:pPr>
+                        <a:defRPr sz="1000">
+                          <a:solidFill>
+                            <a:srgbClr val="333333"/>
+                          </a:solidFill>
+                        </a:defRPr>
+                      </a:pPr>
+                      <a:r>
+                        <a:t>零变现，纯涨粉</a:t>
+                      </a:r>
+                    </a:p>
+                  </a:txBody>
+                  <a:tcPr/>
+                </a:tc>
+                <a:tc>
+                  <a:txBody>
+                    <a:bodyPr/>
+                    <a:lstStyle/>
+                    <a:p>
+                      <a:pPr>
+                        <a:defRPr sz="1000">
+                          <a:solidFill>
+                            <a:srgbClr val="333333"/>
+                          </a:solidFill>
+                        </a:defRPr>
+                      </a:pPr>
+                      <a:r>
+                        <a:t>¥0</a:t>
+                      </a:r>
+                    </a:p>
+                  </a:txBody>
+                  <a:tcPr/>
+                </a:tc>
+                <a:tc>
+                  <a:txBody>
+                    <a:bodyPr/>
+                    <a:lstStyle/>
+                    <a:p>
+                      <a:pPr>
+                        <a:defRPr sz="1000">
+                          <a:solidFill>
+                            <a:srgbClr val="333333"/>
+                          </a:solidFill>
+                        </a:defRPr>
+                      </a:pPr>
+                      <a:r>
+                        <a:t>开始拍摄即可</a:t>
+                      </a:r>
+                    </a:p>
+                  </a:txBody>
+                  <a:tcPr/>
+                </a:tc>
+              </a:tr>
+              <a:tr h="731520">
+                <a:tc>
+                  <a:txBody>
+                    <a:bodyPr/>
+                    <a:lstStyle/>
+                    <a:p>
+                      <a:pPr>
+                        <a:defRPr sz="1000">
+                          <a:solidFill>
+                            <a:srgbClr val="333333"/>
+                          </a:solidFill>
+                        </a:defRPr>
+                      </a:pPr>
+                      <a:r>
+                        <a:t>赛事期</a:t>
+                      </a:r>
+                    </a:p>
+                  </a:txBody>
+                  <a:tcPr>
+                    <a:solidFill>
+                      <a:srgbClr val="F9F7F2"/>
+                    </a:solidFill>
+                  </a:tcPr>
+                </a:tc>
+                <a:tc>
+                  <a:txBody>
+                    <a:bodyPr/>
+                    <a:lstStyle/>
+                    <a:p>
+                      <a:pPr>
+                        <a:defRPr sz="1000">
+                          <a:solidFill>
+                            <a:srgbClr val="333333"/>
+                          </a:solidFill>
+                        </a:defRPr>
+                      </a:pPr>
+                      <a:r>
+                        <a:t>月3-6</a:t>
+                      </a:r>
+                    </a:p>
+                  </a:txBody>
+                  <a:tcPr>
+                    <a:solidFill>
+                      <a:srgbClr val="F9F7F2"/>
+                    </a:solidFill>
+                  </a:tcPr>
+                </a:tc>
+                <a:tc>
+                  <a:txBody>
+                    <a:bodyPr/>
+                    <a:lstStyle/>
+                    <a:p>
+                      <a:pPr>
+                        <a:defRPr sz="1000">
+                          <a:solidFill>
+                            <a:srgbClr val="333333"/>
+                          </a:solidFill>
+                        </a:defRPr>
+                      </a:pPr>
+                      <a:r>
+                        <a:t>邀请赛报名费</a:t>
+                      </a:r>
+                      <a:br/>
+                      <a:r>
+                        <a:t>体育局补贴</a:t>
+                      </a:r>
+                      <a:br/>
+                      <a:r>
+                        <a:t>场边广告位</a:t>
+                      </a:r>
+                    </a:p>
+                  </a:txBody>
+                  <a:tcPr>
+                    <a:solidFill>
+                      <a:srgbClr val="F9F7F2"/>
+                    </a:solidFill>
+                  </a:tcPr>
+                </a:tc>
+                <a:tc>
+                  <a:txBody>
+                    <a:bodyPr/>
+                    <a:lstStyle/>
+                    <a:p>
+                      <a:pPr>
+                        <a:defRPr sz="1000">
+                          <a:solidFill>
+                            <a:srgbClr val="333333"/>
+                          </a:solidFill>
+                        </a:defRPr>
+                      </a:pPr>
+                      <a:r>
+                        <a:t>¥3000-8000/场</a:t>
+                      </a:r>
+                      <a:br/>
+                      <a:r>
+                        <a:t>¥5000-20000</a:t>
+                      </a:r>
+                      <a:br/>
+                      <a:r>
+                        <a:t>¥2000-5000</a:t>
+                      </a:r>
+                    </a:p>
+                  </a:txBody>
+                  <a:tcPr>
+                    <a:solidFill>
+                      <a:srgbClr val="F9F7F2"/>
+                    </a:solidFill>
+                  </a:tcPr>
+                </a:tc>
+                <a:tc>
+                  <a:txBody>
+                    <a:bodyPr/>
+                    <a:lstStyle/>
+                    <a:p>
+                      <a:pPr>
+                        <a:defRPr sz="1000">
+                          <a:solidFill>
+                            <a:srgbClr val="333333"/>
+                          </a:solidFill>
+                        </a:defRPr>
+                      </a:pPr>
+                      <a:r>
+                        <a:t>粉丝≥1万</a:t>
+                      </a:r>
+                      <a:br/>
+                      <a:r>
+                        <a:t>3个合作村</a:t>
+                      </a:r>
+                    </a:p>
+                  </a:txBody>
+                  <a:tcPr>
+                    <a:solidFill>
+                      <a:srgbClr val="F9F7F2"/>
+                    </a:solidFill>
+                  </a:tcPr>
+                </a:tc>
+              </a:tr>
+              <a:tr h="731520">
+                <a:tc>
+                  <a:txBody>
+                    <a:bodyPr/>
+                    <a:lstStyle/>
+                    <a:p>
+                      <a:pPr>
+                        <a:defRPr sz="1000">
+                          <a:solidFill>
+                            <a:srgbClr val="333333"/>
+                          </a:solidFill>
+                        </a:defRPr>
+                      </a:pPr>
+                      <a:r>
+                        <a:t>研学期</a:t>
+                      </a:r>
+                    </a:p>
+                  </a:txBody>
+                  <a:tcPr/>
+                </a:tc>
+                <a:tc>
+                  <a:txBody>
+                    <a:bodyPr/>
+                    <a:lstStyle/>
+                    <a:p>
+                      <a:pPr>
+                        <a:defRPr sz="1000">
+                          <a:solidFill>
+                            <a:srgbClr val="333333"/>
+                          </a:solidFill>
+                        </a:defRPr>
+                      </a:pPr>
+                      <a:r>
+                        <a:t>月6-9</a:t>
+                      </a:r>
+                    </a:p>
+                  </a:txBody>
+                  <a:tcPr/>
+                </a:tc>
+                <a:tc>
+                  <a:txBody>
+                    <a:bodyPr/>
+                    <a:lstStyle/>
+                    <a:p>
+                      <a:pPr>
+                        <a:defRPr sz="1000">
+                          <a:solidFill>
+                            <a:srgbClr val="333333"/>
+                          </a:solidFill>
+                        </a:defRPr>
+                      </a:pPr>
+                      <a:r>
+                        <a:t>青少年足球夏令营</a:t>
+                      </a:r>
+                      <a:br/>
+                      <a:r>
+                        <a:t>企业团建</a:t>
+                      </a:r>
+                      <a:br/>
+                      <a:r>
+                        <a:t>退役球员培训</a:t>
+                      </a:r>
+                    </a:p>
+                  </a:txBody>
+                  <a:tcPr/>
+                </a:tc>
+                <a:tc>
+                  <a:txBody>
+                    <a:bodyPr/>
+                    <a:lstStyle/>
+                    <a:p>
+                      <a:pPr>
+                        <a:defRPr sz="1000">
+                          <a:solidFill>
+                            <a:srgbClr val="333333"/>
+                          </a:solidFill>
+                        </a:defRPr>
+                      </a:pPr>
+                      <a:r>
+                        <a:t>¥1500-3000/人</a:t>
+                      </a:r>
+                      <a:br/>
+                      <a:r>
+                        <a:t>¥5000-15000/场</a:t>
+                      </a:r>
+                      <a:br/>
+                      <a:r>
+                        <a:t>¥500-1000/课时</a:t>
+                      </a:r>
+                    </a:p>
+                  </a:txBody>
+                  <a:tcPr/>
+                </a:tc>
+                <a:tc>
+                  <a:txBody>
+                    <a:bodyPr/>
+                    <a:lstStyle/>
+                    <a:p>
+                      <a:pPr>
+                        <a:defRPr sz="1000">
+                          <a:solidFill>
+                            <a:srgbClr val="333333"/>
+                          </a:solidFill>
+                        </a:defRPr>
+                      </a:pPr>
+                      <a:r>
+                        <a:t>粉丝≥5万</a:t>
+                      </a:r>
+                      <a:br/>
+                      <a:r>
+                        <a:t>有接待能力</a:t>
+                      </a:r>
+                    </a:p>
+                  </a:txBody>
+                  <a:tcPr/>
+                </a:tc>
+              </a:tr>
+              <a:tr h="731520">
+                <a:tc>
+                  <a:txBody>
+                    <a:bodyPr/>
+                    <a:lstStyle/>
+                    <a:p>
+                      <a:pPr>
+                        <a:defRPr sz="1000">
+                          <a:solidFill>
+                            <a:srgbClr val="333333"/>
+                          </a:solidFill>
+                        </a:defRPr>
+                      </a:pPr>
+                      <a:r>
+                        <a:t>文旅期</a:t>
+                      </a:r>
+                    </a:p>
+                  </a:txBody>
+                  <a:tcPr>
+                    <a:solidFill>
+                      <a:srgbClr val="F9F7F2"/>
+                    </a:solidFill>
+                  </a:tcPr>
+                </a:tc>
+                <a:tc>
+                  <a:txBody>
+                    <a:bodyPr/>
+                    <a:lstStyle/>
+                    <a:p>
+                      <a:pPr>
+                        <a:defRPr sz="1000">
+                          <a:solidFill>
+                            <a:srgbClr val="333333"/>
+                          </a:solidFill>
+                        </a:defRPr>
+                      </a:pPr>
+                      <a:r>
+                        <a:t>月9-12</a:t>
+                      </a:r>
+                    </a:p>
+                  </a:txBody>
+                  <a:tcPr>
+                    <a:solidFill>
+                      <a:srgbClr val="F9F7F2"/>
+                    </a:solidFill>
+                  </a:tcPr>
+                </a:tc>
+                <a:tc>
+                  <a:txBody>
+                    <a:bodyPr/>
+                    <a:lstStyle/>
+                    <a:p>
+                      <a:pPr>
+                        <a:defRPr sz="1000">
+                          <a:solidFill>
+                            <a:srgbClr val="333333"/>
+                          </a:solidFill>
+                        </a:defRPr>
+                      </a:pPr>
+                      <a:r>
+                        <a:t>体育旅游线路</a:t>
+                      </a:r>
+                      <a:br/>
+                      <a:r>
+                        <a:t>运动品牌赞助</a:t>
+                      </a:r>
+                      <a:br/>
+                      <a:r>
+                        <a:t>直播带货</a:t>
+                      </a:r>
+                    </a:p>
+                  </a:txBody>
+                  <a:tcPr>
+                    <a:solidFill>
+                      <a:srgbClr val="F9F7F2"/>
+                    </a:solidFill>
+                  </a:tcPr>
+                </a:tc>
+                <a:tc>
+                  <a:txBody>
+                    <a:bodyPr/>
+                    <a:lstStyle/>
+                    <a:p>
+                      <a:pPr>
+                        <a:defRPr sz="1000">
+                          <a:solidFill>
+                            <a:srgbClr val="333333"/>
+                          </a:solidFill>
+                        </a:defRPr>
+                      </a:pPr>
+                      <a:r>
+                        <a:t>按人次分成</a:t>
+                      </a:r>
+                      <a:br/>
+                      <a:r>
+                        <a:t>¥10000-50000/年</a:t>
+                      </a:r>
+                      <a:br/>
+                      <a:r>
+                        <a:t>¥2000-5000/场</a:t>
+                      </a:r>
+                    </a:p>
+                  </a:txBody>
+                  <a:tcPr>
+                    <a:solidFill>
+                      <a:srgbClr val="F9F7F2"/>
+                    </a:solidFill>
+                  </a:tcPr>
+                </a:tc>
+                <a:tc>
+                  <a:txBody>
+                    <a:bodyPr/>
+                    <a:lstStyle/>
+                    <a:p>
+                      <a:pPr>
+                        <a:defRPr sz="1000">
+                          <a:solidFill>
+                            <a:srgbClr val="333333"/>
+                          </a:solidFill>
+                        </a:defRPr>
+                      </a:pPr>
+                      <a:r>
+                        <a:t>粉丝≥10万</a:t>
+                      </a:r>
+                      <a:br/>
+                      <a:r>
+                        <a:t>文旅局合作</a:t>
+                      </a:r>
+                    </a:p>
+                  </a:txBody>
+                  <a:tcPr>
+                    <a:solidFill>
+                      <a:srgbClr val="F9F7F2"/>
+                    </a:solidFill>
+                  </a:tcPr>
+                </a:tc>
+              </a:tr>
+            </a:tbl>
+          </a:graphicData>
+        </a:graphic>
+      </p:graphicFrame>
+    </p:spTree>
+  </p:cSld>
+  <p:clrMapOvr>
+    <a:masterClrMapping/>
+  </p:clrMapOvr>
+</p:sld>
+</file>
+
+<file path=ppt/slides/slide11.xml><?xml version="1.0" encoding="utf-8"?>
+<p:sld xmlns:a="http://schemas.openxmlformats.org/drawingml/2006/main" xmlns:p="http://schemas.openxmlformats.org/presentationml/2006/main" xmlns:r="http://schemas.openxmlformats.org/officeDocument/2006/relationships">
+  <p:cSld>
+    <p:spTree>
+      <p:nvGrpSpPr>
+        <p:cNvPr id="1" name=""/>
+        <p:cNvGrpSpPr/>
+        <p:nvPr/>
+      </p:nvGrpSpPr>
+      <p:grpSpPr/>
+      <p:sp>
+        <p:nvSpPr>
+          <p:cNvPr id="2" name="TextBox 1"/>
+          <p:cNvSpPr txBox="1"/>
+          <p:nvPr/>
+        </p:nvSpPr>
+        <p:spPr>
+          <a:xfrm>
+            <a:off x="457200" y="365760"/>
+            <a:ext cx="7315200" cy="640080"/>
+          </a:xfrm>
+          <a:prstGeom prst="rect">
+            <a:avLst/>
+          </a:prstGeom>
+          <a:noFill/>
+        </p:spPr>
+        <p:txBody>
+          <a:bodyPr wrap="square">
+            <a:spAutoFit/>
+          </a:bodyPr>
+          <a:lstStyle/>
+          <a:p>
+            <a:pPr algn="l">
+              <a:defRPr sz="3000" b="1">
+                <a:solidFill>
+                  <a:srgbClr val="2D5016"/>
+                </a:solidFill>
+              </a:defRPr>
+            </a:pPr>
+            <a:r>
+              <a:t>03  前期（月1-3）怎么做？</a:t>
+            </a:r>
+          </a:p>
+        </p:txBody>
+      </p:sp>
+      <p:sp>
+        <p:nvSpPr>
+          <p:cNvPr id="3" name="Rounded Rectangle 2"/>
+          <p:cNvSpPr/>
+          <p:nvPr/>
+        </p:nvSpPr>
+        <p:spPr>
+          <a:xfrm>
+            <a:off x="274320" y="1188720"/>
+            <a:ext cx="3566160" cy="5029200"/>
+          </a:xfrm>
+          <a:prstGeom prst="roundRect">
+            <a:avLst/>
+          </a:prstGeom>
+          <a:solidFill>
+            <a:srgbClr val="FFFFFF"/>
+          </a:solidFill>
+          <a:ln>
+            <a:noFill/>
+          </a:ln>
+          <a:effectLst/>
+        </p:spPr>
+        <p:style>
+          <a:lnRef idx="1">
+            <a:schemeClr val="accent1"/>
+          </a:lnRef>
+          <a:fillRef idx="3">
+            <a:schemeClr val="accent1"/>
+          </a:fillRef>
+          <a:effectRef idx="2">
+            <a:schemeClr val="accent1"/>
+          </a:effectRef>
+          <a:fontRef idx="minor">
+            <a:schemeClr val="lt1"/>
+          </a:fontRef>
+        </p:style>
+        <p:txBody>
+          <a:bodyPr rtlCol="0" anchor="ctr" wrap="square" lIns="177800" rIns="177800" tIns="177800"/>
+          <a:lstStyle/>
+          <a:p>
+            <a:pPr algn="ctr">
+              <a:spcAft>
+                <a:spcPts val="800"/>
+              </a:spcAft>
+              <a:defRPr sz="1400" b="1">
+                <a:solidFill>
+                  <a:srgbClr val="2D5016"/>
+                </a:solidFill>
+              </a:defRPr>
+            </a:pPr>
+            <a:r>
+              <a:t>内容策略</a:t>
+            </a:r>
+          </a:p>
+          <a:p>
+            <a:pPr>
+              <a:spcAft>
+                <a:spcPts val="200"/>
+              </a:spcAft>
+              <a:defRPr sz="1100">
+                <a:solidFill>
+                  <a:srgbClr val="666666"/>
+                </a:solidFill>
+              </a:defRPr>
+            </a:pPr>
+            <a:r>
+              <a:t>每周3条，雷打不动</a:t>
+            </a:r>
+          </a:p>
+          <a:p>
+            <a:pPr>
+              <a:spcAft>
+                <a:spcPts val="200"/>
+              </a:spcAft>
+              <a:defRPr sz="1100">
+                <a:solidFill>
+                  <a:srgbClr val="666666"/>
+                </a:solidFill>
+              </a:defRPr>
+            </a:pPr>
+            <a:r>
+              <a:t>前4周不求爆款，求人设统一</a:t>
+            </a:r>
+          </a:p>
+          <a:p>
+            <a:pPr>
+              <a:spcAft>
+                <a:spcPts val="200"/>
+              </a:spcAft>
+              <a:defRPr sz="1100">
+                <a:solidFill>
+                  <a:srgbClr val="666666"/>
+                </a:solidFill>
+              </a:defRPr>
+            </a:pPr>
+            <a:r>
+              <a:t>王健出镜率 ≥ 80%</a:t>
+            </a:r>
+          </a:p>
+          <a:p>
+            <a:pPr>
+              <a:spcAft>
+                <a:spcPts val="200"/>
+              </a:spcAft>
+              <a:defRPr sz="1100">
+                <a:solidFill>
+                  <a:srgbClr val="666666"/>
+                </a:solidFill>
+              </a:defRPr>
+            </a:pPr>
+            <a:r>
+              <a:t>评论区100%回复</a:t>
+            </a:r>
+          </a:p>
+          <a:p>
+            <a:pPr>
+              <a:spcAft>
+                <a:spcPts val="200"/>
+              </a:spcAft>
+              <a:defRPr sz="1100">
+                <a:solidFill>
+                  <a:srgbClr val="666666"/>
+                </a:solidFill>
+              </a:defRPr>
+            </a:pPr>
+            <a:r>
+              <a:t>固定发布时间：18:30</a:t>
+            </a:r>
+          </a:p>
+        </p:txBody>
+      </p:sp>
+      <p:sp>
+        <p:nvSpPr>
+          <p:cNvPr id="4" name="Rectangle 3"/>
+          <p:cNvSpPr/>
+          <p:nvPr/>
+        </p:nvSpPr>
+        <p:spPr>
+          <a:xfrm>
+            <a:off x="274320" y="1188720"/>
+            <a:ext cx="3566160" cy="45720"/>
+          </a:xfrm>
+          <a:prstGeom prst="rect">
+            <a:avLst/>
+          </a:prstGeom>
+          <a:solidFill>
+            <a:srgbClr val="2D5016"/>
+          </a:solidFill>
+          <a:ln>
+            <a:noFill/>
+          </a:ln>
+        </p:spPr>
+        <p:style>
+          <a:lnRef idx="1">
+            <a:schemeClr val="accent1"/>
+          </a:lnRef>
+          <a:fillRef idx="3">
+            <a:schemeClr val="accent1"/>
+          </a:fillRef>
+          <a:effectRef idx="2">
+            <a:schemeClr val="accent1"/>
+          </a:effectRef>
+          <a:fontRef idx="minor">
+            <a:schemeClr val="lt1"/>
+          </a:fontRef>
+        </p:style>
+        <p:txBody>
+          <a:bodyPr rtlCol="0" anchor="ctr"/>
+          <a:lstStyle/>
+          <a:p>
+            <a:pPr algn="ctr"/>
+          </a:p>
+        </p:txBody>
+      </p:sp>
+      <p:sp>
+        <p:nvSpPr>
+          <p:cNvPr id="5" name="Rounded Rectangle 4"/>
+          <p:cNvSpPr/>
+          <p:nvPr/>
+        </p:nvSpPr>
+        <p:spPr>
+          <a:xfrm>
+            <a:off x="4114800" y="1188720"/>
+            <a:ext cx="3566160" cy="5029200"/>
+          </a:xfrm>
+          <a:prstGeom prst="roundRect">
+            <a:avLst/>
+          </a:prstGeom>
+          <a:solidFill>
+            <a:srgbClr val="FFFFFF"/>
+          </a:solidFill>
+          <a:ln>
+            <a:noFill/>
+          </a:ln>
+          <a:effectLst/>
+        </p:spPr>
+        <p:style>
+          <a:lnRef idx="1">
+            <a:schemeClr val="accent1"/>
+          </a:lnRef>
+          <a:fillRef idx="3">
+            <a:schemeClr val="accent1"/>
+          </a:fillRef>
+          <a:effectRef idx="2">
+            <a:schemeClr val="accent1"/>
+          </a:effectRef>
+          <a:fontRef idx="minor">
+            <a:schemeClr val="lt1"/>
+          </a:fontRef>
+        </p:style>
+        <p:txBody>
+          <a:bodyPr rtlCol="0" anchor="ctr" wrap="square" lIns="177800" rIns="177800" tIns="177800"/>
+          <a:lstStyle/>
+          <a:p>
+            <a:pPr algn="ctr">
+              <a:spcAft>
+                <a:spcPts val="800"/>
+              </a:spcAft>
+              <a:defRPr sz="1400" b="1">
+                <a:solidFill>
+                  <a:srgbClr val="2D5016"/>
+                </a:solidFill>
+              </a:defRPr>
+            </a:pPr>
+            <a:r>
+              <a:t>设备策略</a:t>
+            </a:r>
+          </a:p>
+          <a:p>
+            <a:pPr>
+              <a:spcAft>
+                <a:spcPts val="200"/>
+              </a:spcAft>
+              <a:defRPr sz="1100">
+                <a:solidFill>
+                  <a:srgbClr val="666666"/>
+                </a:solidFill>
+              </a:defRPr>
+            </a:pPr>
+            <a:r>
+              <a:t>先用手机+稳定器（已有）</a:t>
+            </a:r>
+          </a:p>
+          <a:p>
+            <a:pPr>
+              <a:spcAft>
+                <a:spcPts val="200"/>
+              </a:spcAft>
+              <a:defRPr sz="1100">
+                <a:solidFill>
+                  <a:srgbClr val="666666"/>
+                </a:solidFill>
+              </a:defRPr>
+            </a:pPr>
+            <a:r>
+              <a:t>必买：无线领夹麦</a:t>
+            </a:r>
+          </a:p>
+          <a:p>
+            <a:pPr>
+              <a:spcAft>
+                <a:spcPts val="200"/>
+              </a:spcAft>
+              <a:defRPr sz="1100">
+                <a:solidFill>
+                  <a:srgbClr val="666666"/>
+                </a:solidFill>
+              </a:defRPr>
+            </a:pPr>
+            <a:r>
+              <a:t>航拍：借/租，不急于买</a:t>
+            </a:r>
+          </a:p>
+          <a:p>
+            <a:pPr>
+              <a:spcAft>
+                <a:spcPts val="200"/>
+              </a:spcAft>
+              <a:defRPr sz="1100">
+                <a:solidFill>
+                  <a:srgbClr val="666666"/>
+                </a:solidFill>
+              </a:defRPr>
+            </a:pPr>
+            <a:r>
+              <a:t>花在内容上的时间 &gt; 设备上的钱</a:t>
+            </a:r>
+          </a:p>
+        </p:txBody>
+      </p:sp>
+      <p:sp>
+        <p:nvSpPr>
+          <p:cNvPr id="6" name="Rectangle 5"/>
+          <p:cNvSpPr/>
+          <p:nvPr/>
+        </p:nvSpPr>
+        <p:spPr>
+          <a:xfrm>
+            <a:off x="4114800" y="1188720"/>
+            <a:ext cx="3566160" cy="45720"/>
+          </a:xfrm>
+          <a:prstGeom prst="rect">
+            <a:avLst/>
+          </a:prstGeom>
+          <a:solidFill>
+            <a:srgbClr val="D4A017"/>
+          </a:solidFill>
+          <a:ln>
+            <a:noFill/>
+          </a:ln>
+        </p:spPr>
+        <p:style>
+          <a:lnRef idx="1">
+            <a:schemeClr val="accent1"/>
+          </a:lnRef>
+          <a:fillRef idx="3">
+            <a:schemeClr val="accent1"/>
+          </a:fillRef>
+          <a:effectRef idx="2">
+            <a:schemeClr val="accent1"/>
+          </a:effectRef>
+          <a:fontRef idx="minor">
+            <a:schemeClr val="lt1"/>
+          </a:fontRef>
+        </p:style>
+        <p:txBody>
+          <a:bodyPr rtlCol="0" anchor="ctr"/>
+          <a:lstStyle/>
+          <a:p>
+            <a:pPr algn="ctr"/>
+          </a:p>
+        </p:txBody>
+      </p:sp>
+      <p:sp>
+        <p:nvSpPr>
+          <p:cNvPr id="7" name="Rounded Rectangle 6"/>
+          <p:cNvSpPr/>
+          <p:nvPr/>
+        </p:nvSpPr>
+        <p:spPr>
+          <a:xfrm>
+            <a:off x="7955279" y="1188720"/>
+            <a:ext cx="3566160" cy="5029200"/>
+          </a:xfrm>
+          <a:prstGeom prst="roundRect">
+            <a:avLst/>
+          </a:prstGeom>
+          <a:solidFill>
+            <a:srgbClr val="FFFFFF"/>
+          </a:solidFill>
+          <a:ln>
+            <a:noFill/>
+          </a:ln>
+          <a:effectLst/>
+        </p:spPr>
+        <p:style>
+          <a:lnRef idx="1">
+            <a:schemeClr val="accent1"/>
+          </a:lnRef>
+          <a:fillRef idx="3">
+            <a:schemeClr val="accent1"/>
+          </a:fillRef>
+          <a:effectRef idx="2">
+            <a:schemeClr val="accent1"/>
+          </a:effectRef>
+          <a:fontRef idx="minor">
+            <a:schemeClr val="lt1"/>
+          </a:fontRef>
+        </p:style>
+        <p:txBody>
+          <a:bodyPr rtlCol="0" anchor="ctr" wrap="square" lIns="177800" rIns="177800" tIns="177800"/>
+          <a:lstStyle/>
+          <a:p>
+            <a:pPr algn="ctr">
+              <a:spcAft>
+                <a:spcPts val="800"/>
+              </a:spcAft>
+              <a:defRPr sz="1400" b="1">
+                <a:solidFill>
+                  <a:srgbClr val="2D5016"/>
+                </a:solidFill>
+              </a:defRPr>
+            </a:pPr>
+            <a:r>
+              <a:t>数据 &amp; 迭代</a:t>
+            </a:r>
+          </a:p>
+          <a:p>
+            <a:pPr>
+              <a:spcAft>
+                <a:spcPts val="200"/>
+              </a:spcAft>
+              <a:defRPr sz="1100">
+                <a:solidFill>
+                  <a:srgbClr val="666666"/>
+                </a:solidFill>
+              </a:defRPr>
+            </a:pPr>
+            <a:r>
+              <a:t>周复盘：完播率+互动率+涨粉</a:t>
+            </a:r>
+          </a:p>
+          <a:p>
+            <a:pPr>
+              <a:spcAft>
+                <a:spcPts val="200"/>
+              </a:spcAft>
+              <a:defRPr sz="1100">
+                <a:solidFill>
+                  <a:srgbClr val="666666"/>
+                </a:solidFill>
+              </a:defRPr>
+            </a:pPr>
+            <a:r>
+              <a:t>找到自己的爆款因子</a:t>
+            </a:r>
+          </a:p>
+          <a:p>
+            <a:pPr>
+              <a:spcAft>
+                <a:spcPts val="200"/>
+              </a:spcAft>
+              <a:defRPr sz="1100">
+                <a:solidFill>
+                  <a:srgbClr val="666666"/>
+                </a:solidFill>
+              </a:defRPr>
+            </a:pPr>
+            <a:r>
+              <a:t>每周刷4个对标账号</a:t>
+            </a:r>
+          </a:p>
+          <a:p>
+            <a:pPr>
+              <a:spcAft>
+                <a:spcPts val="200"/>
+              </a:spcAft>
+              <a:defRPr sz="1100">
+                <a:solidFill>
+                  <a:srgbClr val="666666"/>
+                </a:solidFill>
+              </a:defRPr>
+            </a:pPr>
+            <a:r>
+              <a:t>第4周做一次方向微调</a:t>
+            </a:r>
+          </a:p>
+        </p:txBody>
+      </p:sp>
+      <p:sp>
+        <p:nvSpPr>
+          <p:cNvPr id="8" name="Rectangle 7"/>
+          <p:cNvSpPr/>
+          <p:nvPr/>
+        </p:nvSpPr>
+        <p:spPr>
+          <a:xfrm>
+            <a:off x="7955279" y="1188720"/>
+            <a:ext cx="3566160" cy="45720"/>
+          </a:xfrm>
+          <a:prstGeom prst="rect">
+            <a:avLst/>
+          </a:prstGeom>
+          <a:solidFill>
+            <a:srgbClr val="2D5016"/>
+          </a:solidFill>
+          <a:ln>
+            <a:noFill/>
+          </a:ln>
+        </p:spPr>
+        <p:style>
+          <a:lnRef idx="1">
+            <a:schemeClr val="accent1"/>
+          </a:lnRef>
+          <a:fillRef idx="3">
+            <a:schemeClr val="accent1"/>
+          </a:fillRef>
+          <a:effectRef idx="2">
+            <a:schemeClr val="accent1"/>
+          </a:effectRef>
+          <a:fontRef idx="minor">
+            <a:schemeClr val="lt1"/>
+          </a:fontRef>
+        </p:style>
+        <p:txBody>
+          <a:bodyPr rtlCol="0" anchor="ctr"/>
+          <a:lstStyle/>
+          <a:p>
+            <a:pPr algn="ctr"/>
+          </a:p>
+        </p:txBody>
+      </p:sp>
+    </p:spTree>
+  </p:cSld>
+  <p:clrMapOvr>
+    <a:masterClrMapping/>
+  </p:clrMapOvr>
+</p:sld>
+</file>
+
+<file path=ppt/slides/slide12.xml><?xml version="1.0" encoding="utf-8"?>
+<p:sld xmlns:a="http://schemas.openxmlformats.org/drawingml/2006/main" xmlns:p="http://schemas.openxmlformats.org/presentationml/2006/main" xmlns:r="http://schemas.openxmlformats.org/officeDocument/2006/relationships">
+  <p:cSld>
+    <p:spTree>
+      <p:nvGrpSpPr>
+        <p:cNvPr id="1" name=""/>
+        <p:cNvGrpSpPr/>
+        <p:nvPr/>
+      </p:nvGrpSpPr>
+      <p:grpSpPr/>
+      <p:sp>
+        <p:nvSpPr>
+          <p:cNvPr id="2" name="TextBox 1"/>
+          <p:cNvSpPr txBox="1"/>
+          <p:nvPr/>
+        </p:nvSpPr>
+        <p:spPr>
+          <a:xfrm>
+            <a:off x="457200" y="365760"/>
+            <a:ext cx="7315200" cy="640080"/>
+          </a:xfrm>
+          <a:prstGeom prst="rect">
+            <a:avLst/>
+          </a:prstGeom>
+          <a:noFill/>
+        </p:spPr>
+        <p:txBody>
+          <a:bodyPr wrap="square">
+            <a:spAutoFit/>
+          </a:bodyPr>
+          <a:lstStyle/>
+          <a:p>
+            <a:pPr algn="l">
+              <a:defRPr sz="3000" b="1">
+                <a:solidFill>
+                  <a:srgbClr val="2D5016"/>
+                </a:solidFill>
+              </a:defRPr>
+            </a:pPr>
+            <a:r>
+              <a:t>03  什么时候可以开始变现？</a:t>
+            </a:r>
+          </a:p>
+        </p:txBody>
+      </p:sp>
+      <p:sp>
+        <p:nvSpPr>
+          <p:cNvPr id="3" name="Rounded Rectangle 2"/>
+          <p:cNvSpPr/>
+          <p:nvPr/>
+        </p:nvSpPr>
+        <p:spPr>
+          <a:xfrm>
+            <a:off x="274320" y="1188720"/>
+            <a:ext cx="3566160" cy="3200400"/>
+          </a:xfrm>
+          <a:prstGeom prst="roundRect">
+            <a:avLst/>
+          </a:prstGeom>
+          <a:solidFill>
+            <a:srgbClr val="FFFFFF"/>
+          </a:solidFill>
+          <a:ln>
+            <a:noFill/>
+          </a:ln>
+          <a:effectLst/>
+        </p:spPr>
+        <p:style>
+          <a:lnRef idx="1">
+            <a:schemeClr val="accent1"/>
+          </a:lnRef>
+          <a:fillRef idx="3">
+            <a:schemeClr val="accent1"/>
+          </a:fillRef>
+          <a:effectRef idx="2">
+            <a:schemeClr val="accent1"/>
+          </a:effectRef>
+          <a:fontRef idx="minor">
+            <a:schemeClr val="lt1"/>
+          </a:fontRef>
+        </p:style>
+        <p:txBody>
+          <a:bodyPr rtlCol="0" anchor="ctr" wrap="square" lIns="177800" rIns="177800" tIns="177800"/>
+          <a:lstStyle/>
+          <a:p>
+            <a:pPr algn="ctr">
+              <a:spcAft>
+                <a:spcPts val="800"/>
+              </a:spcAft>
+              <a:defRPr sz="1400" b="1">
+                <a:solidFill>
+                  <a:srgbClr val="2D5016"/>
+                </a:solidFill>
+              </a:defRPr>
+            </a:pPr>
+            <a:r>
+              <a:t>🚦 信号一：粉丝过万</a:t>
+            </a:r>
+          </a:p>
+          <a:p>
+            <a:pPr>
+              <a:spcAft>
+                <a:spcPts val="200"/>
+              </a:spcAft>
+              <a:defRPr sz="1100">
+                <a:solidFill>
+                  <a:srgbClr val="666666"/>
+                </a:solidFill>
+              </a:defRPr>
+            </a:pPr>
+            <a:r>
+              <a:t>开始接村际邀请赛</a:t>
+            </a:r>
+          </a:p>
+          <a:p>
+            <a:pPr>
+              <a:spcAft>
+                <a:spcPts val="200"/>
+              </a:spcAft>
+              <a:defRPr sz="1100">
+                <a:solidFill>
+                  <a:srgbClr val="666666"/>
+                </a:solidFill>
+              </a:defRPr>
+            </a:pPr>
+            <a:r>
+              <a:t>邀请赛报名费 + 体育局合作</a:t>
+            </a:r>
+          </a:p>
+          <a:p>
+            <a:pPr>
+              <a:spcAft>
+                <a:spcPts val="200"/>
+              </a:spcAft>
+              <a:defRPr sz="1100">
+                <a:solidFill>
+                  <a:srgbClr val="666666"/>
+                </a:solidFill>
+              </a:defRPr>
+            </a:pPr>
+            <a:r>
+              <a:t>前提：至少3期视频互动率 &gt; 5%</a:t>
+            </a:r>
+          </a:p>
+        </p:txBody>
+      </p:sp>
+      <p:sp>
+        <p:nvSpPr>
+          <p:cNvPr id="4" name="Rectangle 3"/>
+          <p:cNvSpPr/>
+          <p:nvPr/>
+        </p:nvSpPr>
+        <p:spPr>
+          <a:xfrm>
+            <a:off x="274320" y="1188720"/>
+            <a:ext cx="3566160" cy="45720"/>
+          </a:xfrm>
+          <a:prstGeom prst="rect">
+            <a:avLst/>
+          </a:prstGeom>
+          <a:solidFill>
+            <a:srgbClr val="2D5016"/>
+          </a:solidFill>
+          <a:ln>
+            <a:noFill/>
+          </a:ln>
+        </p:spPr>
+        <p:style>
+          <a:lnRef idx="1">
+            <a:schemeClr val="accent1"/>
+          </a:lnRef>
+          <a:fillRef idx="3">
+            <a:schemeClr val="accent1"/>
+          </a:fillRef>
+          <a:effectRef idx="2">
+            <a:schemeClr val="accent1"/>
+          </a:effectRef>
+          <a:fontRef idx="minor">
+            <a:schemeClr val="lt1"/>
+          </a:fontRef>
+        </p:style>
+        <p:txBody>
+          <a:bodyPr rtlCol="0" anchor="ctr"/>
+          <a:lstStyle/>
+          <a:p>
+            <a:pPr algn="ctr"/>
+          </a:p>
+        </p:txBody>
+      </p:sp>
+      <p:sp>
+        <p:nvSpPr>
+          <p:cNvPr id="5" name="Rounded Rectangle 4"/>
+          <p:cNvSpPr/>
+          <p:nvPr/>
+        </p:nvSpPr>
+        <p:spPr>
+          <a:xfrm>
+            <a:off x="4114800" y="1188720"/>
+            <a:ext cx="3566160" cy="3200400"/>
+          </a:xfrm>
+          <a:prstGeom prst="roundRect">
+            <a:avLst/>
+          </a:prstGeom>
+          <a:solidFill>
+            <a:srgbClr val="FFFFFF"/>
+          </a:solidFill>
+          <a:ln>
+            <a:noFill/>
+          </a:ln>
+          <a:effectLst/>
+        </p:spPr>
+        <p:style>
+          <a:lnRef idx="1">
+            <a:schemeClr val="accent1"/>
+          </a:lnRef>
+          <a:fillRef idx="3">
+            <a:schemeClr val="accent1"/>
+          </a:fillRef>
+          <a:effectRef idx="2">
+            <a:schemeClr val="accent1"/>
+          </a:effectRef>
+          <a:fontRef idx="minor">
+            <a:schemeClr val="lt1"/>
+          </a:fontRef>
+        </p:style>
+        <p:txBody>
+          <a:bodyPr rtlCol="0" anchor="ctr" wrap="square" lIns="177800" rIns="177800" tIns="177800"/>
+          <a:lstStyle/>
+          <a:p>
+            <a:pPr algn="ctr">
+              <a:spcAft>
+                <a:spcPts val="800"/>
+              </a:spcAft>
+              <a:defRPr sz="1400" b="1">
+                <a:solidFill>
+                  <a:srgbClr val="2D5016"/>
+                </a:solidFill>
+              </a:defRPr>
+            </a:pPr>
+            <a:r>
+              <a:t>🚦 信号二：出现「野生」咨询</a:t>
+            </a:r>
+          </a:p>
+          <a:p>
+            <a:pPr>
+              <a:spcAft>
+                <a:spcPts val="200"/>
+              </a:spcAft>
+              <a:defRPr sz="1100">
+                <a:solidFill>
+                  <a:srgbClr val="666666"/>
+                </a:solidFill>
+              </a:defRPr>
+            </a:pPr>
+            <a:r>
+              <a:t>评论区有人问：</a:t>
+            </a:r>
+          </a:p>
+          <a:p>
+            <a:pPr>
+              <a:spcAft>
+                <a:spcPts val="200"/>
+              </a:spcAft>
+              <a:defRPr sz="1100">
+                <a:solidFill>
+                  <a:srgbClr val="666666"/>
+                </a:solidFill>
+              </a:defRPr>
+            </a:pPr>
+            <a:r>
+              <a:t>「能来踢球吗」「有夏令营吗」</a:t>
+            </a:r>
+          </a:p>
+          <a:p>
+            <a:pPr>
+              <a:spcAft>
+                <a:spcPts val="200"/>
+              </a:spcAft>
+              <a:defRPr sz="1100">
+                <a:solidFill>
+                  <a:srgbClr val="666666"/>
+                </a:solidFill>
+              </a:defRPr>
+            </a:pPr>
+            <a:r>
+              <a:t>这时候 → 马上推出体验产品</a:t>
+            </a:r>
+          </a:p>
+        </p:txBody>
+      </p:sp>
+      <p:sp>
+        <p:nvSpPr>
+          <p:cNvPr id="6" name="Rectangle 5"/>
+          <p:cNvSpPr/>
+          <p:nvPr/>
+        </p:nvSpPr>
+        <p:spPr>
+          <a:xfrm>
+            <a:off x="4114800" y="1188720"/>
+            <a:ext cx="3566160" cy="45720"/>
+          </a:xfrm>
+          <a:prstGeom prst="rect">
+            <a:avLst/>
+          </a:prstGeom>
+          <a:solidFill>
+            <a:srgbClr val="D4A017"/>
+          </a:solidFill>
+          <a:ln>
+            <a:noFill/>
+          </a:ln>
+        </p:spPr>
+        <p:style>
+          <a:lnRef idx="1">
+            <a:schemeClr val="accent1"/>
+          </a:lnRef>
+          <a:fillRef idx="3">
+            <a:schemeClr val="accent1"/>
+          </a:fillRef>
+          <a:effectRef idx="2">
+            <a:schemeClr val="accent1"/>
+          </a:effectRef>
+          <a:fontRef idx="minor">
+            <a:schemeClr val="lt1"/>
+          </a:fontRef>
+        </p:style>
+        <p:txBody>
+          <a:bodyPr rtlCol="0" anchor="ctr"/>
+          <a:lstStyle/>
+          <a:p>
+            <a:pPr algn="ctr"/>
+          </a:p>
+        </p:txBody>
+      </p:sp>
+      <p:sp>
+        <p:nvSpPr>
+          <p:cNvPr id="7" name="Rounded Rectangle 6"/>
+          <p:cNvSpPr/>
+          <p:nvPr/>
+        </p:nvSpPr>
+        <p:spPr>
+          <a:xfrm>
+            <a:off x="7955279" y="1188720"/>
+            <a:ext cx="3566160" cy="3200400"/>
+          </a:xfrm>
+          <a:prstGeom prst="roundRect">
+            <a:avLst/>
+          </a:prstGeom>
+          <a:solidFill>
+            <a:srgbClr val="FFFFFF"/>
+          </a:solidFill>
+          <a:ln>
+            <a:noFill/>
+          </a:ln>
+          <a:effectLst/>
+        </p:spPr>
+        <p:style>
+          <a:lnRef idx="1">
+            <a:schemeClr val="accent1"/>
+          </a:lnRef>
+          <a:fillRef idx="3">
+            <a:schemeClr val="accent1"/>
+          </a:fillRef>
+          <a:effectRef idx="2">
+            <a:schemeClr val="accent1"/>
+          </a:effectRef>
+          <a:fontRef idx="minor">
+            <a:schemeClr val="lt1"/>
+          </a:fontRef>
+        </p:style>
+        <p:txBody>
+          <a:bodyPr rtlCol="0" anchor="ctr" wrap="square" lIns="177800" rIns="177800" tIns="177800"/>
+          <a:lstStyle/>
+          <a:p>
+            <a:pPr algn="ctr">
+              <a:spcAft>
+                <a:spcPts val="800"/>
+              </a:spcAft>
+              <a:defRPr sz="1400" b="1">
+                <a:solidFill>
+                  <a:srgbClr val="2D5016"/>
+                </a:solidFill>
+              </a:defRPr>
+            </a:pPr>
+            <a:r>
+              <a:t>🚦 信号三：被官方注意到</a:t>
+            </a:r>
+          </a:p>
+          <a:p>
+            <a:pPr>
+              <a:spcAft>
+                <a:spcPts val="200"/>
+              </a:spcAft>
+              <a:defRPr sz="1100">
+                <a:solidFill>
+                  <a:srgbClr val="666666"/>
+                </a:solidFill>
+              </a:defRPr>
+            </a:pPr>
+            <a:r>
+              <a:t>区体育局/文旅局主动联系</a:t>
+            </a:r>
+          </a:p>
+          <a:p>
+            <a:pPr>
+              <a:spcAft>
+                <a:spcPts val="200"/>
+              </a:spcAft>
+              <a:defRPr sz="1100">
+                <a:solidFill>
+                  <a:srgbClr val="666666"/>
+                </a:solidFill>
+              </a:defRPr>
+            </a:pPr>
+            <a:r>
+              <a:t>或本地媒体报道</a:t>
+            </a:r>
+          </a:p>
+          <a:p>
+            <a:pPr>
+              <a:spcAft>
+                <a:spcPts val="200"/>
+              </a:spcAft>
+              <a:defRPr sz="1100">
+                <a:solidFill>
+                  <a:srgbClr val="666666"/>
+                </a:solidFill>
+              </a:defRPr>
+            </a:pPr>
+            <a:r>
+              <a:t>这时候 → 申请政府文旅扶持资金</a:t>
+            </a:r>
+          </a:p>
+        </p:txBody>
+      </p:sp>
+      <p:sp>
+        <p:nvSpPr>
+          <p:cNvPr id="8" name="Rectangle 7"/>
+          <p:cNvSpPr/>
+          <p:nvPr/>
+        </p:nvSpPr>
+        <p:spPr>
+          <a:xfrm>
+            <a:off x="7955279" y="1188720"/>
+            <a:ext cx="3566160" cy="45720"/>
+          </a:xfrm>
+          <a:prstGeom prst="rect">
+            <a:avLst/>
+          </a:prstGeom>
+          <a:solidFill>
+            <a:srgbClr val="2D5016"/>
+          </a:solidFill>
+          <a:ln>
+            <a:noFill/>
+          </a:ln>
+        </p:spPr>
+        <p:style>
+          <a:lnRef idx="1">
+            <a:schemeClr val="accent1"/>
+          </a:lnRef>
+          <a:fillRef idx="3">
+            <a:schemeClr val="accent1"/>
+          </a:fillRef>
+          <a:effectRef idx="2">
+            <a:schemeClr val="accent1"/>
+          </a:effectRef>
+          <a:fontRef idx="minor">
+            <a:schemeClr val="lt1"/>
+          </a:fontRef>
+        </p:style>
+        <p:txBody>
+          <a:bodyPr rtlCol="0" anchor="ctr"/>
+          <a:lstStyle/>
+          <a:p>
+            <a:pPr algn="ctr"/>
+          </a:p>
+        </p:txBody>
+      </p:sp>
+      <p:sp>
+        <p:nvSpPr>
+          <p:cNvPr id="9" name="Rounded Rectangle 8"/>
+          <p:cNvSpPr/>
+          <p:nvPr/>
+        </p:nvSpPr>
+        <p:spPr>
+          <a:xfrm>
+            <a:off x="274320" y="5029200"/>
+            <a:ext cx="11612880" cy="640080"/>
+          </a:xfrm>
+          <a:prstGeom prst="roundRect">
+            <a:avLst/>
+          </a:prstGeom>
+          <a:solidFill>
+            <a:srgbClr val="FFF8E1"/>
+          </a:solidFill>
+          <a:ln>
+            <a:noFill/>
+          </a:ln>
+        </p:spPr>
+        <p:style>
+          <a:lnRef idx="1">
+            <a:schemeClr val="accent1"/>
+          </a:lnRef>
+          <a:fillRef idx="3">
+            <a:schemeClr val="accent1"/>
+          </a:fillRef>
+          <a:effectRef idx="2">
+            <a:schemeClr val="accent1"/>
+          </a:effectRef>
+          <a:fontRef idx="minor">
+            <a:schemeClr val="lt1"/>
+          </a:fontRef>
+        </p:style>
+        <p:txBody>
+          <a:bodyPr rtlCol="0" anchor="ctr" wrap="square" lIns="152400" tIns="101600"/>
+          <a:lstStyle/>
+          <a:p>
+            <a:pPr algn="ctr">
+              <a:defRPr sz="1200" b="1">
+                <a:solidFill>
+                  <a:srgbClr val="D4A017"/>
+                </a:solidFill>
+              </a:defRPr>
+            </a:pPr>
+            <a:r>
+              <a:t>预计时间线：内容期3个月 → 赛事变现第4个月 → 研学变现第7个月 → 文旅变现第10个月</a:t>
+            </a:r>
+          </a:p>
+        </p:txBody>
+      </p:sp>
+      <p:sp>
+        <p:nvSpPr>
+          <p:cNvPr id="10" name="Rounded Rectangle 9"/>
+          <p:cNvSpPr/>
+          <p:nvPr/>
+        </p:nvSpPr>
+        <p:spPr>
+          <a:xfrm>
+            <a:off x="274320" y="5943600"/>
+            <a:ext cx="11612880" cy="731520"/>
+          </a:xfrm>
+          <a:prstGeom prst="roundRect">
+            <a:avLst/>
+          </a:prstGeom>
+          <a:solidFill>
+            <a:srgbClr val="FFFFFF"/>
+          </a:solidFill>
+          <a:ln>
+            <a:noFill/>
+          </a:ln>
+          <a:effectLst/>
+        </p:spPr>
+        <p:style>
+          <a:lnRef idx="1">
+            <a:schemeClr val="accent1"/>
+          </a:lnRef>
+          <a:fillRef idx="3">
+            <a:schemeClr val="accent1"/>
+          </a:fillRef>
+          <a:effectRef idx="2">
+            <a:schemeClr val="accent1"/>
+          </a:effectRef>
+          <a:fontRef idx="minor">
+            <a:schemeClr val="lt1"/>
+          </a:fontRef>
+        </p:style>
+        <p:txBody>
+          <a:bodyPr rtlCol="0" anchor="ctr" wrap="square" lIns="177800" rIns="177800" tIns="177800"/>
+          <a:lstStyle/>
+          <a:p>
+            <a:pPr algn="ctr">
+              <a:spcAft>
+                <a:spcPts val="800"/>
+              </a:spcAft>
+              <a:defRPr sz="1400" b="1">
+                <a:solidFill>
+                  <a:srgbClr val="2D5016"/>
+                </a:solidFill>
+              </a:defRPr>
+            </a:pPr>
+            <a:r>
+              <a:t>内容 → 变现 地图</a:t>
+            </a:r>
+          </a:p>
+          <a:p>
+            <a:pPr>
+              <a:spcAft>
+                <a:spcPts val="200"/>
+              </a:spcAft>
+              <a:defRPr sz="1100">
+                <a:solidFill>
+                  <a:srgbClr val="666666"/>
+                </a:solidFill>
+              </a:defRPr>
+            </a:pPr>
+            <a:r>
+              <a:t>足球精神线→赛事IP→冠军村品牌  |  兵味文化线→文化赋能→研学团建  |  体育政策线→专业信任→政府合作  |  评论区互动→需求洞察→产品迭代</a:t>
+            </a:r>
+          </a:p>
+        </p:txBody>
+      </p:sp>
+      <p:sp>
+        <p:nvSpPr>
+          <p:cNvPr id="11" name="Rectangle 10"/>
+          <p:cNvSpPr/>
+          <p:nvPr/>
+        </p:nvSpPr>
+        <p:spPr>
+          <a:xfrm>
+            <a:off x="274320" y="5943600"/>
+            <a:ext cx="11612880" cy="45720"/>
+          </a:xfrm>
+          <a:prstGeom prst="rect">
+            <a:avLst/>
+          </a:prstGeom>
+          <a:solidFill>
+            <a:srgbClr val="2D5016"/>
+          </a:solidFill>
+          <a:ln>
+            <a:noFill/>
+          </a:ln>
+        </p:spPr>
+        <p:style>
+          <a:lnRef idx="1">
+            <a:schemeClr val="accent1"/>
+          </a:lnRef>
+          <a:fillRef idx="3">
+            <a:schemeClr val="accent1"/>
+          </a:fillRef>
+          <a:effectRef idx="2">
+            <a:schemeClr val="accent1"/>
+          </a:effectRef>
+          <a:fontRef idx="minor">
+            <a:schemeClr val="lt1"/>
+          </a:fontRef>
+        </p:style>
+        <p:txBody>
+          <a:bodyPr rtlCol="0" anchor="ctr"/>
+          <a:lstStyle/>
+          <a:p>
+            <a:pPr algn="ctr"/>
+          </a:p>
+        </p:txBody>
+      </p:sp>
+    </p:spTree>
+  </p:cSld>
+  <p:clrMapOvr>
+    <a:masterClrMapping/>
+  </p:clrMapOvr>
+</p:sld>
+</file>
+
+<file path=ppt/slides/slide13.xml><?xml version="1.0" encoding="utf-8"?>
+<p:sld xmlns:a="http://schemas.openxmlformats.org/drawingml/2006/main" xmlns:p="http://schemas.openxmlformats.org/presentationml/2006/main" xmlns:r="http://schemas.openxmlformats.org/officeDocument/2006/relationships">
+  <p:cSld>
+    <p:bg>
+      <p:bgPr>
+        <a:solidFill>
+          <a:srgbClr val="2D5016"/>
+        </a:solidFill>
+        <a:effectLst/>
+      </p:bgPr>
+    </p:bg>
+    <p:spTree>
+      <p:nvGrpSpPr>
+        <p:cNvPr id="1" name=""/>
+        <p:cNvGrpSpPr/>
+        <p:nvPr/>
+      </p:nvGrpSpPr>
+      <p:grpSpPr/>
+      <p:sp>
+        <p:nvSpPr>
+          <p:cNvPr id="2" name="TextBox 1"/>
+          <p:cNvSpPr txBox="1"/>
+          <p:nvPr/>
+        </p:nvSpPr>
+        <p:spPr>
+          <a:xfrm>
+            <a:off x="457200" y="2743200"/>
+            <a:ext cx="10972800" cy="1371600"/>
+          </a:xfrm>
+          <a:prstGeom prst="rect">
+            <a:avLst/>
+          </a:prstGeom>
+          <a:noFill/>
+        </p:spPr>
+        <p:txBody>
+          <a:bodyPr wrap="square">
+            <a:spAutoFit/>
+          </a:bodyPr>
+          <a:lstStyle/>
+          <a:p>
+            <a:pPr algn="ctr">
+              <a:defRPr sz="8000" b="1">
+                <a:solidFill>
+                  <a:srgbClr val="FFFFFF"/>
+                </a:solidFill>
+              </a:defRPr>
+            </a:pPr>
+            <a:r>
+              <a:t>04</a:t>
+            </a:r>
+          </a:p>
+        </p:txBody>
+      </p:sp>
+      <p:sp>
+        <p:nvSpPr>
+          <p:cNvPr id="3" name="TextBox 2"/>
+          <p:cNvSpPr txBox="1"/>
+          <p:nvPr/>
+        </p:nvSpPr>
+        <p:spPr>
+          <a:xfrm>
+            <a:off x="457200" y="4572000"/>
+            <a:ext cx="10972800" cy="731520"/>
+          </a:xfrm>
+          <a:prstGeom prst="rect">
+            <a:avLst/>
+          </a:prstGeom>
+          <a:noFill/>
+        </p:spPr>
+        <p:txBody>
+          <a:bodyPr wrap="square">
+            <a:spAutoFit/>
+          </a:bodyPr>
+          <a:lstStyle/>
+          <a:p>
+            <a:pPr algn="ctr">
+              <a:defRPr sz="2400" b="0">
+                <a:solidFill>
+                  <a:srgbClr val="D4A017"/>
+                </a:solidFill>
+              </a:defRPr>
+            </a:pPr>
+            <a:r>
+              <a:t>执行清单 · 八周节奏</a:t>
+            </a:r>
+          </a:p>
+        </p:txBody>
+      </p:sp>
+    </p:spTree>
+  </p:cSld>
+  <p:clrMapOvr>
+    <a:masterClrMapping/>
+  </p:clrMapOvr>
+</p:sld>
+</file>
+
+<file path=ppt/slides/slide14.xml><?xml version="1.0" encoding="utf-8"?>
+<p:sld xmlns:a="http://schemas.openxmlformats.org/drawingml/2006/main" xmlns:p="http://schemas.openxmlformats.org/presentationml/2006/main" xmlns:r="http://schemas.openxmlformats.org/officeDocument/2006/relationships">
+  <p:cSld>
+    <p:spTree>
+      <p:nvGrpSpPr>
+        <p:cNvPr id="1" name=""/>
+        <p:cNvGrpSpPr/>
+        <p:nvPr/>
+      </p:nvGrpSpPr>
+      <p:grpSpPr/>
+      <p:sp>
+        <p:nvSpPr>
+          <p:cNvPr id="2" name="TextBox 1"/>
+          <p:cNvSpPr txBox="1"/>
+          <p:nvPr/>
+        </p:nvSpPr>
+        <p:spPr>
+          <a:xfrm>
+            <a:off x="457200" y="365760"/>
+            <a:ext cx="7315200" cy="640080"/>
+          </a:xfrm>
+          <a:prstGeom prst="rect">
+            <a:avLst/>
+          </a:prstGeom>
+          <a:noFill/>
+        </p:spPr>
+        <p:txBody>
+          <a:bodyPr wrap="square">
+            <a:spAutoFit/>
+          </a:bodyPr>
+          <a:lstStyle/>
+          <a:p>
+            <a:pPr algn="l">
+              <a:defRPr sz="3000" b="1">
+                <a:solidFill>
+                  <a:srgbClr val="2D5016"/>
+                </a:solidFill>
+              </a:defRPr>
+            </a:pPr>
+            <a:r>
+              <a:t>04  八周执行节奏</a:t>
             </a:r>
           </a:p>
         </p:txBody>
@@ -3319,9 +5302,9 @@
               </a:tblPr>
               <a:tblGrid>
                 <a:gridCol w="1097280"/>
-                <a:gridCol w="1463040"/>
-                <a:gridCol w="3840480"/>
-                <a:gridCol w="5212080"/>
+                <a:gridCol w="1371600"/>
+                <a:gridCol w="4114800"/>
+                <a:gridCol w="5029200"/>
               </a:tblGrid>
               <a:tr h="558800">
                 <a:tc>
@@ -3330,7 +5313,7 @@
                     <a:lstStyle/>
                     <a:p>
                       <a:pPr>
-                        <a:defRPr sz="1200" b="1">
+                        <a:defRPr sz="1100" b="1">
                           <a:solidFill>
                             <a:srgbClr val="FFFFFF"/>
                           </a:solidFill>
@@ -3343,7 +5326,7 @@
                   </a:txBody>
                   <a:tcPr>
                     <a:solidFill>
-                      <a:srgbClr val="1A5C2A"/>
+                      <a:srgbClr val="2D5016"/>
                     </a:solidFill>
                   </a:tcPr>
                 </a:tc>
@@ -3353,7 +5336,7 @@
                     <a:lstStyle/>
                     <a:p>
                       <a:pPr>
-                        <a:defRPr sz="1200" b="1">
+                        <a:defRPr sz="1100" b="1">
                           <a:solidFill>
                             <a:srgbClr val="FFFFFF"/>
                           </a:solidFill>
@@ -3366,7 +5349,7 @@
                   </a:txBody>
                   <a:tcPr>
                     <a:solidFill>
-                      <a:srgbClr val="1A5C2A"/>
+                      <a:srgbClr val="2D5016"/>
                     </a:solidFill>
                   </a:tcPr>
                 </a:tc>
@@ -3376,20 +5359,20 @@
                     <a:lstStyle/>
                     <a:p>
                       <a:pPr>
-                        <a:defRPr sz="1200" b="1">
+                        <a:defRPr sz="1100" b="1">
                           <a:solidFill>
                             <a:srgbClr val="FFFFFF"/>
                           </a:solidFill>
                         </a:defRPr>
                       </a:pPr>
                       <a:r>
-                        <a:t>足球精神线（主打）</a:t>
+                        <a:t>足球精神线内容</a:t>
                       </a:r>
                     </a:p>
                   </a:txBody>
                   <a:tcPr>
                     <a:solidFill>
-                      <a:srgbClr val="1A5C2A"/>
+                      <a:srgbClr val="2D5016"/>
                     </a:solidFill>
                   </a:tcPr>
                 </a:tc>
@@ -3399,7 +5382,7 @@
                     <a:lstStyle/>
                     <a:p>
                       <a:pPr>
-                        <a:defRPr sz="1200" b="1">
+                        <a:defRPr sz="1100" b="1">
                           <a:solidFill>
                             <a:srgbClr val="FFFFFF"/>
                           </a:solidFill>
@@ -3412,7 +5395,7 @@
                   </a:txBody>
                   <a:tcPr>
                     <a:solidFill>
-                      <a:srgbClr val="1A5C2A"/>
+                      <a:srgbClr val="2D5016"/>
                     </a:solidFill>
                   </a:tcPr>
                 </a:tc>
@@ -3424,9 +5407,9 @@
                     <a:lstStyle/>
                     <a:p>
                       <a:pPr>
-                        <a:defRPr sz="1200">
+                        <a:defRPr sz="1000">
                           <a:solidFill>
-                            <a:srgbClr val="222222"/>
+                            <a:srgbClr val="333333"/>
                           </a:solidFill>
                         </a:defRPr>
                       </a:pPr>
@@ -3443,9 +5426,9 @@
                     <a:lstStyle/>
                     <a:p>
                       <a:pPr>
-                        <a:defRPr sz="1200">
+                        <a:defRPr sz="1000">
                           <a:solidFill>
-                            <a:srgbClr val="222222"/>
+                            <a:srgbClr val="333333"/>
                           </a:solidFill>
                         </a:defRPr>
                       </a:pPr>
@@ -3462,9 +5445,9 @@
                     <a:lstStyle/>
                     <a:p>
                       <a:pPr>
-                        <a:defRPr sz="1200">
+                        <a:defRPr sz="1000">
                           <a:solidFill>
-                            <a:srgbClr val="222222"/>
+                            <a:srgbClr val="333333"/>
                           </a:solidFill>
                         </a:defRPr>
                       </a:pPr>
@@ -3481,9 +5464,9 @@
                     <a:lstStyle/>
                     <a:p>
                       <a:pPr>
-                        <a:defRPr sz="1200">
+                        <a:defRPr sz="1000">
                           <a:solidFill>
-                            <a:srgbClr val="222222"/>
+                            <a:srgbClr val="333333"/>
                           </a:solidFill>
                         </a:defRPr>
                       </a:pPr>
@@ -3502,9 +5485,9 @@
                     <a:lstStyle/>
                     <a:p>
                       <a:pPr>
-                        <a:defRPr sz="1200">
+                        <a:defRPr sz="1000">
                           <a:solidFill>
-                            <a:srgbClr val="222222"/>
+                            <a:srgbClr val="333333"/>
                           </a:solidFill>
                         </a:defRPr>
                       </a:pPr>
@@ -3515,7 +5498,7 @@
                   </a:txBody>
                   <a:tcPr>
                     <a:solidFill>
-                      <a:srgbClr val="F4F7F4"/>
+                      <a:srgbClr val="F9F7F2"/>
                     </a:solidFill>
                   </a:tcPr>
                 </a:tc>
@@ -3525,9 +5508,9 @@
                     <a:lstStyle/>
                     <a:p>
                       <a:pPr>
-                        <a:defRPr sz="1200">
+                        <a:defRPr sz="1000">
                           <a:solidFill>
-                            <a:srgbClr val="222222"/>
+                            <a:srgbClr val="333333"/>
                           </a:solidFill>
                         </a:defRPr>
                       </a:pPr>
@@ -3538,7 +5521,7 @@
                   </a:txBody>
                   <a:tcPr>
                     <a:solidFill>
-                      <a:srgbClr val="F4F7F4"/>
+                      <a:srgbClr val="F9F7F2"/>
                     </a:solidFill>
                   </a:tcPr>
                 </a:tc>
@@ -3548,20 +5531,20 @@
                     <a:lstStyle/>
                     <a:p>
                       <a:pPr>
-                        <a:defRPr sz="1200">
+                        <a:defRPr sz="1000">
                           <a:solidFill>
-                            <a:srgbClr val="222222"/>
+                            <a:srgbClr val="333333"/>
                           </a:solidFill>
                         </a:defRPr>
                       </a:pPr>
                       <a:r>
-                        <a:t>球场建设回忆+从荒地到绿茵</a:t>
+                        <a:t>球场建设回忆</a:t>
                       </a:r>
                     </a:p>
                   </a:txBody>
                   <a:tcPr>
                     <a:solidFill>
-                      <a:srgbClr val="F4F7F4"/>
+                      <a:srgbClr val="F9F7F2"/>
                     </a:solidFill>
                   </a:tcPr>
                 </a:tc>
@@ -3571,9 +5554,9 @@
                     <a:lstStyle/>
                     <a:p>
                       <a:pPr>
-                        <a:defRPr sz="1200">
+                        <a:defRPr sz="1000">
                           <a:solidFill>
-                            <a:srgbClr val="222222"/>
+                            <a:srgbClr val="333333"/>
                           </a:solidFill>
                         </a:defRPr>
                       </a:pPr>
@@ -3584,7 +5567,7 @@
                   </a:txBody>
                   <a:tcPr>
                     <a:solidFill>
-                      <a:srgbClr val="F4F7F4"/>
+                      <a:srgbClr val="F9F7F2"/>
                     </a:solidFill>
                   </a:tcPr>
                 </a:tc>
@@ -3596,9 +5579,9 @@
                     <a:lstStyle/>
                     <a:p>
                       <a:pPr>
-                        <a:defRPr sz="1200">
+                        <a:defRPr sz="1000">
                           <a:solidFill>
-                            <a:srgbClr val="222222"/>
+                            <a:srgbClr val="333333"/>
                           </a:solidFill>
                         </a:defRPr>
                       </a:pPr>
@@ -3615,9 +5598,9 @@
                     <a:lstStyle/>
                     <a:p>
                       <a:pPr>
-                        <a:defRPr sz="1200">
+                        <a:defRPr sz="1000">
                           <a:solidFill>
-                            <a:srgbClr val="222222"/>
+                            <a:srgbClr val="333333"/>
                           </a:solidFill>
                         </a:defRPr>
                       </a:pPr>
@@ -3634,9 +5617,9 @@
                     <a:lstStyle/>
                     <a:p>
                       <a:pPr>
-                        <a:defRPr sz="1200">
+                        <a:defRPr sz="1000">
                           <a:solidFill>
-                            <a:srgbClr val="222222"/>
+                            <a:srgbClr val="333333"/>
                           </a:solidFill>
                         </a:defRPr>
                       </a:pPr>
@@ -3653,9 +5636,9 @@
                     <a:lstStyle/>
                     <a:p>
                       <a:pPr>
-                        <a:defRPr sz="1200">
+                        <a:defRPr sz="1000">
                           <a:solidFill>
-                            <a:srgbClr val="222222"/>
+                            <a:srgbClr val="333333"/>
                           </a:solidFill>
                         </a:defRPr>
                       </a:pPr>
@@ -3674,9 +5657,9 @@
                     <a:lstStyle/>
                     <a:p>
                       <a:pPr>
-                        <a:defRPr sz="1200">
+                        <a:defRPr sz="1000">
                           <a:solidFill>
-                            <a:srgbClr val="222222"/>
+                            <a:srgbClr val="333333"/>
                           </a:solidFill>
                         </a:defRPr>
                       </a:pPr>
@@ -3687,7 +5670,7 @@
                   </a:txBody>
                   <a:tcPr>
                     <a:solidFill>
-                      <a:srgbClr val="F4F7F4"/>
+                      <a:srgbClr val="F9F7F2"/>
                     </a:solidFill>
                   </a:tcPr>
                 </a:tc>
@@ -3697,9 +5680,9 @@
                     <a:lstStyle/>
                     <a:p>
                       <a:pPr>
-                        <a:defRPr sz="1200">
+                        <a:defRPr sz="1000">
                           <a:solidFill>
-                            <a:srgbClr val="222222"/>
+                            <a:srgbClr val="333333"/>
                           </a:solidFill>
                         </a:defRPr>
                       </a:pPr>
@@ -3710,7 +5693,7 @@
                   </a:txBody>
                   <a:tcPr>
                     <a:solidFill>
-                      <a:srgbClr val="F4F7F4"/>
+                      <a:srgbClr val="F9F7F2"/>
                     </a:solidFill>
                   </a:tcPr>
                 </a:tc>
@@ -3720,9 +5703,9 @@
                     <a:lstStyle/>
                     <a:p>
                       <a:pPr>
-                        <a:defRPr sz="1200">
+                        <a:defRPr sz="1000">
                           <a:solidFill>
-                            <a:srgbClr val="222222"/>
+                            <a:srgbClr val="333333"/>
                           </a:solidFill>
                         </a:defRPr>
                       </a:pPr>
@@ -3733,7 +5716,7 @@
                   </a:txBody>
                   <a:tcPr>
                     <a:solidFill>
-                      <a:srgbClr val="F4F7F4"/>
+                      <a:srgbClr val="F9F7F2"/>
                     </a:solidFill>
                   </a:tcPr>
                 </a:tc>
@@ -3743,9 +5726,9 @@
                     <a:lstStyle/>
                     <a:p>
                       <a:pPr>
-                        <a:defRPr sz="1200">
+                        <a:defRPr sz="1000">
                           <a:solidFill>
-                            <a:srgbClr val="222222"/>
+                            <a:srgbClr val="333333"/>
                           </a:solidFill>
                         </a:defRPr>
                       </a:pPr>
@@ -3756,7 +5739,7 @@
                   </a:txBody>
                   <a:tcPr>
                     <a:solidFill>
-                      <a:srgbClr val="F4F7F4"/>
+                      <a:srgbClr val="F9F7F2"/>
                     </a:solidFill>
                   </a:tcPr>
                 </a:tc>
@@ -3768,9 +5751,9 @@
                     <a:lstStyle/>
                     <a:p>
                       <a:pPr>
-                        <a:defRPr sz="1200">
+                        <a:defRPr sz="1000">
                           <a:solidFill>
-                            <a:srgbClr val="222222"/>
+                            <a:srgbClr val="333333"/>
                           </a:solidFill>
                         </a:defRPr>
                       </a:pPr>
@@ -3787,9 +5770,9 @@
                     <a:lstStyle/>
                     <a:p>
                       <a:pPr>
-                        <a:defRPr sz="1200">
+                        <a:defRPr sz="1000">
                           <a:solidFill>
-                            <a:srgbClr val="222222"/>
+                            <a:srgbClr val="333333"/>
                           </a:solidFill>
                         </a:defRPr>
                       </a:pPr>
@@ -3806,9 +5789,9 @@
                     <a:lstStyle/>
                     <a:p>
                       <a:pPr>
-                        <a:defRPr sz="1200">
+                        <a:defRPr sz="1000">
                           <a:solidFill>
-                            <a:srgbClr val="222222"/>
+                            <a:srgbClr val="333333"/>
                           </a:solidFill>
                         </a:defRPr>
                       </a:pPr>
@@ -3825,9 +5808,9 @@
                     <a:lstStyle/>
                     <a:p>
                       <a:pPr>
-                        <a:defRPr sz="1200">
+                        <a:defRPr sz="1000">
                           <a:solidFill>
-                            <a:srgbClr val="222222"/>
+                            <a:srgbClr val="333333"/>
                           </a:solidFill>
                         </a:defRPr>
                       </a:pPr>
@@ -3846,9 +5829,9 @@
                     <a:lstStyle/>
                     <a:p>
                       <a:pPr>
-                        <a:defRPr sz="1200">
+                        <a:defRPr sz="1000">
                           <a:solidFill>
-                            <a:srgbClr val="222222"/>
+                            <a:srgbClr val="333333"/>
                           </a:solidFill>
                         </a:defRPr>
                       </a:pPr>
@@ -3859,7 +5842,7 @@
                   </a:txBody>
                   <a:tcPr>
                     <a:solidFill>
-                      <a:srgbClr val="F4F7F4"/>
+                      <a:srgbClr val="F9F7F2"/>
                     </a:solidFill>
                   </a:tcPr>
                 </a:tc>
@@ -3869,9 +5852,9 @@
                     <a:lstStyle/>
                     <a:p>
                       <a:pPr>
-                        <a:defRPr sz="1200">
+                        <a:defRPr sz="1000">
                           <a:solidFill>
-                            <a:srgbClr val="222222"/>
+                            <a:srgbClr val="333333"/>
                           </a:solidFill>
                         </a:defRPr>
                       </a:pPr>
@@ -3882,7 +5865,7 @@
                   </a:txBody>
                   <a:tcPr>
                     <a:solidFill>
-                      <a:srgbClr val="F4F7F4"/>
+                      <a:srgbClr val="F9F7F2"/>
                     </a:solidFill>
                   </a:tcPr>
                 </a:tc>
@@ -3892,20 +5875,20 @@
                     <a:lstStyle/>
                     <a:p>
                       <a:pPr>
-                        <a:defRPr sz="1200">
+                        <a:defRPr sz="1000">
                           <a:solidFill>
-                            <a:srgbClr val="222222"/>
+                            <a:srgbClr val="333333"/>
                           </a:solidFill>
                         </a:defRPr>
                       </a:pPr>
                       <a:r>
-                        <a:t>比赛全流程+更衣室开会</a:t>
+                        <a:t>比赛全流程+更衣室</a:t>
                       </a:r>
                     </a:p>
                   </a:txBody>
                   <a:tcPr>
                     <a:solidFill>
-                      <a:srgbClr val="F4F7F4"/>
+                      <a:srgbClr val="F9F7F2"/>
                     </a:solidFill>
                   </a:tcPr>
                 </a:tc>
@@ -3915,9 +5898,9 @@
                     <a:lstStyle/>
                     <a:p>
                       <a:pPr>
-                        <a:defRPr sz="1200">
+                        <a:defRPr sz="1000">
                           <a:solidFill>
-                            <a:srgbClr val="222222"/>
+                            <a:srgbClr val="333333"/>
                           </a:solidFill>
                         </a:defRPr>
                       </a:pPr>
@@ -3928,7 +5911,7 @@
                   </a:txBody>
                   <a:tcPr>
                     <a:solidFill>
-                      <a:srgbClr val="F4F7F4"/>
+                      <a:srgbClr val="F9F7F2"/>
                     </a:solidFill>
                   </a:tcPr>
                 </a:tc>
@@ -3940,9 +5923,9 @@
                     <a:lstStyle/>
                     <a:p>
                       <a:pPr>
-                        <a:defRPr sz="1200">
+                        <a:defRPr sz="1000">
                           <a:solidFill>
-                            <a:srgbClr val="222222"/>
+                            <a:srgbClr val="333333"/>
                           </a:solidFill>
                         </a:defRPr>
                       </a:pPr>
@@ -3959,9 +5942,9 @@
                     <a:lstStyle/>
                     <a:p>
                       <a:pPr>
-                        <a:defRPr sz="1200">
+                        <a:defRPr sz="1000">
                           <a:solidFill>
-                            <a:srgbClr val="222222"/>
+                            <a:srgbClr val="333333"/>
                           </a:solidFill>
                         </a:defRPr>
                       </a:pPr>
@@ -3978,9 +5961,9 @@
                     <a:lstStyle/>
                     <a:p>
                       <a:pPr>
-                        <a:defRPr sz="1200">
+                        <a:defRPr sz="1000">
                           <a:solidFill>
-                            <a:srgbClr val="222222"/>
+                            <a:srgbClr val="333333"/>
                           </a:solidFill>
                         </a:defRPr>
                       </a:pPr>
@@ -3997,9 +5980,9 @@
                     <a:lstStyle/>
                     <a:p>
                       <a:pPr>
-                        <a:defRPr sz="1200">
+                        <a:defRPr sz="1000">
                           <a:solidFill>
-                            <a:srgbClr val="222222"/>
+                            <a:srgbClr val="333333"/>
                           </a:solidFill>
                         </a:defRPr>
                       </a:pPr>
@@ -4018,9 +6001,9 @@
                     <a:lstStyle/>
                     <a:p>
                       <a:pPr>
-                        <a:defRPr sz="1200">
+                        <a:defRPr sz="1000">
                           <a:solidFill>
-                            <a:srgbClr val="222222"/>
+                            <a:srgbClr val="333333"/>
                           </a:solidFill>
                         </a:defRPr>
                       </a:pPr>
@@ -4031,7 +6014,7 @@
                   </a:txBody>
                   <a:tcPr>
                     <a:solidFill>
-                      <a:srgbClr val="F4F7F4"/>
+                      <a:srgbClr val="F9F7F2"/>
                     </a:solidFill>
                   </a:tcPr>
                 </a:tc>
@@ -4041,9 +6024,9 @@
                     <a:lstStyle/>
                     <a:p>
                       <a:pPr>
-                        <a:defRPr sz="1200">
+                        <a:defRPr sz="1000">
                           <a:solidFill>
-                            <a:srgbClr val="222222"/>
+                            <a:srgbClr val="333333"/>
                           </a:solidFill>
                         </a:defRPr>
                       </a:pPr>
@@ -4054,7 +6037,7 @@
                   </a:txBody>
                   <a:tcPr>
                     <a:solidFill>
-                      <a:srgbClr val="F4F7F4"/>
+                      <a:srgbClr val="F9F7F2"/>
                     </a:solidFill>
                   </a:tcPr>
                 </a:tc>
@@ -4064,9 +6047,9 @@
                     <a:lstStyle/>
                     <a:p>
                       <a:pPr>
-                        <a:defRPr sz="1200">
+                        <a:defRPr sz="1000">
                           <a:solidFill>
-                            <a:srgbClr val="222222"/>
+                            <a:srgbClr val="333333"/>
                           </a:solidFill>
                         </a:defRPr>
                       </a:pPr>
@@ -4077,7 +6060,7 @@
                   </a:txBody>
                   <a:tcPr>
                     <a:solidFill>
-                      <a:srgbClr val="F4F7F4"/>
+                      <a:srgbClr val="F9F7F2"/>
                     </a:solidFill>
                   </a:tcPr>
                 </a:tc>
@@ -4087,9 +6070,9 @@
                     <a:lstStyle/>
                     <a:p>
                       <a:pPr>
-                        <a:defRPr sz="1200">
+                        <a:defRPr sz="1000">
                           <a:solidFill>
-                            <a:srgbClr val="222222"/>
+                            <a:srgbClr val="333333"/>
                           </a:solidFill>
                         </a:defRPr>
                       </a:pPr>
@@ -4100,7 +6083,7 @@
                   </a:txBody>
                   <a:tcPr>
                     <a:solidFill>
-                      <a:srgbClr val="F4F7F4"/>
+                      <a:srgbClr val="F9F7F2"/>
                     </a:solidFill>
                   </a:tcPr>
                 </a:tc>
@@ -4117,7 +6100,7 @@
 </p:sld>
 </file>
 
-<file path=ppt/slides/slide11.xml><?xml version="1.0" encoding="utf-8"?>
+<file path=ppt/slides/slide15.xml><?xml version="1.0" encoding="utf-8"?>
 <p:sld xmlns:a="http://schemas.openxmlformats.org/drawingml/2006/main" xmlns:p="http://schemas.openxmlformats.org/presentationml/2006/main" xmlns:r="http://schemas.openxmlformats.org/officeDocument/2006/relationships">
   <p:cSld>
     <p:bg>
@@ -4160,7 +6143,7 @@
             <a:pPr algn="ctr">
               <a:defRPr sz="4800" b="1">
                 <a:solidFill>
-                  <a:srgbClr val="E8A817"/>
+                  <a:srgbClr val="D4A017"/>
                 </a:solidFill>
               </a:defRPr>
             </a:pPr>
@@ -4251,14 +6234,6 @@
 <file path=ppt/slides/slide2.xml><?xml version="1.0" encoding="utf-8"?>
 <p:sld xmlns:a="http://schemas.openxmlformats.org/drawingml/2006/main" xmlns:p="http://schemas.openxmlformats.org/presentationml/2006/main" xmlns:r="http://schemas.openxmlformats.org/officeDocument/2006/relationships">
   <p:cSld>
-    <p:bg>
-      <p:bgPr>
-        <a:solidFill>
-          <a:srgbClr val="0F1F0F"/>
-        </a:solidFill>
-        <a:effectLst/>
-      </p:bgPr>
-    </p:bg>
     <p:spTree>
       <p:nvGrpSpPr>
         <p:cNvPr id="1" name=""/>
@@ -4274,8 +6249,8 @@
         </p:nvSpPr>
         <p:spPr>
           <a:xfrm>
-            <a:off x="457200" y="274320"/>
-            <a:ext cx="4572000" cy="731520"/>
+            <a:off x="457200" y="365760"/>
+            <a:ext cx="7315200" cy="640080"/>
           </a:xfrm>
           <a:prstGeom prst="rect">
             <a:avLst/>
@@ -4289,9 +6264,9 @@
           <a:lstStyle/>
           <a:p>
             <a:pPr algn="l">
-              <a:defRPr sz="3600" b="1">
-                <a:solidFill>
-                  <a:srgbClr val="E8A817"/>
+              <a:defRPr sz="3000" b="1">
+                <a:solidFill>
+                  <a:srgbClr val="2D5016"/>
                 </a:solidFill>
               </a:defRPr>
             </a:pPr>
@@ -4303,20 +6278,248 @@
       </p:sp>
       <p:sp>
         <p:nvSpPr>
-          <p:cNvPr id="3" name="Rectangle 2"/>
+          <p:cNvPr id="3" name="Rounded Rectangle 2"/>
           <p:cNvSpPr/>
           <p:nvPr/>
         </p:nvSpPr>
         <p:spPr>
           <a:xfrm>
             <a:off x="457200" y="1371600"/>
-            <a:ext cx="5303520" cy="4754880"/>
+            <a:ext cx="5303520" cy="4572000"/>
           </a:xfrm>
-          <a:prstGeom prst="rect">
+          <a:prstGeom prst="roundRect">
             <a:avLst/>
           </a:prstGeom>
           <a:solidFill>
-            <a:srgbClr val="222222"/>
+            <a:srgbClr val="F0F0F0"/>
+          </a:solidFill>
+          <a:ln w="12700">
+            <a:solidFill>
+              <a:srgbClr val="CCCCCC"/>
+            </a:solidFill>
+          </a:ln>
+        </p:spPr>
+        <p:style>
+          <a:lnRef idx="1">
+            <a:schemeClr val="accent1"/>
+          </a:lnRef>
+          <a:fillRef idx="3">
+            <a:schemeClr val="accent1"/>
+          </a:fillRef>
+          <a:effectRef idx="2">
+            <a:schemeClr val="accent1"/>
+          </a:effectRef>
+          <a:fontRef idx="minor">
+            <a:schemeClr val="lt1"/>
+          </a:fontRef>
+        </p:style>
+        <p:txBody>
+          <a:bodyPr rtlCol="0" anchor="ctr" wrap="square" lIns="203200" tIns="177800"/>
+          <a:lstStyle/>
+          <a:p>
+            <a:pPr algn="ctr">
+              <a:defRPr sz="2000" b="1">
+                <a:solidFill>
+                  <a:srgbClr val="CC3333"/>
+                </a:solidFill>
+              </a:defRPr>
+            </a:pPr>
+            <a:r>
+              <a:t>v1.0 的问题</a:t>
+            </a:r>
+          </a:p>
+          <a:p>
+            <a:pPr>
+              <a:spcBef>
+                <a:spcPts val="1000"/>
+              </a:spcBef>
+              <a:defRPr sz="1300">
+                <a:solidFill>
+                  <a:srgbClr val="333333"/>
+                </a:solidFill>
+              </a:defRPr>
+            </a:pPr>
+            <a:r>
+              <a:t>• 内容太散——13条脚本覆盖6个方向，用户记不住</a:t>
+            </a:r>
+          </a:p>
+          <a:p>
+            <a:pPr>
+              <a:spcBef>
+                <a:spcPts val="1000"/>
+              </a:spcBef>
+              <a:defRPr sz="1300">
+                <a:solidFill>
+                  <a:srgbClr val="333333"/>
+                </a:solidFill>
+              </a:defRPr>
+            </a:pPr>
+            <a:r>
+              <a:t>• 没有差异化——跟其他村支书号雷同</a:t>
+            </a:r>
+          </a:p>
+          <a:p>
+            <a:pPr>
+              <a:spcBef>
+                <a:spcPts val="1000"/>
+              </a:spcBef>
+              <a:defRPr sz="1300">
+                <a:solidFill>
+                  <a:srgbClr val="333333"/>
+                </a:solidFill>
+              </a:defRPr>
+            </a:pPr>
+            <a:r>
+              <a:t>• 未发挥核心优势——足球和冠军</a:t>
+            </a:r>
+          </a:p>
+          <a:p>
+            <a:pPr>
+              <a:spcBef>
+                <a:spcPts val="1000"/>
+              </a:spcBef>
+              <a:defRPr sz="1300">
+                <a:solidFill>
+                  <a:srgbClr val="333333"/>
+                </a:solidFill>
+              </a:defRPr>
+            </a:pPr>
+            <a:r>
+              <a:t>• 变现路径模糊，没跟内容绑定</a:t>
+            </a:r>
+          </a:p>
+        </p:txBody>
+      </p:sp>
+      <p:sp>
+        <p:nvSpPr>
+          <p:cNvPr id="4" name="Rounded Rectangle 3"/>
+          <p:cNvSpPr/>
+          <p:nvPr/>
+        </p:nvSpPr>
+        <p:spPr>
+          <a:xfrm>
+            <a:off x="6217920" y="1371600"/>
+            <a:ext cx="5303520" cy="4572000"/>
+          </a:xfrm>
+          <a:prstGeom prst="roundRect">
+            <a:avLst/>
+          </a:prstGeom>
+          <a:solidFill>
+            <a:srgbClr val="E8F5E0"/>
+          </a:solidFill>
+          <a:ln w="25400">
+            <a:solidFill>
+              <a:srgbClr val="2D5016"/>
+            </a:solidFill>
+          </a:ln>
+        </p:spPr>
+        <p:style>
+          <a:lnRef idx="1">
+            <a:schemeClr val="accent1"/>
+          </a:lnRef>
+          <a:fillRef idx="3">
+            <a:schemeClr val="accent1"/>
+          </a:fillRef>
+          <a:effectRef idx="2">
+            <a:schemeClr val="accent1"/>
+          </a:effectRef>
+          <a:fontRef idx="minor">
+            <a:schemeClr val="lt1"/>
+          </a:fontRef>
+        </p:style>
+        <p:txBody>
+          <a:bodyPr rtlCol="0" anchor="ctr" wrap="square" lIns="203200" tIns="177800"/>
+          <a:lstStyle/>
+          <a:p>
+            <a:pPr algn="ctr">
+              <a:defRPr sz="2000" b="1">
+                <a:solidFill>
+                  <a:srgbClr val="2D5016"/>
+                </a:solidFill>
+              </a:defRPr>
+            </a:pPr>
+            <a:r>
+              <a:t>v2.0 的解法</a:t>
+            </a:r>
+          </a:p>
+          <a:p>
+            <a:pPr>
+              <a:spcBef>
+                <a:spcPts val="1000"/>
+              </a:spcBef>
+              <a:defRPr sz="1300">
+                <a:solidFill>
+                  <a:srgbClr val="333333"/>
+                </a:solidFill>
+              </a:defRPr>
+            </a:pPr>
+            <a:r>
+              <a:t>• 聚焦足球——24条脚本全部围绕足球展开</a:t>
+            </a:r>
+          </a:p>
+          <a:p>
+            <a:pPr>
+              <a:spcBef>
+                <a:spcPts val="1000"/>
+              </a:spcBef>
+              <a:defRPr sz="1300">
+                <a:solidFill>
+                  <a:srgbClr val="333333"/>
+                </a:solidFill>
+              </a:defRPr>
+            </a:pPr>
+            <a:r>
+              <a:t>• 建立壁垒——冠军村IP，其他村无法复制</a:t>
+            </a:r>
+          </a:p>
+          <a:p>
+            <a:pPr>
+              <a:spcBef>
+                <a:spcPts val="1000"/>
+              </a:spcBef>
+              <a:defRPr sz="1300">
+                <a:solidFill>
+                  <a:srgbClr val="333333"/>
+                </a:solidFill>
+              </a:defRPr>
+            </a:pPr>
+            <a:r>
+              <a:t>• 三条清晰栏目线，发布节奏固定</a:t>
+            </a:r>
+          </a:p>
+          <a:p>
+            <a:pPr>
+              <a:spcBef>
+                <a:spcPts val="1000"/>
+              </a:spcBef>
+              <a:defRPr sz="1300">
+                <a:solidFill>
+                  <a:srgbClr val="333333"/>
+                </a:solidFill>
+              </a:defRPr>
+            </a:pPr>
+            <a:r>
+              <a:t>• 变现前置——阶梯式规划，逐级变现</a:t>
+            </a:r>
+          </a:p>
+        </p:txBody>
+      </p:sp>
+      <p:sp>
+        <p:nvSpPr>
+          <p:cNvPr id="5" name="Rounded Rectangle 4"/>
+          <p:cNvSpPr/>
+          <p:nvPr/>
+        </p:nvSpPr>
+        <p:spPr>
+          <a:xfrm>
+            <a:off x="457200" y="6126480"/>
+            <a:ext cx="11247120" cy="457200"/>
+          </a:xfrm>
+          <a:prstGeom prst="roundRect">
+            <a:avLst/>
+          </a:prstGeom>
+          <a:solidFill>
+            <a:srgbClr val="FFF8E1"/>
           </a:solidFill>
           <a:ln>
             <a:noFill/>
@@ -4337,239 +6540,13 @@
           </a:fontRef>
         </p:style>
         <p:txBody>
-          <a:bodyPr rtlCol="0" anchor="ctr" wrap="square" lIns="177800" rIns="177800" tIns="152400"/>
+          <a:bodyPr rtlCol="0" anchor="ctr" wrap="square" lIns="152400" tIns="101600"/>
           <a:lstStyle/>
           <a:p>
             <a:pPr algn="ctr">
-              <a:defRPr sz="1800" b="1">
-                <a:solidFill>
-                  <a:srgbClr val="CC6666"/>
-                </a:solidFill>
-              </a:defRPr>
-            </a:pPr>
-            <a:r>
-              <a:t>❌  v1.0 的问题</a:t>
-            </a:r>
-          </a:p>
-          <a:p>
-            <a:pPr>
-              <a:spcBef>
-                <a:spcPts val="800"/>
-              </a:spcBef>
-              <a:defRPr sz="1400">
-                <a:solidFill>
-                  <a:srgbClr val="CCCCCC"/>
-                </a:solidFill>
-              </a:defRPr>
-            </a:pPr>
-            <a:r>
-              <a:t>• 内容太散——13条覆盖6个方向，记不住</a:t>
-            </a:r>
-          </a:p>
-          <a:p>
-            <a:pPr>
-              <a:spcBef>
-                <a:spcPts val="800"/>
-              </a:spcBef>
-              <a:defRPr sz="1400">
-                <a:solidFill>
-                  <a:srgbClr val="CCCCCC"/>
-                </a:solidFill>
-              </a:defRPr>
-            </a:pPr>
-            <a:r>
-              <a:t>• 跟其他村支书号雷同（日常+政策+带货）</a:t>
-            </a:r>
-          </a:p>
-          <a:p>
-            <a:pPr>
-              <a:spcBef>
-                <a:spcPts val="800"/>
-              </a:spcBef>
-              <a:defRPr sz="1400">
-                <a:solidFill>
-                  <a:srgbClr val="CCCCCC"/>
-                </a:solidFill>
-              </a:defRPr>
-            </a:pPr>
-            <a:r>
-              <a:t>• 未发挥核心优势——足球和冠军</a:t>
-            </a:r>
-          </a:p>
-          <a:p>
-            <a:pPr>
-              <a:spcBef>
-                <a:spcPts val="800"/>
-              </a:spcBef>
-              <a:defRPr sz="1400">
-                <a:solidFill>
-                  <a:srgbClr val="CCCCCC"/>
-                </a:solidFill>
-              </a:defRPr>
-            </a:pPr>
-            <a:r>
-              <a:t>• 变现路径模糊</a:t>
-            </a:r>
-          </a:p>
-        </p:txBody>
-      </p:sp>
-      <p:sp>
-        <p:nvSpPr>
-          <p:cNvPr id="4" name="Rectangle 3"/>
-          <p:cNvSpPr/>
-          <p:nvPr/>
-        </p:nvSpPr>
-        <p:spPr>
-          <a:xfrm>
-            <a:off x="6217920" y="1371600"/>
-            <a:ext cx="5303520" cy="4754880"/>
-          </a:xfrm>
-          <a:prstGeom prst="rect">
-            <a:avLst/>
-          </a:prstGeom>
-          <a:solidFill>
-            <a:srgbClr val="0A2A0A"/>
-          </a:solidFill>
-          <a:ln w="25400">
-            <a:solidFill>
-              <a:srgbClr val="E8A817"/>
-            </a:solidFill>
-          </a:ln>
-        </p:spPr>
-        <p:style>
-          <a:lnRef idx="1">
-            <a:schemeClr val="accent1"/>
-          </a:lnRef>
-          <a:fillRef idx="3">
-            <a:schemeClr val="accent1"/>
-          </a:fillRef>
-          <a:effectRef idx="2">
-            <a:schemeClr val="accent1"/>
-          </a:effectRef>
-          <a:fontRef idx="minor">
-            <a:schemeClr val="lt1"/>
-          </a:fontRef>
-        </p:style>
-        <p:txBody>
-          <a:bodyPr rtlCol="0" anchor="ctr" wrap="square" lIns="177800" rIns="177800" tIns="152400"/>
-          <a:lstStyle/>
-          <a:p>
-            <a:pPr algn="ctr">
-              <a:defRPr sz="1800" b="1">
-                <a:solidFill>
-                  <a:srgbClr val="66CC66"/>
-                </a:solidFill>
-              </a:defRPr>
-            </a:pPr>
-            <a:r>
-              <a:t>✅  v2.0 的解法</a:t>
-            </a:r>
-          </a:p>
-          <a:p>
-            <a:pPr>
-              <a:spcBef>
-                <a:spcPts val="800"/>
-              </a:spcBef>
-              <a:defRPr sz="1400">
-                <a:solidFill>
-                  <a:srgbClr val="CCEECC"/>
-                </a:solidFill>
-              </a:defRPr>
-            </a:pPr>
-            <a:r>
-              <a:t>• 聚焦足球——24条脚本全部围绕足球</a:t>
-            </a:r>
-          </a:p>
-          <a:p>
-            <a:pPr>
-              <a:spcBef>
-                <a:spcPts val="800"/>
-              </a:spcBef>
-              <a:defRPr sz="1400">
-                <a:solidFill>
-                  <a:srgbClr val="CCEECC"/>
-                </a:solidFill>
-              </a:defRPr>
-            </a:pPr>
-            <a:r>
-              <a:t>• 建立壁垒——冠军村IP无法复制</a:t>
-            </a:r>
-          </a:p>
-          <a:p>
-            <a:pPr>
-              <a:spcBef>
-                <a:spcPts val="800"/>
-              </a:spcBef>
-              <a:defRPr sz="1400">
-                <a:solidFill>
-                  <a:srgbClr val="CCEECC"/>
-                </a:solidFill>
-              </a:defRPr>
-            </a:pPr>
-            <a:r>
-              <a:t>• 三条清晰栏目线，发布节奏固定</a:t>
-            </a:r>
-          </a:p>
-          <a:p>
-            <a:pPr>
-              <a:spcBef>
-                <a:spcPts val="800"/>
-              </a:spcBef>
-              <a:defRPr sz="1400">
-                <a:solidFill>
-                  <a:srgbClr val="CCEECC"/>
-                </a:solidFill>
-              </a:defRPr>
-            </a:pPr>
-            <a:r>
-              <a:t>• 变现前置——阶梯式规划</a:t>
-            </a:r>
-          </a:p>
-        </p:txBody>
-      </p:sp>
-      <p:sp>
-        <p:nvSpPr>
-          <p:cNvPr id="5" name="Rectangle 4"/>
-          <p:cNvSpPr/>
-          <p:nvPr/>
-        </p:nvSpPr>
-        <p:spPr>
-          <a:xfrm>
-            <a:off x="457200" y="6309360"/>
-            <a:ext cx="11247120" cy="365760"/>
-          </a:xfrm>
-          <a:prstGeom prst="rect">
-            <a:avLst/>
-          </a:prstGeom>
-          <a:solidFill>
-            <a:srgbClr val="334411"/>
-          </a:solidFill>
-          <a:ln>
-            <a:noFill/>
-          </a:ln>
-        </p:spPr>
-        <p:style>
-          <a:lnRef idx="1">
-            <a:schemeClr val="accent1"/>
-          </a:lnRef>
-          <a:fillRef idx="3">
-            <a:schemeClr val="accent1"/>
-          </a:fillRef>
-          <a:effectRef idx="2">
-            <a:schemeClr val="accent1"/>
-          </a:effectRef>
-          <a:fontRef idx="minor">
-            <a:schemeClr val="lt1"/>
-          </a:fontRef>
-        </p:style>
-        <p:txBody>
-          <a:bodyPr rtlCol="0" anchor="ctr" lIns="127000"/>
-          <a:lstStyle/>
-          <a:p>
-            <a:pPr algn="ctr">
-              <a:defRPr sz="1300" b="1">
-                <a:solidFill>
-                  <a:srgbClr val="E8A817"/>
+              <a:defRPr sz="1200" b="1">
+                <a:solidFill>
+                  <a:srgbClr val="D4A017"/>
                 </a:solidFill>
               </a:defRPr>
             </a:pPr>
@@ -4605,8 +6582,8 @@
         </p:nvSpPr>
         <p:spPr>
           <a:xfrm>
-            <a:off x="457200" y="274320"/>
-            <a:ext cx="4572000" cy="731520"/>
+            <a:off x="457200" y="365760"/>
+            <a:ext cx="7315200" cy="640080"/>
           </a:xfrm>
           <a:prstGeom prst="rect">
             <a:avLst/>
@@ -4622,12 +6599,12 @@
             <a:pPr algn="l">
               <a:defRPr sz="3000" b="1">
                 <a:solidFill>
-                  <a:srgbClr val="1A5C2A"/>
-                </a:solidFill>
-              </a:defRPr>
-            </a:pPr>
-            <a:r>
-              <a:t>框架变化一览</a:t>
+                  <a:srgbClr val="2D5016"/>
+                </a:solidFill>
+              </a:defRPr>
+            </a:pPr>
+            <a:r>
+              <a:t>01  框架变化一览</a:t>
             </a:r>
           </a:p>
         </p:txBody>
@@ -4655,14 +6632,14 @@
                 <a:gridCol w="4572000"/>
                 <a:gridCol w="4663440"/>
               </a:tblGrid>
-              <a:tr h="718457">
+              <a:tr h="628650">
                 <a:tc>
                   <a:txBody>
                     <a:bodyPr/>
                     <a:lstStyle/>
                     <a:p>
                       <a:pPr>
-                        <a:defRPr sz="1300" b="1">
+                        <a:defRPr sz="1100" b="1">
                           <a:solidFill>
                             <a:srgbClr val="FFFFFF"/>
                           </a:solidFill>
@@ -4675,7 +6652,7 @@
                   </a:txBody>
                   <a:tcPr>
                     <a:solidFill>
-                      <a:srgbClr val="1A5C2A"/>
+                      <a:srgbClr val="2D5016"/>
                     </a:solidFill>
                   </a:tcPr>
                 </a:tc>
@@ -4685,7 +6662,7 @@
                     <a:lstStyle/>
                     <a:p>
                       <a:pPr>
-                        <a:defRPr sz="1300" b="1">
+                        <a:defRPr sz="1100" b="1">
                           <a:solidFill>
                             <a:srgbClr val="FFFFFF"/>
                           </a:solidFill>
@@ -4698,7 +6675,7 @@
                   </a:txBody>
                   <a:tcPr>
                     <a:solidFill>
-                      <a:srgbClr val="1A5C2A"/>
+                      <a:srgbClr val="2D5016"/>
                     </a:solidFill>
                   </a:tcPr>
                 </a:tc>
@@ -4708,7 +6685,7 @@
                     <a:lstStyle/>
                     <a:p>
                       <a:pPr>
-                        <a:defRPr sz="1300" b="1">
+                        <a:defRPr sz="1100" b="1">
                           <a:solidFill>
                             <a:srgbClr val="FFFFFF"/>
                           </a:solidFill>
@@ -4721,21 +6698,21 @@
                   </a:txBody>
                   <a:tcPr>
                     <a:solidFill>
-                      <a:srgbClr val="1A5C2A"/>
+                      <a:srgbClr val="2D5016"/>
                     </a:solidFill>
                   </a:tcPr>
                 </a:tc>
               </a:tr>
-              <a:tr h="718457">
+              <a:tr h="628650">
                 <a:tc>
                   <a:txBody>
                     <a:bodyPr/>
                     <a:lstStyle/>
                     <a:p>
                       <a:pPr>
-                        <a:defRPr sz="1300">
+                        <a:defRPr sz="1000">
                           <a:solidFill>
-                            <a:srgbClr val="222222"/>
+                            <a:srgbClr val="333333"/>
                           </a:solidFill>
                         </a:defRPr>
                       </a:pPr>
@@ -4752,9 +6729,9 @@
                     <a:lstStyle/>
                     <a:p>
                       <a:pPr>
-                        <a:defRPr sz="1300">
+                        <a:defRPr sz="1000">
                           <a:solidFill>
-                            <a:srgbClr val="222222"/>
+                            <a:srgbClr val="333333"/>
                           </a:solidFill>
                         </a:defRPr>
                       </a:pPr>
@@ -4771,9 +6748,9 @@
                     <a:lstStyle/>
                     <a:p>
                       <a:pPr>
-                        <a:defRPr sz="1300">
+                        <a:defRPr sz="1000">
                           <a:solidFill>
-                            <a:srgbClr val="222222"/>
+                            <a:srgbClr val="333333"/>
                           </a:solidFill>
                         </a:defRPr>
                       </a:pPr>
@@ -4785,16 +6762,16 @@
                   <a:tcPr/>
                 </a:tc>
               </a:tr>
-              <a:tr h="718457">
+              <a:tr h="628650">
                 <a:tc>
                   <a:txBody>
                     <a:bodyPr/>
                     <a:lstStyle/>
                     <a:p>
                       <a:pPr>
-                        <a:defRPr sz="1300">
+                        <a:defRPr sz="1000">
                           <a:solidFill>
-                            <a:srgbClr val="222222"/>
+                            <a:srgbClr val="333333"/>
                           </a:solidFill>
                         </a:defRPr>
                       </a:pPr>
@@ -4805,7 +6782,7 @@
                   </a:txBody>
                   <a:tcPr>
                     <a:solidFill>
-                      <a:srgbClr val="F4F7F4"/>
+                      <a:srgbClr val="F9F7F2"/>
                     </a:solidFill>
                   </a:tcPr>
                 </a:tc>
@@ -4815,20 +6792,20 @@
                     <a:lstStyle/>
                     <a:p>
                       <a:pPr>
-                        <a:defRPr sz="1300">
+                        <a:defRPr sz="1000">
                           <a:solidFill>
-                            <a:srgbClr val="222222"/>
+                            <a:srgbClr val="333333"/>
                           </a:solidFill>
                         </a:defRPr>
                       </a:pPr>
                       <a:r>
-                        <a:t>日常 + 政策 + 文化</a:t>
+                        <a:t>日常+政策+文化</a:t>
                       </a:r>
                     </a:p>
                   </a:txBody>
                   <a:tcPr>
                     <a:solidFill>
-                      <a:srgbClr val="F4F7F4"/>
+                      <a:srgbClr val="F9F7F2"/>
                     </a:solidFill>
                   </a:tcPr>
                 </a:tc>
@@ -4838,34 +6815,34 @@
                     <a:lstStyle/>
                     <a:p>
                       <a:pPr>
-                        <a:defRPr sz="1300">
+                        <a:defRPr sz="1000">
                           <a:solidFill>
-                            <a:srgbClr val="222222"/>
+                            <a:srgbClr val="333333"/>
                           </a:solidFill>
                         </a:defRPr>
                       </a:pPr>
                       <a:r>
-                        <a:t>🥇足球精神 + 🥈兵味文化 + 🥉体育政策</a:t>
+                        <a:t>足球精神 + 兵味文化 + 体育政策</a:t>
                       </a:r>
                     </a:p>
                   </a:txBody>
                   <a:tcPr>
                     <a:solidFill>
-                      <a:srgbClr val="F4F7F4"/>
+                      <a:srgbClr val="F9F7F2"/>
                     </a:solidFill>
                   </a:tcPr>
                 </a:tc>
               </a:tr>
-              <a:tr h="718457">
+              <a:tr h="628650">
                 <a:tc>
                   <a:txBody>
                     <a:bodyPr/>
                     <a:lstStyle/>
                     <a:p>
                       <a:pPr>
-                        <a:defRPr sz="1300">
+                        <a:defRPr sz="1000">
                           <a:solidFill>
-                            <a:srgbClr val="222222"/>
+                            <a:srgbClr val="333333"/>
                           </a:solidFill>
                         </a:defRPr>
                       </a:pPr>
@@ -4882,9 +6859,9 @@
                     <a:lstStyle/>
                     <a:p>
                       <a:pPr>
-                        <a:defRPr sz="1300">
+                        <a:defRPr sz="1000">
                           <a:solidFill>
-                            <a:srgbClr val="222222"/>
+                            <a:srgbClr val="333333"/>
                           </a:solidFill>
                         </a:defRPr>
                       </a:pPr>
@@ -4901,9 +6878,9 @@
                     <a:lstStyle/>
                     <a:p>
                       <a:pPr>
-                        <a:defRPr sz="1300">
+                        <a:defRPr sz="1000">
                           <a:solidFill>
-                            <a:srgbClr val="222222"/>
+                            <a:srgbClr val="333333"/>
                           </a:solidFill>
                         </a:defRPr>
                       </a:pPr>
@@ -4915,16 +6892,16 @@
                   <a:tcPr/>
                 </a:tc>
               </a:tr>
-              <a:tr h="718457">
+              <a:tr h="628650">
                 <a:tc>
                   <a:txBody>
                     <a:bodyPr/>
                     <a:lstStyle/>
                     <a:p>
                       <a:pPr>
-                        <a:defRPr sz="1300">
+                        <a:defRPr sz="1000">
                           <a:solidFill>
-                            <a:srgbClr val="222222"/>
+                            <a:srgbClr val="333333"/>
                           </a:solidFill>
                         </a:defRPr>
                       </a:pPr>
@@ -4935,7 +6912,7 @@
                   </a:txBody>
                   <a:tcPr>
                     <a:solidFill>
-                      <a:srgbClr val="F4F7F4"/>
+                      <a:srgbClr val="F9F7F2"/>
                     </a:solidFill>
                   </a:tcPr>
                 </a:tc>
@@ -4945,9 +6922,9 @@
                     <a:lstStyle/>
                     <a:p>
                       <a:pPr>
-                        <a:defRPr sz="1300">
+                        <a:defRPr sz="1000">
                           <a:solidFill>
-                            <a:srgbClr val="222222"/>
+                            <a:srgbClr val="333333"/>
                           </a:solidFill>
                         </a:defRPr>
                       </a:pPr>
@@ -4958,7 +6935,7 @@
                   </a:txBody>
                   <a:tcPr>
                     <a:solidFill>
-                      <a:srgbClr val="F4F7F4"/>
+                      <a:srgbClr val="F9F7F2"/>
                     </a:solidFill>
                   </a:tcPr>
                 </a:tc>
@@ -4968,9 +6945,9 @@
                     <a:lstStyle/>
                     <a:p>
                       <a:pPr>
-                        <a:defRPr sz="1300">
+                        <a:defRPr sz="1000">
                           <a:solidFill>
-                            <a:srgbClr val="222222"/>
+                            <a:srgbClr val="333333"/>
                           </a:solidFill>
                         </a:defRPr>
                       </a:pPr>
@@ -4981,26 +6958,26 @@
                   </a:txBody>
                   <a:tcPr>
                     <a:solidFill>
-                      <a:srgbClr val="F4F7F4"/>
+                      <a:srgbClr val="F9F7F2"/>
                     </a:solidFill>
                   </a:tcPr>
                 </a:tc>
               </a:tr>
-              <a:tr h="718457">
+              <a:tr h="628650">
                 <a:tc>
                   <a:txBody>
                     <a:bodyPr/>
                     <a:lstStyle/>
                     <a:p>
                       <a:pPr>
-                        <a:defRPr sz="1300">
+                        <a:defRPr sz="1000">
                           <a:solidFill>
-                            <a:srgbClr val="222222"/>
+                            <a:srgbClr val="333333"/>
                           </a:solidFill>
                         </a:defRPr>
                       </a:pPr>
                       <a:r>
-                        <a:t>变现路径</a:t>
+                        <a:t>栏目化</a:t>
                       </a:r>
                     </a:p>
                   </a:txBody>
@@ -5012,14 +6989,14 @@
                     <a:lstStyle/>
                     <a:p>
                       <a:pPr>
-                        <a:defRPr sz="1300">
+                        <a:defRPr sz="1000">
                           <a:solidFill>
-                            <a:srgbClr val="222222"/>
+                            <a:srgbClr val="333333"/>
                           </a:solidFill>
                         </a:defRPr>
                       </a:pPr>
                       <a:r>
-                        <a:t>农产品带货</a:t>
+                        <a:t>3栏目，时长分散</a:t>
                       </a:r>
                     </a:p>
                   </a:txBody>
@@ -5031,41 +7008,41 @@
                     <a:lstStyle/>
                     <a:p>
                       <a:pPr>
-                        <a:defRPr sz="1300">
+                        <a:defRPr sz="1000">
                           <a:solidFill>
-                            <a:srgbClr val="222222"/>
+                            <a:srgbClr val="333333"/>
                           </a:solidFill>
                         </a:defRPr>
                       </a:pPr>
                       <a:r>
-                        <a:t>夏令营→赛事→研学→文旅，阶梯变现</a:t>
+                        <a:t>3栏目，每周固定节奏</a:t>
                       </a:r>
                     </a:p>
                   </a:txBody>
                   <a:tcPr/>
                 </a:tc>
               </a:tr>
-              <a:tr h="718458">
+              <a:tr h="628650">
                 <a:tc>
                   <a:txBody>
                     <a:bodyPr/>
                     <a:lstStyle/>
                     <a:p>
                       <a:pPr>
-                        <a:defRPr sz="1300">
+                        <a:defRPr sz="1000">
                           <a:solidFill>
-                            <a:srgbClr val="222222"/>
+                            <a:srgbClr val="333333"/>
                           </a:solidFill>
                         </a:defRPr>
                       </a:pPr>
                       <a:r>
-                        <a:t>对标策略</a:t>
+                        <a:t>变现路径</a:t>
                       </a:r>
                     </a:p>
                   </a:txBody>
                   <a:tcPr>
                     <a:solidFill>
-                      <a:srgbClr val="F4F7F4"/>
+                      <a:srgbClr val="F9F7F2"/>
                     </a:solidFill>
                   </a:tcPr>
                 </a:tc>
@@ -5075,20 +7052,20 @@
                     <a:lstStyle/>
                     <a:p>
                       <a:pPr>
-                        <a:defRPr sz="1300">
+                        <a:defRPr sz="1000">
                           <a:solidFill>
-                            <a:srgbClr val="222222"/>
+                            <a:srgbClr val="333333"/>
                           </a:solidFill>
                         </a:defRPr>
                       </a:pPr>
                       <a:r>
-                        <a:t>无对标分析</a:t>
+                        <a:t>农产品带货</a:t>
                       </a:r>
                     </a:p>
                   </a:txBody>
                   <a:tcPr>
                     <a:solidFill>
-                      <a:srgbClr val="F4F7F4"/>
+                      <a:srgbClr val="F9F7F2"/>
                     </a:solidFill>
                   </a:tcPr>
                 </a:tc>
@@ -5098,22 +7075,81 @@
                     <a:lstStyle/>
                     <a:p>
                       <a:pPr>
-                        <a:defRPr sz="1300">
+                        <a:defRPr sz="1000">
                           <a:solidFill>
-                            <a:srgbClr val="222222"/>
+                            <a:srgbClr val="333333"/>
                           </a:solidFill>
                         </a:defRPr>
                       </a:pPr>
                       <a:r>
-                        <a:t>4个对标号深度分析</a:t>
+                        <a:t>夏令营→赛事→研学→文旅</a:t>
                       </a:r>
                     </a:p>
                   </a:txBody>
                   <a:tcPr>
                     <a:solidFill>
-                      <a:srgbClr val="F4F7F4"/>
+                      <a:srgbClr val="F9F7F2"/>
                     </a:solidFill>
                   </a:tcPr>
+                </a:tc>
+              </a:tr>
+              <a:tr h="628650">
+                <a:tc>
+                  <a:txBody>
+                    <a:bodyPr/>
+                    <a:lstStyle/>
+                    <a:p>
+                      <a:pPr>
+                        <a:defRPr sz="1000">
+                          <a:solidFill>
+                            <a:srgbClr val="333333"/>
+                          </a:solidFill>
+                        </a:defRPr>
+                      </a:pPr>
+                      <a:r>
+                        <a:t>对标策略</a:t>
+                      </a:r>
+                    </a:p>
+                  </a:txBody>
+                  <a:tcPr/>
+                </a:tc>
+                <a:tc>
+                  <a:txBody>
+                    <a:bodyPr/>
+                    <a:lstStyle/>
+                    <a:p>
+                      <a:pPr>
+                        <a:defRPr sz="1000">
+                          <a:solidFill>
+                            <a:srgbClr val="333333"/>
+                          </a:solidFill>
+                        </a:defRPr>
+                      </a:pPr>
+                      <a:r>
+                        <a:t>无对标分析</a:t>
+                      </a:r>
+                    </a:p>
+                  </a:txBody>
+                  <a:tcPr/>
+                </a:tc>
+                <a:tc>
+                  <a:txBody>
+                    <a:bodyPr/>
+                    <a:lstStyle/>
+                    <a:p>
+                      <a:pPr>
+                        <a:defRPr sz="1000">
+                          <a:solidFill>
+                            <a:srgbClr val="333333"/>
+                          </a:solidFill>
+                        </a:defRPr>
+                      </a:pPr>
+                      <a:r>
+                        <a:t>4个对标号深度分析</a:t>
+                      </a:r>
+                    </a:p>
+                  </a:txBody>
+                  <a:tcPr/>
                 </a:tc>
               </a:tr>
             </a:tbl>
@@ -5146,8 +7182,8 @@
         </p:nvSpPr>
         <p:spPr>
           <a:xfrm>
-            <a:off x="457200" y="274320"/>
-            <a:ext cx="4572000" cy="731520"/>
+            <a:off x="457200" y="365760"/>
+            <a:ext cx="7315200" cy="640080"/>
           </a:xfrm>
           <a:prstGeom prst="rect">
             <a:avLst/>
@@ -5163,37 +7199,178 @@
             <a:pPr algn="l">
               <a:defRPr sz="3000" b="1">
                 <a:solidFill>
-                  <a:srgbClr val="1A5C2A"/>
-                </a:solidFill>
-              </a:defRPr>
-            </a:pPr>
-            <a:r>
-              <a:t>三条新栏目线</a:t>
-            </a:r>
-          </a:p>
-        </p:txBody>
-      </p:sp>
-      <p:sp>
-        <p:nvSpPr>
-          <p:cNvPr id="3" name="Rectangle 2"/>
+                  <a:srgbClr val="2D5016"/>
+                </a:solidFill>
+              </a:defRPr>
+            </a:pPr>
+            <a:r>
+              <a:t>01  三条新栏目线</a:t>
+            </a:r>
+          </a:p>
+        </p:txBody>
+      </p:sp>
+      <p:sp>
+        <p:nvSpPr>
+          <p:cNvPr id="3" name="Rounded Rectangle 2"/>
           <p:cNvSpPr/>
           <p:nvPr/>
         </p:nvSpPr>
         <p:spPr>
           <a:xfrm>
-            <a:off x="457200" y="1188720"/>
-            <a:ext cx="3474720" cy="5029200"/>
+            <a:off x="274320" y="1188720"/>
+            <a:ext cx="3657600" cy="5029200"/>
+          </a:xfrm>
+          <a:prstGeom prst="roundRect">
+            <a:avLst/>
+          </a:prstGeom>
+          <a:solidFill>
+            <a:srgbClr val="FFFFFF"/>
+          </a:solidFill>
+          <a:ln>
+            <a:noFill/>
+          </a:ln>
+          <a:effectLst/>
+        </p:spPr>
+        <p:style>
+          <a:lnRef idx="1">
+            <a:schemeClr val="accent1"/>
+          </a:lnRef>
+          <a:fillRef idx="3">
+            <a:schemeClr val="accent1"/>
+          </a:fillRef>
+          <a:effectRef idx="2">
+            <a:schemeClr val="accent1"/>
+          </a:effectRef>
+          <a:fontRef idx="minor">
+            <a:schemeClr val="lt1"/>
+          </a:fontRef>
+        </p:style>
+        <p:txBody>
+          <a:bodyPr rtlCol="0" anchor="ctr" wrap="square" lIns="177800" rIns="177800" tIns="177800"/>
+          <a:lstStyle/>
+          <a:p>
+            <a:pPr algn="ctr">
+              <a:spcAft>
+                <a:spcPts val="800"/>
+              </a:spcAft>
+              <a:defRPr sz="1400" b="1">
+                <a:solidFill>
+                  <a:srgbClr val="2D5016"/>
+                </a:solidFill>
+              </a:defRPr>
+            </a:pPr>
+            <a:r>
+              <a:t>冠军村的足球精神线 · 主力栏目</a:t>
+            </a:r>
+          </a:p>
+          <a:p>
+            <a:pPr>
+              <a:spcAft>
+                <a:spcPts val="200"/>
+              </a:spcAft>
+              <a:defRPr sz="1100">
+                <a:solidFill>
+                  <a:srgbClr val="666666"/>
+                </a:solidFill>
+              </a:defRPr>
+            </a:pPr>
+            <a:r>
+              <a:t>发布：每周二、四</a:t>
+            </a:r>
+          </a:p>
+          <a:p>
+            <a:pPr>
+              <a:spcAft>
+                <a:spcPts val="200"/>
+              </a:spcAft>
+              <a:defRPr sz="1100">
+                <a:solidFill>
+                  <a:srgbClr val="666666"/>
+                </a:solidFill>
+              </a:defRPr>
+            </a:pPr>
+            <a:r>
+              <a:t>训练日常 · 比赛纪实 · 球队故事 · 人物群像</a:t>
+            </a:r>
+          </a:p>
+          <a:p>
+            <a:pPr>
+              <a:spcAft>
+                <a:spcPts val="200"/>
+              </a:spcAft>
+              <a:defRPr sz="1100">
+                <a:solidFill>
+                  <a:srgbClr val="666666"/>
+                </a:solidFill>
+              </a:defRPr>
+            </a:pPr>
+          </a:p>
+          <a:p>
+            <a:pPr>
+              <a:spcAft>
+                <a:spcPts val="200"/>
+              </a:spcAft>
+              <a:defRPr sz="1100">
+                <a:solidFill>
+                  <a:srgbClr val="666666"/>
+                </a:solidFill>
+              </a:defRPr>
+            </a:pPr>
+            <a:r>
+              <a:t>目的：建立「冠军村」IP认知，积累情感粉丝</a:t>
+            </a:r>
+          </a:p>
+          <a:p>
+            <a:pPr>
+              <a:spcAft>
+                <a:spcPts val="200"/>
+              </a:spcAft>
+              <a:defRPr sz="1100">
+                <a:solidFill>
+                  <a:srgbClr val="666666"/>
+                </a:solidFill>
+              </a:defRPr>
+            </a:pPr>
+            <a:r>
+              <a:t>一句话：「屯军营，踢出来的冠军村」</a:t>
+            </a:r>
+          </a:p>
+          <a:p>
+            <a:pPr>
+              <a:spcAft>
+                <a:spcPts val="200"/>
+              </a:spcAft>
+              <a:defRPr sz="1100">
+                <a:solidFill>
+                  <a:srgbClr val="666666"/>
+                </a:solidFill>
+              </a:defRPr>
+            </a:pPr>
+            <a:r>
+              <a:t>视觉锤：王健一脚射门，球网抖动</a:t>
+            </a:r>
+          </a:p>
+        </p:txBody>
+      </p:sp>
+      <p:sp>
+        <p:nvSpPr>
+          <p:cNvPr id="4" name="Rectangle 3"/>
+          <p:cNvSpPr/>
+          <p:nvPr/>
+        </p:nvSpPr>
+        <p:spPr>
+          <a:xfrm>
+            <a:off x="274320" y="1188720"/>
+            <a:ext cx="3657600" cy="45720"/>
           </a:xfrm>
           <a:prstGeom prst="rect">
             <a:avLst/>
           </a:prstGeom>
           <a:solidFill>
-            <a:srgbClr val="F4F7F4"/>
+            <a:srgbClr val="2D5016"/>
           </a:solidFill>
-          <a:ln w="25400">
-            <a:solidFill>
-              <a:srgbClr val="1A5C2A"/>
-            </a:solidFill>
+          <a:ln>
+            <a:noFill/>
           </a:ln>
         </p:spPr>
         <p:style>
@@ -5211,80 +7388,175 @@
           </a:fontRef>
         </p:style>
         <p:txBody>
-          <a:bodyPr rtlCol="0" anchor="ctr" wrap="square" lIns="152400" rIns="152400" tIns="127000"/>
-          <a:lstStyle/>
-          <a:p>
-            <a:pPr algn="ctr">
-              <a:defRPr sz="1300" b="1">
-                <a:solidFill>
-                  <a:srgbClr val="1A5C2A"/>
-                </a:solidFill>
-              </a:defRPr>
-            </a:pPr>
-            <a:r>
-              <a:t>🥇 冠军村的足球精神线</a:t>
-            </a:r>
-          </a:p>
-          <a:p>
-            <a:pPr>
-              <a:spcBef>
-                <a:spcPts val="600"/>
-              </a:spcBef>
-              <a:defRPr sz="1100">
-                <a:solidFill>
-                  <a:srgbClr val="666666"/>
-                </a:solidFill>
-              </a:defRPr>
-            </a:pPr>
-            <a:r>
-              <a:t>每周二、四发布</a:t>
-            </a:r>
-            <a:br/>
-            <a:r>
-              <a:t>主力栏目</a:t>
-            </a:r>
-            <a:br/>
-            <a:br/>
-            <a:r>
-              <a:t>训练日常 · 比赛纪实</a:t>
-            </a:r>
-            <a:br/>
-            <a:r>
-              <a:t>球队故事 · 人物群像</a:t>
-            </a:r>
-            <a:br/>
-            <a:br/>
-            <a:r>
-              <a:t>目的：建立「冠军村」IP认知</a:t>
-            </a:r>
-            <a:br/>
-            <a:r>
-              <a:t>积累情感粉丝</a:t>
-            </a:r>
-          </a:p>
-        </p:txBody>
-      </p:sp>
-      <p:sp>
-        <p:nvSpPr>
-          <p:cNvPr id="4" name="Rectangle 3"/>
+          <a:bodyPr rtlCol="0" anchor="ctr"/>
+          <a:lstStyle/>
+          <a:p>
+            <a:pPr algn="ctr"/>
+          </a:p>
+        </p:txBody>
+      </p:sp>
+      <p:sp>
+        <p:nvSpPr>
+          <p:cNvPr id="5" name="Rounded Rectangle 4"/>
           <p:cNvSpPr/>
           <p:nvPr/>
         </p:nvSpPr>
         <p:spPr>
           <a:xfrm>
-            <a:off x="4297680" y="1188720"/>
-            <a:ext cx="3474720" cy="5029200"/>
+            <a:off x="4206240" y="1188720"/>
+            <a:ext cx="3657600" cy="5029200"/>
+          </a:xfrm>
+          <a:prstGeom prst="roundRect">
+            <a:avLst/>
+          </a:prstGeom>
+          <a:solidFill>
+            <a:srgbClr val="FFFFFF"/>
+          </a:solidFill>
+          <a:ln>
+            <a:noFill/>
+          </a:ln>
+          <a:effectLst/>
+        </p:spPr>
+        <p:style>
+          <a:lnRef idx="1">
+            <a:schemeClr val="accent1"/>
+          </a:lnRef>
+          <a:fillRef idx="3">
+            <a:schemeClr val="accent1"/>
+          </a:fillRef>
+          <a:effectRef idx="2">
+            <a:schemeClr val="accent1"/>
+          </a:effectRef>
+          <a:fontRef idx="minor">
+            <a:schemeClr val="lt1"/>
+          </a:fontRef>
+        </p:style>
+        <p:txBody>
+          <a:bodyPr rtlCol="0" anchor="ctr" wrap="square" lIns="177800" rIns="177800" tIns="177800"/>
+          <a:lstStyle/>
+          <a:p>
+            <a:pPr algn="ctr">
+              <a:spcAft>
+                <a:spcPts val="800"/>
+              </a:spcAft>
+              <a:defRPr sz="1400" b="1">
+                <a:solidFill>
+                  <a:srgbClr val="2D5016"/>
+                </a:solidFill>
+              </a:defRPr>
+            </a:pPr>
+            <a:r>
+              <a:t>屯军营兵味文化线</a:t>
+            </a:r>
+          </a:p>
+          <a:p>
+            <a:pPr>
+              <a:spcAft>
+                <a:spcPts val="200"/>
+              </a:spcAft>
+              <a:defRPr sz="1100">
+                <a:solidFill>
+                  <a:srgbClr val="666666"/>
+                </a:solidFill>
+              </a:defRPr>
+            </a:pPr>
+            <a:r>
+              <a:t>发布：每周四、六</a:t>
+            </a:r>
+          </a:p>
+          <a:p>
+            <a:pPr>
+              <a:spcAft>
+                <a:spcPts val="200"/>
+              </a:spcAft>
+              <a:defRPr sz="1100">
+                <a:solidFill>
+                  <a:srgbClr val="666666"/>
+                </a:solidFill>
+              </a:defRPr>
+            </a:pPr>
+            <a:r>
+              <a:t>军屯历史 · 老兵故事 · 古今对话 · 乡村规矩</a:t>
+            </a:r>
+          </a:p>
+          <a:p>
+            <a:pPr>
+              <a:spcAft>
+                <a:spcPts val="200"/>
+              </a:spcAft>
+              <a:defRPr sz="1100">
+                <a:solidFill>
+                  <a:srgbClr val="666666"/>
+                </a:solidFill>
+              </a:defRPr>
+            </a:pPr>
+          </a:p>
+          <a:p>
+            <a:pPr>
+              <a:spcAft>
+                <a:spcPts val="200"/>
+              </a:spcAft>
+              <a:defRPr sz="1100">
+                <a:solidFill>
+                  <a:srgbClr val="666666"/>
+                </a:solidFill>
+              </a:defRPr>
+            </a:pPr>
+            <a:r>
+              <a:t>目的：赋予足球文化厚度，强化壁垒</a:t>
+            </a:r>
+          </a:p>
+          <a:p>
+            <a:pPr>
+              <a:spcAft>
+                <a:spcPts val="200"/>
+              </a:spcAft>
+              <a:defRPr sz="1100">
+                <a:solidFill>
+                  <a:srgbClr val="666666"/>
+                </a:solidFill>
+              </a:defRPr>
+            </a:pPr>
+            <a:r>
+              <a:t>一句话：「500年前练兵场，今天冠军村」</a:t>
+            </a:r>
+          </a:p>
+          <a:p>
+            <a:pPr>
+              <a:spcAft>
+                <a:spcPts val="200"/>
+              </a:spcAft>
+              <a:defRPr sz="1100">
+                <a:solidFill>
+                  <a:srgbClr val="666666"/>
+                </a:solidFill>
+              </a:defRPr>
+            </a:pPr>
+            <a:r>
+              <a:t>视觉锤：长城+球场同框</a:t>
+            </a:r>
+          </a:p>
+        </p:txBody>
+      </p:sp>
+      <p:sp>
+        <p:nvSpPr>
+          <p:cNvPr id="6" name="Rectangle 5"/>
+          <p:cNvSpPr/>
+          <p:nvPr/>
+        </p:nvSpPr>
+        <p:spPr>
+          <a:xfrm>
+            <a:off x="4206240" y="1188720"/>
+            <a:ext cx="3657600" cy="45720"/>
           </a:xfrm>
           <a:prstGeom prst="rect">
             <a:avLst/>
           </a:prstGeom>
           <a:solidFill>
-            <a:srgbClr val="FFF8E1"/>
+            <a:srgbClr val="D4A017"/>
           </a:solidFill>
-          <a:ln w="25400">
-            <a:solidFill>
-              <a:srgbClr val="E8A817"/>
-            </a:solidFill>
+          <a:ln>
+            <a:noFill/>
           </a:ln>
         </p:spPr>
         <p:style>
@@ -5302,76 +7574,175 @@
           </a:fontRef>
         </p:style>
         <p:txBody>
-          <a:bodyPr rtlCol="0" anchor="ctr" wrap="square" lIns="152400" rIns="152400" tIns="127000"/>
-          <a:lstStyle/>
-          <a:p>
-            <a:pPr algn="ctr">
-              <a:defRPr sz="1300" b="1">
-                <a:solidFill>
-                  <a:srgbClr val="1A5C2A"/>
-                </a:solidFill>
-              </a:defRPr>
-            </a:pPr>
-            <a:r>
-              <a:t>🥈 屯军营兵味文化线</a:t>
-            </a:r>
-          </a:p>
-          <a:p>
-            <a:pPr>
-              <a:spcBef>
-                <a:spcPts val="600"/>
-              </a:spcBef>
-              <a:defRPr sz="1100">
-                <a:solidFill>
-                  <a:srgbClr val="666666"/>
-                </a:solidFill>
-              </a:defRPr>
-            </a:pPr>
-            <a:r>
-              <a:t>每周四、六发布</a:t>
-            </a:r>
-            <a:br/>
-            <a:br/>
-            <a:r>
-              <a:t>军屯历史 · 老兵故事</a:t>
-            </a:r>
-            <a:br/>
-            <a:r>
-              <a:t>古今对话 · 乡村规矩</a:t>
-            </a:r>
-            <a:br/>
-            <a:br/>
-            <a:r>
-              <a:t>目的：赋予足球文化厚度</a:t>
-            </a:r>
-            <a:br/>
-            <a:r>
-              <a:t>强化独特性，其他村学不来</a:t>
-            </a:r>
-          </a:p>
-        </p:txBody>
-      </p:sp>
-      <p:sp>
-        <p:nvSpPr>
-          <p:cNvPr id="5" name="Rectangle 4"/>
+          <a:bodyPr rtlCol="0" anchor="ctr"/>
+          <a:lstStyle/>
+          <a:p>
+            <a:pPr algn="ctr"/>
+          </a:p>
+        </p:txBody>
+      </p:sp>
+      <p:sp>
+        <p:nvSpPr>
+          <p:cNvPr id="7" name="Rounded Rectangle 6"/>
           <p:cNvSpPr/>
           <p:nvPr/>
         </p:nvSpPr>
         <p:spPr>
           <a:xfrm>
             <a:off x="8138160" y="1188720"/>
-            <a:ext cx="3474720" cy="5029200"/>
+            <a:ext cx="3657600" cy="5029200"/>
+          </a:xfrm>
+          <a:prstGeom prst="roundRect">
+            <a:avLst/>
+          </a:prstGeom>
+          <a:solidFill>
+            <a:srgbClr val="FFFFFF"/>
+          </a:solidFill>
+          <a:ln>
+            <a:noFill/>
+          </a:ln>
+          <a:effectLst/>
+        </p:spPr>
+        <p:style>
+          <a:lnRef idx="1">
+            <a:schemeClr val="accent1"/>
+          </a:lnRef>
+          <a:fillRef idx="3">
+            <a:schemeClr val="accent1"/>
+          </a:fillRef>
+          <a:effectRef idx="2">
+            <a:schemeClr val="accent1"/>
+          </a:effectRef>
+          <a:fontRef idx="minor">
+            <a:schemeClr val="lt1"/>
+          </a:fontRef>
+        </p:style>
+        <p:txBody>
+          <a:bodyPr rtlCol="0" anchor="ctr" wrap="square" lIns="177800" rIns="177800" tIns="177800"/>
+          <a:lstStyle/>
+          <a:p>
+            <a:pPr algn="ctr">
+              <a:spcAft>
+                <a:spcPts val="800"/>
+              </a:spcAft>
+              <a:defRPr sz="1400" b="1">
+                <a:solidFill>
+                  <a:srgbClr val="2D5016"/>
+                </a:solidFill>
+              </a:defRPr>
+            </a:pPr>
+            <a:r>
+              <a:t>体育政策白话解读</a:t>
+            </a:r>
+          </a:p>
+          <a:p>
+            <a:pPr>
+              <a:spcAft>
+                <a:spcPts val="200"/>
+              </a:spcAft>
+              <a:defRPr sz="1100">
+                <a:solidFill>
+                  <a:srgbClr val="666666"/>
+                </a:solidFill>
+              </a:defRPr>
+            </a:pPr>
+            <a:r>
+              <a:t>发布：每周六、一</a:t>
+            </a:r>
+          </a:p>
+          <a:p>
+            <a:pPr>
+              <a:spcAft>
+                <a:spcPts val="200"/>
+              </a:spcAft>
+              <a:defRPr sz="1100">
+                <a:solidFill>
+                  <a:srgbClr val="666666"/>
+                </a:solidFill>
+              </a:defRPr>
+            </a:pPr>
+            <a:r>
+              <a:t>运动健康 · 升学政策 · 场地申请 · 赛事安全</a:t>
+            </a:r>
+          </a:p>
+          <a:p>
+            <a:pPr>
+              <a:spcAft>
+                <a:spcPts val="200"/>
+              </a:spcAft>
+              <a:defRPr sz="1100">
+                <a:solidFill>
+                  <a:srgbClr val="666666"/>
+                </a:solidFill>
+              </a:defRPr>
+            </a:pPr>
+          </a:p>
+          <a:p>
+            <a:pPr>
+              <a:spcAft>
+                <a:spcPts val="200"/>
+              </a:spcAft>
+              <a:defRPr sz="1100">
+                <a:solidFill>
+                  <a:srgbClr val="666666"/>
+                </a:solidFill>
+              </a:defRPr>
+            </a:pPr>
+            <a:r>
+              <a:t>目的：实用价值+涨粉，建立专业信任</a:t>
+            </a:r>
+          </a:p>
+          <a:p>
+            <a:pPr>
+              <a:spcAft>
+                <a:spcPts val="200"/>
+              </a:spcAft>
+              <a:defRPr sz="1100">
+                <a:solidFill>
+                  <a:srgbClr val="666666"/>
+                </a:solidFill>
+              </a:defRPr>
+            </a:pPr>
+            <a:r>
+              <a:t>一句话：「政策看不懂？王支书说给你听」</a:t>
+            </a:r>
+          </a:p>
+          <a:p>
+            <a:pPr>
+              <a:spcAft>
+                <a:spcPts val="200"/>
+              </a:spcAft>
+              <a:defRPr sz="1100">
+                <a:solidFill>
+                  <a:srgbClr val="666666"/>
+                </a:solidFill>
+              </a:defRPr>
+            </a:pPr>
+            <a:r>
+              <a:t>视觉锤：王健掰手指+字幕弹出</a:t>
+            </a:r>
+          </a:p>
+        </p:txBody>
+      </p:sp>
+      <p:sp>
+        <p:nvSpPr>
+          <p:cNvPr id="8" name="Rectangle 7"/>
+          <p:cNvSpPr/>
+          <p:nvPr/>
+        </p:nvSpPr>
+        <p:spPr>
+          <a:xfrm>
+            <a:off x="8138160" y="1188720"/>
+            <a:ext cx="3657600" cy="45720"/>
           </a:xfrm>
           <a:prstGeom prst="rect">
             <a:avLst/>
           </a:prstGeom>
           <a:solidFill>
-            <a:srgbClr val="F4F7F4"/>
+            <a:srgbClr val="2D5016"/>
           </a:solidFill>
-          <a:ln w="25400">
-            <a:solidFill>
-              <a:srgbClr val="1A5C2A"/>
-            </a:solidFill>
+          <a:ln>
+            <a:noFill/>
           </a:ln>
         </p:spPr>
         <p:style>
@@ -5389,52 +7760,10 @@
           </a:fontRef>
         </p:style>
         <p:txBody>
-          <a:bodyPr rtlCol="0" anchor="ctr" wrap="square" lIns="152400" rIns="152400" tIns="127000"/>
-          <a:lstStyle/>
-          <a:p>
-            <a:pPr algn="ctr">
-              <a:defRPr sz="1300" b="1">
-                <a:solidFill>
-                  <a:srgbClr val="1A5C2A"/>
-                </a:solidFill>
-              </a:defRPr>
-            </a:pPr>
-            <a:r>
-              <a:t>🥉 体育政策白话解读</a:t>
-            </a:r>
-          </a:p>
-          <a:p>
-            <a:pPr>
-              <a:spcBef>
-                <a:spcPts val="600"/>
-              </a:spcBef>
-              <a:defRPr sz="1100">
-                <a:solidFill>
-                  <a:srgbClr val="666666"/>
-                </a:solidFill>
-              </a:defRPr>
-            </a:pPr>
-            <a:r>
-              <a:t>每周六、一发布</a:t>
-            </a:r>
-            <a:br/>
-            <a:br/>
-            <a:r>
-              <a:t>运动健康 · 升学政策</a:t>
-            </a:r>
-            <a:br/>
-            <a:r>
-              <a:t>场地申请 · 赛事安全</a:t>
-            </a:r>
-            <a:br/>
-            <a:br/>
-            <a:r>
-              <a:t>目的：实用价值+涨粉</a:t>
-            </a:r>
-            <a:br/>
-            <a:r>
-              <a:t>建立体育专业信任</a:t>
-            </a:r>
+          <a:bodyPr rtlCol="0" anchor="ctr"/>
+          <a:lstStyle/>
+          <a:p>
+            <a:pPr algn="ctr"/>
           </a:p>
         </p:txBody>
       </p:sp>
@@ -5452,7 +7781,7 @@
     <p:bg>
       <p:bgPr>
         <a:solidFill>
-          <a:srgbClr val="0F1F0F"/>
+          <a:srgbClr val="2D5016"/>
         </a:solidFill>
         <a:effectLst/>
       </p:bgPr>
@@ -5472,8 +7801,8 @@
         </p:nvSpPr>
         <p:spPr>
           <a:xfrm>
-            <a:off x="457200" y="274320"/>
-            <a:ext cx="4572000" cy="731520"/>
+            <a:off x="457200" y="2743200"/>
+            <a:ext cx="10972800" cy="1371600"/>
           </a:xfrm>
           <a:prstGeom prst="rect">
             <a:avLst/>
@@ -5486,15 +7815,103 @@
           </a:bodyPr>
           <a:lstStyle/>
           <a:p>
+            <a:pPr algn="ctr">
+              <a:defRPr sz="8000" b="1">
+                <a:solidFill>
+                  <a:srgbClr val="FFFFFF"/>
+                </a:solidFill>
+              </a:defRPr>
+            </a:pPr>
+            <a:r>
+              <a:t>02</a:t>
+            </a:r>
+          </a:p>
+        </p:txBody>
+      </p:sp>
+      <p:sp>
+        <p:nvSpPr>
+          <p:cNvPr id="3" name="TextBox 2"/>
+          <p:cNvSpPr txBox="1"/>
+          <p:nvPr/>
+        </p:nvSpPr>
+        <p:spPr>
+          <a:xfrm>
+            <a:off x="457200" y="4572000"/>
+            <a:ext cx="10972800" cy="731520"/>
+          </a:xfrm>
+          <a:prstGeom prst="rect">
+            <a:avLst/>
+          </a:prstGeom>
+          <a:noFill/>
+        </p:spPr>
+        <p:txBody>
+          <a:bodyPr wrap="square">
+            <a:spAutoFit/>
+          </a:bodyPr>
+          <a:lstStyle/>
+          <a:p>
+            <a:pPr algn="ctr">
+              <a:defRPr sz="2400" b="0">
+                <a:solidFill>
+                  <a:srgbClr val="D4A017"/>
+                </a:solidFill>
+              </a:defRPr>
+            </a:pPr>
+            <a:r>
+              <a:t>对标分析：四个村支书账号 × 盈利逻辑</a:t>
+            </a:r>
+          </a:p>
+        </p:txBody>
+      </p:sp>
+    </p:spTree>
+  </p:cSld>
+  <p:clrMapOvr>
+    <a:masterClrMapping/>
+  </p:clrMapOvr>
+</p:sld>
+</file>
+
+<file path=ppt/slides/slide6.xml><?xml version="1.0" encoding="utf-8"?>
+<p:sld xmlns:a="http://schemas.openxmlformats.org/drawingml/2006/main" xmlns:p="http://schemas.openxmlformats.org/presentationml/2006/main" xmlns:r="http://schemas.openxmlformats.org/officeDocument/2006/relationships">
+  <p:cSld>
+    <p:spTree>
+      <p:nvGrpSpPr>
+        <p:cNvPr id="1" name=""/>
+        <p:cNvGrpSpPr/>
+        <p:nvPr/>
+      </p:nvGrpSpPr>
+      <p:grpSpPr/>
+      <p:sp>
+        <p:nvSpPr>
+          <p:cNvPr id="2" name="TextBox 1"/>
+          <p:cNvSpPr txBox="1"/>
+          <p:nvPr/>
+        </p:nvSpPr>
+        <p:spPr>
+          <a:xfrm>
+            <a:off x="457200" y="365760"/>
+            <a:ext cx="7315200" cy="640080"/>
+          </a:xfrm>
+          <a:prstGeom prst="rect">
+            <a:avLst/>
+          </a:prstGeom>
+          <a:noFill/>
+        </p:spPr>
+        <p:txBody>
+          <a:bodyPr wrap="square">
+            <a:spAutoFit/>
+          </a:bodyPr>
+          <a:lstStyle/>
+          <a:p>
             <a:pPr algn="l">
-              <a:defRPr sz="3600" b="1">
-                <a:solidFill>
-                  <a:srgbClr val="E8A817"/>
-                </a:solidFill>
-              </a:defRPr>
-            </a:pPr>
-            <a:r>
-              <a:t>02  对标分析</a:t>
+              <a:defRPr sz="3000" b="1">
+                <a:solidFill>
+                  <a:srgbClr val="2D5016"/>
+                </a:solidFill>
+              </a:defRPr>
+            </a:pPr>
+            <a:r>
+              <a:t>02  四个核心对标账号</a:t>
             </a:r>
           </a:p>
         </p:txBody>
@@ -5508,8 +7925,8 @@
           <p:nvPr/>
         </p:nvGraphicFramePr>
         <p:xfrm>
-          <a:off x="274320" y="1280160"/>
-          <a:ext cx="11612880" cy="3657600"/>
+          <a:off x="274320" y="1188720"/>
+          <a:ext cx="11612880" cy="3200400"/>
         </p:xfrm>
         <a:graphic>
           <a:graphicData uri="http://schemas.openxmlformats.org/drawingml/2006/table">
@@ -5518,13 +7935,13 @@
                 <a:tableStyleId>{5C22544A-7EE6-4342-B048-85BDC9FD1C3A}</a:tableStyleId>
               </a:tblPr>
               <a:tblGrid>
-                <a:gridCol w="2011680"/>
+                <a:gridCol w="2194560"/>
                 <a:gridCol w="1828800"/>
                 <a:gridCol w="1828800"/>
+                <a:gridCol w="2743200"/>
                 <a:gridCol w="3017520"/>
-                <a:gridCol w="2926080"/>
               </a:tblGrid>
-              <a:tr h="609600">
+              <a:tr h="640080">
                 <a:tc>
                   <a:txBody>
                     <a:bodyPr/>
@@ -5544,7 +7961,7 @@
                   </a:txBody>
                   <a:tcPr>
                     <a:solidFill>
-                      <a:srgbClr val="1A5C2A"/>
+                      <a:srgbClr val="2D5016"/>
                     </a:solidFill>
                   </a:tcPr>
                 </a:tc>
@@ -5567,7 +7984,7 @@
                   </a:txBody>
                   <a:tcPr>
                     <a:solidFill>
-                      <a:srgbClr val="1A5C2A"/>
+                      <a:srgbClr val="2D5016"/>
                     </a:solidFill>
                   </a:tcPr>
                 </a:tc>
@@ -5590,7 +8007,7 @@
                   </a:txBody>
                   <a:tcPr>
                     <a:solidFill>
-                      <a:srgbClr val="1A5C2A"/>
+                      <a:srgbClr val="2D5016"/>
                     </a:solidFill>
                   </a:tcPr>
                 </a:tc>
@@ -5613,7 +8030,7 @@
                   </a:txBody>
                   <a:tcPr>
                     <a:solidFill>
-                      <a:srgbClr val="1A5C2A"/>
+                      <a:srgbClr val="2D5016"/>
                     </a:solidFill>
                   </a:tcPr>
                 </a:tc>
@@ -5636,32 +8053,137 @@
                   </a:txBody>
                   <a:tcPr>
                     <a:solidFill>
-                      <a:srgbClr val="1A5C2A"/>
+                      <a:srgbClr val="2D5016"/>
                     </a:solidFill>
                   </a:tcPr>
                 </a:tc>
               </a:tr>
-              <a:tr h="609600">
+              <a:tr h="640080">
                 <a:tc>
                   <a:txBody>
                     <a:bodyPr/>
                     <a:lstStyle/>
                     <a:p>
                       <a:pPr>
-                        <a:defRPr sz="1100">
+                        <a:defRPr sz="1000">
                           <a:solidFill>
-                            <a:srgbClr val="CCCCCC"/>
+                            <a:srgbClr val="333333"/>
                           </a:solidFill>
                         </a:defRPr>
                       </a:pPr>
                       <a:r>
-                        <a:t>烟消云</a:t>
+                        <a:t>烟消云（驻村书记）</a:t>
+                      </a:r>
+                    </a:p>
+                  </a:txBody>
+                  <a:tcPr/>
+                </a:tc>
+                <a:tc>
+                  <a:txBody>
+                    <a:bodyPr/>
+                    <a:lstStyle/>
+                    <a:p>
+                      <a:pPr>
+                        <a:defRPr sz="1000">
+                          <a:solidFill>
+                            <a:srgbClr val="333333"/>
+                          </a:solidFill>
+                        </a:defRPr>
+                      </a:pPr>
+                      <a:r>
+                        <a:t>个人故事+带货</a:t>
+                      </a:r>
+                    </a:p>
+                  </a:txBody>
+                  <a:tcPr/>
+                </a:tc>
+                <a:tc>
+                  <a:txBody>
+                    <a:bodyPr/>
+                    <a:lstStyle/>
+                    <a:p>
+                      <a:pPr>
+                        <a:defRPr sz="1000">
+                          <a:solidFill>
+                            <a:srgbClr val="333333"/>
+                          </a:solidFill>
+                        </a:defRPr>
+                      </a:pPr>
+                      <a:r>
+                        <a:t>791作品·6865万赞</a:t>
+                      </a:r>
+                    </a:p>
+                  </a:txBody>
+                  <a:tcPr/>
+                </a:tc>
+                <a:tc>
+                  <a:txBody>
+                    <a:bodyPr/>
+                    <a:lstStyle/>
+                    <a:p>
+                      <a:pPr>
+                        <a:defRPr sz="1000">
+                          <a:solidFill>
+                            <a:srgbClr val="333333"/>
+                          </a:solidFill>
+                        </a:defRPr>
+                      </a:pPr>
+                      <a:r>
+                        <a:t>农产品橱窗带货</a:t>
+                      </a:r>
+                      <a:br/>
+                      <a:r>
+                        <a:t>个人IP商务合作</a:t>
+                      </a:r>
+                    </a:p>
+                  </a:txBody>
+                  <a:tcPr/>
+                </a:tc>
+                <a:tc>
+                  <a:txBody>
+                    <a:bodyPr/>
+                    <a:lstStyle/>
+                    <a:p>
+                      <a:pPr>
+                        <a:defRPr sz="1000">
+                          <a:solidFill>
+                            <a:srgbClr val="333333"/>
+                          </a:solidFill>
+                        </a:defRPr>
+                      </a:pPr>
+                      <a:r>
+                        <a:t>军旅背景=信任</a:t>
+                      </a:r>
+                      <a:br/>
+                      <a:r>
+                        <a:t>日更高频=算法优势</a:t>
+                      </a:r>
+                    </a:p>
+                  </a:txBody>
+                  <a:tcPr/>
+                </a:tc>
+              </a:tr>
+              <a:tr h="640080">
+                <a:tc>
+                  <a:txBody>
+                    <a:bodyPr/>
+                    <a:lstStyle/>
+                    <a:p>
+                      <a:pPr>
+                        <a:defRPr sz="1000">
+                          <a:solidFill>
+                            <a:srgbClr val="333333"/>
+                          </a:solidFill>
+                        </a:defRPr>
+                      </a:pPr>
+                      <a:r>
+                        <a:t>点亮乡村-范文栋</a:t>
                       </a:r>
                     </a:p>
                   </a:txBody>
                   <a:tcPr>
                     <a:solidFill>
-                      <a:srgbClr val="1A1A1A"/>
+                      <a:srgbClr val="F9F7F2"/>
                     </a:solidFill>
                   </a:tcPr>
                 </a:tc>
@@ -5671,20 +8193,20 @@
                     <a:lstStyle/>
                     <a:p>
                       <a:pPr>
-                        <a:defRPr sz="1100">
+                        <a:defRPr sz="1000">
                           <a:solidFill>
-                            <a:srgbClr val="CCCCCC"/>
+                            <a:srgbClr val="333333"/>
                           </a:solidFill>
                         </a:defRPr>
                       </a:pPr>
                       <a:r>
-                        <a:t>个人故事+带货</a:t>
+                        <a:t>基建+直播</a:t>
                       </a:r>
                     </a:p>
                   </a:txBody>
                   <a:tcPr>
                     <a:solidFill>
-                      <a:srgbClr val="1A1A1A"/>
+                      <a:srgbClr val="F9F7F2"/>
                     </a:solidFill>
                   </a:tcPr>
                 </a:tc>
@@ -5694,24 +8216,20 @@
                     <a:lstStyle/>
                     <a:p>
                       <a:pPr>
-                        <a:defRPr sz="1100">
+                        <a:defRPr sz="1000">
                           <a:solidFill>
-                            <a:srgbClr val="CCCCCC"/>
+                            <a:srgbClr val="333333"/>
                           </a:solidFill>
                         </a:defRPr>
                       </a:pPr>
                       <a:r>
-                        <a:t>791作品</a:t>
-                      </a:r>
-                      <a:br/>
-                      <a:r>
-                        <a:t>6865万赞</a:t>
+                        <a:t>72作品·244万赞</a:t>
                       </a:r>
                     </a:p>
                   </a:txBody>
                   <a:tcPr>
                     <a:solidFill>
-                      <a:srgbClr val="1A1A1A"/>
+                      <a:srgbClr val="F9F7F2"/>
                     </a:solidFill>
                   </a:tcPr>
                 </a:tc>
@@ -5721,24 +8239,24 @@
                     <a:lstStyle/>
                     <a:p>
                       <a:pPr>
-                        <a:defRPr sz="1100">
+                        <a:defRPr sz="1000">
                           <a:solidFill>
-                            <a:srgbClr val="CCCCCC"/>
+                            <a:srgbClr val="333333"/>
                           </a:solidFill>
                         </a:defRPr>
                       </a:pPr>
                       <a:r>
-                        <a:t>农产品橱窗带货</a:t>
+                        <a:t>直播助农打赏</a:t>
                       </a:r>
                       <a:br/>
                       <a:r>
-                        <a:t>个人IP商务合作</a:t>
+                        <a:t>政府项目合作</a:t>
                       </a:r>
                     </a:p>
                   </a:txBody>
                   <a:tcPr>
                     <a:solidFill>
-                      <a:srgbClr val="1A1A1A"/>
+                      <a:srgbClr val="F9F7F2"/>
                     </a:solidFill>
                   </a:tcPr>
                 </a:tc>
@@ -5748,49 +8266,154 @@
                     <a:lstStyle/>
                     <a:p>
                       <a:pPr>
-                        <a:defRPr sz="1100">
+                        <a:defRPr sz="1000">
                           <a:solidFill>
-                            <a:srgbClr val="CCCCCC"/>
+                            <a:srgbClr val="333333"/>
                           </a:solidFill>
                         </a:defRPr>
                       </a:pPr>
                       <a:r>
-                        <a:t>军旅背景=信任背书</a:t>
+                        <a:t>「安路灯」=IP符号</a:t>
                       </a:r>
                       <a:br/>
                       <a:r>
-                        <a:t>日更高频=算法优势</a:t>
+                        <a:t>极简定位=极强记忆</a:t>
                       </a:r>
                     </a:p>
                   </a:txBody>
                   <a:tcPr>
                     <a:solidFill>
-                      <a:srgbClr val="1A1A1A"/>
+                      <a:srgbClr val="F9F7F2"/>
                     </a:solidFill>
                   </a:tcPr>
                 </a:tc>
               </a:tr>
-              <a:tr h="609600">
+              <a:tr h="640080">
                 <a:tc>
                   <a:txBody>
                     <a:bodyPr/>
                     <a:lstStyle/>
                     <a:p>
                       <a:pPr>
-                        <a:defRPr sz="1100">
+                        <a:defRPr sz="1000">
                           <a:solidFill>
-                            <a:srgbClr val="CCCCCC"/>
+                            <a:srgbClr val="333333"/>
                           </a:solidFill>
                         </a:defRPr>
                       </a:pPr>
                       <a:r>
-                        <a:t>范文栋</a:t>
+                        <a:t>小江支书</a:t>
+                      </a:r>
+                    </a:p>
+                  </a:txBody>
+                  <a:tcPr/>
+                </a:tc>
+                <a:tc>
+                  <a:txBody>
+                    <a:bodyPr/>
+                    <a:lstStyle/>
+                    <a:p>
+                      <a:pPr>
+                        <a:defRPr sz="1000">
+                          <a:solidFill>
+                            <a:srgbClr val="333333"/>
+                          </a:solidFill>
+                        </a:defRPr>
+                      </a:pPr>
+                      <a:r>
+                        <a:t>正能量+文化</a:t>
+                      </a:r>
+                    </a:p>
+                  </a:txBody>
+                  <a:tcPr/>
+                </a:tc>
+                <a:tc>
+                  <a:txBody>
+                    <a:bodyPr/>
+                    <a:lstStyle/>
+                    <a:p>
+                      <a:pPr>
+                        <a:defRPr sz="1000">
+                          <a:solidFill>
+                            <a:srgbClr val="333333"/>
+                          </a:solidFill>
+                        </a:defRPr>
+                      </a:pPr>
+                      <a:r>
+                        <a:t>34作品·77万赞</a:t>
+                      </a:r>
+                    </a:p>
+                  </a:txBody>
+                  <a:tcPr/>
+                </a:tc>
+                <a:tc>
+                  <a:txBody>
+                    <a:bodyPr/>
+                    <a:lstStyle/>
+                    <a:p>
+                      <a:pPr>
+                        <a:defRPr sz="1000">
+                          <a:solidFill>
+                            <a:srgbClr val="333333"/>
+                          </a:solidFill>
+                        </a:defRPr>
+                      </a:pPr>
+                      <a:r>
+                        <a:t>少而精人设沉淀</a:t>
+                      </a:r>
+                      <a:br/>
+                      <a:r>
+                        <a:t>长期信任变现</a:t>
+                      </a:r>
+                    </a:p>
+                  </a:txBody>
+                  <a:tcPr/>
+                </a:tc>
+                <a:tc>
+                  <a:txBody>
+                    <a:bodyPr/>
+                    <a:lstStyle/>
+                    <a:p>
+                      <a:pPr>
+                        <a:defRPr sz="1000">
+                          <a:solidFill>
+                            <a:srgbClr val="333333"/>
+                          </a:solidFill>
+                        </a:defRPr>
+                      </a:pPr>
+                      <a:r>
+                        <a:t>34条=高粘性</a:t>
+                      </a:r>
+                      <a:br/>
+                      <a:r>
+                        <a:t>质量 &gt; 数量</a:t>
+                      </a:r>
+                    </a:p>
+                  </a:txBody>
+                  <a:tcPr/>
+                </a:tc>
+              </a:tr>
+              <a:tr h="640080">
+                <a:tc>
+                  <a:txBody>
+                    <a:bodyPr/>
+                    <a:lstStyle/>
+                    <a:p>
+                      <a:pPr>
+                        <a:defRPr sz="1000">
+                          <a:solidFill>
+                            <a:srgbClr val="333333"/>
+                          </a:solidFill>
+                        </a:defRPr>
+                      </a:pPr>
+                      <a:r>
+                        <a:t>八甲村书记张爱军</a:t>
                       </a:r>
                     </a:p>
                   </a:txBody>
                   <a:tcPr>
                     <a:solidFill>
-                      <a:srgbClr val="1A1A1A"/>
+                      <a:srgbClr val="F9F7F2"/>
                     </a:solidFill>
                   </a:tcPr>
                 </a:tc>
@@ -5800,20 +8423,20 @@
                     <a:lstStyle/>
                     <a:p>
                       <a:pPr>
-                        <a:defRPr sz="1100">
+                        <a:defRPr sz="1000">
                           <a:solidFill>
-                            <a:srgbClr val="CCCCCC"/>
+                            <a:srgbClr val="333333"/>
                           </a:solidFill>
                         </a:defRPr>
                       </a:pPr>
                       <a:r>
-                        <a:t>基建+直播</a:t>
+                        <a:t>特产锚点</a:t>
                       </a:r>
                     </a:p>
                   </a:txBody>
                   <a:tcPr>
                     <a:solidFill>
-                      <a:srgbClr val="1A1A1A"/>
+                      <a:srgbClr val="F9F7F2"/>
                     </a:solidFill>
                   </a:tcPr>
                 </a:tc>
@@ -5823,24 +8446,20 @@
                     <a:lstStyle/>
                     <a:p>
                       <a:pPr>
-                        <a:defRPr sz="1100">
+                        <a:defRPr sz="1000">
                           <a:solidFill>
-                            <a:srgbClr val="CCCCCC"/>
+                            <a:srgbClr val="333333"/>
                           </a:solidFill>
                         </a:defRPr>
                       </a:pPr>
                       <a:r>
-                        <a:t>72作品</a:t>
-                      </a:r>
-                      <a:br/>
-                      <a:r>
-                        <a:t>244万赞</a:t>
+                        <a:t>105作品·678万赞</a:t>
                       </a:r>
                     </a:p>
                   </a:txBody>
                   <a:tcPr>
                     <a:solidFill>
-                      <a:srgbClr val="1A1A1A"/>
+                      <a:srgbClr val="F9F7F2"/>
                     </a:solidFill>
                   </a:tcPr>
                 </a:tc>
@@ -5850,24 +8469,24 @@
                     <a:lstStyle/>
                     <a:p>
                       <a:pPr>
-                        <a:defRPr sz="1100">
+                        <a:defRPr sz="1000">
                           <a:solidFill>
-                            <a:srgbClr val="CCCCCC"/>
+                            <a:srgbClr val="333333"/>
                           </a:solidFill>
                         </a:defRPr>
                       </a:pPr>
                       <a:r>
-                        <a:t>直播助农打赏</a:t>
+                        <a:t>苹果品牌溢价</a:t>
                       </a:r>
                       <a:br/>
                       <a:r>
-                        <a:t>政府项目合作</a:t>
+                        <a:t>产地旅游导流</a:t>
                       </a:r>
                     </a:p>
                   </a:txBody>
                   <a:tcPr>
                     <a:solidFill>
-                      <a:srgbClr val="1A1A1A"/>
+                      <a:srgbClr val="F9F7F2"/>
                     </a:solidFill>
                   </a:tcPr>
                 </a:tc>
@@ -5877,407 +8496,24 @@
                     <a:lstStyle/>
                     <a:p>
                       <a:pPr>
-                        <a:defRPr sz="1100">
+                        <a:defRPr sz="1000">
                           <a:solidFill>
-                            <a:srgbClr val="CCCCCC"/>
+                            <a:srgbClr val="333333"/>
                           </a:solidFill>
                         </a:defRPr>
                       </a:pPr>
                       <a:r>
-                        <a:t>「安路灯」=IP符号</a:t>
+                        <a:t>「苹果第一镇」=产品锚</a:t>
                       </a:r>
                       <a:br/>
                       <a:r>
-                        <a:t>极简定位=极强记忆</a:t>
+                        <a:t>不需要解释就懂</a:t>
                       </a:r>
                     </a:p>
                   </a:txBody>
                   <a:tcPr>
                     <a:solidFill>
-                      <a:srgbClr val="1A1A1A"/>
-                    </a:solidFill>
-                  </a:tcPr>
-                </a:tc>
-              </a:tr>
-              <a:tr h="609600">
-                <a:tc>
-                  <a:txBody>
-                    <a:bodyPr/>
-                    <a:lstStyle/>
-                    <a:p>
-                      <a:pPr>
-                        <a:defRPr sz="1100">
-                          <a:solidFill>
-                            <a:srgbClr val="CCCCCC"/>
-                          </a:solidFill>
-                        </a:defRPr>
-                      </a:pPr>
-                      <a:r>
-                        <a:t>小江支书</a:t>
-                      </a:r>
-                    </a:p>
-                  </a:txBody>
-                  <a:tcPr>
-                    <a:solidFill>
-                      <a:srgbClr val="1A1A1A"/>
-                    </a:solidFill>
-                  </a:tcPr>
-                </a:tc>
-                <a:tc>
-                  <a:txBody>
-                    <a:bodyPr/>
-                    <a:lstStyle/>
-                    <a:p>
-                      <a:pPr>
-                        <a:defRPr sz="1100">
-                          <a:solidFill>
-                            <a:srgbClr val="CCCCCC"/>
-                          </a:solidFill>
-                        </a:defRPr>
-                      </a:pPr>
-                      <a:r>
-                        <a:t>正能量+文化</a:t>
-                      </a:r>
-                    </a:p>
-                  </a:txBody>
-                  <a:tcPr>
-                    <a:solidFill>
-                      <a:srgbClr val="1A1A1A"/>
-                    </a:solidFill>
-                  </a:tcPr>
-                </a:tc>
-                <a:tc>
-                  <a:txBody>
-                    <a:bodyPr/>
-                    <a:lstStyle/>
-                    <a:p>
-                      <a:pPr>
-                        <a:defRPr sz="1100">
-                          <a:solidFill>
-                            <a:srgbClr val="CCCCCC"/>
-                          </a:solidFill>
-                        </a:defRPr>
-                      </a:pPr>
-                      <a:r>
-                        <a:t>34作品</a:t>
-                      </a:r>
-                      <a:br/>
-                      <a:r>
-                        <a:t>77万赞</a:t>
-                      </a:r>
-                    </a:p>
-                  </a:txBody>
-                  <a:tcPr>
-                    <a:solidFill>
-                      <a:srgbClr val="1A1A1A"/>
-                    </a:solidFill>
-                  </a:tcPr>
-                </a:tc>
-                <a:tc>
-                  <a:txBody>
-                    <a:bodyPr/>
-                    <a:lstStyle/>
-                    <a:p>
-                      <a:pPr>
-                        <a:defRPr sz="1100">
-                          <a:solidFill>
-                            <a:srgbClr val="CCCCCC"/>
-                          </a:solidFill>
-                        </a:defRPr>
-                      </a:pPr>
-                      <a:r>
-                        <a:t>少而精人设沉淀</a:t>
-                      </a:r>
-                      <a:br/>
-                      <a:r>
-                        <a:t>长期信任变现</a:t>
-                      </a:r>
-                    </a:p>
-                  </a:txBody>
-                  <a:tcPr>
-                    <a:solidFill>
-                      <a:srgbClr val="1A1A1A"/>
-                    </a:solidFill>
-                  </a:tcPr>
-                </a:tc>
-                <a:tc>
-                  <a:txBody>
-                    <a:bodyPr/>
-                    <a:lstStyle/>
-                    <a:p>
-                      <a:pPr>
-                        <a:defRPr sz="1100">
-                          <a:solidFill>
-                            <a:srgbClr val="CCCCCC"/>
-                          </a:solidFill>
-                        </a:defRPr>
-                      </a:pPr>
-                      <a:r>
-                        <a:t>34条=高粘性</a:t>
-                      </a:r>
-                      <a:br/>
-                      <a:r>
-                        <a:t>重质不重量</a:t>
-                      </a:r>
-                    </a:p>
-                  </a:txBody>
-                  <a:tcPr>
-                    <a:solidFill>
-                      <a:srgbClr val="1A1A1A"/>
-                    </a:solidFill>
-                  </a:tcPr>
-                </a:tc>
-              </a:tr>
-              <a:tr h="609600">
-                <a:tc>
-                  <a:txBody>
-                    <a:bodyPr/>
-                    <a:lstStyle/>
-                    <a:p>
-                      <a:pPr>
-                        <a:defRPr sz="1100">
-                          <a:solidFill>
-                            <a:srgbClr val="CCCCCC"/>
-                          </a:solidFill>
-                        </a:defRPr>
-                      </a:pPr>
-                      <a:r>
-                        <a:t>张爱军</a:t>
-                      </a:r>
-                    </a:p>
-                  </a:txBody>
-                  <a:tcPr>
-                    <a:solidFill>
-                      <a:srgbClr val="1A1A1A"/>
-                    </a:solidFill>
-                  </a:tcPr>
-                </a:tc>
-                <a:tc>
-                  <a:txBody>
-                    <a:bodyPr/>
-                    <a:lstStyle/>
-                    <a:p>
-                      <a:pPr>
-                        <a:defRPr sz="1100">
-                          <a:solidFill>
-                            <a:srgbClr val="CCCCCC"/>
-                          </a:solidFill>
-                        </a:defRPr>
-                      </a:pPr>
-                      <a:r>
-                        <a:t>特产锚点</a:t>
-                      </a:r>
-                    </a:p>
-                  </a:txBody>
-                  <a:tcPr>
-                    <a:solidFill>
-                      <a:srgbClr val="1A1A1A"/>
-                    </a:solidFill>
-                  </a:tcPr>
-                </a:tc>
-                <a:tc>
-                  <a:txBody>
-                    <a:bodyPr/>
-                    <a:lstStyle/>
-                    <a:p>
-                      <a:pPr>
-                        <a:defRPr sz="1100">
-                          <a:solidFill>
-                            <a:srgbClr val="CCCCCC"/>
-                          </a:solidFill>
-                        </a:defRPr>
-                      </a:pPr>
-                      <a:r>
-                        <a:t>105作品</a:t>
-                      </a:r>
-                      <a:br/>
-                      <a:r>
-                        <a:t>678万赞</a:t>
-                      </a:r>
-                    </a:p>
-                  </a:txBody>
-                  <a:tcPr>
-                    <a:solidFill>
-                      <a:srgbClr val="1A1A1A"/>
-                    </a:solidFill>
-                  </a:tcPr>
-                </a:tc>
-                <a:tc>
-                  <a:txBody>
-                    <a:bodyPr/>
-                    <a:lstStyle/>
-                    <a:p>
-                      <a:pPr>
-                        <a:defRPr sz="1100">
-                          <a:solidFill>
-                            <a:srgbClr val="CCCCCC"/>
-                          </a:solidFill>
-                        </a:defRPr>
-                      </a:pPr>
-                      <a:r>
-                        <a:t>苹果品牌溢价</a:t>
-                      </a:r>
-                      <a:br/>
-                      <a:r>
-                        <a:t>产地旅游导流</a:t>
-                      </a:r>
-                    </a:p>
-                  </a:txBody>
-                  <a:tcPr>
-                    <a:solidFill>
-                      <a:srgbClr val="1A1A1A"/>
-                    </a:solidFill>
-                  </a:tcPr>
-                </a:tc>
-                <a:tc>
-                  <a:txBody>
-                    <a:bodyPr/>
-                    <a:lstStyle/>
-                    <a:p>
-                      <a:pPr>
-                        <a:defRPr sz="1100">
-                          <a:solidFill>
-                            <a:srgbClr val="CCCCCC"/>
-                          </a:solidFill>
-                        </a:defRPr>
-                      </a:pPr>
-                      <a:r>
-                        <a:t>「苹果第一镇」=产品锚</a:t>
-                      </a:r>
-                      <a:br/>
-                      <a:r>
-                        <a:t>不需要解释就懂</a:t>
-                      </a:r>
-                    </a:p>
-                  </a:txBody>
-                  <a:tcPr>
-                    <a:solidFill>
-                      <a:srgbClr val="1A1A1A"/>
-                    </a:solidFill>
-                  </a:tcPr>
-                </a:tc>
-              </a:tr>
-              <a:tr h="609600">
-                <a:tc>
-                  <a:txBody>
-                    <a:bodyPr/>
-                    <a:lstStyle/>
-                    <a:p>
-                      <a:pPr>
-                        <a:defRPr sz="1100">
-                          <a:solidFill>
-                            <a:srgbClr val="E8A817"/>
-                          </a:solidFill>
-                        </a:defRPr>
-                      </a:pPr>
-                      <a:r>
-                        <a:t>⭐ 我们</a:t>
-                      </a:r>
-                    </a:p>
-                  </a:txBody>
-                  <a:tcPr>
-                    <a:solidFill>
-                      <a:srgbClr val="0A2A0A"/>
-                    </a:solidFill>
-                  </a:tcPr>
-                </a:tc>
-                <a:tc>
-                  <a:txBody>
-                    <a:bodyPr/>
-                    <a:lstStyle/>
-                    <a:p>
-                      <a:pPr>
-                        <a:defRPr sz="1100">
-                          <a:solidFill>
-                            <a:srgbClr val="E8A817"/>
-                          </a:solidFill>
-                        </a:defRPr>
-                      </a:pPr>
-                      <a:r>
-                        <a:t>足球IP</a:t>
-                      </a:r>
-                    </a:p>
-                  </a:txBody>
-                  <a:tcPr>
-                    <a:solidFill>
-                      <a:srgbClr val="0A2A0A"/>
-                    </a:solidFill>
-                  </a:tcPr>
-                </a:tc>
-                <a:tc>
-                  <a:txBody>
-                    <a:bodyPr/>
-                    <a:lstStyle/>
-                    <a:p>
-                      <a:pPr>
-                        <a:defRPr sz="1100">
-                          <a:solidFill>
-                            <a:srgbClr val="E8A817"/>
-                          </a:solidFill>
-                        </a:defRPr>
-                      </a:pPr>
-                      <a:r>
-                        <a:t>24条待拍</a:t>
-                      </a:r>
-                    </a:p>
-                  </a:txBody>
-                  <a:tcPr>
-                    <a:solidFill>
-                      <a:srgbClr val="0A2A0A"/>
-                    </a:solidFill>
-                  </a:tcPr>
-                </a:tc>
-                <a:tc>
-                  <a:txBody>
-                    <a:bodyPr/>
-                    <a:lstStyle/>
-                    <a:p>
-                      <a:pPr>
-                        <a:defRPr sz="1100">
-                          <a:solidFill>
-                            <a:srgbClr val="E8A817"/>
-                          </a:solidFill>
-                        </a:defRPr>
-                      </a:pPr>
-                      <a:r>
-                        <a:t>赛事+研学+文旅</a:t>
-                      </a:r>
-                      <a:br/>
-                      <a:r>
-                        <a:t>阶梯式变现</a:t>
-                      </a:r>
-                    </a:p>
-                  </a:txBody>
-                  <a:tcPr>
-                    <a:solidFill>
-                      <a:srgbClr val="0A2A0A"/>
-                    </a:solidFill>
-                  </a:tcPr>
-                </a:tc>
-                <a:tc>
-                  <a:txBody>
-                    <a:bodyPr/>
-                    <a:lstStyle/>
-                    <a:p>
-                      <a:pPr>
-                        <a:defRPr sz="1100">
-                          <a:solidFill>
-                            <a:srgbClr val="E8A817"/>
-                          </a:solidFill>
-                        </a:defRPr>
-                      </a:pPr>
-                      <a:r>
-                        <a:t>4类竞品空白</a:t>
-                      </a:r>
-                      <a:br/>
-                      <a:r>
-                        <a:t>天花板远超农产品</a:t>
-                      </a:r>
-                    </a:p>
-                  </a:txBody>
-                  <a:tcPr>
-                    <a:solidFill>
-                      <a:srgbClr val="0A2A0A"/>
+                      <a:srgbClr val="F9F7F2"/>
                     </a:solidFill>
                   </a:tcPr>
                 </a:tc>
@@ -6288,20 +8524,20 @@
       </p:graphicFrame>
       <p:sp>
         <p:nvSpPr>
-          <p:cNvPr id="4" name="Rectangle 3"/>
+          <p:cNvPr id="4" name="Rounded Rectangle 3"/>
           <p:cNvSpPr/>
           <p:nvPr/>
         </p:nvSpPr>
         <p:spPr>
           <a:xfrm>
-            <a:off x="274320" y="4754880"/>
-            <a:ext cx="11612880" cy="731520"/>
+            <a:off x="274320" y="4572000"/>
+            <a:ext cx="11612880" cy="457200"/>
           </a:xfrm>
-          <a:prstGeom prst="rect">
+          <a:prstGeom prst="roundRect">
             <a:avLst/>
           </a:prstGeom>
           <a:solidFill>
-            <a:srgbClr val="334411"/>
+            <a:srgbClr val="FFF8E1"/>
           </a:solidFill>
           <a:ln>
             <a:noFill/>
@@ -6322,276 +8558,139 @@
           </a:fontRef>
         </p:style>
         <p:txBody>
-          <a:bodyPr rtlCol="0" anchor="ctr" lIns="127000"/>
+          <a:bodyPr rtlCol="0" anchor="ctr" wrap="square" lIns="152400" tIns="101600"/>
           <a:lstStyle/>
           <a:p>
             <a:pPr algn="ctr">
               <a:defRPr sz="1200" b="1">
                 <a:solidFill>
-                  <a:srgbClr val="E8A817"/>
-                </a:solidFill>
-              </a:defRPr>
-            </a:pPr>
-            <a:r>
-              <a:t>四个对标号共同点：都靠农产品/直播变现，天花板 = 带货GMV</a:t>
-            </a:r>
-            <a:br/>
-            <a:r>
-              <a:t>我们的差异：变现靠「IP」，天花板 = 赛事 + 研学 + 体育旅游</a:t>
-            </a:r>
-          </a:p>
-        </p:txBody>
-      </p:sp>
-      <p:sp>
-        <p:nvSpPr>
-          <p:cNvPr id="5" name="Rectangle 4"/>
+                  <a:srgbClr val="D4A017"/>
+                </a:solidFill>
+              </a:defRPr>
+            </a:pPr>
+            <a:r>
+              <a:t>四个对标号共同点：都靠农产品/直播变现 → 天花板=带货GMV    我们的差异：变现靠「IP」→ 天花板=赛事+研学+体育旅游</a:t>
+            </a:r>
+          </a:p>
+        </p:txBody>
+      </p:sp>
+      <p:sp>
+        <p:nvSpPr>
+          <p:cNvPr id="5" name="Rounded Rectangle 4"/>
           <p:cNvSpPr/>
           <p:nvPr/>
         </p:nvSpPr>
         <p:spPr>
           <a:xfrm>
             <a:off x="274320" y="5303520"/>
-            <a:ext cx="5577840" cy="914400"/>
+            <a:ext cx="5577840" cy="1280160"/>
+          </a:xfrm>
+          <a:prstGeom prst="roundRect">
+            <a:avLst/>
+          </a:prstGeom>
+          <a:solidFill>
+            <a:srgbClr val="FFFFFF"/>
+          </a:solidFill>
+          <a:ln>
+            <a:noFill/>
+          </a:ln>
+          <a:effectLst/>
+        </p:spPr>
+        <p:style>
+          <a:lnRef idx="1">
+            <a:schemeClr val="accent1"/>
+          </a:lnRef>
+          <a:fillRef idx="3">
+            <a:schemeClr val="accent1"/>
+          </a:fillRef>
+          <a:effectRef idx="2">
+            <a:schemeClr val="accent1"/>
+          </a:effectRef>
+          <a:fontRef idx="minor">
+            <a:schemeClr val="lt1"/>
+          </a:fontRef>
+        </p:style>
+        <p:txBody>
+          <a:bodyPr rtlCol="0" anchor="ctr" wrap="square" lIns="177800" rIns="177800" tIns="177800"/>
+          <a:lstStyle/>
+          <a:p>
+            <a:pPr algn="ctr">
+              <a:spcAft>
+                <a:spcPts val="800"/>
+              </a:spcAft>
+              <a:defRPr sz="1400" b="1">
+                <a:solidFill>
+                  <a:srgbClr val="2D5016"/>
+                </a:solidFill>
+              </a:defRPr>
+            </a:pPr>
+            <a:r>
+              <a:t>竞品做不了的事</a:t>
+            </a:r>
+          </a:p>
+          <a:p>
+            <a:pPr>
+              <a:spcAft>
+                <a:spcPts val="200"/>
+              </a:spcAft>
+              <a:defRPr sz="1100">
+                <a:solidFill>
+                  <a:srgbClr val="666666"/>
+                </a:solidFill>
+              </a:defRPr>
+            </a:pPr>
+            <a:r>
+              <a:t>没有村级体育公园 · 没有冠军球队</a:t>
+            </a:r>
+          </a:p>
+          <a:p>
+            <a:pPr>
+              <a:spcAft>
+                <a:spcPts val="200"/>
+              </a:spcAft>
+              <a:defRPr sz="1100">
+                <a:solidFill>
+                  <a:srgbClr val="666666"/>
+                </a:solidFill>
+              </a:defRPr>
+            </a:pPr>
+            <a:r>
+              <a:t>没有500年军屯IP · 没有书记+教练复合人设</a:t>
+            </a:r>
+          </a:p>
+          <a:p>
+            <a:pPr>
+              <a:spcAft>
+                <a:spcPts val="200"/>
+              </a:spcAft>
+              <a:defRPr sz="1100">
+                <a:solidFill>
+                  <a:srgbClr val="666666"/>
+                </a:solidFill>
+              </a:defRPr>
+            </a:pPr>
+            <a:r>
+              <a:t>没有围绕体育的多元化变现空间</a:t>
+            </a:r>
+          </a:p>
+        </p:txBody>
+      </p:sp>
+      <p:sp>
+        <p:nvSpPr>
+          <p:cNvPr id="6" name="Rectangle 5"/>
+          <p:cNvSpPr/>
+          <p:nvPr/>
+        </p:nvSpPr>
+        <p:spPr>
+          <a:xfrm>
+            <a:off x="274320" y="5303520"/>
+            <a:ext cx="5577840" cy="45720"/>
           </a:xfrm>
           <a:prstGeom prst="rect">
             <a:avLst/>
           </a:prstGeom>
           <a:solidFill>
-            <a:srgbClr val="F4F7F4"/>
-          </a:solidFill>
-          <a:ln w="25400">
-            <a:solidFill>
-              <a:srgbClr val="1A5C2A"/>
-            </a:solidFill>
-          </a:ln>
-        </p:spPr>
-        <p:style>
-          <a:lnRef idx="1">
-            <a:schemeClr val="accent1"/>
-          </a:lnRef>
-          <a:fillRef idx="3">
-            <a:schemeClr val="accent1"/>
-          </a:fillRef>
-          <a:effectRef idx="2">
-            <a:schemeClr val="accent1"/>
-          </a:effectRef>
-          <a:fontRef idx="minor">
-            <a:schemeClr val="lt1"/>
-          </a:fontRef>
-        </p:style>
-        <p:txBody>
-          <a:bodyPr rtlCol="0" anchor="ctr" wrap="square" lIns="152400" rIns="152400" tIns="127000"/>
-          <a:lstStyle/>
-          <a:p>
-            <a:pPr algn="ctr">
-              <a:defRPr sz="1300" b="1">
-                <a:solidFill>
-                  <a:srgbClr val="1A5C2A"/>
-                </a:solidFill>
-              </a:defRPr>
-            </a:pPr>
-            <a:r>
-              <a:t>竞品做不了的事</a:t>
-            </a:r>
-          </a:p>
-          <a:p>
-            <a:pPr>
-              <a:spcBef>
-                <a:spcPts val="600"/>
-              </a:spcBef>
-              <a:defRPr sz="1100">
-                <a:solidFill>
-                  <a:srgbClr val="666666"/>
-                </a:solidFill>
-              </a:defRPr>
-            </a:pPr>
-            <a:r>
-              <a:t>没有村级体育公园 · 没有冠军球队 · 没有500年军屯IP · 没有书记+教练复合人设</a:t>
-            </a:r>
-          </a:p>
-        </p:txBody>
-      </p:sp>
-      <p:sp>
-        <p:nvSpPr>
-          <p:cNvPr id="6" name="Rectangle 5"/>
-          <p:cNvSpPr/>
-          <p:nvPr/>
-        </p:nvSpPr>
-        <p:spPr>
-          <a:xfrm>
-            <a:off x="6217920" y="5303520"/>
-            <a:ext cx="5669280" cy="914400"/>
-          </a:xfrm>
-          <a:prstGeom prst="rect">
-            <a:avLst/>
-          </a:prstGeom>
-          <a:solidFill>
-            <a:srgbClr val="FFF8E1"/>
-          </a:solidFill>
-          <a:ln w="25400">
-            <a:solidFill>
-              <a:srgbClr val="E8A817"/>
-            </a:solidFill>
-          </a:ln>
-        </p:spPr>
-        <p:style>
-          <a:lnRef idx="1">
-            <a:schemeClr val="accent1"/>
-          </a:lnRef>
-          <a:fillRef idx="3">
-            <a:schemeClr val="accent1"/>
-          </a:fillRef>
-          <a:effectRef idx="2">
-            <a:schemeClr val="accent1"/>
-          </a:effectRef>
-          <a:fontRef idx="minor">
-            <a:schemeClr val="lt1"/>
-          </a:fontRef>
-        </p:style>
-        <p:txBody>
-          <a:bodyPr rtlCol="0" anchor="ctr" wrap="square" lIns="152400" rIns="152400" tIns="127000"/>
-          <a:lstStyle/>
-          <a:p>
-            <a:pPr algn="ctr">
-              <a:defRPr sz="1300" b="1">
-                <a:solidFill>
-                  <a:srgbClr val="1A5C2A"/>
-                </a:solidFill>
-              </a:defRPr>
-            </a:pPr>
-            <a:r>
-              <a:t>我们独有的事</a:t>
-            </a:r>
-          </a:p>
-          <a:p>
-            <a:pPr>
-              <a:spcBef>
-                <a:spcPts val="600"/>
-              </a:spcBef>
-              <a:defRPr sz="1100">
-                <a:solidFill>
-                  <a:srgbClr val="666666"/>
-                </a:solidFill>
-              </a:defRPr>
-            </a:pPr>
-            <a:r>
-              <a:t>延庆首个村级体育公园 · 多条冠军奖杯 · 军屯文化+足球IP · 4类竞品均未切入体育赛道</a:t>
-            </a:r>
-          </a:p>
-        </p:txBody>
-      </p:sp>
-    </p:spTree>
-  </p:cSld>
-  <p:clrMapOvr>
-    <a:masterClrMapping/>
-  </p:clrMapOvr>
-</p:sld>
-</file>
-
-<file path=ppt/slides/slide6.xml><?xml version="1.0" encoding="utf-8"?>
-<p:sld xmlns:a="http://schemas.openxmlformats.org/drawingml/2006/main" xmlns:p="http://schemas.openxmlformats.org/presentationml/2006/main" xmlns:r="http://schemas.openxmlformats.org/officeDocument/2006/relationships">
-  <p:cSld>
-    <p:bg>
-      <p:bgPr>
-        <a:solidFill>
-          <a:srgbClr val="0F1F0F"/>
-        </a:solidFill>
-        <a:effectLst/>
-      </p:bgPr>
-    </p:bg>
-    <p:spTree>
-      <p:nvGrpSpPr>
-        <p:cNvPr id="1" name=""/>
-        <p:cNvGrpSpPr/>
-        <p:nvPr/>
-      </p:nvGrpSpPr>
-      <p:grpSpPr/>
-      <p:sp>
-        <p:nvSpPr>
-          <p:cNvPr id="2" name="TextBox 1"/>
-          <p:cNvSpPr txBox="1"/>
-          <p:nvPr/>
-        </p:nvSpPr>
-        <p:spPr>
-          <a:xfrm>
-            <a:off x="457200" y="274320"/>
-            <a:ext cx="4572000" cy="731520"/>
-          </a:xfrm>
-          <a:prstGeom prst="rect">
-            <a:avLst/>
-          </a:prstGeom>
-          <a:noFill/>
-        </p:spPr>
-        <p:txBody>
-          <a:bodyPr wrap="square">
-            <a:spAutoFit/>
-          </a:bodyPr>
-          <a:lstStyle/>
-          <a:p>
-            <a:pPr algn="l">
-              <a:defRPr sz="3600" b="1">
-                <a:solidFill>
-                  <a:srgbClr val="E8A817"/>
-                </a:solidFill>
-              </a:defRPr>
-            </a:pPr>
-            <a:r>
-              <a:t>03  怎么盈利？</a:t>
-            </a:r>
-          </a:p>
-        </p:txBody>
-      </p:sp>
-      <p:sp>
-        <p:nvSpPr>
-          <p:cNvPr id="3" name="TextBox 2"/>
-          <p:cNvSpPr txBox="1"/>
-          <p:nvPr/>
-        </p:nvSpPr>
-        <p:spPr>
-          <a:xfrm>
-            <a:off x="457200" y="1005840"/>
-            <a:ext cx="10972800" cy="457200"/>
-          </a:xfrm>
-          <a:prstGeom prst="rect">
-            <a:avLst/>
-          </a:prstGeom>
-          <a:noFill/>
-        </p:spPr>
-        <p:txBody>
-          <a:bodyPr wrap="square">
-            <a:spAutoFit/>
-          </a:bodyPr>
-          <a:lstStyle/>
-          <a:p>
-            <a:pPr algn="ctr">
-              <a:defRPr sz="2000" b="0">
-                <a:solidFill>
-                  <a:srgbClr val="FFFFFF"/>
-                </a:solidFill>
-              </a:defRPr>
-            </a:pPr>
-            <a:r>
-              <a:t>四阶梯变现路径</a:t>
-            </a:r>
-          </a:p>
-        </p:txBody>
-      </p:sp>
-      <p:sp>
-        <p:nvSpPr>
-          <p:cNvPr id="4" name="Oval 3"/>
-          <p:cNvSpPr/>
-          <p:nvPr/>
-        </p:nvSpPr>
-        <p:spPr>
-          <a:xfrm>
-            <a:off x="1371600" y="1828800"/>
-            <a:ext cx="548640" cy="548640"/>
-          </a:xfrm>
-          <a:prstGeom prst="ellipse">
-            <a:avLst/>
-          </a:prstGeom>
-          <a:solidFill>
-            <a:srgbClr val="E8A817"/>
+            <a:srgbClr val="2D5016"/>
           </a:solidFill>
           <a:ln>
             <a:noFill/>
@@ -6612,155 +8711,130 @@
           </a:fontRef>
         </p:style>
         <p:txBody>
-          <a:bodyPr rtlCol="0" anchor="ctr" wrap="none"/>
-          <a:lstStyle/>
-          <a:p>
-            <a:pPr algn="ctr">
-              <a:defRPr sz="2200" b="1">
-                <a:solidFill>
-                  <a:srgbClr val="0F1F0F"/>
-                </a:solidFill>
-              </a:defRPr>
-            </a:pPr>
-            <a:r>
-              <a:t>1</a:t>
-            </a:r>
-          </a:p>
-        </p:txBody>
-      </p:sp>
-      <p:sp>
-        <p:nvSpPr>
-          <p:cNvPr id="5" name="TextBox 4"/>
-          <p:cNvSpPr txBox="1"/>
+          <a:bodyPr rtlCol="0" anchor="ctr"/>
+          <a:lstStyle/>
+          <a:p>
+            <a:pPr algn="ctr"/>
+          </a:p>
+        </p:txBody>
+      </p:sp>
+      <p:sp>
+        <p:nvSpPr>
+          <p:cNvPr id="7" name="Rounded Rectangle 6"/>
+          <p:cNvSpPr/>
           <p:nvPr/>
         </p:nvSpPr>
         <p:spPr>
           <a:xfrm>
-            <a:off x="457200" y="2560320"/>
-            <a:ext cx="2743200" cy="365760"/>
+            <a:off x="6217920" y="5303520"/>
+            <a:ext cx="5669280" cy="1280160"/>
+          </a:xfrm>
+          <a:prstGeom prst="roundRect">
+            <a:avLst/>
+          </a:prstGeom>
+          <a:solidFill>
+            <a:srgbClr val="FFFFFF"/>
+          </a:solidFill>
+          <a:ln>
+            <a:noFill/>
+          </a:ln>
+          <a:effectLst/>
+        </p:spPr>
+        <p:style>
+          <a:lnRef idx="1">
+            <a:schemeClr val="accent1"/>
+          </a:lnRef>
+          <a:fillRef idx="3">
+            <a:schemeClr val="accent1"/>
+          </a:fillRef>
+          <a:effectRef idx="2">
+            <a:schemeClr val="accent1"/>
+          </a:effectRef>
+          <a:fontRef idx="minor">
+            <a:schemeClr val="lt1"/>
+          </a:fontRef>
+        </p:style>
+        <p:txBody>
+          <a:bodyPr rtlCol="0" anchor="ctr" wrap="square" lIns="177800" rIns="177800" tIns="177800"/>
+          <a:lstStyle/>
+          <a:p>
+            <a:pPr algn="ctr">
+              <a:spcAft>
+                <a:spcPts val="800"/>
+              </a:spcAft>
+              <a:defRPr sz="1400" b="1">
+                <a:solidFill>
+                  <a:srgbClr val="2D5016"/>
+                </a:solidFill>
+              </a:defRPr>
+            </a:pPr>
+            <a:r>
+              <a:t>我们独有的事</a:t>
+            </a:r>
+          </a:p>
+          <a:p>
+            <a:pPr>
+              <a:spcAft>
+                <a:spcPts val="200"/>
+              </a:spcAft>
+              <a:defRPr sz="1100">
+                <a:solidFill>
+                  <a:srgbClr val="666666"/>
+                </a:solidFill>
+              </a:defRPr>
+            </a:pPr>
+            <a:r>
+              <a:t>延庆首个村级体育公园 · 多条冠军奖杯</a:t>
+            </a:r>
+          </a:p>
+          <a:p>
+            <a:pPr>
+              <a:spcAft>
+                <a:spcPts val="200"/>
+              </a:spcAft>
+              <a:defRPr sz="1100">
+                <a:solidFill>
+                  <a:srgbClr val="666666"/>
+                </a:solidFill>
+              </a:defRPr>
+            </a:pPr>
+            <a:r>
+              <a:t>军屯文化+足球精神=不可复制IP</a:t>
+            </a:r>
+          </a:p>
+          <a:p>
+            <a:pPr>
+              <a:spcAft>
+                <a:spcPts val="200"/>
+              </a:spcAft>
+              <a:defRPr sz="1100">
+                <a:solidFill>
+                  <a:srgbClr val="666666"/>
+                </a:solidFill>
+              </a:defRPr>
+            </a:pPr>
+            <a:r>
+              <a:t>足球→赛事→研学→文旅阶梯变现</a:t>
+            </a:r>
+          </a:p>
+        </p:txBody>
+      </p:sp>
+      <p:sp>
+        <p:nvSpPr>
+          <p:cNvPr id="8" name="Rectangle 7"/>
+          <p:cNvSpPr/>
+          <p:nvPr/>
+        </p:nvSpPr>
+        <p:spPr>
+          <a:xfrm>
+            <a:off x="6217920" y="5303520"/>
+            <a:ext cx="5669280" cy="45720"/>
           </a:xfrm>
           <a:prstGeom prst="rect">
             <a:avLst/>
           </a:prstGeom>
-          <a:noFill/>
-        </p:spPr>
-        <p:txBody>
-          <a:bodyPr wrap="square">
-            <a:spAutoFit/>
-          </a:bodyPr>
-          <a:lstStyle/>
-          <a:p>
-            <a:pPr algn="ctr">
-              <a:defRPr sz="1600" b="1">
-                <a:solidFill>
-                  <a:srgbClr val="E8A817"/>
-                </a:solidFill>
-              </a:defRPr>
-            </a:pPr>
-            <a:r>
-              <a:t>内容期</a:t>
-            </a:r>
-          </a:p>
-        </p:txBody>
-      </p:sp>
-      <p:sp>
-        <p:nvSpPr>
-          <p:cNvPr id="6" name="TextBox 5"/>
-          <p:cNvSpPr txBox="1"/>
-          <p:nvPr/>
-        </p:nvSpPr>
-        <p:spPr>
-          <a:xfrm>
-            <a:off x="457200" y="3017520"/>
-            <a:ext cx="2743200" cy="2743200"/>
-          </a:xfrm>
-          <a:prstGeom prst="rect">
-            <a:avLst/>
-          </a:prstGeom>
-          <a:noFill/>
-        </p:spPr>
-        <p:txBody>
-          <a:bodyPr wrap="square">
-            <a:spAutoFit/>
-          </a:bodyPr>
-          <a:lstStyle/>
-          <a:p>
-            <a:pPr algn="ctr">
-              <a:defRPr sz="1200" b="0">
-                <a:solidFill>
-                  <a:srgbClr val="BBBBBB"/>
-                </a:solidFill>
-              </a:defRPr>
-            </a:pPr>
-            <a:r>
-              <a:t>月1-3</a:t>
-            </a:r>
-            <a:br/>
-            <a:r>
-              <a:t>零变现</a:t>
-            </a:r>
-            <a:br/>
-            <a:r>
-              <a:t>纯内容积累</a:t>
-            </a:r>
-            <a:br/>
-            <a:r>
-              <a:t>目标：1万粉</a:t>
-            </a:r>
-          </a:p>
-        </p:txBody>
-      </p:sp>
-      <p:sp>
-        <p:nvSpPr>
-          <p:cNvPr id="7" name="TextBox 6"/>
-          <p:cNvSpPr txBox="1"/>
-          <p:nvPr/>
-        </p:nvSpPr>
-        <p:spPr>
-          <a:xfrm>
-            <a:off x="2926080" y="1920240"/>
-            <a:ext cx="457200" cy="457200"/>
-          </a:xfrm>
-          <a:prstGeom prst="rect">
-            <a:avLst/>
-          </a:prstGeom>
-          <a:noFill/>
-        </p:spPr>
-        <p:txBody>
-          <a:bodyPr wrap="square">
-            <a:spAutoFit/>
-          </a:bodyPr>
-          <a:lstStyle/>
-          <a:p>
-            <a:pPr algn="ctr">
-              <a:defRPr sz="2800" b="0">
-                <a:solidFill>
-                  <a:srgbClr val="E8A817"/>
-                </a:solidFill>
-              </a:defRPr>
-            </a:pPr>
-            <a:r>
-              <a:t>→</a:t>
-            </a:r>
-          </a:p>
-        </p:txBody>
-      </p:sp>
-      <p:sp>
-        <p:nvSpPr>
-          <p:cNvPr id="8" name="Oval 7"/>
-          <p:cNvSpPr/>
-          <p:nvPr/>
-        </p:nvSpPr>
-        <p:spPr>
-          <a:xfrm>
-            <a:off x="4297680" y="1828800"/>
-            <a:ext cx="548640" cy="548640"/>
-          </a:xfrm>
-          <a:prstGeom prst="ellipse">
-            <a:avLst/>
-          </a:prstGeom>
           <a:solidFill>
-            <a:srgbClr val="E8A817"/>
+            <a:srgbClr val="D4A017"/>
           </a:solidFill>
           <a:ln>
             <a:noFill/>
@@ -6781,491 +8855,10 @@
           </a:fontRef>
         </p:style>
         <p:txBody>
-          <a:bodyPr rtlCol="0" anchor="ctr" wrap="none"/>
-          <a:lstStyle/>
-          <a:p>
-            <a:pPr algn="ctr">
-              <a:defRPr sz="2200" b="1">
-                <a:solidFill>
-                  <a:srgbClr val="0F1F0F"/>
-                </a:solidFill>
-              </a:defRPr>
-            </a:pPr>
-            <a:r>
-              <a:t>2</a:t>
-            </a:r>
-          </a:p>
-        </p:txBody>
-      </p:sp>
-      <p:sp>
-        <p:nvSpPr>
-          <p:cNvPr id="9" name="TextBox 8"/>
-          <p:cNvSpPr txBox="1"/>
-          <p:nvPr/>
-        </p:nvSpPr>
-        <p:spPr>
-          <a:xfrm>
-            <a:off x="3383280" y="2560320"/>
-            <a:ext cx="2743200" cy="365760"/>
-          </a:xfrm>
-          <a:prstGeom prst="rect">
-            <a:avLst/>
-          </a:prstGeom>
-          <a:noFill/>
-        </p:spPr>
-        <p:txBody>
-          <a:bodyPr wrap="square">
-            <a:spAutoFit/>
-          </a:bodyPr>
-          <a:lstStyle/>
-          <a:p>
-            <a:pPr algn="ctr">
-              <a:defRPr sz="1600" b="1">
-                <a:solidFill>
-                  <a:srgbClr val="E8A817"/>
-                </a:solidFill>
-              </a:defRPr>
-            </a:pPr>
-            <a:r>
-              <a:t>赛事期</a:t>
-            </a:r>
-          </a:p>
-        </p:txBody>
-      </p:sp>
-      <p:sp>
-        <p:nvSpPr>
-          <p:cNvPr id="10" name="TextBox 9"/>
-          <p:cNvSpPr txBox="1"/>
-          <p:nvPr/>
-        </p:nvSpPr>
-        <p:spPr>
-          <a:xfrm>
-            <a:off x="3383280" y="3017520"/>
-            <a:ext cx="2743200" cy="2743200"/>
-          </a:xfrm>
-          <a:prstGeom prst="rect">
-            <a:avLst/>
-          </a:prstGeom>
-          <a:noFill/>
-        </p:spPr>
-        <p:txBody>
-          <a:bodyPr wrap="square">
-            <a:spAutoFit/>
-          </a:bodyPr>
-          <a:lstStyle/>
-          <a:p>
-            <a:pPr algn="ctr">
-              <a:defRPr sz="1200" b="0">
-                <a:solidFill>
-                  <a:srgbClr val="BBBBBB"/>
-                </a:solidFill>
-              </a:defRPr>
-            </a:pPr>
-            <a:r>
-              <a:t>月3-6</a:t>
-            </a:r>
-            <a:br/>
-            <a:r>
-              <a:t>邀请赛报名费</a:t>
-            </a:r>
-            <a:br/>
-            <a:r>
-              <a:t>体育局合作</a:t>
-            </a:r>
-            <a:br/>
-            <a:r>
-              <a:t>目标：5万粉</a:t>
-            </a:r>
-          </a:p>
-        </p:txBody>
-      </p:sp>
-      <p:sp>
-        <p:nvSpPr>
-          <p:cNvPr id="11" name="TextBox 10"/>
-          <p:cNvSpPr txBox="1"/>
-          <p:nvPr/>
-        </p:nvSpPr>
-        <p:spPr>
-          <a:xfrm>
-            <a:off x="5852160" y="1920240"/>
-            <a:ext cx="457200" cy="457200"/>
-          </a:xfrm>
-          <a:prstGeom prst="rect">
-            <a:avLst/>
-          </a:prstGeom>
-          <a:noFill/>
-        </p:spPr>
-        <p:txBody>
-          <a:bodyPr wrap="square">
-            <a:spAutoFit/>
-          </a:bodyPr>
-          <a:lstStyle/>
-          <a:p>
-            <a:pPr algn="ctr">
-              <a:defRPr sz="2800" b="0">
-                <a:solidFill>
-                  <a:srgbClr val="E8A817"/>
-                </a:solidFill>
-              </a:defRPr>
-            </a:pPr>
-            <a:r>
-              <a:t>→</a:t>
-            </a:r>
-          </a:p>
-        </p:txBody>
-      </p:sp>
-      <p:sp>
-        <p:nvSpPr>
-          <p:cNvPr id="12" name="Oval 11"/>
-          <p:cNvSpPr/>
-          <p:nvPr/>
-        </p:nvSpPr>
-        <p:spPr>
-          <a:xfrm>
-            <a:off x="7223760" y="1828800"/>
-            <a:ext cx="548640" cy="548640"/>
-          </a:xfrm>
-          <a:prstGeom prst="ellipse">
-            <a:avLst/>
-          </a:prstGeom>
-          <a:solidFill>
-            <a:srgbClr val="E8A817"/>
-          </a:solidFill>
-          <a:ln>
-            <a:noFill/>
-          </a:ln>
-        </p:spPr>
-        <p:style>
-          <a:lnRef idx="1">
-            <a:schemeClr val="accent1"/>
-          </a:lnRef>
-          <a:fillRef idx="3">
-            <a:schemeClr val="accent1"/>
-          </a:fillRef>
-          <a:effectRef idx="2">
-            <a:schemeClr val="accent1"/>
-          </a:effectRef>
-          <a:fontRef idx="minor">
-            <a:schemeClr val="lt1"/>
-          </a:fontRef>
-        </p:style>
-        <p:txBody>
-          <a:bodyPr rtlCol="0" anchor="ctr" wrap="none"/>
-          <a:lstStyle/>
-          <a:p>
-            <a:pPr algn="ctr">
-              <a:defRPr sz="2200" b="1">
-                <a:solidFill>
-                  <a:srgbClr val="0F1F0F"/>
-                </a:solidFill>
-              </a:defRPr>
-            </a:pPr>
-            <a:r>
-              <a:t>3</a:t>
-            </a:r>
-          </a:p>
-        </p:txBody>
-      </p:sp>
-      <p:sp>
-        <p:nvSpPr>
-          <p:cNvPr id="13" name="TextBox 12"/>
-          <p:cNvSpPr txBox="1"/>
-          <p:nvPr/>
-        </p:nvSpPr>
-        <p:spPr>
-          <a:xfrm>
-            <a:off x="6309360" y="2560320"/>
-            <a:ext cx="2743200" cy="365760"/>
-          </a:xfrm>
-          <a:prstGeom prst="rect">
-            <a:avLst/>
-          </a:prstGeom>
-          <a:noFill/>
-        </p:spPr>
-        <p:txBody>
-          <a:bodyPr wrap="square">
-            <a:spAutoFit/>
-          </a:bodyPr>
-          <a:lstStyle/>
-          <a:p>
-            <a:pPr algn="ctr">
-              <a:defRPr sz="1600" b="1">
-                <a:solidFill>
-                  <a:srgbClr val="E8A817"/>
-                </a:solidFill>
-              </a:defRPr>
-            </a:pPr>
-            <a:r>
-              <a:t>研学期</a:t>
-            </a:r>
-          </a:p>
-        </p:txBody>
-      </p:sp>
-      <p:sp>
-        <p:nvSpPr>
-          <p:cNvPr id="14" name="TextBox 13"/>
-          <p:cNvSpPr txBox="1"/>
-          <p:nvPr/>
-        </p:nvSpPr>
-        <p:spPr>
-          <a:xfrm>
-            <a:off x="6309360" y="3017520"/>
-            <a:ext cx="2743200" cy="2743200"/>
-          </a:xfrm>
-          <a:prstGeom prst="rect">
-            <a:avLst/>
-          </a:prstGeom>
-          <a:noFill/>
-        </p:spPr>
-        <p:txBody>
-          <a:bodyPr wrap="square">
-            <a:spAutoFit/>
-          </a:bodyPr>
-          <a:lstStyle/>
-          <a:p>
-            <a:pPr algn="ctr">
-              <a:defRPr sz="1200" b="0">
-                <a:solidFill>
-                  <a:srgbClr val="BBBBBB"/>
-                </a:solidFill>
-              </a:defRPr>
-            </a:pPr>
-            <a:r>
-              <a:t>月6-9</a:t>
-            </a:r>
-            <a:br/>
-            <a:r>
-              <a:t>夏令营收入</a:t>
-            </a:r>
-            <a:br/>
-            <a:r>
-              <a:t>企业团建</a:t>
-            </a:r>
-            <a:br/>
-            <a:r>
-              <a:t>目标：10万粉</a:t>
-            </a:r>
-          </a:p>
-        </p:txBody>
-      </p:sp>
-      <p:sp>
-        <p:nvSpPr>
-          <p:cNvPr id="15" name="TextBox 14"/>
-          <p:cNvSpPr txBox="1"/>
-          <p:nvPr/>
-        </p:nvSpPr>
-        <p:spPr>
-          <a:xfrm>
-            <a:off x="8778240" y="1920240"/>
-            <a:ext cx="457200" cy="457200"/>
-          </a:xfrm>
-          <a:prstGeom prst="rect">
-            <a:avLst/>
-          </a:prstGeom>
-          <a:noFill/>
-        </p:spPr>
-        <p:txBody>
-          <a:bodyPr wrap="square">
-            <a:spAutoFit/>
-          </a:bodyPr>
-          <a:lstStyle/>
-          <a:p>
-            <a:pPr algn="ctr">
-              <a:defRPr sz="2800" b="0">
-                <a:solidFill>
-                  <a:srgbClr val="E8A817"/>
-                </a:solidFill>
-              </a:defRPr>
-            </a:pPr>
-            <a:r>
-              <a:t>→</a:t>
-            </a:r>
-          </a:p>
-        </p:txBody>
-      </p:sp>
-      <p:sp>
-        <p:nvSpPr>
-          <p:cNvPr id="16" name="Oval 15"/>
-          <p:cNvSpPr/>
-          <p:nvPr/>
-        </p:nvSpPr>
-        <p:spPr>
-          <a:xfrm>
-            <a:off x="10149840" y="1828800"/>
-            <a:ext cx="548640" cy="548640"/>
-          </a:xfrm>
-          <a:prstGeom prst="ellipse">
-            <a:avLst/>
-          </a:prstGeom>
-          <a:solidFill>
-            <a:srgbClr val="E8A817"/>
-          </a:solidFill>
-          <a:ln>
-            <a:noFill/>
-          </a:ln>
-        </p:spPr>
-        <p:style>
-          <a:lnRef idx="1">
-            <a:schemeClr val="accent1"/>
-          </a:lnRef>
-          <a:fillRef idx="3">
-            <a:schemeClr val="accent1"/>
-          </a:fillRef>
-          <a:effectRef idx="2">
-            <a:schemeClr val="accent1"/>
-          </a:effectRef>
-          <a:fontRef idx="minor">
-            <a:schemeClr val="lt1"/>
-          </a:fontRef>
-        </p:style>
-        <p:txBody>
-          <a:bodyPr rtlCol="0" anchor="ctr" wrap="none"/>
-          <a:lstStyle/>
-          <a:p>
-            <a:pPr algn="ctr">
-              <a:defRPr sz="2200" b="1">
-                <a:solidFill>
-                  <a:srgbClr val="0F1F0F"/>
-                </a:solidFill>
-              </a:defRPr>
-            </a:pPr>
-            <a:r>
-              <a:t>4</a:t>
-            </a:r>
-          </a:p>
-        </p:txBody>
-      </p:sp>
-      <p:sp>
-        <p:nvSpPr>
-          <p:cNvPr id="17" name="TextBox 16"/>
-          <p:cNvSpPr txBox="1"/>
-          <p:nvPr/>
-        </p:nvSpPr>
-        <p:spPr>
-          <a:xfrm>
-            <a:off x="9235440" y="2560320"/>
-            <a:ext cx="2743200" cy="365760"/>
-          </a:xfrm>
-          <a:prstGeom prst="rect">
-            <a:avLst/>
-          </a:prstGeom>
-          <a:noFill/>
-        </p:spPr>
-        <p:txBody>
-          <a:bodyPr wrap="square">
-            <a:spAutoFit/>
-          </a:bodyPr>
-          <a:lstStyle/>
-          <a:p>
-            <a:pPr algn="ctr">
-              <a:defRPr sz="1600" b="1">
-                <a:solidFill>
-                  <a:srgbClr val="E8A817"/>
-                </a:solidFill>
-              </a:defRPr>
-            </a:pPr>
-            <a:r>
-              <a:t>文旅期</a:t>
-            </a:r>
-          </a:p>
-        </p:txBody>
-      </p:sp>
-      <p:sp>
-        <p:nvSpPr>
-          <p:cNvPr id="18" name="TextBox 17"/>
-          <p:cNvSpPr txBox="1"/>
-          <p:nvPr/>
-        </p:nvSpPr>
-        <p:spPr>
-          <a:xfrm>
-            <a:off x="9235440" y="3017520"/>
-            <a:ext cx="2743200" cy="2743200"/>
-          </a:xfrm>
-          <a:prstGeom prst="rect">
-            <a:avLst/>
-          </a:prstGeom>
-          <a:noFill/>
-        </p:spPr>
-        <p:txBody>
-          <a:bodyPr wrap="square">
-            <a:spAutoFit/>
-          </a:bodyPr>
-          <a:lstStyle/>
-          <a:p>
-            <a:pPr algn="ctr">
-              <a:defRPr sz="1200" b="0">
-                <a:solidFill>
-                  <a:srgbClr val="BBBBBB"/>
-                </a:solidFill>
-              </a:defRPr>
-            </a:pPr>
-            <a:r>
-              <a:t>月9-12</a:t>
-            </a:r>
-            <a:br/>
-            <a:r>
-              <a:t>体育旅游线路</a:t>
-            </a:r>
-            <a:br/>
-            <a:r>
-              <a:t>品牌赞助</a:t>
-            </a:r>
-            <a:br/>
-            <a:r>
-              <a:t>目标：20万粉</a:t>
-            </a:r>
-          </a:p>
-        </p:txBody>
-      </p:sp>
-      <p:sp>
-        <p:nvSpPr>
-          <p:cNvPr id="19" name="Rectangle 18"/>
-          <p:cNvSpPr/>
-          <p:nvPr/>
-        </p:nvSpPr>
-        <p:spPr>
-          <a:xfrm>
-            <a:off x="457200" y="5486400"/>
-            <a:ext cx="11247120" cy="548640"/>
-          </a:xfrm>
-          <a:prstGeom prst="rect">
-            <a:avLst/>
-          </a:prstGeom>
-          <a:solidFill>
-            <a:srgbClr val="334411"/>
-          </a:solidFill>
-          <a:ln>
-            <a:noFill/>
-          </a:ln>
-        </p:spPr>
-        <p:style>
-          <a:lnRef idx="1">
-            <a:schemeClr val="accent1"/>
-          </a:lnRef>
-          <a:fillRef idx="3">
-            <a:schemeClr val="accent1"/>
-          </a:fillRef>
-          <a:effectRef idx="2">
-            <a:schemeClr val="accent1"/>
-          </a:effectRef>
-          <a:fontRef idx="minor">
-            <a:schemeClr val="lt1"/>
-          </a:fontRef>
-        </p:style>
-        <p:txBody>
-          <a:bodyPr rtlCol="0" anchor="ctr" lIns="127000"/>
-          <a:lstStyle/>
-          <a:p>
-            <a:pPr algn="ctr">
-              <a:defRPr sz="1300" b="1">
-                <a:solidFill>
-                  <a:srgbClr val="E8A817"/>
-                </a:solidFill>
-              </a:defRPr>
-            </a:pPr>
-            <a:r>
-              <a:t>盈利逻辑：足球内容建信任 → 赛事聚人气 → 研学教育变现 → 体育旅游IP</a:t>
-            </a:r>
+          <a:bodyPr rtlCol="0" anchor="ctr"/>
+          <a:lstStyle/>
+          <a:p>
+            <a:pPr algn="ctr"/>
           </a:p>
         </p:txBody>
       </p:sp>
@@ -7295,8 +8888,8 @@
         </p:nvSpPr>
         <p:spPr>
           <a:xfrm>
-            <a:off x="457200" y="274320"/>
-            <a:ext cx="4572000" cy="731520"/>
+            <a:off x="457200" y="365760"/>
+            <a:ext cx="7315200" cy="640080"/>
           </a:xfrm>
           <a:prstGeom prst="rect">
             <a:avLst/>
@@ -7312,650 +8905,652 @@
             <a:pPr algn="l">
               <a:defRPr sz="3000" b="1">
                 <a:solidFill>
-                  <a:srgbClr val="1A5C2A"/>
-                </a:solidFill>
-              </a:defRPr>
-            </a:pPr>
-            <a:r>
-              <a:t>各阶段盈利明细</a:t>
-            </a:r>
-          </a:p>
-        </p:txBody>
-      </p:sp>
-      <p:graphicFrame>
-        <p:nvGraphicFramePr>
-          <p:cNvPr id="3" name="Table 2"/>
-          <p:cNvGraphicFramePr>
-            <a:graphicFrameLocks noGrp="1"/>
-          </p:cNvGraphicFramePr>
+                  <a:srgbClr val="2D5016"/>
+                </a:solidFill>
+              </a:defRPr>
+            </a:pPr>
+            <a:r>
+              <a:t>02  对标盈利逻辑拆解</a:t>
+            </a:r>
+          </a:p>
+        </p:txBody>
+      </p:sp>
+      <p:sp>
+        <p:nvSpPr>
+          <p:cNvPr id="3" name="Rounded Rectangle 2"/>
+          <p:cNvSpPr/>
           <p:nvPr/>
-        </p:nvGraphicFramePr>
-        <p:xfrm>
-          <a:off x="274320" y="1188720"/>
-          <a:ext cx="11612880" cy="4114800"/>
-        </p:xfrm>
-        <a:graphic>
-          <a:graphicData uri="http://schemas.openxmlformats.org/drawingml/2006/table">
-            <a:tbl>
-              <a:tblPr firstRow="1" bandRow="1">
-                <a:tableStyleId>{5C22544A-7EE6-4342-B048-85BDC9FD1C3A}</a:tableStyleId>
-              </a:tblPr>
-              <a:tblGrid>
-                <a:gridCol w="1645920"/>
-                <a:gridCol w="1645920"/>
-                <a:gridCol w="3200400"/>
-                <a:gridCol w="2560320"/>
-                <a:gridCol w="2560320"/>
-              </a:tblGrid>
-              <a:tr h="822960">
-                <a:tc>
-                  <a:txBody>
-                    <a:bodyPr/>
-                    <a:lstStyle/>
-                    <a:p>
-                      <a:pPr>
-                        <a:defRPr sz="1200" b="1">
-                          <a:solidFill>
-                            <a:srgbClr val="FFFFFF"/>
-                          </a:solidFill>
-                        </a:defRPr>
-                      </a:pPr>
-                      <a:r>
-                        <a:t>阶段</a:t>
-                      </a:r>
-                    </a:p>
-                  </a:txBody>
-                  <a:tcPr>
-                    <a:solidFill>
-                      <a:srgbClr val="1A5C2A"/>
-                    </a:solidFill>
-                  </a:tcPr>
-                </a:tc>
-                <a:tc>
-                  <a:txBody>
-                    <a:bodyPr/>
-                    <a:lstStyle/>
-                    <a:p>
-                      <a:pPr>
-                        <a:defRPr sz="1200" b="1">
-                          <a:solidFill>
-                            <a:srgbClr val="FFFFFF"/>
-                          </a:solidFill>
-                        </a:defRPr>
-                      </a:pPr>
-                      <a:r>
-                        <a:t>时间</a:t>
-                      </a:r>
-                    </a:p>
-                  </a:txBody>
-                  <a:tcPr>
-                    <a:solidFill>
-                      <a:srgbClr val="1A5C2A"/>
-                    </a:solidFill>
-                  </a:tcPr>
-                </a:tc>
-                <a:tc>
-                  <a:txBody>
-                    <a:bodyPr/>
-                    <a:lstStyle/>
-                    <a:p>
-                      <a:pPr>
-                        <a:defRPr sz="1200" b="1">
-                          <a:solidFill>
-                            <a:srgbClr val="FFFFFF"/>
-                          </a:solidFill>
-                        </a:defRPr>
-                      </a:pPr>
-                      <a:r>
-                        <a:t>变现方式</a:t>
-                      </a:r>
-                    </a:p>
-                  </a:txBody>
-                  <a:tcPr>
-                    <a:solidFill>
-                      <a:srgbClr val="1A5C2A"/>
-                    </a:solidFill>
-                  </a:tcPr>
-                </a:tc>
-                <a:tc>
-                  <a:txBody>
-                    <a:bodyPr/>
-                    <a:lstStyle/>
-                    <a:p>
-                      <a:pPr>
-                        <a:defRPr sz="1200" b="1">
-                          <a:solidFill>
-                            <a:srgbClr val="FFFFFF"/>
-                          </a:solidFill>
-                        </a:defRPr>
-                      </a:pPr>
-                      <a:r>
-                        <a:t>预估收入</a:t>
-                      </a:r>
-                    </a:p>
-                  </a:txBody>
-                  <a:tcPr>
-                    <a:solidFill>
-                      <a:srgbClr val="1A5C2A"/>
-                    </a:solidFill>
-                  </a:tcPr>
-                </a:tc>
-                <a:tc>
-                  <a:txBody>
-                    <a:bodyPr/>
-                    <a:lstStyle/>
-                    <a:p>
-                      <a:pPr>
-                        <a:defRPr sz="1200" b="1">
-                          <a:solidFill>
-                            <a:srgbClr val="FFFFFF"/>
-                          </a:solidFill>
-                        </a:defRPr>
-                      </a:pPr>
-                      <a:r>
-                        <a:t>启动条件</a:t>
-                      </a:r>
-                    </a:p>
-                  </a:txBody>
-                  <a:tcPr>
-                    <a:solidFill>
-                      <a:srgbClr val="1A5C2A"/>
-                    </a:solidFill>
-                  </a:tcPr>
-                </a:tc>
-              </a:tr>
-              <a:tr h="822960">
-                <a:tc>
-                  <a:txBody>
-                    <a:bodyPr/>
-                    <a:lstStyle/>
-                    <a:p>
-                      <a:pPr>
-                        <a:defRPr sz="1200">
-                          <a:solidFill>
-                            <a:srgbClr val="222222"/>
-                          </a:solidFill>
-                        </a:defRPr>
-                      </a:pPr>
-                      <a:r>
-                        <a:t>内容期</a:t>
-                      </a:r>
-                    </a:p>
-                  </a:txBody>
-                  <a:tcPr/>
-                </a:tc>
-                <a:tc>
-                  <a:txBody>
-                    <a:bodyPr/>
-                    <a:lstStyle/>
-                    <a:p>
-                      <a:pPr>
-                        <a:defRPr sz="1200">
-                          <a:solidFill>
-                            <a:srgbClr val="222222"/>
-                          </a:solidFill>
-                        </a:defRPr>
-                      </a:pPr>
-                      <a:r>
-                        <a:t>月1-3</a:t>
-                      </a:r>
-                    </a:p>
-                  </a:txBody>
-                  <a:tcPr/>
-                </a:tc>
-                <a:tc>
-                  <a:txBody>
-                    <a:bodyPr/>
-                    <a:lstStyle/>
-                    <a:p>
-                      <a:pPr>
-                        <a:defRPr sz="1200">
-                          <a:solidFill>
-                            <a:srgbClr val="222222"/>
-                          </a:solidFill>
-                        </a:defRPr>
-                      </a:pPr>
-                      <a:r>
-                        <a:t>零变现，纯涨粉</a:t>
-                      </a:r>
-                    </a:p>
-                  </a:txBody>
-                  <a:tcPr/>
-                </a:tc>
-                <a:tc>
-                  <a:txBody>
-                    <a:bodyPr/>
-                    <a:lstStyle/>
-                    <a:p>
-                      <a:pPr>
-                        <a:defRPr sz="1200">
-                          <a:solidFill>
-                            <a:srgbClr val="222222"/>
-                          </a:solidFill>
-                        </a:defRPr>
-                      </a:pPr>
-                      <a:r>
-                        <a:t>¥0</a:t>
-                      </a:r>
-                    </a:p>
-                  </a:txBody>
-                  <a:tcPr/>
-                </a:tc>
-                <a:tc>
-                  <a:txBody>
-                    <a:bodyPr/>
-                    <a:lstStyle/>
-                    <a:p>
-                      <a:pPr>
-                        <a:defRPr sz="1200">
-                          <a:solidFill>
-                            <a:srgbClr val="222222"/>
-                          </a:solidFill>
-                        </a:defRPr>
-                      </a:pPr>
-                      <a:r>
-                        <a:t>开始拍摄即可</a:t>
-                      </a:r>
-                    </a:p>
-                  </a:txBody>
-                  <a:tcPr/>
-                </a:tc>
-              </a:tr>
-              <a:tr h="822960">
-                <a:tc>
-                  <a:txBody>
-                    <a:bodyPr/>
-                    <a:lstStyle/>
-                    <a:p>
-                      <a:pPr>
-                        <a:defRPr sz="1200">
-                          <a:solidFill>
-                            <a:srgbClr val="222222"/>
-                          </a:solidFill>
-                        </a:defRPr>
-                      </a:pPr>
-                      <a:r>
-                        <a:t>赛事期</a:t>
-                      </a:r>
-                    </a:p>
-                  </a:txBody>
-                  <a:tcPr>
-                    <a:solidFill>
-                      <a:srgbClr val="F4F7F4"/>
-                    </a:solidFill>
-                  </a:tcPr>
-                </a:tc>
-                <a:tc>
-                  <a:txBody>
-                    <a:bodyPr/>
-                    <a:lstStyle/>
-                    <a:p>
-                      <a:pPr>
-                        <a:defRPr sz="1200">
-                          <a:solidFill>
-                            <a:srgbClr val="222222"/>
-                          </a:solidFill>
-                        </a:defRPr>
-                      </a:pPr>
-                      <a:r>
-                        <a:t>月3-6</a:t>
-                      </a:r>
-                    </a:p>
-                  </a:txBody>
-                  <a:tcPr>
-                    <a:solidFill>
-                      <a:srgbClr val="F4F7F4"/>
-                    </a:solidFill>
-                  </a:tcPr>
-                </a:tc>
-                <a:tc>
-                  <a:txBody>
-                    <a:bodyPr/>
-                    <a:lstStyle/>
-                    <a:p>
-                      <a:pPr>
-                        <a:defRPr sz="1200">
-                          <a:solidFill>
-                            <a:srgbClr val="222222"/>
-                          </a:solidFill>
-                        </a:defRPr>
-                      </a:pPr>
-                      <a:r>
-                        <a:t>村际邀请赛报名费</a:t>
-                      </a:r>
-                      <a:br/>
-                      <a:r>
-                        <a:t>体育局补贴</a:t>
-                      </a:r>
-                      <a:br/>
-                      <a:r>
-                        <a:t>场边广告位</a:t>
-                      </a:r>
-                    </a:p>
-                  </a:txBody>
-                  <a:tcPr>
-                    <a:solidFill>
-                      <a:srgbClr val="F4F7F4"/>
-                    </a:solidFill>
-                  </a:tcPr>
-                </a:tc>
-                <a:tc>
-                  <a:txBody>
-                    <a:bodyPr/>
-                    <a:lstStyle/>
-                    <a:p>
-                      <a:pPr>
-                        <a:defRPr sz="1200">
-                          <a:solidFill>
-                            <a:srgbClr val="222222"/>
-                          </a:solidFill>
-                        </a:defRPr>
-                      </a:pPr>
-                      <a:r>
-                        <a:t>¥3000-8000/场</a:t>
-                      </a:r>
-                      <a:br/>
-                      <a:r>
-                        <a:t>¥5000-20000</a:t>
-                      </a:r>
-                      <a:br/>
-                      <a:r>
-                        <a:t>¥2000-5000</a:t>
-                      </a:r>
-                    </a:p>
-                  </a:txBody>
-                  <a:tcPr>
-                    <a:solidFill>
-                      <a:srgbClr val="F4F7F4"/>
-                    </a:solidFill>
-                  </a:tcPr>
-                </a:tc>
-                <a:tc>
-                  <a:txBody>
-                    <a:bodyPr/>
-                    <a:lstStyle/>
-                    <a:p>
-                      <a:pPr>
-                        <a:defRPr sz="1200">
-                          <a:solidFill>
-                            <a:srgbClr val="222222"/>
-                          </a:solidFill>
-                        </a:defRPr>
-                      </a:pPr>
-                      <a:r>
-                        <a:t>粉丝≥1万</a:t>
-                      </a:r>
-                      <a:br/>
-                      <a:r>
-                        <a:t>3个合作村</a:t>
-                      </a:r>
-                    </a:p>
-                  </a:txBody>
-                  <a:tcPr>
-                    <a:solidFill>
-                      <a:srgbClr val="F4F7F4"/>
-                    </a:solidFill>
-                  </a:tcPr>
-                </a:tc>
-              </a:tr>
-              <a:tr h="822960">
-                <a:tc>
-                  <a:txBody>
-                    <a:bodyPr/>
-                    <a:lstStyle/>
-                    <a:p>
-                      <a:pPr>
-                        <a:defRPr sz="1200">
-                          <a:solidFill>
-                            <a:srgbClr val="222222"/>
-                          </a:solidFill>
-                        </a:defRPr>
-                      </a:pPr>
-                      <a:r>
-                        <a:t>研学期</a:t>
-                      </a:r>
-                    </a:p>
-                  </a:txBody>
-                  <a:tcPr/>
-                </a:tc>
-                <a:tc>
-                  <a:txBody>
-                    <a:bodyPr/>
-                    <a:lstStyle/>
-                    <a:p>
-                      <a:pPr>
-                        <a:defRPr sz="1200">
-                          <a:solidFill>
-                            <a:srgbClr val="222222"/>
-                          </a:solidFill>
-                        </a:defRPr>
-                      </a:pPr>
-                      <a:r>
-                        <a:t>月6-9</a:t>
-                      </a:r>
-                    </a:p>
-                  </a:txBody>
-                  <a:tcPr/>
-                </a:tc>
-                <a:tc>
-                  <a:txBody>
-                    <a:bodyPr/>
-                    <a:lstStyle/>
-                    <a:p>
-                      <a:pPr>
-                        <a:defRPr sz="1200">
-                          <a:solidFill>
-                            <a:srgbClr val="222222"/>
-                          </a:solidFill>
-                        </a:defRPr>
-                      </a:pPr>
-                      <a:r>
-                        <a:t>青少年足球夏令营</a:t>
-                      </a:r>
-                      <a:br/>
-                      <a:r>
-                        <a:t>企业足球团建</a:t>
-                      </a:r>
-                      <a:br/>
-                      <a:r>
-                        <a:t>球员培训课</a:t>
-                      </a:r>
-                    </a:p>
-                  </a:txBody>
-                  <a:tcPr/>
-                </a:tc>
-                <a:tc>
-                  <a:txBody>
-                    <a:bodyPr/>
-                    <a:lstStyle/>
-                    <a:p>
-                      <a:pPr>
-                        <a:defRPr sz="1200">
-                          <a:solidFill>
-                            <a:srgbClr val="222222"/>
-                          </a:solidFill>
-                        </a:defRPr>
-                      </a:pPr>
-                      <a:r>
-                        <a:t>¥1500-3000/人</a:t>
-                      </a:r>
-                      <a:br/>
-                      <a:r>
-                        <a:t>¥5000-15000/场</a:t>
-                      </a:r>
-                      <a:br/>
-                      <a:r>
-                        <a:t>¥500-1000/课时</a:t>
-                      </a:r>
-                    </a:p>
-                  </a:txBody>
-                  <a:tcPr/>
-                </a:tc>
-                <a:tc>
-                  <a:txBody>
-                    <a:bodyPr/>
-                    <a:lstStyle/>
-                    <a:p>
-                      <a:pPr>
-                        <a:defRPr sz="1200">
-                          <a:solidFill>
-                            <a:srgbClr val="222222"/>
-                          </a:solidFill>
-                        </a:defRPr>
-                      </a:pPr>
-                      <a:r>
-                        <a:t>粉丝≥5万</a:t>
-                      </a:r>
-                      <a:br/>
-                      <a:r>
-                        <a:t>有接待能力</a:t>
-                      </a:r>
-                    </a:p>
-                  </a:txBody>
-                  <a:tcPr/>
-                </a:tc>
-              </a:tr>
-              <a:tr h="822960">
-                <a:tc>
-                  <a:txBody>
-                    <a:bodyPr/>
-                    <a:lstStyle/>
-                    <a:p>
-                      <a:pPr>
-                        <a:defRPr sz="1200">
-                          <a:solidFill>
-                            <a:srgbClr val="222222"/>
-                          </a:solidFill>
-                        </a:defRPr>
-                      </a:pPr>
-                      <a:r>
-                        <a:t>文旅期</a:t>
-                      </a:r>
-                    </a:p>
-                  </a:txBody>
-                  <a:tcPr>
-                    <a:solidFill>
-                      <a:srgbClr val="F4F7F4"/>
-                    </a:solidFill>
-                  </a:tcPr>
-                </a:tc>
-                <a:tc>
-                  <a:txBody>
-                    <a:bodyPr/>
-                    <a:lstStyle/>
-                    <a:p>
-                      <a:pPr>
-                        <a:defRPr sz="1200">
-                          <a:solidFill>
-                            <a:srgbClr val="222222"/>
-                          </a:solidFill>
-                        </a:defRPr>
-                      </a:pPr>
-                      <a:r>
-                        <a:t>月9-12</a:t>
-                      </a:r>
-                    </a:p>
-                  </a:txBody>
-                  <a:tcPr>
-                    <a:solidFill>
-                      <a:srgbClr val="F4F7F4"/>
-                    </a:solidFill>
-                  </a:tcPr>
-                </a:tc>
-                <a:tc>
-                  <a:txBody>
-                    <a:bodyPr/>
-                    <a:lstStyle/>
-                    <a:p>
-                      <a:pPr>
-                        <a:defRPr sz="1200">
-                          <a:solidFill>
-                            <a:srgbClr val="222222"/>
-                          </a:solidFill>
-                        </a:defRPr>
-                      </a:pPr>
-                      <a:r>
-                        <a:t>体育旅游线路分成</a:t>
-                      </a:r>
-                      <a:br/>
-                      <a:r>
-                        <a:t>运动品牌赞助</a:t>
-                      </a:r>
-                      <a:br/>
-                      <a:r>
-                        <a:t>直播带货</a:t>
-                      </a:r>
-                    </a:p>
-                  </a:txBody>
-                  <a:tcPr>
-                    <a:solidFill>
-                      <a:srgbClr val="F4F7F4"/>
-                    </a:solidFill>
-                  </a:tcPr>
-                </a:tc>
-                <a:tc>
-                  <a:txBody>
-                    <a:bodyPr/>
-                    <a:lstStyle/>
-                    <a:p>
-                      <a:pPr>
-                        <a:defRPr sz="1200">
-                          <a:solidFill>
-                            <a:srgbClr val="222222"/>
-                          </a:solidFill>
-                        </a:defRPr>
-                      </a:pPr>
-                      <a:r>
-                        <a:t>按人次分成</a:t>
-                      </a:r>
-                      <a:br/>
-                      <a:r>
-                        <a:t>¥10000-50000/年</a:t>
-                      </a:r>
-                      <a:br/>
-                      <a:r>
-                        <a:t>¥2000-5000/场</a:t>
-                      </a:r>
-                    </a:p>
-                  </a:txBody>
-                  <a:tcPr>
-                    <a:solidFill>
-                      <a:srgbClr val="F4F7F4"/>
-                    </a:solidFill>
-                  </a:tcPr>
-                </a:tc>
-                <a:tc>
-                  <a:txBody>
-                    <a:bodyPr/>
-                    <a:lstStyle/>
-                    <a:p>
-                      <a:pPr>
-                        <a:defRPr sz="1200">
-                          <a:solidFill>
-                            <a:srgbClr val="222222"/>
-                          </a:solidFill>
-                        </a:defRPr>
-                      </a:pPr>
-                      <a:r>
-                        <a:t>粉丝≥10万</a:t>
-                      </a:r>
-                      <a:br/>
-                      <a:r>
-                        <a:t>文旅局合作</a:t>
-                      </a:r>
-                    </a:p>
-                  </a:txBody>
-                  <a:tcPr>
-                    <a:solidFill>
-                      <a:srgbClr val="F4F7F4"/>
-                    </a:solidFill>
-                  </a:tcPr>
-                </a:tc>
-              </a:tr>
-            </a:tbl>
-          </a:graphicData>
-        </a:graphic>
-      </p:graphicFrame>
+        </p:nvSpPr>
+        <p:spPr>
+          <a:xfrm>
+            <a:off x="274320" y="1188720"/>
+            <a:ext cx="2743200" cy="5029200"/>
+          </a:xfrm>
+          <a:prstGeom prst="roundRect">
+            <a:avLst/>
+          </a:prstGeom>
+          <a:solidFill>
+            <a:srgbClr val="FFFFFF"/>
+          </a:solidFill>
+          <a:ln>
+            <a:noFill/>
+          </a:ln>
+          <a:effectLst/>
+        </p:spPr>
+        <p:style>
+          <a:lnRef idx="1">
+            <a:schemeClr val="accent1"/>
+          </a:lnRef>
+          <a:fillRef idx="3">
+            <a:schemeClr val="accent1"/>
+          </a:fillRef>
+          <a:effectRef idx="2">
+            <a:schemeClr val="accent1"/>
+          </a:effectRef>
+          <a:fontRef idx="minor">
+            <a:schemeClr val="lt1"/>
+          </a:fontRef>
+        </p:style>
+        <p:txBody>
+          <a:bodyPr rtlCol="0" anchor="ctr" wrap="square" lIns="177800" rIns="177800" tIns="177800"/>
+          <a:lstStyle/>
+          <a:p>
+            <a:pPr algn="ctr">
+              <a:spcAft>
+                <a:spcPts val="800"/>
+              </a:spcAft>
+              <a:defRPr sz="1400" b="1">
+                <a:solidFill>
+                  <a:srgbClr val="2D5016"/>
+                </a:solidFill>
+              </a:defRPr>
+            </a:pPr>
+            <a:r>
+              <a:t>烟消云 · 高频带货型</a:t>
+            </a:r>
+          </a:p>
+          <a:p>
+            <a:pPr>
+              <a:spcAft>
+                <a:spcPts val="200"/>
+              </a:spcAft>
+              <a:defRPr sz="1100">
+                <a:solidFill>
+                  <a:srgbClr val="666666"/>
+                </a:solidFill>
+              </a:defRPr>
+            </a:pPr>
+            <a:r>
+              <a:t>模式：内容引流→IP信任→橱窗带货</a:t>
+            </a:r>
+          </a:p>
+          <a:p>
+            <a:pPr>
+              <a:spcAft>
+                <a:spcPts val="200"/>
+              </a:spcAft>
+              <a:defRPr sz="1100">
+                <a:solidFill>
+                  <a:srgbClr val="666666"/>
+                </a:solidFill>
+              </a:defRPr>
+            </a:pPr>
+            <a:r>
+              <a:t>优势：791条，高频输出</a:t>
+            </a:r>
+          </a:p>
+          <a:p>
+            <a:pPr>
+              <a:spcAft>
+                <a:spcPts val="200"/>
+              </a:spcAft>
+              <a:defRPr sz="1100">
+                <a:solidFill>
+                  <a:srgbClr val="666666"/>
+                </a:solidFill>
+              </a:defRPr>
+            </a:pPr>
+            <a:r>
+              <a:t>局限：个人精力瓶颈</a:t>
+            </a:r>
+          </a:p>
+          <a:p>
+            <a:pPr>
+              <a:spcAft>
+                <a:spcPts val="200"/>
+              </a:spcAft>
+              <a:defRPr sz="1100">
+                <a:solidFill>
+                  <a:srgbClr val="666666"/>
+                </a:solidFill>
+              </a:defRPr>
+            </a:pPr>
+            <a:r>
+              <a:t>启示：要高频，但不能只靠一人</a:t>
+            </a:r>
+          </a:p>
+        </p:txBody>
+      </p:sp>
+      <p:sp>
+        <p:nvSpPr>
+          <p:cNvPr id="4" name="Rectangle 3"/>
+          <p:cNvSpPr/>
+          <p:nvPr/>
+        </p:nvSpPr>
+        <p:spPr>
+          <a:xfrm>
+            <a:off x="274320" y="1188720"/>
+            <a:ext cx="2743200" cy="45720"/>
+          </a:xfrm>
+          <a:prstGeom prst="rect">
+            <a:avLst/>
+          </a:prstGeom>
+          <a:solidFill>
+            <a:srgbClr val="2D5016"/>
+          </a:solidFill>
+          <a:ln>
+            <a:noFill/>
+          </a:ln>
+        </p:spPr>
+        <p:style>
+          <a:lnRef idx="1">
+            <a:schemeClr val="accent1"/>
+          </a:lnRef>
+          <a:fillRef idx="3">
+            <a:schemeClr val="accent1"/>
+          </a:fillRef>
+          <a:effectRef idx="2">
+            <a:schemeClr val="accent1"/>
+          </a:effectRef>
+          <a:fontRef idx="minor">
+            <a:schemeClr val="lt1"/>
+          </a:fontRef>
+        </p:style>
+        <p:txBody>
+          <a:bodyPr rtlCol="0" anchor="ctr"/>
+          <a:lstStyle/>
+          <a:p>
+            <a:pPr algn="ctr"/>
+          </a:p>
+        </p:txBody>
+      </p:sp>
+      <p:sp>
+        <p:nvSpPr>
+          <p:cNvPr id="5" name="Rounded Rectangle 4"/>
+          <p:cNvSpPr/>
+          <p:nvPr/>
+        </p:nvSpPr>
+        <p:spPr>
+          <a:xfrm>
+            <a:off x="3200400" y="1188720"/>
+            <a:ext cx="2743200" cy="5029200"/>
+          </a:xfrm>
+          <a:prstGeom prst="roundRect">
+            <a:avLst/>
+          </a:prstGeom>
+          <a:solidFill>
+            <a:srgbClr val="FFFFFF"/>
+          </a:solidFill>
+          <a:ln>
+            <a:noFill/>
+          </a:ln>
+          <a:effectLst/>
+        </p:spPr>
+        <p:style>
+          <a:lnRef idx="1">
+            <a:schemeClr val="accent1"/>
+          </a:lnRef>
+          <a:fillRef idx="3">
+            <a:schemeClr val="accent1"/>
+          </a:fillRef>
+          <a:effectRef idx="2">
+            <a:schemeClr val="accent1"/>
+          </a:effectRef>
+          <a:fontRef idx="minor">
+            <a:schemeClr val="lt1"/>
+          </a:fontRef>
+        </p:style>
+        <p:txBody>
+          <a:bodyPr rtlCol="0" anchor="ctr" wrap="square" lIns="177800" rIns="177800" tIns="177800"/>
+          <a:lstStyle/>
+          <a:p>
+            <a:pPr algn="ctr">
+              <a:spcAft>
+                <a:spcPts val="800"/>
+              </a:spcAft>
+              <a:defRPr sz="1400" b="1">
+                <a:solidFill>
+                  <a:srgbClr val="2D5016"/>
+                </a:solidFill>
+              </a:defRPr>
+            </a:pPr>
+            <a:r>
+              <a:t>范文栋 · 一动作IP型</a:t>
+            </a:r>
+          </a:p>
+          <a:p>
+            <a:pPr>
+              <a:spcAft>
+                <a:spcPts val="200"/>
+              </a:spcAft>
+              <a:defRPr sz="1100">
+                <a:solidFill>
+                  <a:srgbClr val="666666"/>
+                </a:solidFill>
+              </a:defRPr>
+            </a:pPr>
+            <a:r>
+              <a:t>模式：公益IP→政府背书→直播变现</a:t>
+            </a:r>
+          </a:p>
+          <a:p>
+            <a:pPr>
+              <a:spcAft>
+                <a:spcPts val="200"/>
+              </a:spcAft>
+              <a:defRPr sz="1100">
+                <a:solidFill>
+                  <a:srgbClr val="666666"/>
+                </a:solidFill>
+              </a:defRPr>
+            </a:pPr>
+            <a:r>
+              <a:t>优势：「安路灯」标签极强</a:t>
+            </a:r>
+          </a:p>
+          <a:p>
+            <a:pPr>
+              <a:spcAft>
+                <a:spcPts val="200"/>
+              </a:spcAft>
+              <a:defRPr sz="1100">
+                <a:solidFill>
+                  <a:srgbClr val="666666"/>
+                </a:solidFill>
+              </a:defRPr>
+            </a:pPr>
+            <a:r>
+              <a:t>局限：公益属性影响商业空间</a:t>
+            </a:r>
+          </a:p>
+          <a:p>
+            <a:pPr>
+              <a:spcAft>
+                <a:spcPts val="200"/>
+              </a:spcAft>
+              <a:defRPr sz="1100">
+                <a:solidFill>
+                  <a:srgbClr val="666666"/>
+                </a:solidFill>
+              </a:defRPr>
+            </a:pPr>
+            <a:r>
+              <a:t>启示：需要一个标志动作</a:t>
+            </a:r>
+          </a:p>
+        </p:txBody>
+      </p:sp>
+      <p:sp>
+        <p:nvSpPr>
+          <p:cNvPr id="6" name="Rectangle 5"/>
+          <p:cNvSpPr/>
+          <p:nvPr/>
+        </p:nvSpPr>
+        <p:spPr>
+          <a:xfrm>
+            <a:off x="3200400" y="1188720"/>
+            <a:ext cx="2743200" cy="45720"/>
+          </a:xfrm>
+          <a:prstGeom prst="rect">
+            <a:avLst/>
+          </a:prstGeom>
+          <a:solidFill>
+            <a:srgbClr val="D4A017"/>
+          </a:solidFill>
+          <a:ln>
+            <a:noFill/>
+          </a:ln>
+        </p:spPr>
+        <p:style>
+          <a:lnRef idx="1">
+            <a:schemeClr val="accent1"/>
+          </a:lnRef>
+          <a:fillRef idx="3">
+            <a:schemeClr val="accent1"/>
+          </a:fillRef>
+          <a:effectRef idx="2">
+            <a:schemeClr val="accent1"/>
+          </a:effectRef>
+          <a:fontRef idx="minor">
+            <a:schemeClr val="lt1"/>
+          </a:fontRef>
+        </p:style>
+        <p:txBody>
+          <a:bodyPr rtlCol="0" anchor="ctr"/>
+          <a:lstStyle/>
+          <a:p>
+            <a:pPr algn="ctr"/>
+          </a:p>
+        </p:txBody>
+      </p:sp>
+      <p:sp>
+        <p:nvSpPr>
+          <p:cNvPr id="7" name="Rounded Rectangle 6"/>
+          <p:cNvSpPr/>
+          <p:nvPr/>
+        </p:nvSpPr>
+        <p:spPr>
+          <a:xfrm>
+            <a:off x="6126480" y="1188720"/>
+            <a:ext cx="2743200" cy="5029200"/>
+          </a:xfrm>
+          <a:prstGeom prst="roundRect">
+            <a:avLst/>
+          </a:prstGeom>
+          <a:solidFill>
+            <a:srgbClr val="FFFFFF"/>
+          </a:solidFill>
+          <a:ln>
+            <a:noFill/>
+          </a:ln>
+          <a:effectLst/>
+        </p:spPr>
+        <p:style>
+          <a:lnRef idx="1">
+            <a:schemeClr val="accent1"/>
+          </a:lnRef>
+          <a:fillRef idx="3">
+            <a:schemeClr val="accent1"/>
+          </a:fillRef>
+          <a:effectRef idx="2">
+            <a:schemeClr val="accent1"/>
+          </a:effectRef>
+          <a:fontRef idx="minor">
+            <a:schemeClr val="lt1"/>
+          </a:fontRef>
+        </p:style>
+        <p:txBody>
+          <a:bodyPr rtlCol="0" anchor="ctr" wrap="square" lIns="177800" rIns="177800" tIns="177800"/>
+          <a:lstStyle/>
+          <a:p>
+            <a:pPr algn="ctr">
+              <a:spcAft>
+                <a:spcPts val="800"/>
+              </a:spcAft>
+              <a:defRPr sz="1400" b="1">
+                <a:solidFill>
+                  <a:srgbClr val="2D5016"/>
+                </a:solidFill>
+              </a:defRPr>
+            </a:pPr>
+            <a:r>
+              <a:t>小江支书 · 少而精型</a:t>
+            </a:r>
+          </a:p>
+          <a:p>
+            <a:pPr>
+              <a:spcAft>
+                <a:spcPts val="200"/>
+              </a:spcAft>
+              <a:defRPr sz="1100">
+                <a:solidFill>
+                  <a:srgbClr val="666666"/>
+                </a:solidFill>
+              </a:defRPr>
+            </a:pPr>
+            <a:r>
+              <a:t>模式：少而精→人格信任→长期变现</a:t>
+            </a:r>
+          </a:p>
+          <a:p>
+            <a:pPr>
+              <a:spcAft>
+                <a:spcPts val="200"/>
+              </a:spcAft>
+              <a:defRPr sz="1100">
+                <a:solidFill>
+                  <a:srgbClr val="666666"/>
+                </a:solidFill>
+              </a:defRPr>
+            </a:pPr>
+            <a:r>
+              <a:t>优势：34条获高粘性，转化率极高</a:t>
+            </a:r>
+          </a:p>
+          <a:p>
+            <a:pPr>
+              <a:spcAft>
+                <a:spcPts val="200"/>
+              </a:spcAft>
+              <a:defRPr sz="1100">
+                <a:solidFill>
+                  <a:srgbClr val="666666"/>
+                </a:solidFill>
+              </a:defRPr>
+            </a:pPr>
+            <a:r>
+              <a:t>局限：变现路径不清晰</a:t>
+            </a:r>
+          </a:p>
+          <a:p>
+            <a:pPr>
+              <a:spcAft>
+                <a:spcPts val="200"/>
+              </a:spcAft>
+              <a:defRPr sz="1100">
+                <a:solidFill>
+                  <a:srgbClr val="666666"/>
+                </a:solidFill>
+              </a:defRPr>
+            </a:pPr>
+            <a:r>
+              <a:t>启示：不求日更，每条精品</a:t>
+            </a:r>
+          </a:p>
+        </p:txBody>
+      </p:sp>
+      <p:sp>
+        <p:nvSpPr>
+          <p:cNvPr id="8" name="Rectangle 7"/>
+          <p:cNvSpPr/>
+          <p:nvPr/>
+        </p:nvSpPr>
+        <p:spPr>
+          <a:xfrm>
+            <a:off x="6126480" y="1188720"/>
+            <a:ext cx="2743200" cy="45720"/>
+          </a:xfrm>
+          <a:prstGeom prst="rect">
+            <a:avLst/>
+          </a:prstGeom>
+          <a:solidFill>
+            <a:srgbClr val="2D5016"/>
+          </a:solidFill>
+          <a:ln>
+            <a:noFill/>
+          </a:ln>
+        </p:spPr>
+        <p:style>
+          <a:lnRef idx="1">
+            <a:schemeClr val="accent1"/>
+          </a:lnRef>
+          <a:fillRef idx="3">
+            <a:schemeClr val="accent1"/>
+          </a:fillRef>
+          <a:effectRef idx="2">
+            <a:schemeClr val="accent1"/>
+          </a:effectRef>
+          <a:fontRef idx="minor">
+            <a:schemeClr val="lt1"/>
+          </a:fontRef>
+        </p:style>
+        <p:txBody>
+          <a:bodyPr rtlCol="0" anchor="ctr"/>
+          <a:lstStyle/>
+          <a:p>
+            <a:pPr algn="ctr"/>
+          </a:p>
+        </p:txBody>
+      </p:sp>
+      <p:sp>
+        <p:nvSpPr>
+          <p:cNvPr id="9" name="Rounded Rectangle 8"/>
+          <p:cNvSpPr/>
+          <p:nvPr/>
+        </p:nvSpPr>
+        <p:spPr>
+          <a:xfrm>
+            <a:off x="9052560" y="1188720"/>
+            <a:ext cx="2743200" cy="5029200"/>
+          </a:xfrm>
+          <a:prstGeom prst="roundRect">
+            <a:avLst/>
+          </a:prstGeom>
+          <a:solidFill>
+            <a:srgbClr val="FFFFFF"/>
+          </a:solidFill>
+          <a:ln>
+            <a:noFill/>
+          </a:ln>
+          <a:effectLst/>
+        </p:spPr>
+        <p:style>
+          <a:lnRef idx="1">
+            <a:schemeClr val="accent1"/>
+          </a:lnRef>
+          <a:fillRef idx="3">
+            <a:schemeClr val="accent1"/>
+          </a:fillRef>
+          <a:effectRef idx="2">
+            <a:schemeClr val="accent1"/>
+          </a:effectRef>
+          <a:fontRef idx="minor">
+            <a:schemeClr val="lt1"/>
+          </a:fontRef>
+        </p:style>
+        <p:txBody>
+          <a:bodyPr rtlCol="0" anchor="ctr" wrap="square" lIns="177800" rIns="177800" tIns="177800"/>
+          <a:lstStyle/>
+          <a:p>
+            <a:pPr algn="ctr">
+              <a:spcAft>
+                <a:spcPts val="800"/>
+              </a:spcAft>
+              <a:defRPr sz="1400" b="1">
+                <a:solidFill>
+                  <a:srgbClr val="2D5016"/>
+                </a:solidFill>
+              </a:defRPr>
+            </a:pPr>
+            <a:r>
+              <a:t>张爱军 · 产品锚型</a:t>
+            </a:r>
+          </a:p>
+          <a:p>
+            <a:pPr>
+              <a:spcAft>
+                <a:spcPts val="200"/>
+              </a:spcAft>
+              <a:defRPr sz="1100">
+                <a:solidFill>
+                  <a:srgbClr val="666666"/>
+                </a:solidFill>
+              </a:defRPr>
+            </a:pPr>
+            <a:r>
+              <a:t>模式：特产锚点→品类绑定→产地溢价</a:t>
+            </a:r>
+          </a:p>
+          <a:p>
+            <a:pPr>
+              <a:spcAft>
+                <a:spcPts val="200"/>
+              </a:spcAft>
+              <a:defRPr sz="1100">
+                <a:solidFill>
+                  <a:srgbClr val="666666"/>
+                </a:solidFill>
+              </a:defRPr>
+            </a:pPr>
+            <a:r>
+              <a:t>优势：「苹果」认知零成本</a:t>
+            </a:r>
+          </a:p>
+          <a:p>
+            <a:pPr>
+              <a:spcAft>
+                <a:spcPts val="200"/>
+              </a:spcAft>
+              <a:defRPr sz="1100">
+                <a:solidFill>
+                  <a:srgbClr val="666666"/>
+                </a:solidFill>
+              </a:defRPr>
+            </a:pPr>
+            <a:r>
+              <a:t>局限：品类太窄扩展难</a:t>
+            </a:r>
+          </a:p>
+          <a:p>
+            <a:pPr>
+              <a:spcAft>
+                <a:spcPts val="200"/>
+              </a:spcAft>
+              <a:defRPr sz="1100">
+                <a:solidFill>
+                  <a:srgbClr val="666666"/>
+                </a:solidFill>
+              </a:defRPr>
+            </a:pPr>
+            <a:r>
+              <a:t>启示：「冠军村」就是我们的苹果</a:t>
+            </a:r>
+          </a:p>
+        </p:txBody>
+      </p:sp>
+      <p:sp>
+        <p:nvSpPr>
+          <p:cNvPr id="10" name="Rectangle 9"/>
+          <p:cNvSpPr/>
+          <p:nvPr/>
+        </p:nvSpPr>
+        <p:spPr>
+          <a:xfrm>
+            <a:off x="9052560" y="1188720"/>
+            <a:ext cx="2743200" cy="45720"/>
+          </a:xfrm>
+          <a:prstGeom prst="rect">
+            <a:avLst/>
+          </a:prstGeom>
+          <a:solidFill>
+            <a:srgbClr val="2D5016"/>
+          </a:solidFill>
+          <a:ln>
+            <a:noFill/>
+          </a:ln>
+        </p:spPr>
+        <p:style>
+          <a:lnRef idx="1">
+            <a:schemeClr val="accent1"/>
+          </a:lnRef>
+          <a:fillRef idx="3">
+            <a:schemeClr val="accent1"/>
+          </a:fillRef>
+          <a:effectRef idx="2">
+            <a:schemeClr val="accent1"/>
+          </a:effectRef>
+          <a:fontRef idx="minor">
+            <a:schemeClr val="lt1"/>
+          </a:fontRef>
+        </p:style>
+        <p:txBody>
+          <a:bodyPr rtlCol="0" anchor="ctr"/>
+          <a:lstStyle/>
+          <a:p>
+            <a:pPr algn="ctr"/>
+          </a:p>
+        </p:txBody>
+      </p:sp>
     </p:spTree>
   </p:cSld>
   <p:clrMapOvr>
@@ -7967,6 +9562,14 @@
 <file path=ppt/slides/slide8.xml><?xml version="1.0" encoding="utf-8"?>
 <p:sld xmlns:a="http://schemas.openxmlformats.org/drawingml/2006/main" xmlns:p="http://schemas.openxmlformats.org/presentationml/2006/main" xmlns:r="http://schemas.openxmlformats.org/officeDocument/2006/relationships">
   <p:cSld>
+    <p:bg>
+      <p:bgPr>
+        <a:solidFill>
+          <a:srgbClr val="2D5016"/>
+        </a:solidFill>
+        <a:effectLst/>
+      </p:bgPr>
+    </p:bg>
     <p:spTree>
       <p:nvGrpSpPr>
         <p:cNvPr id="1" name=""/>
@@ -7982,8 +9585,8 @@
         </p:nvSpPr>
         <p:spPr>
           <a:xfrm>
-            <a:off x="457200" y="274320"/>
-            <a:ext cx="4572000" cy="731520"/>
+            <a:off x="457200" y="2743200"/>
+            <a:ext cx="10972800" cy="1371600"/>
           </a:xfrm>
           <a:prstGeom prst="rect">
             <a:avLst/>
@@ -7996,266 +9599,50 @@
           </a:bodyPr>
           <a:lstStyle/>
           <a:p>
-            <a:pPr algn="l">
-              <a:defRPr sz="3000" b="1">
-                <a:solidFill>
-                  <a:srgbClr val="1A5C2A"/>
-                </a:solidFill>
-              </a:defRPr>
-            </a:pPr>
-            <a:r>
-              <a:t>前期（月1-3）怎么做？</a:t>
-            </a:r>
-          </a:p>
-        </p:txBody>
-      </p:sp>
-      <p:sp>
-        <p:nvSpPr>
-          <p:cNvPr id="3" name="Rectangle 2"/>
-          <p:cNvSpPr/>
+            <a:pPr algn="ctr">
+              <a:defRPr sz="8000" b="1">
+                <a:solidFill>
+                  <a:srgbClr val="FFFFFF"/>
+                </a:solidFill>
+              </a:defRPr>
+            </a:pPr>
+            <a:r>
+              <a:t>03</a:t>
+            </a:r>
+          </a:p>
+        </p:txBody>
+      </p:sp>
+      <p:sp>
+        <p:nvSpPr>
+          <p:cNvPr id="3" name="TextBox 2"/>
+          <p:cNvSpPr txBox="1"/>
           <p:nvPr/>
         </p:nvSpPr>
         <p:spPr>
           <a:xfrm>
-            <a:off x="274320" y="1188720"/>
-            <a:ext cx="3566160" cy="5029200"/>
+            <a:off x="457200" y="4572000"/>
+            <a:ext cx="10972800" cy="731520"/>
           </a:xfrm>
           <a:prstGeom prst="rect">
             <a:avLst/>
           </a:prstGeom>
-          <a:solidFill>
-            <a:srgbClr val="F4F7F4"/>
-          </a:solidFill>
-          <a:ln w="25400">
-            <a:solidFill>
-              <a:srgbClr val="1A5C2A"/>
-            </a:solidFill>
-          </a:ln>
+          <a:noFill/>
         </p:spPr>
-        <p:style>
-          <a:lnRef idx="1">
-            <a:schemeClr val="accent1"/>
-          </a:lnRef>
-          <a:fillRef idx="3">
-            <a:schemeClr val="accent1"/>
-          </a:fillRef>
-          <a:effectRef idx="2">
-            <a:schemeClr val="accent1"/>
-          </a:effectRef>
-          <a:fontRef idx="minor">
-            <a:schemeClr val="lt1"/>
-          </a:fontRef>
-        </p:style>
-        <p:txBody>
-          <a:bodyPr rtlCol="0" anchor="ctr" wrap="square" lIns="152400" rIns="152400" tIns="127000"/>
+        <p:txBody>
+          <a:bodyPr wrap="square">
+            <a:spAutoFit/>
+          </a:bodyPr>
           <a:lstStyle/>
           <a:p>
             <a:pPr algn="ctr">
-              <a:defRPr sz="1300" b="1">
-                <a:solidFill>
-                  <a:srgbClr val="1A5C2A"/>
-                </a:solidFill>
-              </a:defRPr>
-            </a:pPr>
-            <a:r>
-              <a:t>📱 内容策略</a:t>
-            </a:r>
-          </a:p>
-          <a:p>
-            <a:pPr>
-              <a:spcBef>
-                <a:spcPts val="600"/>
-              </a:spcBef>
-              <a:defRPr sz="1100">
-                <a:solidFill>
-                  <a:srgbClr val="666666"/>
-                </a:solidFill>
-              </a:defRPr>
-            </a:pPr>
-            <a:r>
-              <a:t>• 每周3条，雷打不动</a:t>
-            </a:r>
-            <a:br/>
-            <a:r>
-              <a:t>• 前4周不求爆款，求人设统一</a:t>
-            </a:r>
-            <a:br/>
-            <a:r>
-              <a:t>• 王健出镜率 ≥ 80%</a:t>
-            </a:r>
-            <a:br/>
-            <a:r>
-              <a:t>• 评论区100%回复</a:t>
-            </a:r>
-            <a:br/>
-            <a:r>
-              <a:t>• 固定发布时间：18:30</a:t>
-            </a:r>
-          </a:p>
-        </p:txBody>
-      </p:sp>
-      <p:sp>
-        <p:nvSpPr>
-          <p:cNvPr id="4" name="Rectangle 3"/>
-          <p:cNvSpPr/>
-          <p:nvPr/>
-        </p:nvSpPr>
-        <p:spPr>
-          <a:xfrm>
-            <a:off x="4114800" y="1188720"/>
-            <a:ext cx="3566160" cy="5029200"/>
-          </a:xfrm>
-          <a:prstGeom prst="rect">
-            <a:avLst/>
-          </a:prstGeom>
-          <a:solidFill>
-            <a:srgbClr val="FFF8E1"/>
-          </a:solidFill>
-          <a:ln w="25400">
-            <a:solidFill>
-              <a:srgbClr val="E8A817"/>
-            </a:solidFill>
-          </a:ln>
-        </p:spPr>
-        <p:style>
-          <a:lnRef idx="1">
-            <a:schemeClr val="accent1"/>
-          </a:lnRef>
-          <a:fillRef idx="3">
-            <a:schemeClr val="accent1"/>
-          </a:fillRef>
-          <a:effectRef idx="2">
-            <a:schemeClr val="accent1"/>
-          </a:effectRef>
-          <a:fontRef idx="minor">
-            <a:schemeClr val="lt1"/>
-          </a:fontRef>
-        </p:style>
-        <p:txBody>
-          <a:bodyPr rtlCol="0" anchor="ctr" wrap="square" lIns="152400" rIns="152400" tIns="127000"/>
-          <a:lstStyle/>
-          <a:p>
-            <a:pPr algn="ctr">
-              <a:defRPr sz="1300" b="1">
-                <a:solidFill>
-                  <a:srgbClr val="1A5C2A"/>
-                </a:solidFill>
-              </a:defRPr>
-            </a:pPr>
-            <a:r>
-              <a:t>🔧 设备策略</a:t>
-            </a:r>
-          </a:p>
-          <a:p>
-            <a:pPr>
-              <a:spcBef>
-                <a:spcPts val="600"/>
-              </a:spcBef>
-              <a:defRPr sz="1100">
-                <a:solidFill>
-                  <a:srgbClr val="666666"/>
-                </a:solidFill>
-              </a:defRPr>
-            </a:pPr>
-            <a:r>
-              <a:t>• 先用手机+稳定器（已有）</a:t>
-            </a:r>
-            <a:br/>
-            <a:r>
-              <a:t>• 必买：无线领夹麦</a:t>
-            </a:r>
-            <a:br/>
-            <a:r>
-              <a:t>• 航拍：借/租，不急买</a:t>
-            </a:r>
-            <a:br/>
-            <a:r>
-              <a:t>• 花在「内容」上的时间</a:t>
-            </a:r>
-            <a:br/>
-            <a:r>
-              <a:t>   &gt; 花在「设备」上的钱</a:t>
-            </a:r>
-          </a:p>
-        </p:txBody>
-      </p:sp>
-      <p:sp>
-        <p:nvSpPr>
-          <p:cNvPr id="5" name="Rectangle 4"/>
-          <p:cNvSpPr/>
-          <p:nvPr/>
-        </p:nvSpPr>
-        <p:spPr>
-          <a:xfrm>
-            <a:off x="7955279" y="1188720"/>
-            <a:ext cx="3566160" cy="5029200"/>
-          </a:xfrm>
-          <a:prstGeom prst="rect">
-            <a:avLst/>
-          </a:prstGeom>
-          <a:solidFill>
-            <a:srgbClr val="F4F7F4"/>
-          </a:solidFill>
-          <a:ln w="25400">
-            <a:solidFill>
-              <a:srgbClr val="1A5C2A"/>
-            </a:solidFill>
-          </a:ln>
-        </p:spPr>
-        <p:style>
-          <a:lnRef idx="1">
-            <a:schemeClr val="accent1"/>
-          </a:lnRef>
-          <a:fillRef idx="3">
-            <a:schemeClr val="accent1"/>
-          </a:fillRef>
-          <a:effectRef idx="2">
-            <a:schemeClr val="accent1"/>
-          </a:effectRef>
-          <a:fontRef idx="minor">
-            <a:schemeClr val="lt1"/>
-          </a:fontRef>
-        </p:style>
-        <p:txBody>
-          <a:bodyPr rtlCol="0" anchor="ctr" wrap="square" lIns="152400" rIns="152400" tIns="127000"/>
-          <a:lstStyle/>
-          <a:p>
-            <a:pPr algn="ctr">
-              <a:defRPr sz="1300" b="1">
-                <a:solidFill>
-                  <a:srgbClr val="1A5C2A"/>
-                </a:solidFill>
-              </a:defRPr>
-            </a:pPr>
-            <a:r>
-              <a:t>📊 数据策略</a:t>
-            </a:r>
-          </a:p>
-          <a:p>
-            <a:pPr>
-              <a:spcBef>
-                <a:spcPts val="600"/>
-              </a:spcBef>
-              <a:defRPr sz="1100">
-                <a:solidFill>
-                  <a:srgbClr val="666666"/>
-                </a:solidFill>
-              </a:defRPr>
-            </a:pPr>
-            <a:r>
-              <a:t>• 周复盘：完播率+互动率+涨粉</a:t>
-            </a:r>
-            <a:br/>
-            <a:r>
-              <a:t>• 找到自己的爆款因子</a:t>
-            </a:r>
-            <a:br/>
-            <a:r>
-              <a:t>• 每周刷4个同类对标账号</a:t>
-            </a:r>
-            <a:br/>
-            <a:r>
-              <a:t>• 第4周做一次方向微调</a:t>
+              <a:defRPr sz="2400" b="0">
+                <a:solidFill>
+                  <a:srgbClr val="D4A017"/>
+                </a:solidFill>
+              </a:defRPr>
+            </a:pPr>
+            <a:r>
+              <a:t>怎么盈利？四阶梯变现路径</a:t>
             </a:r>
           </a:p>
         </p:txBody>
@@ -8286,8 +9673,8 @@
         </p:nvSpPr>
         <p:spPr>
           <a:xfrm>
-            <a:off x="457200" y="274320"/>
-            <a:ext cx="4572000" cy="731520"/>
+            <a:off x="457200" y="365760"/>
+            <a:ext cx="7315200" cy="640080"/>
           </a:xfrm>
           <a:prstGeom prst="rect">
             <a:avLst/>
@@ -8303,263 +9690,32 @@
             <a:pPr algn="l">
               <a:defRPr sz="3000" b="1">
                 <a:solidFill>
-                  <a:srgbClr val="1A5C2A"/>
-                </a:solidFill>
-              </a:defRPr>
-            </a:pPr>
-            <a:r>
-              <a:t>什么时候可以开始变现？</a:t>
-            </a:r>
-          </a:p>
-        </p:txBody>
-      </p:sp>
-      <p:sp>
-        <p:nvSpPr>
-          <p:cNvPr id="3" name="Rectangle 2"/>
+                  <a:srgbClr val="2D5016"/>
+                </a:solidFill>
+              </a:defRPr>
+            </a:pPr>
+            <a:r>
+              <a:t>03  四阶梯变现路径</a:t>
+            </a:r>
+          </a:p>
+        </p:txBody>
+      </p:sp>
+      <p:sp>
+        <p:nvSpPr>
+          <p:cNvPr id="3" name="Oval 2"/>
           <p:cNvSpPr/>
           <p:nvPr/>
         </p:nvSpPr>
         <p:spPr>
           <a:xfrm>
-            <a:off x="274320" y="1188720"/>
-            <a:ext cx="3566160" cy="3200400"/>
+            <a:off x="1097280" y="1371600"/>
+            <a:ext cx="640080" cy="640080"/>
           </a:xfrm>
-          <a:prstGeom prst="rect">
+          <a:prstGeom prst="ellipse">
             <a:avLst/>
           </a:prstGeom>
           <a:solidFill>
-            <a:srgbClr val="F4F7F4"/>
-          </a:solidFill>
-          <a:ln w="25400">
-            <a:solidFill>
-              <a:srgbClr val="1A5C2A"/>
-            </a:solidFill>
-          </a:ln>
-        </p:spPr>
-        <p:style>
-          <a:lnRef idx="1">
-            <a:schemeClr val="accent1"/>
-          </a:lnRef>
-          <a:fillRef idx="3">
-            <a:schemeClr val="accent1"/>
-          </a:fillRef>
-          <a:effectRef idx="2">
-            <a:schemeClr val="accent1"/>
-          </a:effectRef>
-          <a:fontRef idx="minor">
-            <a:schemeClr val="lt1"/>
-          </a:fontRef>
-        </p:style>
-        <p:txBody>
-          <a:bodyPr rtlCol="0" anchor="ctr" wrap="square" lIns="152400" rIns="152400" tIns="127000"/>
-          <a:lstStyle/>
-          <a:p>
-            <a:pPr algn="ctr">
-              <a:defRPr sz="1300" b="1">
-                <a:solidFill>
-                  <a:srgbClr val="1A5C2A"/>
-                </a:solidFill>
-              </a:defRPr>
-            </a:pPr>
-            <a:r>
-              <a:t>🚦 信号一：粉丝过万</a:t>
-            </a:r>
-          </a:p>
-          <a:p>
-            <a:pPr>
-              <a:spcBef>
-                <a:spcPts val="600"/>
-              </a:spcBef>
-              <a:defRPr sz="1100">
-                <a:solidFill>
-                  <a:srgbClr val="666666"/>
-                </a:solidFill>
-              </a:defRPr>
-            </a:pPr>
-            <a:r>
-              <a:t>开始接村际邀请赛</a:t>
-            </a:r>
-            <a:br/>
-            <a:r>
-              <a:t>邀请赛报名费 + 体育局合作</a:t>
-            </a:r>
-            <a:br/>
-            <a:r>
-              <a:t>前提：至少3期视频互动率 &gt; 5%</a:t>
-            </a:r>
-          </a:p>
-        </p:txBody>
-      </p:sp>
-      <p:sp>
-        <p:nvSpPr>
-          <p:cNvPr id="4" name="Rectangle 3"/>
-          <p:cNvSpPr/>
-          <p:nvPr/>
-        </p:nvSpPr>
-        <p:spPr>
-          <a:xfrm>
-            <a:off x="4114800" y="1188720"/>
-            <a:ext cx="3566160" cy="3200400"/>
-          </a:xfrm>
-          <a:prstGeom prst="rect">
-            <a:avLst/>
-          </a:prstGeom>
-          <a:solidFill>
-            <a:srgbClr val="FFF8E1"/>
-          </a:solidFill>
-          <a:ln w="25400">
-            <a:solidFill>
-              <a:srgbClr val="E8A817"/>
-            </a:solidFill>
-          </a:ln>
-        </p:spPr>
-        <p:style>
-          <a:lnRef idx="1">
-            <a:schemeClr val="accent1"/>
-          </a:lnRef>
-          <a:fillRef idx="3">
-            <a:schemeClr val="accent1"/>
-          </a:fillRef>
-          <a:effectRef idx="2">
-            <a:schemeClr val="accent1"/>
-          </a:effectRef>
-          <a:fontRef idx="minor">
-            <a:schemeClr val="lt1"/>
-          </a:fontRef>
-        </p:style>
-        <p:txBody>
-          <a:bodyPr rtlCol="0" anchor="ctr" wrap="square" lIns="152400" rIns="152400" tIns="127000"/>
-          <a:lstStyle/>
-          <a:p>
-            <a:pPr algn="ctr">
-              <a:defRPr sz="1300" b="1">
-                <a:solidFill>
-                  <a:srgbClr val="1A5C2A"/>
-                </a:solidFill>
-              </a:defRPr>
-            </a:pPr>
-            <a:r>
-              <a:t>🚦 信号二：野生咨询</a:t>
-            </a:r>
-          </a:p>
-          <a:p>
-            <a:pPr>
-              <a:spcBef>
-                <a:spcPts val="600"/>
-              </a:spcBef>
-              <a:defRPr sz="1100">
-                <a:solidFill>
-                  <a:srgbClr val="666666"/>
-                </a:solidFill>
-              </a:defRPr>
-            </a:pPr>
-            <a:r>
-              <a:t>评论区有人问：</a:t>
-            </a:r>
-            <a:br/>
-            <a:r>
-              <a:t>「能来踢球吗」「有夏令营吗」</a:t>
-            </a:r>
-            <a:br/>
-            <a:r>
-              <a:t>这时候：马上推出体验产品</a:t>
-            </a:r>
-          </a:p>
-        </p:txBody>
-      </p:sp>
-      <p:sp>
-        <p:nvSpPr>
-          <p:cNvPr id="5" name="Rectangle 4"/>
-          <p:cNvSpPr/>
-          <p:nvPr/>
-        </p:nvSpPr>
-        <p:spPr>
-          <a:xfrm>
-            <a:off x="7955279" y="1188720"/>
-            <a:ext cx="3566160" cy="3200400"/>
-          </a:xfrm>
-          <a:prstGeom prst="rect">
-            <a:avLst/>
-          </a:prstGeom>
-          <a:solidFill>
-            <a:srgbClr val="F4F7F4"/>
-          </a:solidFill>
-          <a:ln w="25400">
-            <a:solidFill>
-              <a:srgbClr val="1A5C2A"/>
-            </a:solidFill>
-          </a:ln>
-        </p:spPr>
-        <p:style>
-          <a:lnRef idx="1">
-            <a:schemeClr val="accent1"/>
-          </a:lnRef>
-          <a:fillRef idx="3">
-            <a:schemeClr val="accent1"/>
-          </a:fillRef>
-          <a:effectRef idx="2">
-            <a:schemeClr val="accent1"/>
-          </a:effectRef>
-          <a:fontRef idx="minor">
-            <a:schemeClr val="lt1"/>
-          </a:fontRef>
-        </p:style>
-        <p:txBody>
-          <a:bodyPr rtlCol="0" anchor="ctr" wrap="square" lIns="152400" rIns="152400" tIns="127000"/>
-          <a:lstStyle/>
-          <a:p>
-            <a:pPr algn="ctr">
-              <a:defRPr sz="1300" b="1">
-                <a:solidFill>
-                  <a:srgbClr val="1A5C2A"/>
-                </a:solidFill>
-              </a:defRPr>
-            </a:pPr>
-            <a:r>
-              <a:t>🚦 信号三：官方关注</a:t>
-            </a:r>
-          </a:p>
-          <a:p>
-            <a:pPr>
-              <a:spcBef>
-                <a:spcPts val="600"/>
-              </a:spcBef>
-              <a:defRPr sz="1100">
-                <a:solidFill>
-                  <a:srgbClr val="666666"/>
-                </a:solidFill>
-              </a:defRPr>
-            </a:pPr>
-            <a:r>
-              <a:t>区体育局/文旅局主动联系</a:t>
-            </a:r>
-            <a:br/>
-            <a:r>
-              <a:t>或本地媒体报道</a:t>
-            </a:r>
-            <a:br/>
-            <a:r>
-              <a:t>这时候：申请政府文旅扶持资金</a:t>
-            </a:r>
-          </a:p>
-        </p:txBody>
-      </p:sp>
-      <p:sp>
-        <p:nvSpPr>
-          <p:cNvPr id="6" name="Rectangle 5"/>
-          <p:cNvSpPr/>
-          <p:nvPr/>
-        </p:nvSpPr>
-        <p:spPr>
-          <a:xfrm>
-            <a:off x="274320" y="5029200"/>
-            <a:ext cx="11612880" cy="731520"/>
-          </a:xfrm>
-          <a:prstGeom prst="rect">
-            <a:avLst/>
-          </a:prstGeom>
-          <a:solidFill>
-            <a:srgbClr val="223311"/>
+            <a:srgbClr val="2D5016"/>
           </a:solidFill>
           <a:ln>
             <a:noFill/>
@@ -8580,32 +9736,32 @@
           </a:fontRef>
         </p:style>
         <p:txBody>
-          <a:bodyPr rtlCol="0" anchor="ctr" lIns="127000"/>
+          <a:bodyPr rtlCol="0" anchor="ctr" wrap="none"/>
           <a:lstStyle/>
           <a:p>
             <a:pPr algn="ctr">
-              <a:defRPr sz="1400" b="1">
-                <a:solidFill>
-                  <a:srgbClr val="E8A817"/>
-                </a:solidFill>
-              </a:defRPr>
-            </a:pPr>
-            <a:r>
-              <a:t>预计时间线：内容期 3个月 → 赛事变现 第4个月 → 研学变现 第7个月 → 文旅变现 第10个月</a:t>
-            </a:r>
-          </a:p>
-        </p:txBody>
-      </p:sp>
-      <p:sp>
-        <p:nvSpPr>
-          <p:cNvPr id="7" name="TextBox 6"/>
+              <a:defRPr sz="2400" b="1">
+                <a:solidFill>
+                  <a:srgbClr val="FFFFFF"/>
+                </a:solidFill>
+              </a:defRPr>
+            </a:pPr>
+            <a:r>
+              <a:t>1</a:t>
+            </a:r>
+          </a:p>
+        </p:txBody>
+      </p:sp>
+      <p:sp>
+        <p:nvSpPr>
+          <p:cNvPr id="4" name="TextBox 3"/>
           <p:cNvSpPr txBox="1"/>
           <p:nvPr/>
         </p:nvSpPr>
         <p:spPr>
           <a:xfrm>
-            <a:off x="457200" y="5943600"/>
-            <a:ext cx="3657600" cy="365760"/>
+            <a:off x="274320" y="2194560"/>
+            <a:ext cx="2743200" cy="365760"/>
           </a:xfrm>
           <a:prstGeom prst="rect">
             <a:avLst/>
@@ -8618,29 +9774,29 @@
           </a:bodyPr>
           <a:lstStyle/>
           <a:p>
-            <a:pPr algn="l">
+            <a:pPr algn="ctr">
               <a:defRPr sz="1600" b="1">
                 <a:solidFill>
-                  <a:srgbClr val="1A5C2A"/>
-                </a:solidFill>
-              </a:defRPr>
-            </a:pPr>
-            <a:r>
-              <a:t>内容 → 变现 地图</a:t>
-            </a:r>
-          </a:p>
-        </p:txBody>
-      </p:sp>
-      <p:sp>
-        <p:nvSpPr>
-          <p:cNvPr id="8" name="TextBox 7"/>
+                  <a:srgbClr val="2D5016"/>
+                </a:solidFill>
+              </a:defRPr>
+            </a:pPr>
+            <a:r>
+              <a:t>内容期</a:t>
+            </a:r>
+          </a:p>
+        </p:txBody>
+      </p:sp>
+      <p:sp>
+        <p:nvSpPr>
+          <p:cNvPr id="5" name="TextBox 4"/>
           <p:cNvSpPr txBox="1"/>
           <p:nvPr/>
         </p:nvSpPr>
         <p:spPr>
           <a:xfrm>
-            <a:off x="274320" y="6400800"/>
-            <a:ext cx="11612880" cy="365760"/>
+            <a:off x="274320" y="2560320"/>
+            <a:ext cx="2743200" cy="274320"/>
           </a:xfrm>
           <a:prstGeom prst="rect">
             <a:avLst/>
@@ -8653,15 +9809,920 @@
           </a:bodyPr>
           <a:lstStyle/>
           <a:p>
-            <a:pPr algn="l">
+            <a:pPr algn="ctr">
+              <a:defRPr sz="1200" b="0">
+                <a:solidFill>
+                  <a:srgbClr val="666666"/>
+                </a:solidFill>
+              </a:defRPr>
+            </a:pPr>
+            <a:r>
+              <a:t>月1-3</a:t>
+            </a:r>
+          </a:p>
+        </p:txBody>
+      </p:sp>
+      <p:sp>
+        <p:nvSpPr>
+          <p:cNvPr id="6" name="TextBox 5"/>
+          <p:cNvSpPr txBox="1"/>
+          <p:nvPr/>
+        </p:nvSpPr>
+        <p:spPr>
+          <a:xfrm>
+            <a:off x="274320" y="3017520"/>
+            <a:ext cx="2743200" cy="2011680"/>
+          </a:xfrm>
+          <a:prstGeom prst="rect">
+            <a:avLst/>
+          </a:prstGeom>
+          <a:noFill/>
+        </p:spPr>
+        <p:txBody>
+          <a:bodyPr wrap="square">
+            <a:spAutoFit/>
+          </a:bodyPr>
+          <a:lstStyle/>
+          <a:p>
+            <a:pPr>
+              <a:spcAft>
+                <a:spcPts val="300"/>
+              </a:spcAft>
               <a:defRPr sz="1100" b="0">
                 <a:solidFill>
+                  <a:srgbClr val="333333"/>
+                </a:solidFill>
+              </a:defRPr>
+            </a:pPr>
+            <a:r>
+              <a:t>零变现 · 纯涨粉</a:t>
+            </a:r>
+          </a:p>
+        </p:txBody>
+      </p:sp>
+      <p:sp>
+        <p:nvSpPr>
+          <p:cNvPr id="7" name="TextBox 6"/>
+          <p:cNvSpPr txBox="1"/>
+          <p:nvPr/>
+        </p:nvSpPr>
+        <p:spPr>
+          <a:xfrm>
+            <a:off x="274320" y="5120640"/>
+            <a:ext cx="2743200" cy="274320"/>
+          </a:xfrm>
+          <a:prstGeom prst="rect">
+            <a:avLst/>
+          </a:prstGeom>
+          <a:noFill/>
+        </p:spPr>
+        <p:txBody>
+          <a:bodyPr wrap="square">
+            <a:spAutoFit/>
+          </a:bodyPr>
+          <a:lstStyle/>
+          <a:p>
+            <a:pPr algn="ctr">
+              <a:defRPr sz="1200" b="1">
+                <a:solidFill>
+                  <a:srgbClr val="D4A017"/>
+                </a:solidFill>
+              </a:defRPr>
+            </a:pPr>
+            <a:r>
+              <a:t>目标：1万粉</a:t>
+            </a:r>
+          </a:p>
+        </p:txBody>
+      </p:sp>
+      <p:sp>
+        <p:nvSpPr>
+          <p:cNvPr id="8" name="TextBox 7"/>
+          <p:cNvSpPr txBox="1"/>
+          <p:nvPr/>
+        </p:nvSpPr>
+        <p:spPr>
+          <a:xfrm>
+            <a:off x="2651760" y="1554480"/>
+            <a:ext cx="457200" cy="457200"/>
+          </a:xfrm>
+          <a:prstGeom prst="rect">
+            <a:avLst/>
+          </a:prstGeom>
+          <a:noFill/>
+        </p:spPr>
+        <p:txBody>
+          <a:bodyPr wrap="square">
+            <a:spAutoFit/>
+          </a:bodyPr>
+          <a:lstStyle/>
+          <a:p>
+            <a:pPr algn="ctr">
+              <a:defRPr sz="2800" b="0">
+                <a:solidFill>
+                  <a:srgbClr val="D4A017"/>
+                </a:solidFill>
+              </a:defRPr>
+            </a:pPr>
+            <a:r>
+              <a:t>→</a:t>
+            </a:r>
+          </a:p>
+        </p:txBody>
+      </p:sp>
+      <p:sp>
+        <p:nvSpPr>
+          <p:cNvPr id="9" name="Oval 8"/>
+          <p:cNvSpPr/>
+          <p:nvPr/>
+        </p:nvSpPr>
+        <p:spPr>
+          <a:xfrm>
+            <a:off x="4023360" y="1371600"/>
+            <a:ext cx="640080" cy="640080"/>
+          </a:xfrm>
+          <a:prstGeom prst="ellipse">
+            <a:avLst/>
+          </a:prstGeom>
+          <a:solidFill>
+            <a:srgbClr val="4A7C28"/>
+          </a:solidFill>
+          <a:ln>
+            <a:noFill/>
+          </a:ln>
+        </p:spPr>
+        <p:style>
+          <a:lnRef idx="1">
+            <a:schemeClr val="accent1"/>
+          </a:lnRef>
+          <a:fillRef idx="3">
+            <a:schemeClr val="accent1"/>
+          </a:fillRef>
+          <a:effectRef idx="2">
+            <a:schemeClr val="accent1"/>
+          </a:effectRef>
+          <a:fontRef idx="minor">
+            <a:schemeClr val="lt1"/>
+          </a:fontRef>
+        </p:style>
+        <p:txBody>
+          <a:bodyPr rtlCol="0" anchor="ctr" wrap="none"/>
+          <a:lstStyle/>
+          <a:p>
+            <a:pPr algn="ctr">
+              <a:defRPr sz="2400" b="1">
+                <a:solidFill>
+                  <a:srgbClr val="0F1F0F"/>
+                </a:solidFill>
+              </a:defRPr>
+            </a:pPr>
+            <a:r>
+              <a:t>2</a:t>
+            </a:r>
+          </a:p>
+        </p:txBody>
+      </p:sp>
+      <p:sp>
+        <p:nvSpPr>
+          <p:cNvPr id="10" name="TextBox 9"/>
+          <p:cNvSpPr txBox="1"/>
+          <p:nvPr/>
+        </p:nvSpPr>
+        <p:spPr>
+          <a:xfrm>
+            <a:off x="3200400" y="2194560"/>
+            <a:ext cx="2743200" cy="365760"/>
+          </a:xfrm>
+          <a:prstGeom prst="rect">
+            <a:avLst/>
+          </a:prstGeom>
+          <a:noFill/>
+        </p:spPr>
+        <p:txBody>
+          <a:bodyPr wrap="square">
+            <a:spAutoFit/>
+          </a:bodyPr>
+          <a:lstStyle/>
+          <a:p>
+            <a:pPr algn="ctr">
+              <a:defRPr sz="1600" b="1">
+                <a:solidFill>
+                  <a:srgbClr val="4A7C28"/>
+                </a:solidFill>
+              </a:defRPr>
+            </a:pPr>
+            <a:r>
+              <a:t>赛事期</a:t>
+            </a:r>
+          </a:p>
+        </p:txBody>
+      </p:sp>
+      <p:sp>
+        <p:nvSpPr>
+          <p:cNvPr id="11" name="TextBox 10"/>
+          <p:cNvSpPr txBox="1"/>
+          <p:nvPr/>
+        </p:nvSpPr>
+        <p:spPr>
+          <a:xfrm>
+            <a:off x="3200400" y="2560320"/>
+            <a:ext cx="2743200" cy="274320"/>
+          </a:xfrm>
+          <a:prstGeom prst="rect">
+            <a:avLst/>
+          </a:prstGeom>
+          <a:noFill/>
+        </p:spPr>
+        <p:txBody>
+          <a:bodyPr wrap="square">
+            <a:spAutoFit/>
+          </a:bodyPr>
+          <a:lstStyle/>
+          <a:p>
+            <a:pPr algn="ctr">
+              <a:defRPr sz="1200" b="0">
+                <a:solidFill>
                   <a:srgbClr val="666666"/>
                 </a:solidFill>
               </a:defRPr>
             </a:pPr>
             <a:r>
-              <a:t>🥇足球精神线 → 赛事IP → 冠军村品牌  |  🥈兵味文化线 → 文化赋能 → 研学团建  |  🥉体育政策线 → 专业信任 → 政府合作</a:t>
+              <a:t>月3-6</a:t>
+            </a:r>
+          </a:p>
+        </p:txBody>
+      </p:sp>
+      <p:sp>
+        <p:nvSpPr>
+          <p:cNvPr id="12" name="TextBox 11"/>
+          <p:cNvSpPr txBox="1"/>
+          <p:nvPr/>
+        </p:nvSpPr>
+        <p:spPr>
+          <a:xfrm>
+            <a:off x="3200400" y="3017520"/>
+            <a:ext cx="2743200" cy="2011680"/>
+          </a:xfrm>
+          <a:prstGeom prst="rect">
+            <a:avLst/>
+          </a:prstGeom>
+          <a:noFill/>
+        </p:spPr>
+        <p:txBody>
+          <a:bodyPr wrap="square">
+            <a:spAutoFit/>
+          </a:bodyPr>
+          <a:lstStyle/>
+          <a:p>
+            <a:pPr>
+              <a:spcAft>
+                <a:spcPts val="300"/>
+              </a:spcAft>
+              <a:defRPr sz="1100" b="0">
+                <a:solidFill>
+                  <a:srgbClr val="333333"/>
+                </a:solidFill>
+              </a:defRPr>
+            </a:pPr>
+            <a:r>
+              <a:t>邀请赛报名费</a:t>
+            </a:r>
+          </a:p>
+          <a:p>
+            <a:pPr>
+              <a:spcAft>
+                <a:spcPts val="300"/>
+              </a:spcAft>
+              <a:defRPr sz="1100" b="0">
+                <a:solidFill>
+                  <a:srgbClr val="333333"/>
+                </a:solidFill>
+              </a:defRPr>
+            </a:pPr>
+            <a:r>
+              <a:t>体育局合作</a:t>
+            </a:r>
+          </a:p>
+          <a:p>
+            <a:pPr>
+              <a:spcAft>
+                <a:spcPts val="300"/>
+              </a:spcAft>
+              <a:defRPr sz="1100" b="0">
+                <a:solidFill>
+                  <a:srgbClr val="333333"/>
+                </a:solidFill>
+              </a:defRPr>
+            </a:pPr>
+            <a:r>
+              <a:t>场边广告</a:t>
+            </a:r>
+          </a:p>
+        </p:txBody>
+      </p:sp>
+      <p:sp>
+        <p:nvSpPr>
+          <p:cNvPr id="13" name="TextBox 12"/>
+          <p:cNvSpPr txBox="1"/>
+          <p:nvPr/>
+        </p:nvSpPr>
+        <p:spPr>
+          <a:xfrm>
+            <a:off x="3200400" y="5120640"/>
+            <a:ext cx="2743200" cy="274320"/>
+          </a:xfrm>
+          <a:prstGeom prst="rect">
+            <a:avLst/>
+          </a:prstGeom>
+          <a:noFill/>
+        </p:spPr>
+        <p:txBody>
+          <a:bodyPr wrap="square">
+            <a:spAutoFit/>
+          </a:bodyPr>
+          <a:lstStyle/>
+          <a:p>
+            <a:pPr algn="ctr">
+              <a:defRPr sz="1200" b="1">
+                <a:solidFill>
+                  <a:srgbClr val="D4A017"/>
+                </a:solidFill>
+              </a:defRPr>
+            </a:pPr>
+            <a:r>
+              <a:t>目标：5万粉</a:t>
+            </a:r>
+          </a:p>
+        </p:txBody>
+      </p:sp>
+      <p:sp>
+        <p:nvSpPr>
+          <p:cNvPr id="14" name="TextBox 13"/>
+          <p:cNvSpPr txBox="1"/>
+          <p:nvPr/>
+        </p:nvSpPr>
+        <p:spPr>
+          <a:xfrm>
+            <a:off x="5577840" y="1554480"/>
+            <a:ext cx="457200" cy="457200"/>
+          </a:xfrm>
+          <a:prstGeom prst="rect">
+            <a:avLst/>
+          </a:prstGeom>
+          <a:noFill/>
+        </p:spPr>
+        <p:txBody>
+          <a:bodyPr wrap="square">
+            <a:spAutoFit/>
+          </a:bodyPr>
+          <a:lstStyle/>
+          <a:p>
+            <a:pPr algn="ctr">
+              <a:defRPr sz="2800" b="0">
+                <a:solidFill>
+                  <a:srgbClr val="D4A017"/>
+                </a:solidFill>
+              </a:defRPr>
+            </a:pPr>
+            <a:r>
+              <a:t>→</a:t>
+            </a:r>
+          </a:p>
+        </p:txBody>
+      </p:sp>
+      <p:sp>
+        <p:nvSpPr>
+          <p:cNvPr id="15" name="Oval 14"/>
+          <p:cNvSpPr/>
+          <p:nvPr/>
+        </p:nvSpPr>
+        <p:spPr>
+          <a:xfrm>
+            <a:off x="6949440" y="1371600"/>
+            <a:ext cx="640080" cy="640080"/>
+          </a:xfrm>
+          <a:prstGeom prst="ellipse">
+            <a:avLst/>
+          </a:prstGeom>
+          <a:solidFill>
+            <a:srgbClr val="D4A017"/>
+          </a:solidFill>
+          <a:ln>
+            <a:noFill/>
+          </a:ln>
+        </p:spPr>
+        <p:style>
+          <a:lnRef idx="1">
+            <a:schemeClr val="accent1"/>
+          </a:lnRef>
+          <a:fillRef idx="3">
+            <a:schemeClr val="accent1"/>
+          </a:fillRef>
+          <a:effectRef idx="2">
+            <a:schemeClr val="accent1"/>
+          </a:effectRef>
+          <a:fontRef idx="minor">
+            <a:schemeClr val="lt1"/>
+          </a:fontRef>
+        </p:style>
+        <p:txBody>
+          <a:bodyPr rtlCol="0" anchor="ctr" wrap="none"/>
+          <a:lstStyle/>
+          <a:p>
+            <a:pPr algn="ctr">
+              <a:defRPr sz="2400" b="1">
+                <a:solidFill>
+                  <a:srgbClr val="0F1F0F"/>
+                </a:solidFill>
+              </a:defRPr>
+            </a:pPr>
+            <a:r>
+              <a:t>3</a:t>
+            </a:r>
+          </a:p>
+        </p:txBody>
+      </p:sp>
+      <p:sp>
+        <p:nvSpPr>
+          <p:cNvPr id="16" name="TextBox 15"/>
+          <p:cNvSpPr txBox="1"/>
+          <p:nvPr/>
+        </p:nvSpPr>
+        <p:spPr>
+          <a:xfrm>
+            <a:off x="6126480" y="2194560"/>
+            <a:ext cx="2743200" cy="365760"/>
+          </a:xfrm>
+          <a:prstGeom prst="rect">
+            <a:avLst/>
+          </a:prstGeom>
+          <a:noFill/>
+        </p:spPr>
+        <p:txBody>
+          <a:bodyPr wrap="square">
+            <a:spAutoFit/>
+          </a:bodyPr>
+          <a:lstStyle/>
+          <a:p>
+            <a:pPr algn="ctr">
+              <a:defRPr sz="1600" b="1">
+                <a:solidFill>
+                  <a:srgbClr val="D4A017"/>
+                </a:solidFill>
+              </a:defRPr>
+            </a:pPr>
+            <a:r>
+              <a:t>研学期</a:t>
+            </a:r>
+          </a:p>
+        </p:txBody>
+      </p:sp>
+      <p:sp>
+        <p:nvSpPr>
+          <p:cNvPr id="17" name="TextBox 16"/>
+          <p:cNvSpPr txBox="1"/>
+          <p:nvPr/>
+        </p:nvSpPr>
+        <p:spPr>
+          <a:xfrm>
+            <a:off x="6126480" y="2560320"/>
+            <a:ext cx="2743200" cy="274320"/>
+          </a:xfrm>
+          <a:prstGeom prst="rect">
+            <a:avLst/>
+          </a:prstGeom>
+          <a:noFill/>
+        </p:spPr>
+        <p:txBody>
+          <a:bodyPr wrap="square">
+            <a:spAutoFit/>
+          </a:bodyPr>
+          <a:lstStyle/>
+          <a:p>
+            <a:pPr algn="ctr">
+              <a:defRPr sz="1200" b="0">
+                <a:solidFill>
+                  <a:srgbClr val="666666"/>
+                </a:solidFill>
+              </a:defRPr>
+            </a:pPr>
+            <a:r>
+              <a:t>月6-9</a:t>
+            </a:r>
+          </a:p>
+        </p:txBody>
+      </p:sp>
+      <p:sp>
+        <p:nvSpPr>
+          <p:cNvPr id="18" name="TextBox 17"/>
+          <p:cNvSpPr txBox="1"/>
+          <p:nvPr/>
+        </p:nvSpPr>
+        <p:spPr>
+          <a:xfrm>
+            <a:off x="6126480" y="3017520"/>
+            <a:ext cx="2743200" cy="2011680"/>
+          </a:xfrm>
+          <a:prstGeom prst="rect">
+            <a:avLst/>
+          </a:prstGeom>
+          <a:noFill/>
+        </p:spPr>
+        <p:txBody>
+          <a:bodyPr wrap="square">
+            <a:spAutoFit/>
+          </a:bodyPr>
+          <a:lstStyle/>
+          <a:p>
+            <a:pPr>
+              <a:spcAft>
+                <a:spcPts val="300"/>
+              </a:spcAft>
+              <a:defRPr sz="1100" b="0">
+                <a:solidFill>
+                  <a:srgbClr val="333333"/>
+                </a:solidFill>
+              </a:defRPr>
+            </a:pPr>
+            <a:r>
+              <a:t>夏令营收入</a:t>
+            </a:r>
+          </a:p>
+          <a:p>
+            <a:pPr>
+              <a:spcAft>
+                <a:spcPts val="300"/>
+              </a:spcAft>
+              <a:defRPr sz="1100" b="0">
+                <a:solidFill>
+                  <a:srgbClr val="333333"/>
+                </a:solidFill>
+              </a:defRPr>
+            </a:pPr>
+            <a:r>
+              <a:t>企业团建</a:t>
+            </a:r>
+          </a:p>
+          <a:p>
+            <a:pPr>
+              <a:spcAft>
+                <a:spcPts val="300"/>
+              </a:spcAft>
+              <a:defRPr sz="1100" b="0">
+                <a:solidFill>
+                  <a:srgbClr val="333333"/>
+                </a:solidFill>
+              </a:defRPr>
+            </a:pPr>
+            <a:r>
+              <a:t>培训课</a:t>
+            </a:r>
+          </a:p>
+        </p:txBody>
+      </p:sp>
+      <p:sp>
+        <p:nvSpPr>
+          <p:cNvPr id="19" name="TextBox 18"/>
+          <p:cNvSpPr txBox="1"/>
+          <p:nvPr/>
+        </p:nvSpPr>
+        <p:spPr>
+          <a:xfrm>
+            <a:off x="6126480" y="5120640"/>
+            <a:ext cx="2743200" cy="274320"/>
+          </a:xfrm>
+          <a:prstGeom prst="rect">
+            <a:avLst/>
+          </a:prstGeom>
+          <a:noFill/>
+        </p:spPr>
+        <p:txBody>
+          <a:bodyPr wrap="square">
+            <a:spAutoFit/>
+          </a:bodyPr>
+          <a:lstStyle/>
+          <a:p>
+            <a:pPr algn="ctr">
+              <a:defRPr sz="1200" b="1">
+                <a:solidFill>
+                  <a:srgbClr val="D4A017"/>
+                </a:solidFill>
+              </a:defRPr>
+            </a:pPr>
+            <a:r>
+              <a:t>目标：10万粉</a:t>
+            </a:r>
+          </a:p>
+        </p:txBody>
+      </p:sp>
+      <p:sp>
+        <p:nvSpPr>
+          <p:cNvPr id="20" name="TextBox 19"/>
+          <p:cNvSpPr txBox="1"/>
+          <p:nvPr/>
+        </p:nvSpPr>
+        <p:spPr>
+          <a:xfrm>
+            <a:off x="8503920" y="1554480"/>
+            <a:ext cx="457200" cy="457200"/>
+          </a:xfrm>
+          <a:prstGeom prst="rect">
+            <a:avLst/>
+          </a:prstGeom>
+          <a:noFill/>
+        </p:spPr>
+        <p:txBody>
+          <a:bodyPr wrap="square">
+            <a:spAutoFit/>
+          </a:bodyPr>
+          <a:lstStyle/>
+          <a:p>
+            <a:pPr algn="ctr">
+              <a:defRPr sz="2800" b="0">
+                <a:solidFill>
+                  <a:srgbClr val="D4A017"/>
+                </a:solidFill>
+              </a:defRPr>
+            </a:pPr>
+            <a:r>
+              <a:t>→</a:t>
+            </a:r>
+          </a:p>
+        </p:txBody>
+      </p:sp>
+      <p:sp>
+        <p:nvSpPr>
+          <p:cNvPr id="21" name="Oval 20"/>
+          <p:cNvSpPr/>
+          <p:nvPr/>
+        </p:nvSpPr>
+        <p:spPr>
+          <a:xfrm>
+            <a:off x="9875520" y="1371600"/>
+            <a:ext cx="640080" cy="640080"/>
+          </a:xfrm>
+          <a:prstGeom prst="ellipse">
+            <a:avLst/>
+          </a:prstGeom>
+          <a:solidFill>
+            <a:srgbClr val="FFAA00"/>
+          </a:solidFill>
+          <a:ln>
+            <a:noFill/>
+          </a:ln>
+        </p:spPr>
+        <p:style>
+          <a:lnRef idx="1">
+            <a:schemeClr val="accent1"/>
+          </a:lnRef>
+          <a:fillRef idx="3">
+            <a:schemeClr val="accent1"/>
+          </a:fillRef>
+          <a:effectRef idx="2">
+            <a:schemeClr val="accent1"/>
+          </a:effectRef>
+          <a:fontRef idx="minor">
+            <a:schemeClr val="lt1"/>
+          </a:fontRef>
+        </p:style>
+        <p:txBody>
+          <a:bodyPr rtlCol="0" anchor="ctr" wrap="none"/>
+          <a:lstStyle/>
+          <a:p>
+            <a:pPr algn="ctr">
+              <a:defRPr sz="2400" b="1">
+                <a:solidFill>
+                  <a:srgbClr val="0F1F0F"/>
+                </a:solidFill>
+              </a:defRPr>
+            </a:pPr>
+            <a:r>
+              <a:t>4</a:t>
+            </a:r>
+          </a:p>
+        </p:txBody>
+      </p:sp>
+      <p:sp>
+        <p:nvSpPr>
+          <p:cNvPr id="22" name="TextBox 21"/>
+          <p:cNvSpPr txBox="1"/>
+          <p:nvPr/>
+        </p:nvSpPr>
+        <p:spPr>
+          <a:xfrm>
+            <a:off x="9052560" y="2194560"/>
+            <a:ext cx="2743200" cy="365760"/>
+          </a:xfrm>
+          <a:prstGeom prst="rect">
+            <a:avLst/>
+          </a:prstGeom>
+          <a:noFill/>
+        </p:spPr>
+        <p:txBody>
+          <a:bodyPr wrap="square">
+            <a:spAutoFit/>
+          </a:bodyPr>
+          <a:lstStyle/>
+          <a:p>
+            <a:pPr algn="ctr">
+              <a:defRPr sz="1600" b="1">
+                <a:solidFill>
+                  <a:srgbClr val="FFAA00"/>
+                </a:solidFill>
+              </a:defRPr>
+            </a:pPr>
+            <a:r>
+              <a:t>文旅期</a:t>
+            </a:r>
+          </a:p>
+        </p:txBody>
+      </p:sp>
+      <p:sp>
+        <p:nvSpPr>
+          <p:cNvPr id="23" name="TextBox 22"/>
+          <p:cNvSpPr txBox="1"/>
+          <p:nvPr/>
+        </p:nvSpPr>
+        <p:spPr>
+          <a:xfrm>
+            <a:off x="9052560" y="2560320"/>
+            <a:ext cx="2743200" cy="274320"/>
+          </a:xfrm>
+          <a:prstGeom prst="rect">
+            <a:avLst/>
+          </a:prstGeom>
+          <a:noFill/>
+        </p:spPr>
+        <p:txBody>
+          <a:bodyPr wrap="square">
+            <a:spAutoFit/>
+          </a:bodyPr>
+          <a:lstStyle/>
+          <a:p>
+            <a:pPr algn="ctr">
+              <a:defRPr sz="1200" b="0">
+                <a:solidFill>
+                  <a:srgbClr val="666666"/>
+                </a:solidFill>
+              </a:defRPr>
+            </a:pPr>
+            <a:r>
+              <a:t>月9-12</a:t>
+            </a:r>
+          </a:p>
+        </p:txBody>
+      </p:sp>
+      <p:sp>
+        <p:nvSpPr>
+          <p:cNvPr id="24" name="TextBox 23"/>
+          <p:cNvSpPr txBox="1"/>
+          <p:nvPr/>
+        </p:nvSpPr>
+        <p:spPr>
+          <a:xfrm>
+            <a:off x="9052560" y="3017520"/>
+            <a:ext cx="2743200" cy="2011680"/>
+          </a:xfrm>
+          <a:prstGeom prst="rect">
+            <a:avLst/>
+          </a:prstGeom>
+          <a:noFill/>
+        </p:spPr>
+        <p:txBody>
+          <a:bodyPr wrap="square">
+            <a:spAutoFit/>
+          </a:bodyPr>
+          <a:lstStyle/>
+          <a:p>
+            <a:pPr>
+              <a:spcAft>
+                <a:spcPts val="300"/>
+              </a:spcAft>
+              <a:defRPr sz="1100" b="0">
+                <a:solidFill>
+                  <a:srgbClr val="333333"/>
+                </a:solidFill>
+              </a:defRPr>
+            </a:pPr>
+            <a:r>
+              <a:t>体育旅游</a:t>
+            </a:r>
+          </a:p>
+          <a:p>
+            <a:pPr>
+              <a:spcAft>
+                <a:spcPts val="300"/>
+              </a:spcAft>
+              <a:defRPr sz="1100" b="0">
+                <a:solidFill>
+                  <a:srgbClr val="333333"/>
+                </a:solidFill>
+              </a:defRPr>
+            </a:pPr>
+            <a:r>
+              <a:t>品牌赞助</a:t>
+            </a:r>
+          </a:p>
+          <a:p>
+            <a:pPr>
+              <a:spcAft>
+                <a:spcPts val="300"/>
+              </a:spcAft>
+              <a:defRPr sz="1100" b="0">
+                <a:solidFill>
+                  <a:srgbClr val="333333"/>
+                </a:solidFill>
+              </a:defRPr>
+            </a:pPr>
+            <a:r>
+              <a:t>直播带货</a:t>
+            </a:r>
+          </a:p>
+        </p:txBody>
+      </p:sp>
+      <p:sp>
+        <p:nvSpPr>
+          <p:cNvPr id="25" name="TextBox 24"/>
+          <p:cNvSpPr txBox="1"/>
+          <p:nvPr/>
+        </p:nvSpPr>
+        <p:spPr>
+          <a:xfrm>
+            <a:off x="9052560" y="5120640"/>
+            <a:ext cx="2743200" cy="274320"/>
+          </a:xfrm>
+          <a:prstGeom prst="rect">
+            <a:avLst/>
+          </a:prstGeom>
+          <a:noFill/>
+        </p:spPr>
+        <p:txBody>
+          <a:bodyPr wrap="square">
+            <a:spAutoFit/>
+          </a:bodyPr>
+          <a:lstStyle/>
+          <a:p>
+            <a:pPr algn="ctr">
+              <a:defRPr sz="1200" b="1">
+                <a:solidFill>
+                  <a:srgbClr val="D4A017"/>
+                </a:solidFill>
+              </a:defRPr>
+            </a:pPr>
+            <a:r>
+              <a:t>目标：20万粉</a:t>
+            </a:r>
+          </a:p>
+        </p:txBody>
+      </p:sp>
+      <p:sp>
+        <p:nvSpPr>
+          <p:cNvPr id="26" name="Rounded Rectangle 25"/>
+          <p:cNvSpPr/>
+          <p:nvPr/>
+        </p:nvSpPr>
+        <p:spPr>
+          <a:xfrm>
+            <a:off x="274320" y="5760720"/>
+            <a:ext cx="11612880" cy="457200"/>
+          </a:xfrm>
+          <a:prstGeom prst="roundRect">
+            <a:avLst/>
+          </a:prstGeom>
+          <a:solidFill>
+            <a:srgbClr val="FFF8E1"/>
+          </a:solidFill>
+          <a:ln>
+            <a:noFill/>
+          </a:ln>
+        </p:spPr>
+        <p:style>
+          <a:lnRef idx="1">
+            <a:schemeClr val="accent1"/>
+          </a:lnRef>
+          <a:fillRef idx="3">
+            <a:schemeClr val="accent1"/>
+          </a:fillRef>
+          <a:effectRef idx="2">
+            <a:schemeClr val="accent1"/>
+          </a:effectRef>
+          <a:fontRef idx="minor">
+            <a:schemeClr val="lt1"/>
+          </a:fontRef>
+        </p:style>
+        <p:txBody>
+          <a:bodyPr rtlCol="0" anchor="ctr" wrap="square" lIns="152400" tIns="101600"/>
+          <a:lstStyle/>
+          <a:p>
+            <a:pPr algn="ctr">
+              <a:defRPr sz="1200" b="1">
+                <a:solidFill>
+                  <a:srgbClr val="D4A017"/>
+                </a:solidFill>
+              </a:defRPr>
+            </a:pPr>
+            <a:r>
+              <a:t>盈利逻辑：足球内容建信任 → 赛事聚人气 → 研学教育变现 → 最终成为延庆体育旅游IP</a:t>
             </a:r>
           </a:p>
         </p:txBody>

--- a/tunjunying/plan_v2.pptx
+++ b/tunjunying/plan_v2.pptx
@@ -7189,7 +7189,7 @@
               </a:defRPr>
             </a:pPr>
             <a:r>
-              <a:t>视觉锤：王健掰手指 / 字幕逐条弹出 / 政策文件翻动</a:t>
+              <a:t>视觉锤：王支书掰手指 / 字幕逐条弹出 / 政策文件翻动</a:t>
             </a:r>
           </a:p>
         </p:txBody>
@@ -16518,7 +16518,7 @@
               </a:defRPr>
             </a:pPr>
             <a:r>
-              <a:t>跟王健确认足球方向，确定人设关键词</a:t>
+              <a:t>跟王支书确认足球方向，确定人设关键词</a:t>
             </a:r>
           </a:p>
         </p:txBody>
@@ -17227,7 +17227,7 @@
               </a:defRPr>
             </a:pPr>
             <a:r>
-              <a:t>延庆区屯军营村 · 王健支书 · v2.0 · 2026年6月</a:t>
+              <a:t>延庆区屯军营村 · 王支书支书 · v2.0 · 2026年6月</a:t>
             </a:r>
           </a:p>
         </p:txBody>
@@ -21266,7 +21266,7 @@
               </a:defRPr>
             </a:pPr>
             <a:r>
-              <a:t>💡 启示：要高频输出，但不能只靠王健一个人</a:t>
+              <a:t>💡 启示：要高频输出，但不能只靠王支书一个人</a:t>
             </a:r>
           </a:p>
         </p:txBody>

--- a/tunjunying/plan_v2.pptx
+++ b/tunjunying/plan_v2.pptx
@@ -3707,7 +3707,9 @@
               </a:defRPr>
             </a:pPr>
             <a:r>
-              <a:t>月1-3 · 零变现</a:t>
+              <a:t>初期 · 零变现
+纯内容积累
+积累信任</a:t>
             </a:r>
             <a:br/>
             <a:r>
@@ -3715,7 +3717,7 @@
             </a:r>
             <a:br/>
             <a:r>
-              <a:t>目标：1万粉</a:t>
+              <a:t>纯内容积累阶段</a:t>
             </a:r>
           </a:p>
         </p:txBody>
@@ -3917,7 +3919,7 @@
             </a:r>
             <a:br/>
             <a:r>
-              <a:t>目标：5万粉</a:t>
+              <a:t>赛事探索阶段</a:t>
             </a:r>
           </a:p>
         </p:txBody>
@@ -4119,7 +4121,7 @@
             </a:r>
             <a:br/>
             <a:r>
-              <a:t>目标：10万粉</a:t>
+              <a:t>品牌建设阶段</a:t>
             </a:r>
           </a:p>
         </p:txBody>
@@ -4684,7 +4686,7 @@
               </a:defRPr>
             </a:pPr>
             <a:r>
-              <a:t>零变现 · 纯涨粉    |    开始拍摄即可 → 每周3条雷打不动</a:t>
+              <a:t>零变现 · 纯内容积累    |    开始拍摄即可 → 每周3条稳定更新</a:t>
             </a:r>
           </a:p>
         </p:txBody>
@@ -4799,7 +4801,7 @@
               </a:defRPr>
             </a:pPr>
             <a:r>
-              <a:t>邀请赛报名 ¥3000-8000/场 · 体育局补贴 ¥5000-20000 · 场边广告 ¥2000-5000</a:t>
+              <a:t>村际邀请赛报名收入 · 体育局赛事合作 · 场边广告位  |  需有一定粉丝基础</a:t>
             </a:r>
           </a:p>
         </p:txBody>
@@ -4914,7 +4916,7 @@
               </a:defRPr>
             </a:pPr>
             <a:r>
-              <a:t>夏令营 ¥1500-3000/人 · 企业团建 ¥5000-15000/场 · 培训 ¥500-1000/课时</a:t>
+              <a:t>青少年足球夏令营 · 企业团建 · 退役球员培训课  |  需内容影响力形成</a:t>
             </a:r>
           </a:p>
         </p:txBody>
@@ -5029,7 +5031,7 @@
               </a:defRPr>
             </a:pPr>
             <a:r>
-              <a:t>旅游线路分成 · 品牌赞助 ¥10000-50000/年 · 直播带货 ¥2000-5000/场</a:t>
+              <a:t>体育旅游线路合作 · 运动品牌赞助 · 直播带货  |  需品牌成熟后探索</a:t>
             </a:r>
           </a:p>
         </p:txBody>
@@ -5144,7 +5146,7 @@
               </a:defRPr>
             </a:pPr>
             <a:r>
-              <a:t>🚦粉丝过万→赛事  |  🚦野生咨询→体验产品  |  🚦官方关注→扶持资金</a:t>
+              <a:t>🚦内容积累→赛事合作  |  🚦用户主动咨询→推出体验产品  |  🚦官方关注→申请扶持</a:t>
             </a:r>
           </a:p>
         </p:txBody>

--- a/tunjunying/plan_v2.pptx
+++ b/tunjunying/plan_v2.pptx
@@ -27,6 +27,8 @@
     <p:sldId id="275" r:id="rId26"/>
     <p:sldId id="276" r:id="rId27"/>
     <p:sldId id="277" r:id="rId28"/>
+    <p:sldId id="282" r:id="rId33"/>
+    <p:sldId id="283" r:id="rId34"/>
     <p:sldId id="278" r:id="rId29"/>
     <p:sldId id="279" r:id="rId30"/>
     <p:sldId id="280" r:id="rId31"/>
@@ -3671,7 +3673,11 @@
               </a:defRPr>
             </a:pPr>
             <a:r>
-              <a:t>1  内容期</a:t>
+              <a:t>第1层</a:t>
+            </a:r>
+            <a:br/>
+            <a:r>
+              <a:t>定位层</a:t>
             </a:r>
           </a:p>
         </p:txBody>
@@ -3707,17 +3713,11 @@
               </a:defRPr>
             </a:pPr>
             <a:r>
-              <a:t>初期 · 零变现
-纯内容积累
-积累信任</a:t>
+              <a:t>王支书是谁？</a:t>
             </a:r>
             <a:br/>
             <a:r>
-              <a:t>纯内容积累</a:t>
-            </a:r>
-            <a:br/>
-            <a:r>
-              <a:t>纯内容积累阶段</a:t>
+              <a:t>真实 · 接地气 · 有温度 · 能办事</a:t>
             </a:r>
           </a:p>
         </p:txBody>
@@ -3875,7 +3875,11 @@
               </a:defRPr>
             </a:pPr>
             <a:r>
-              <a:t>2  赛事期</a:t>
+              <a:t>第2层</a:t>
+            </a:r>
+            <a:br/>
+            <a:r>
+              <a:t>内容层</a:t>
             </a:r>
           </a:p>
         </p:txBody>
@@ -3911,15 +3915,11 @@
               </a:defRPr>
             </a:pPr>
             <a:r>
-              <a:t>月3-6 · 邀请赛</a:t>
+              <a:t>四大内容支柱</a:t>
             </a:r>
             <a:br/>
             <a:r>
-              <a:t>报名费+体育局</a:t>
-            </a:r>
-            <a:br/>
-            <a:r>
-              <a:t>赛事探索阶段</a:t>
+              <a:t>日常工作+政策解读+村庄故事+Vlog</a:t>
             </a:r>
           </a:p>
         </p:txBody>
@@ -4077,7 +4077,11 @@
               </a:defRPr>
             </a:pPr>
             <a:r>
-              <a:t>3  研学期</a:t>
+              <a:t>第3层</a:t>
+            </a:r>
+            <a:br/>
+            <a:r>
+              <a:t>运营层</a:t>
             </a:r>
           </a:p>
         </p:txBody>
@@ -4113,15 +4117,11 @@
               </a:defRPr>
             </a:pPr>
             <a:r>
-              <a:t>月6-9 · 夏令营</a:t>
+              <a:t>抖音主+视频号辅</a:t>
             </a:r>
             <a:br/>
             <a:r>
-              <a:t>企业团建+培训</a:t>
-            </a:r>
-            <a:br/>
-            <a:r>
-              <a:t>品牌建设阶段</a:t>
+              <a:t>每周3-5条 · 评论必回 · 周复盘</a:t>
             </a:r>
           </a:p>
         </p:txBody>
@@ -4279,7 +4279,11 @@
               </a:defRPr>
             </a:pPr>
             <a:r>
-              <a:t>4  文旅期</a:t>
+              <a:t>第4层</a:t>
+            </a:r>
+            <a:br/>
+            <a:r>
+              <a:t>转化层</a:t>
             </a:r>
           </a:p>
         </p:txBody>
@@ -4315,7 +4319,9 @@
               </a:defRPr>
             </a:pPr>
             <a:r>
-              <a:t>信任→关注→铁粉→办事/购买</a:t>
+              <a:t>成熟期 · 旅游
+品牌赞助+直播
+生态变现</a:t>
             </a:r>
           </a:p>
         </p:txBody>
@@ -4473,7 +4479,11 @@
               </a:defRPr>
             </a:pPr>
             <a:r>
-              <a:t>💰  盈利逻辑</a:t>
+              <a:t>第5层</a:t>
+            </a:r>
+            <a:br/>
+            <a:r>
+              <a:t>风险层</a:t>
             </a:r>
           </a:p>
         </p:txBody>
@@ -4650,7 +4660,7 @@
               </a:defRPr>
             </a:pPr>
             <a:r>
-              <a:t>内容期  |  月1-3</a:t>
+              <a:t>内容期  |  初期</a:t>
             </a:r>
           </a:p>
         </p:txBody>
@@ -4765,7 +4775,7 @@
               </a:defRPr>
             </a:pPr>
             <a:r>
-              <a:t>赛事期  |  月3-6</a:t>
+              <a:t>赛事期  |  中期</a:t>
             </a:r>
           </a:p>
         </p:txBody>
@@ -4880,7 +4890,7 @@
               </a:defRPr>
             </a:pPr>
             <a:r>
-              <a:t>研学期  |  月6-9</a:t>
+              <a:t>研学期  |  后期</a:t>
             </a:r>
           </a:p>
         </p:txBody>
@@ -4995,7 +5005,7 @@
               </a:defRPr>
             </a:pPr>
             <a:r>
-              <a:t>文旅期  |  月9-12</a:t>
+              <a:t>文旅期  |  成熟期</a:t>
             </a:r>
           </a:p>
         </p:txBody>
@@ -5244,7 +5254,7 @@
               </a:defRPr>
             </a:pPr>
             <a:r>
-              <a:t>八周执行计划 &amp; 三条金线</a:t>
+              <a:t>人设讨论：八周执行计划 &amp; 三条金线</a:t>
             </a:r>
           </a:p>
         </p:txBody>
@@ -5464,7 +5474,8 @@
               </a:defRPr>
             </a:pPr>
             <a:r>
-              <a:t>Q1</a:t>
+              <a:t>W1
+亮相</a:t>
             </a:r>
           </a:p>
         </p:txBody>
@@ -5500,7 +5511,7 @@
               </a:defRPr>
             </a:pPr>
             <a:r>
-              <a:t>W1：①我是王支书也是冠军教练 ②屯军营500年前练兵场 ③体育公园钱从哪来</a:t>
+              <a:t>①我是王支书也是冠军教练 ②屯军营500年前练兵场 ③体育公园钱从哪来</a:t>
             </a:r>
           </a:p>
         </p:txBody>
@@ -5579,7 +5590,8 @@
               </a:defRPr>
             </a:pPr>
             <a:r>
-              <a:t>Q2</a:t>
+              <a:t>W2
+情感</a:t>
             </a:r>
           </a:p>
         </p:txBody>
@@ -5615,7 +5627,7 @@
               </a:defRPr>
             </a:pPr>
             <a:r>
-              <a:t>W2：④我们的球场荒地到绿茵 ⑤最老的老兵看踢球 ⑥孩子踢球体测加分</a:t>
+              <a:t>④我们的球场荒地到绿茵 ⑤最老的老兵看踢球 ⑥孩子踢球体测加分</a:t>
             </a:r>
           </a:p>
         </p:txBody>
@@ -5694,7 +5706,8 @@
               </a:defRPr>
             </a:pPr>
             <a:r>
-              <a:t>Q3</a:t>
+              <a:t>W3
+热血</a:t>
             </a:r>
           </a:p>
         </p:txBody>
@@ -5730,7 +5743,7 @@
               </a:defRPr>
             </a:pPr>
             <a:r>
-              <a:t>W3：⑦凌晨五点半足球场 ⑧王支书战术板 ⑨扭了脚村医教看伤</a:t>
+              <a:t>⑦凌晨五点半足球场 ⑧王支书战术板 ⑨扭了脚村医教看伤</a:t>
             </a:r>
           </a:p>
         </p:txBody>
@@ -5809,7 +5822,8 @@
               </a:defRPr>
             </a:pPr>
             <a:r>
-              <a:t>Q4</a:t>
+              <a:t>W4
+人物</a:t>
             </a:r>
           </a:p>
         </p:txBody>
@@ -5845,7 +5859,7 @@
               </a:defRPr>
             </a:pPr>
             <a:r>
-              <a:t>W4：⑩村民说支书踢球比干活拼 ⑪城里人不懂的足球规矩 ⑫建球场能申请多少补贴</a:t>
+              <a:t>⑩村民说支书踢球比干活拼 ⑪城里人不懂的足球规矩 ⑫建球场能申请多少补贴</a:t>
             </a:r>
           </a:p>
         </p:txBody>
@@ -5924,7 +5938,7 @@
               </a:defRPr>
             </a:pPr>
             <a:r>
-              <a:t>Q5</a:t>
+              <a:t>→ 目标</a:t>
             </a:r>
           </a:p>
         </p:txBody>
@@ -6137,7 +6151,8 @@
               </a:defRPr>
             </a:pPr>
             <a:r>
-              <a:t>Q1</a:t>
+              <a:t>W5
+成果</a:t>
             </a:r>
           </a:p>
         </p:txBody>
@@ -6173,7 +6188,7 @@
               </a:defRPr>
             </a:pPr>
             <a:r>
-              <a:t>W5：⑬拿遍了延庆冠军 ⑭一颗球三代人 ⑮成年人踢球到底有啥用</a:t>
+              <a:t>大家觉得，⑬拿遍了延庆冠军 ⑭一颗球三代人 ⑮成年人踢球到底有啥用</a:t>
             </a:r>
           </a:p>
         </p:txBody>
@@ -6252,7 +6267,8 @@
               </a:defRPr>
             </a:pPr>
             <a:r>
-              <a:t>Q2</a:t>
+              <a:t>W6
+幕后</a:t>
             </a:r>
           </a:p>
         </p:txBody>
@@ -6288,7 +6304,7 @@
               </a:defRPr>
             </a:pPr>
             <a:r>
-              <a:t>W6：⑯一场比赛从准备到结束 ⑰村队开会吵起来了 ⑱体育特长生怎么走</a:t>
+              <a:t>⑯一场比赛从准备到结束 ⑰村队开会吵起来了 ⑱体育特长生怎么走直来直去？还是耐心慢慢聊？</a:t>
             </a:r>
           </a:p>
         </p:txBody>
@@ -6367,7 +6383,8 @@
               </a:defRPr>
             </a:pPr>
             <a:r>
-              <a:t>Q3</a:t>
+              <a:t>W7
+对抗</a:t>
             </a:r>
           </a:p>
         </p:txBody>
@@ -6403,7 +6420,7 @@
               </a:defRPr>
             </a:pPr>
             <a:r>
-              <a:t>W7：⑲今天这场必须赢 ⑳一亩地账本vs一粒球梦想 ㉑办比赛安全谁负责</a:t>
+              <a:t>⑲今天这场必须赢 ⑳一亩地账本vs一粒球梦想 ㉑办比赛安全谁负责</a:t>
             </a:r>
           </a:p>
         </p:txBody>
@@ -6482,7 +6499,8 @@
               </a:defRPr>
             </a:pPr>
             <a:r>
-              <a:t>Q4</a:t>
+              <a:t>W8
+展望</a:t>
             </a:r>
           </a:p>
         </p:txBody>
@@ -6518,7 +6536,7 @@
               </a:defRPr>
             </a:pPr>
             <a:r>
-              <a:t>W8：㉒致在外打工的屯军营人 ㉓从长城脚下到绿茵场上 ㉔让冠军村被看见</a:t>
+              <a:t>㉒致在外打工的屯军营人 ㉓从长城脚下到绿茵场上 ㉔让冠军村被看见</a:t>
             </a:r>
           </a:p>
         </p:txBody>
@@ -6597,7 +6615,7 @@
               </a:defRPr>
             </a:pPr>
             <a:r>
-              <a:t>Q5</a:t>
+              <a:t>→ 目标</a:t>
             </a:r>
           </a:p>
         </p:txBody>
@@ -6810,7 +6828,7 @@
               </a:defRPr>
             </a:pPr>
             <a:r>
-              <a:t>Q1</a:t>
+              <a:t>🥇 足球</a:t>
             </a:r>
           </a:p>
         </p:txBody>
@@ -6846,7 +6864,7 @@
               </a:defRPr>
             </a:pPr>
             <a:r>
-              <a:t>视觉锤：长城烽火台 + 绿茵球场同框 / 老兵摸球</a:t>
+              <a:t>一句：「屯军营，踢出来的冠军村」</a:t>
             </a:r>
           </a:p>
         </p:txBody>
@@ -6925,7 +6943,7 @@
               </a:defRPr>
             </a:pPr>
             <a:r>
-              <a:t>Q2</a:t>
+              <a:t>🥈 文化</a:t>
             </a:r>
           </a:p>
         </p:txBody>
@@ -6961,7 +6979,7 @@
               </a:defRPr>
             </a:pPr>
             <a:r>
-              <a:t>🥉 体育政策线</a:t>
+              <a:t>视觉锤：王支书一脚射门 / 球网剧烈抖动 / 夕阳下球场剪影</a:t>
             </a:r>
           </a:p>
         </p:txBody>
@@ -7040,7 +7058,7 @@
               </a:defRPr>
             </a:pPr>
             <a:r>
-              <a:t>Q3</a:t>
+              <a:t>🥉 政策</a:t>
             </a:r>
           </a:p>
         </p:txBody>
@@ -7076,7 +7094,7 @@
               </a:defRPr>
             </a:pPr>
             <a:r>
-              <a:t>一句：「政策看不懂？王支书说给你听」</a:t>
+              <a:t>一句：「500年前练兵场，今天冠军村」</a:t>
             </a:r>
           </a:p>
         </p:txBody>
@@ -7155,7 +7173,7 @@
               </a:defRPr>
             </a:pPr>
             <a:r>
-              <a:t>Q4</a:t>
+              <a:t>🥇</a:t>
             </a:r>
           </a:p>
         </p:txBody>
@@ -7191,7 +7209,7 @@
               </a:defRPr>
             </a:pPr>
             <a:r>
-              <a:t>视觉锤：王支书掰手指 / 字幕逐条弹出 / 政策文件翻动</a:t>
+              <a:t>视觉锤：长城烽火台 + 绿茵球场同框 / 老兵摸球</a:t>
             </a:r>
           </a:p>
         </p:txBody>
@@ -7270,7 +7288,7 @@
               </a:defRPr>
             </a:pPr>
             <a:r>
-              <a:t>Q5</a:t>
+              <a:t>🎯</a:t>
             </a:r>
           </a:p>
         </p:txBody>
@@ -7306,7 +7324,7 @@
               </a:defRPr>
             </a:pPr>
             <a:r>
-              <a:t>🎯 三条线一个声音：屯军营不只是一个村——是中国乡村体育的一张名片</a:t>
+              <a:t>一句：「政策看不懂？王支书说给你听」· 视觉锤：王支书掰手指 / 字幕弹出</a:t>
             </a:r>
           </a:p>
         </p:txBody>
@@ -9118,7 +9136,7 @@
               </a:defRPr>
             </a:pPr>
             <a:r>
-              <a:t>三大栏目模板（v2.0 足球专题版）</a:t>
+              <a:t>三大栏目模板</a:t>
             </a:r>
           </a:p>
         </p:txBody>
@@ -9233,7 +9251,7 @@
               </a:defRPr>
             </a:pPr>
             <a:r>
-              <a:t>热血纪实型 · 45-65s</a:t>
+              <a:t>热血纪实 · 45-65s</a:t>
             </a:r>
           </a:p>
         </p:txBody>
@@ -9269,7 +9287,7 @@
               </a:defRPr>
             </a:pPr>
             <a:r>
-              <a:t>例：凌晨五点半的足球场</a:t>
+              <a:t>凌晨五点半的足球场</a:t>
             </a:r>
           </a:p>
         </p:txBody>
@@ -9384,7 +9402,7 @@
               </a:defRPr>
             </a:pPr>
             <a:r>
-              <a:t>文化故事型 · 50-65s</a:t>
+              <a:t>文化故事 · 50-65s</a:t>
             </a:r>
           </a:p>
         </p:txBody>
@@ -9420,7 +9438,7 @@
               </a:defRPr>
             </a:pPr>
             <a:r>
-              <a:t>例：500年前就是练兵场</a:t>
+              <a:t>500年前就是练兵场</a:t>
             </a:r>
           </a:p>
         </p:txBody>
@@ -9535,7 +9553,7 @@
               </a:defRPr>
             </a:pPr>
             <a:r>
-              <a:t>实用干货型 · 40-50s</a:t>
+              <a:t>实用干货 · 40-50s</a:t>
             </a:r>
           </a:p>
         </p:txBody>
@@ -9571,7 +9589,7 @@
               </a:defRPr>
             </a:pPr>
             <a:r>
-              <a:t>例：体育公园钱从哪来？</a:t>
+              <a:t>体育公园钱从哪来</a:t>
             </a:r>
           </a:p>
         </p:txBody>
@@ -9669,7 +9687,7 @@
               </a:defRPr>
             </a:pPr>
             <a:r>
-              <a:t>为什么改版？从 v1.0 到 v2.0</a:t>
+              <a:t>项目背景：为什么改版？从 v1.0 到 v2.0</a:t>
             </a:r>
           </a:p>
         </p:txBody>
@@ -9915,7 +9933,7 @@
               </a:defRPr>
             </a:pPr>
             <a:r>
-              <a:t>📋 脚本清单 W1-W4（1-12条）</a:t>
+              <a:t>📋 脚本清单 W1-W2（1-6条）</a:t>
             </a:r>
           </a:p>
         </p:txBody>
@@ -12838,7 +12856,7 @@
               </a:defRPr>
             </a:pPr>
             <a:r>
-              <a:t>凌晨五点半的足球场</a:t>
+              <a:t>村民说：我们支书____</a:t>
             </a:r>
           </a:p>
         </p:txBody>
@@ -12917,7 +12935,7 @@
               </a:defRPr>
             </a:pPr>
             <a:r>
-              <a:t>凌晨五点半的足球场</a:t>
+              <a:t>屯军营密码</a:t>
             </a:r>
           </a:p>
         </p:txBody>
@@ -13075,7 +13093,7 @@
               </a:defRPr>
             </a:pPr>
             <a:r>
-              <a:t>45s</a:t>
+              <a:t>⭐⭐⭐⭐</a:t>
             </a:r>
           </a:p>
         </p:txBody>
@@ -13137,7 +13155,7 @@
               </a:defRPr>
             </a:pPr>
             <a:r>
-              <a:t>📋 脚本清单 W5-W8（13-24条）</a:t>
+              <a:t>📋 脚本清单 W3-W4（7-12条）</a:t>
             </a:r>
           </a:p>
         </p:txBody>
@@ -13611,7 +13629,7 @@
               </a:defRPr>
             </a:pPr>
             <a:r>
-              <a:t>13</a:t>
+              <a:t>7</a:t>
             </a:r>
           </a:p>
         </p:txBody>
@@ -13690,7 +13708,7 @@
               </a:defRPr>
             </a:pPr>
             <a:r>
-              <a:t>我们拿遍了延庆的冠军</a:t>
+              <a:t>凌晨五点半的足球场</a:t>
             </a:r>
           </a:p>
         </p:txBody>
@@ -13769,7 +13787,7 @@
               </a:defRPr>
             </a:pPr>
             <a:r>
-              <a:t>我们拿遍了延庆的冠军</a:t>
+              <a:t>凌晨五点半的足球场</a:t>
             </a:r>
           </a:p>
         </p:txBody>
@@ -13927,7 +13945,7 @@
               </a:defRPr>
             </a:pPr>
             <a:r>
-              <a:t>60s</a:t>
+              <a:t>45s</a:t>
             </a:r>
           </a:p>
         </p:txBody>
@@ -14006,7 +14024,7 @@
               </a:defRPr>
             </a:pPr>
             <a:r>
-              <a:t>14</a:t>
+              <a:t>8</a:t>
             </a:r>
           </a:p>
         </p:txBody>
@@ -14085,7 +14103,7 @@
               </a:defRPr>
             </a:pPr>
             <a:r>
-              <a:t>一颗球三代人</a:t>
+              <a:t>王支书的战术板</a:t>
             </a:r>
           </a:p>
         </p:txBody>
@@ -14164,7 +14182,7 @@
               </a:defRPr>
             </a:pPr>
             <a:r>
-              <a:t>一颗球三代人</a:t>
+              <a:t>王支书的战术板</a:t>
             </a:r>
           </a:p>
         </p:txBody>
@@ -14322,7 +14340,7 @@
               </a:defRPr>
             </a:pPr>
             <a:r>
-              <a:t>55s</a:t>
+              <a:t>50s</a:t>
             </a:r>
           </a:p>
         </p:txBody>
@@ -14401,7 +14419,7 @@
               </a:defRPr>
             </a:pPr>
             <a:r>
-              <a:t>15</a:t>
+              <a:t>9</a:t>
             </a:r>
           </a:p>
         </p:txBody>
@@ -14480,7 +14498,7 @@
               </a:defRPr>
             </a:pPr>
             <a:r>
-              <a:t>成年人踢球到底有啥用</a:t>
+              <a:t>扭了脚别硬扛村医教看伤</a:t>
             </a:r>
           </a:p>
         </p:txBody>
@@ -14559,7 +14577,7 @@
               </a:defRPr>
             </a:pPr>
             <a:r>
-              <a:t>成年人踢球到底有啥用</a:t>
+              <a:t>扭了脚别硬扛村医教看伤</a:t>
             </a:r>
           </a:p>
         </p:txBody>
@@ -14796,7 +14814,7 @@
               </a:defRPr>
             </a:pPr>
             <a:r>
-              <a:t>16</a:t>
+              <a:t>10</a:t>
             </a:r>
           </a:p>
         </p:txBody>
@@ -14875,7 +14893,7 @@
               </a:defRPr>
             </a:pPr>
             <a:r>
-              <a:t>一场比赛从准备到结束</a:t>
+              <a:t>村民说我们支书踢球比干活拼</a:t>
             </a:r>
           </a:p>
         </p:txBody>
@@ -14954,7 +14972,7 @@
               </a:defRPr>
             </a:pPr>
             <a:r>
-              <a:t>一场比赛从准备到结束</a:t>
+              <a:t>村民说我们支书踢球比干活拼</a:t>
             </a:r>
           </a:p>
         </p:txBody>
@@ -15112,7 +15130,7 @@
               </a:defRPr>
             </a:pPr>
             <a:r>
-              <a:t>60s</a:t>
+              <a:t>55s</a:t>
             </a:r>
           </a:p>
         </p:txBody>
@@ -15191,7 +15209,7 @@
               </a:defRPr>
             </a:pPr>
             <a:r>
-              <a:t>17</a:t>
+              <a:t>11</a:t>
             </a:r>
           </a:p>
         </p:txBody>
@@ -15270,7 +15288,7 @@
               </a:defRPr>
             </a:pPr>
             <a:r>
-              <a:t>村队开会吵起来了</a:t>
+              <a:t>城里人看不懂的农村足球规矩</a:t>
             </a:r>
           </a:p>
         </p:txBody>
@@ -15349,7 +15367,7 @@
               </a:defRPr>
             </a:pPr>
             <a:r>
-              <a:t>村队开会吵起来了</a:t>
+              <a:t>城里人看不懂的农村足球规矩</a:t>
             </a:r>
           </a:p>
         </p:txBody>
@@ -15507,7 +15525,7 @@
               </a:defRPr>
             </a:pPr>
             <a:r>
-              <a:t>55s</a:t>
+              <a:t>50s</a:t>
             </a:r>
           </a:p>
         </p:txBody>
@@ -15586,7 +15604,7 @@
               </a:defRPr>
             </a:pPr>
             <a:r>
-              <a:t>18</a:t>
+              <a:t>12</a:t>
             </a:r>
           </a:p>
         </p:txBody>
@@ -15665,7 +15683,7 @@
               </a:defRPr>
             </a:pPr>
             <a:r>
-              <a:t>体育特长生怎么走一条路说清楚</a:t>
+              <a:t>村里建球场能申请多少补贴</a:t>
             </a:r>
           </a:p>
         </p:txBody>
@@ -15744,7 +15762,7 @@
               </a:defRPr>
             </a:pPr>
             <a:r>
-              <a:t>体育特长生怎么走一条路说清楚</a:t>
+              <a:t>村里建球场能申请多少补贴</a:t>
             </a:r>
           </a:p>
         </p:txBody>
@@ -15916,6 +15934,6450 @@
 </file>
 
 <file path=ppt/slides/slide23.xml><?xml version="1.0" encoding="utf-8"?>
+<p:sld xmlns:a="http://schemas.openxmlformats.org/drawingml/2006/main" xmlns:p="http://schemas.openxmlformats.org/presentationml/2006/main" xmlns:r="http://schemas.openxmlformats.org/officeDocument/2006/relationships">
+  <p:cSld>
+    <p:bg>
+      <p:bgPr>
+        <a:solidFill>
+          <a:srgbClr val="FFFFFF"/>
+        </a:solidFill>
+        <a:effectLst/>
+      </p:bgPr>
+    </p:bg>
+    <p:spTree>
+      <p:nvGrpSpPr>
+        <p:cNvPr id="1" name=""/>
+        <p:cNvGrpSpPr/>
+        <p:nvPr/>
+      </p:nvGrpSpPr>
+      <p:grpSpPr/>
+      <p:sp>
+        <p:nvSpPr>
+          <p:cNvPr id="2" name="TextBox 1"/>
+          <p:cNvSpPr txBox="1"/>
+          <p:nvPr/>
+        </p:nvSpPr>
+        <p:spPr>
+          <a:xfrm>
+            <a:off x="457200" y="228600"/>
+            <a:ext cx="9144000" cy="594360"/>
+          </a:xfrm>
+          <a:prstGeom prst="rect">
+            <a:avLst/>
+          </a:prstGeom>
+          <a:noFill/>
+        </p:spPr>
+        <p:txBody>
+          <a:bodyPr wrap="square">
+            <a:spAutoFit/>
+          </a:bodyPr>
+          <a:lstStyle/>
+          <a:p>
+            <a:pPr algn="l">
+              <a:defRPr sz="3000" b="1">
+                <a:solidFill>
+                  <a:srgbClr val="2D5016"/>
+                </a:solidFill>
+                <a:latin typeface="Microsoft YaHei"/>
+              </a:defRPr>
+            </a:pPr>
+            <a:r>
+              <a:t>📋 脚本清单 W5-W6（13-18条）</a:t>
+            </a:r>
+          </a:p>
+        </p:txBody>
+      </p:sp>
+      <p:sp>
+        <p:nvSpPr>
+          <p:cNvPr id="3" name="Rectangle 2"/>
+          <p:cNvSpPr/>
+          <p:nvPr/>
+        </p:nvSpPr>
+        <p:spPr>
+          <a:xfrm>
+            <a:off x="457200" y="914400"/>
+            <a:ext cx="502919" cy="457200"/>
+          </a:xfrm>
+          <a:prstGeom prst="rect">
+            <a:avLst/>
+          </a:prstGeom>
+          <a:solidFill>
+            <a:srgbClr val="2D5016"/>
+          </a:solidFill>
+          <a:ln>
+            <a:noFill/>
+          </a:ln>
+        </p:spPr>
+        <p:style>
+          <a:lnRef idx="1">
+            <a:schemeClr val="accent1"/>
+          </a:lnRef>
+          <a:fillRef idx="3">
+            <a:schemeClr val="accent1"/>
+          </a:fillRef>
+          <a:effectRef idx="2">
+            <a:schemeClr val="accent1"/>
+          </a:effectRef>
+          <a:fontRef idx="minor">
+            <a:schemeClr val="lt1"/>
+          </a:fontRef>
+        </p:style>
+        <p:txBody>
+          <a:bodyPr rtlCol="0" anchor="ctr"/>
+          <a:lstStyle/>
+          <a:p>
+            <a:pPr algn="ctr"/>
+          </a:p>
+        </p:txBody>
+      </p:sp>
+      <p:sp>
+        <p:nvSpPr>
+          <p:cNvPr id="4" name="TextBox 3"/>
+          <p:cNvSpPr txBox="1"/>
+          <p:nvPr/>
+        </p:nvSpPr>
+        <p:spPr>
+          <a:xfrm>
+            <a:off x="548640" y="960120"/>
+            <a:ext cx="411479" cy="411480"/>
+          </a:xfrm>
+          <a:prstGeom prst="rect">
+            <a:avLst/>
+          </a:prstGeom>
+          <a:noFill/>
+        </p:spPr>
+        <p:txBody>
+          <a:bodyPr wrap="square">
+            <a:spAutoFit/>
+          </a:bodyPr>
+          <a:lstStyle/>
+          <a:p>
+            <a:pPr algn="l">
+              <a:defRPr sz="1400" b="1">
+                <a:solidFill>
+                  <a:srgbClr val="FFFFFF"/>
+                </a:solidFill>
+                <a:latin typeface="Microsoft YaHei"/>
+              </a:defRPr>
+            </a:pPr>
+            <a:r>
+              <a:t>#</a:t>
+            </a:r>
+          </a:p>
+        </p:txBody>
+      </p:sp>
+      <p:sp>
+        <p:nvSpPr>
+          <p:cNvPr id="5" name="Rectangle 4"/>
+          <p:cNvSpPr/>
+          <p:nvPr/>
+        </p:nvSpPr>
+        <p:spPr>
+          <a:xfrm>
+            <a:off x="1005840" y="914400"/>
+            <a:ext cx="4983480" cy="457200"/>
+          </a:xfrm>
+          <a:prstGeom prst="rect">
+            <a:avLst/>
+          </a:prstGeom>
+          <a:solidFill>
+            <a:srgbClr val="2D5016"/>
+          </a:solidFill>
+          <a:ln>
+            <a:noFill/>
+          </a:ln>
+        </p:spPr>
+        <p:style>
+          <a:lnRef idx="1">
+            <a:schemeClr val="accent1"/>
+          </a:lnRef>
+          <a:fillRef idx="3">
+            <a:schemeClr val="accent1"/>
+          </a:fillRef>
+          <a:effectRef idx="2">
+            <a:schemeClr val="accent1"/>
+          </a:effectRef>
+          <a:fontRef idx="minor">
+            <a:schemeClr val="lt1"/>
+          </a:fontRef>
+        </p:style>
+        <p:txBody>
+          <a:bodyPr rtlCol="0" anchor="ctr"/>
+          <a:lstStyle/>
+          <a:p>
+            <a:pPr algn="ctr"/>
+          </a:p>
+        </p:txBody>
+      </p:sp>
+      <p:sp>
+        <p:nvSpPr>
+          <p:cNvPr id="6" name="TextBox 5"/>
+          <p:cNvSpPr txBox="1"/>
+          <p:nvPr/>
+        </p:nvSpPr>
+        <p:spPr>
+          <a:xfrm>
+            <a:off x="1097280" y="960120"/>
+            <a:ext cx="4892040" cy="411480"/>
+          </a:xfrm>
+          <a:prstGeom prst="rect">
+            <a:avLst/>
+          </a:prstGeom>
+          <a:noFill/>
+        </p:spPr>
+        <p:txBody>
+          <a:bodyPr wrap="square">
+            <a:spAutoFit/>
+          </a:bodyPr>
+          <a:lstStyle/>
+          <a:p>
+            <a:pPr algn="l">
+              <a:defRPr sz="1400" b="1">
+                <a:solidFill>
+                  <a:srgbClr val="FFFFFF"/>
+                </a:solidFill>
+                <a:latin typeface="Microsoft YaHei"/>
+              </a:defRPr>
+            </a:pPr>
+            <a:r>
+              <a:t>脚本名</a:t>
+            </a:r>
+          </a:p>
+        </p:txBody>
+      </p:sp>
+      <p:sp>
+        <p:nvSpPr>
+          <p:cNvPr id="7" name="Rectangle 6"/>
+          <p:cNvSpPr/>
+          <p:nvPr/>
+        </p:nvSpPr>
+        <p:spPr>
+          <a:xfrm>
+            <a:off x="6035040" y="914400"/>
+            <a:ext cx="2514600" cy="457200"/>
+          </a:xfrm>
+          <a:prstGeom prst="rect">
+            <a:avLst/>
+          </a:prstGeom>
+          <a:solidFill>
+            <a:srgbClr val="2D5016"/>
+          </a:solidFill>
+          <a:ln>
+            <a:noFill/>
+          </a:ln>
+        </p:spPr>
+        <p:style>
+          <a:lnRef idx="1">
+            <a:schemeClr val="accent1"/>
+          </a:lnRef>
+          <a:fillRef idx="3">
+            <a:schemeClr val="accent1"/>
+          </a:fillRef>
+          <a:effectRef idx="2">
+            <a:schemeClr val="accent1"/>
+          </a:effectRef>
+          <a:fontRef idx="minor">
+            <a:schemeClr val="lt1"/>
+          </a:fontRef>
+        </p:style>
+        <p:txBody>
+          <a:bodyPr rtlCol="0" anchor="ctr"/>
+          <a:lstStyle/>
+          <a:p>
+            <a:pPr algn="ctr"/>
+          </a:p>
+        </p:txBody>
+      </p:sp>
+      <p:sp>
+        <p:nvSpPr>
+          <p:cNvPr id="8" name="TextBox 7"/>
+          <p:cNvSpPr txBox="1"/>
+          <p:nvPr/>
+        </p:nvSpPr>
+        <p:spPr>
+          <a:xfrm>
+            <a:off x="6126479" y="960120"/>
+            <a:ext cx="2423160" cy="411480"/>
+          </a:xfrm>
+          <a:prstGeom prst="rect">
+            <a:avLst/>
+          </a:prstGeom>
+          <a:noFill/>
+        </p:spPr>
+        <p:txBody>
+          <a:bodyPr wrap="square">
+            <a:spAutoFit/>
+          </a:bodyPr>
+          <a:lstStyle/>
+          <a:p>
+            <a:pPr algn="l">
+              <a:defRPr sz="1400" b="1">
+                <a:solidFill>
+                  <a:srgbClr val="FFFFFF"/>
+                </a:solidFill>
+                <a:latin typeface="Microsoft YaHei"/>
+              </a:defRPr>
+            </a:pPr>
+            <a:r>
+              <a:t>栏目</a:t>
+            </a:r>
+          </a:p>
+        </p:txBody>
+      </p:sp>
+      <p:sp>
+        <p:nvSpPr>
+          <p:cNvPr id="9" name="Rectangle 8"/>
+          <p:cNvSpPr/>
+          <p:nvPr/>
+        </p:nvSpPr>
+        <p:spPr>
+          <a:xfrm>
+            <a:off x="8595360" y="914400"/>
+            <a:ext cx="1051560" cy="457200"/>
+          </a:xfrm>
+          <a:prstGeom prst="rect">
+            <a:avLst/>
+          </a:prstGeom>
+          <a:solidFill>
+            <a:srgbClr val="2D5016"/>
+          </a:solidFill>
+          <a:ln>
+            <a:noFill/>
+          </a:ln>
+        </p:spPr>
+        <p:style>
+          <a:lnRef idx="1">
+            <a:schemeClr val="accent1"/>
+          </a:lnRef>
+          <a:fillRef idx="3">
+            <a:schemeClr val="accent1"/>
+          </a:fillRef>
+          <a:effectRef idx="2">
+            <a:schemeClr val="accent1"/>
+          </a:effectRef>
+          <a:fontRef idx="minor">
+            <a:schemeClr val="lt1"/>
+          </a:fontRef>
+        </p:style>
+        <p:txBody>
+          <a:bodyPr rtlCol="0" anchor="ctr"/>
+          <a:lstStyle/>
+          <a:p>
+            <a:pPr algn="ctr"/>
+          </a:p>
+        </p:txBody>
+      </p:sp>
+      <p:sp>
+        <p:nvSpPr>
+          <p:cNvPr id="10" name="TextBox 9"/>
+          <p:cNvSpPr txBox="1"/>
+          <p:nvPr/>
+        </p:nvSpPr>
+        <p:spPr>
+          <a:xfrm>
+            <a:off x="8686800" y="960120"/>
+            <a:ext cx="960120" cy="411480"/>
+          </a:xfrm>
+          <a:prstGeom prst="rect">
+            <a:avLst/>
+          </a:prstGeom>
+          <a:noFill/>
+        </p:spPr>
+        <p:txBody>
+          <a:bodyPr wrap="square">
+            <a:spAutoFit/>
+          </a:bodyPr>
+          <a:lstStyle/>
+          <a:p>
+            <a:pPr algn="l">
+              <a:defRPr sz="1400" b="1">
+                <a:solidFill>
+                  <a:srgbClr val="FFFFFF"/>
+                </a:solidFill>
+                <a:latin typeface="Microsoft YaHei"/>
+              </a:defRPr>
+            </a:pPr>
+            <a:r>
+              <a:t>时长</a:t>
+            </a:r>
+          </a:p>
+        </p:txBody>
+      </p:sp>
+      <p:sp>
+        <p:nvSpPr>
+          <p:cNvPr id="11" name="Rectangle 10"/>
+          <p:cNvSpPr/>
+          <p:nvPr/>
+        </p:nvSpPr>
+        <p:spPr>
+          <a:xfrm>
+            <a:off x="9692640" y="914400"/>
+            <a:ext cx="1051560" cy="457200"/>
+          </a:xfrm>
+          <a:prstGeom prst="rect">
+            <a:avLst/>
+          </a:prstGeom>
+          <a:solidFill>
+            <a:srgbClr val="2D5016"/>
+          </a:solidFill>
+          <a:ln>
+            <a:noFill/>
+          </a:ln>
+        </p:spPr>
+        <p:style>
+          <a:lnRef idx="1">
+            <a:schemeClr val="accent1"/>
+          </a:lnRef>
+          <a:fillRef idx="3">
+            <a:schemeClr val="accent1"/>
+          </a:fillRef>
+          <a:effectRef idx="2">
+            <a:schemeClr val="accent1"/>
+          </a:effectRef>
+          <a:fontRef idx="minor">
+            <a:schemeClr val="lt1"/>
+          </a:fontRef>
+        </p:style>
+        <p:txBody>
+          <a:bodyPr rtlCol="0" anchor="ctr"/>
+          <a:lstStyle/>
+          <a:p>
+            <a:pPr algn="ctr"/>
+          </a:p>
+        </p:txBody>
+      </p:sp>
+      <p:sp>
+        <p:nvSpPr>
+          <p:cNvPr id="12" name="TextBox 11"/>
+          <p:cNvSpPr txBox="1"/>
+          <p:nvPr/>
+        </p:nvSpPr>
+        <p:spPr>
+          <a:xfrm>
+            <a:off x="9784080" y="960120"/>
+            <a:ext cx="960120" cy="411480"/>
+          </a:xfrm>
+          <a:prstGeom prst="rect">
+            <a:avLst/>
+          </a:prstGeom>
+          <a:noFill/>
+        </p:spPr>
+        <p:txBody>
+          <a:bodyPr wrap="square">
+            <a:spAutoFit/>
+          </a:bodyPr>
+          <a:lstStyle/>
+          <a:p>
+            <a:pPr algn="l">
+              <a:defRPr sz="1400" b="1">
+                <a:solidFill>
+                  <a:srgbClr val="FFFFFF"/>
+                </a:solidFill>
+                <a:latin typeface="Microsoft YaHei"/>
+              </a:defRPr>
+            </a:pPr>
+            <a:r>
+              <a:t>传播力</a:t>
+            </a:r>
+          </a:p>
+        </p:txBody>
+      </p:sp>
+      <p:sp>
+        <p:nvSpPr>
+          <p:cNvPr id="13" name="Rectangle 12"/>
+          <p:cNvSpPr/>
+          <p:nvPr/>
+        </p:nvSpPr>
+        <p:spPr>
+          <a:xfrm>
+            <a:off x="457200" y="1508760"/>
+            <a:ext cx="502919" cy="475488"/>
+          </a:xfrm>
+          <a:prstGeom prst="rect">
+            <a:avLst/>
+          </a:prstGeom>
+          <a:solidFill>
+            <a:srgbClr val="F7F5F0"/>
+          </a:solidFill>
+          <a:ln>
+            <a:noFill/>
+          </a:ln>
+        </p:spPr>
+        <p:style>
+          <a:lnRef idx="1">
+            <a:schemeClr val="accent1"/>
+          </a:lnRef>
+          <a:fillRef idx="3">
+            <a:schemeClr val="accent1"/>
+          </a:fillRef>
+          <a:effectRef idx="2">
+            <a:schemeClr val="accent1"/>
+          </a:effectRef>
+          <a:fontRef idx="minor">
+            <a:schemeClr val="lt1"/>
+          </a:fontRef>
+        </p:style>
+        <p:txBody>
+          <a:bodyPr rtlCol="0" anchor="ctr"/>
+          <a:lstStyle/>
+          <a:p>
+            <a:pPr algn="ctr"/>
+          </a:p>
+        </p:txBody>
+      </p:sp>
+      <p:sp>
+        <p:nvSpPr>
+          <p:cNvPr id="14" name="TextBox 13"/>
+          <p:cNvSpPr txBox="1"/>
+          <p:nvPr/>
+        </p:nvSpPr>
+        <p:spPr>
+          <a:xfrm>
+            <a:off x="548640" y="1563624"/>
+            <a:ext cx="411479" cy="384048"/>
+          </a:xfrm>
+          <a:prstGeom prst="rect">
+            <a:avLst/>
+          </a:prstGeom>
+          <a:noFill/>
+        </p:spPr>
+        <p:txBody>
+          <a:bodyPr wrap="square">
+            <a:spAutoFit/>
+          </a:bodyPr>
+          <a:lstStyle/>
+          <a:p>
+            <a:pPr algn="l">
+              <a:defRPr sz="1300" b="1">
+                <a:solidFill>
+                  <a:srgbClr val="2D5016"/>
+                </a:solidFill>
+                <a:latin typeface="Microsoft YaHei"/>
+              </a:defRPr>
+            </a:pPr>
+            <a:r>
+              <a:t>13</a:t>
+            </a:r>
+          </a:p>
+        </p:txBody>
+      </p:sp>
+      <p:sp>
+        <p:nvSpPr>
+          <p:cNvPr id="15" name="Rectangle 14"/>
+          <p:cNvSpPr/>
+          <p:nvPr/>
+        </p:nvSpPr>
+        <p:spPr>
+          <a:xfrm>
+            <a:off x="1005840" y="1508760"/>
+            <a:ext cx="4983480" cy="475488"/>
+          </a:xfrm>
+          <a:prstGeom prst="rect">
+            <a:avLst/>
+          </a:prstGeom>
+          <a:solidFill>
+            <a:srgbClr val="F7F5F0"/>
+          </a:solidFill>
+          <a:ln>
+            <a:noFill/>
+          </a:ln>
+        </p:spPr>
+        <p:style>
+          <a:lnRef idx="1">
+            <a:schemeClr val="accent1"/>
+          </a:lnRef>
+          <a:fillRef idx="3">
+            <a:schemeClr val="accent1"/>
+          </a:fillRef>
+          <a:effectRef idx="2">
+            <a:schemeClr val="accent1"/>
+          </a:effectRef>
+          <a:fontRef idx="minor">
+            <a:schemeClr val="lt1"/>
+          </a:fontRef>
+        </p:style>
+        <p:txBody>
+          <a:bodyPr rtlCol="0" anchor="ctr"/>
+          <a:lstStyle/>
+          <a:p>
+            <a:pPr algn="ctr"/>
+          </a:p>
+        </p:txBody>
+      </p:sp>
+      <p:sp>
+        <p:nvSpPr>
+          <p:cNvPr id="16" name="TextBox 15"/>
+          <p:cNvSpPr txBox="1"/>
+          <p:nvPr/>
+        </p:nvSpPr>
+        <p:spPr>
+          <a:xfrm>
+            <a:off x="1097280" y="1563624"/>
+            <a:ext cx="4892040" cy="384048"/>
+          </a:xfrm>
+          <a:prstGeom prst="rect">
+            <a:avLst/>
+          </a:prstGeom>
+          <a:noFill/>
+        </p:spPr>
+        <p:txBody>
+          <a:bodyPr wrap="square">
+            <a:spAutoFit/>
+          </a:bodyPr>
+          <a:lstStyle/>
+          <a:p>
+            <a:pPr algn="l">
+              <a:defRPr sz="1300" b="0">
+                <a:solidFill>
+                  <a:srgbClr val="333333"/>
+                </a:solidFill>
+                <a:latin typeface="Microsoft YaHei"/>
+              </a:defRPr>
+            </a:pPr>
+            <a:r>
+              <a:t>我们拿遍了延庆的冠军</a:t>
+            </a:r>
+          </a:p>
+        </p:txBody>
+      </p:sp>
+      <p:sp>
+        <p:nvSpPr>
+          <p:cNvPr id="17" name="Rectangle 16"/>
+          <p:cNvSpPr/>
+          <p:nvPr/>
+        </p:nvSpPr>
+        <p:spPr>
+          <a:xfrm>
+            <a:off x="6035040" y="1508760"/>
+            <a:ext cx="2514600" cy="475488"/>
+          </a:xfrm>
+          <a:prstGeom prst="rect">
+            <a:avLst/>
+          </a:prstGeom>
+          <a:solidFill>
+            <a:srgbClr val="F7F5F0"/>
+          </a:solidFill>
+          <a:ln>
+            <a:noFill/>
+          </a:ln>
+        </p:spPr>
+        <p:style>
+          <a:lnRef idx="1">
+            <a:schemeClr val="accent1"/>
+          </a:lnRef>
+          <a:fillRef idx="3">
+            <a:schemeClr val="accent1"/>
+          </a:fillRef>
+          <a:effectRef idx="2">
+            <a:schemeClr val="accent1"/>
+          </a:effectRef>
+          <a:fontRef idx="minor">
+            <a:schemeClr val="lt1"/>
+          </a:fontRef>
+        </p:style>
+        <p:txBody>
+          <a:bodyPr rtlCol="0" anchor="ctr"/>
+          <a:lstStyle/>
+          <a:p>
+            <a:pPr algn="ctr"/>
+          </a:p>
+        </p:txBody>
+      </p:sp>
+      <p:sp>
+        <p:nvSpPr>
+          <p:cNvPr id="18" name="TextBox 17"/>
+          <p:cNvSpPr txBox="1"/>
+          <p:nvPr/>
+        </p:nvSpPr>
+        <p:spPr>
+          <a:xfrm>
+            <a:off x="6126479" y="1563624"/>
+            <a:ext cx="2423160" cy="384048"/>
+          </a:xfrm>
+          <a:prstGeom prst="rect">
+            <a:avLst/>
+          </a:prstGeom>
+          <a:noFill/>
+        </p:spPr>
+        <p:txBody>
+          <a:bodyPr wrap="square">
+            <a:spAutoFit/>
+          </a:bodyPr>
+          <a:lstStyle/>
+          <a:p>
+            <a:pPr algn="l">
+              <a:defRPr sz="1300" b="0">
+                <a:solidFill>
+                  <a:srgbClr val="333333"/>
+                </a:solidFill>
+                <a:latin typeface="Microsoft YaHei"/>
+              </a:defRPr>
+            </a:pPr>
+            <a:r>
+              <a:t>我们拿遍了延庆的冠军</a:t>
+            </a:r>
+          </a:p>
+        </p:txBody>
+      </p:sp>
+      <p:sp>
+        <p:nvSpPr>
+          <p:cNvPr id="19" name="Rectangle 18"/>
+          <p:cNvSpPr/>
+          <p:nvPr/>
+        </p:nvSpPr>
+        <p:spPr>
+          <a:xfrm>
+            <a:off x="8595360" y="1508760"/>
+            <a:ext cx="1051560" cy="475488"/>
+          </a:xfrm>
+          <a:prstGeom prst="rect">
+            <a:avLst/>
+          </a:prstGeom>
+          <a:solidFill>
+            <a:srgbClr val="F7F5F0"/>
+          </a:solidFill>
+          <a:ln>
+            <a:noFill/>
+          </a:ln>
+        </p:spPr>
+        <p:style>
+          <a:lnRef idx="1">
+            <a:schemeClr val="accent1"/>
+          </a:lnRef>
+          <a:fillRef idx="3">
+            <a:schemeClr val="accent1"/>
+          </a:fillRef>
+          <a:effectRef idx="2">
+            <a:schemeClr val="accent1"/>
+          </a:effectRef>
+          <a:fontRef idx="minor">
+            <a:schemeClr val="lt1"/>
+          </a:fontRef>
+        </p:style>
+        <p:txBody>
+          <a:bodyPr rtlCol="0" anchor="ctr"/>
+          <a:lstStyle/>
+          <a:p>
+            <a:pPr algn="ctr"/>
+          </a:p>
+        </p:txBody>
+      </p:sp>
+      <p:sp>
+        <p:nvSpPr>
+          <p:cNvPr id="20" name="TextBox 19"/>
+          <p:cNvSpPr txBox="1"/>
+          <p:nvPr/>
+        </p:nvSpPr>
+        <p:spPr>
+          <a:xfrm>
+            <a:off x="8686800" y="1563624"/>
+            <a:ext cx="960120" cy="384048"/>
+          </a:xfrm>
+          <a:prstGeom prst="rect">
+            <a:avLst/>
+          </a:prstGeom>
+          <a:noFill/>
+        </p:spPr>
+        <p:txBody>
+          <a:bodyPr wrap="square">
+            <a:spAutoFit/>
+          </a:bodyPr>
+          <a:lstStyle/>
+          <a:p>
+            <a:pPr algn="l">
+              <a:defRPr sz="1300" b="0">
+                <a:solidFill>
+                  <a:srgbClr val="333333"/>
+                </a:solidFill>
+                <a:latin typeface="Microsoft YaHei"/>
+              </a:defRPr>
+            </a:pPr>
+            <a:r>
+              <a:t>45s</a:t>
+            </a:r>
+          </a:p>
+        </p:txBody>
+      </p:sp>
+      <p:sp>
+        <p:nvSpPr>
+          <p:cNvPr id="21" name="Rectangle 20"/>
+          <p:cNvSpPr/>
+          <p:nvPr/>
+        </p:nvSpPr>
+        <p:spPr>
+          <a:xfrm>
+            <a:off x="9692640" y="1508760"/>
+            <a:ext cx="1051560" cy="475488"/>
+          </a:xfrm>
+          <a:prstGeom prst="rect">
+            <a:avLst/>
+          </a:prstGeom>
+          <a:solidFill>
+            <a:srgbClr val="F7F5F0"/>
+          </a:solidFill>
+          <a:ln>
+            <a:noFill/>
+          </a:ln>
+        </p:spPr>
+        <p:style>
+          <a:lnRef idx="1">
+            <a:schemeClr val="accent1"/>
+          </a:lnRef>
+          <a:fillRef idx="3">
+            <a:schemeClr val="accent1"/>
+          </a:fillRef>
+          <a:effectRef idx="2">
+            <a:schemeClr val="accent1"/>
+          </a:effectRef>
+          <a:fontRef idx="minor">
+            <a:schemeClr val="lt1"/>
+          </a:fontRef>
+        </p:style>
+        <p:txBody>
+          <a:bodyPr rtlCol="0" anchor="ctr"/>
+          <a:lstStyle/>
+          <a:p>
+            <a:pPr algn="ctr"/>
+          </a:p>
+        </p:txBody>
+      </p:sp>
+      <p:sp>
+        <p:nvSpPr>
+          <p:cNvPr id="22" name="TextBox 21"/>
+          <p:cNvSpPr txBox="1"/>
+          <p:nvPr/>
+        </p:nvSpPr>
+        <p:spPr>
+          <a:xfrm>
+            <a:off x="9784080" y="1563624"/>
+            <a:ext cx="960120" cy="384048"/>
+          </a:xfrm>
+          <a:prstGeom prst="rect">
+            <a:avLst/>
+          </a:prstGeom>
+          <a:noFill/>
+        </p:spPr>
+        <p:txBody>
+          <a:bodyPr wrap="square">
+            <a:spAutoFit/>
+          </a:bodyPr>
+          <a:lstStyle/>
+          <a:p>
+            <a:pPr algn="l">
+              <a:defRPr sz="1300" b="0">
+                <a:solidFill>
+                  <a:srgbClr val="333333"/>
+                </a:solidFill>
+                <a:latin typeface="Microsoft YaHei"/>
+              </a:defRPr>
+            </a:pPr>
+            <a:r>
+              <a:t>60s</a:t>
+            </a:r>
+          </a:p>
+        </p:txBody>
+      </p:sp>
+      <p:sp>
+        <p:nvSpPr>
+          <p:cNvPr id="23" name="Rectangle 22"/>
+          <p:cNvSpPr/>
+          <p:nvPr/>
+        </p:nvSpPr>
+        <p:spPr>
+          <a:xfrm>
+            <a:off x="457200" y="2057400"/>
+            <a:ext cx="502919" cy="475488"/>
+          </a:xfrm>
+          <a:prstGeom prst="rect">
+            <a:avLst/>
+          </a:prstGeom>
+          <a:solidFill>
+            <a:srgbClr val="FFFFFF"/>
+          </a:solidFill>
+          <a:ln>
+            <a:noFill/>
+          </a:ln>
+        </p:spPr>
+        <p:style>
+          <a:lnRef idx="1">
+            <a:schemeClr val="accent1"/>
+          </a:lnRef>
+          <a:fillRef idx="3">
+            <a:schemeClr val="accent1"/>
+          </a:fillRef>
+          <a:effectRef idx="2">
+            <a:schemeClr val="accent1"/>
+          </a:effectRef>
+          <a:fontRef idx="minor">
+            <a:schemeClr val="lt1"/>
+          </a:fontRef>
+        </p:style>
+        <p:txBody>
+          <a:bodyPr rtlCol="0" anchor="ctr"/>
+          <a:lstStyle/>
+          <a:p>
+            <a:pPr algn="ctr"/>
+          </a:p>
+        </p:txBody>
+      </p:sp>
+      <p:sp>
+        <p:nvSpPr>
+          <p:cNvPr id="24" name="TextBox 23"/>
+          <p:cNvSpPr txBox="1"/>
+          <p:nvPr/>
+        </p:nvSpPr>
+        <p:spPr>
+          <a:xfrm>
+            <a:off x="548640" y="2112264"/>
+            <a:ext cx="411479" cy="384048"/>
+          </a:xfrm>
+          <a:prstGeom prst="rect">
+            <a:avLst/>
+          </a:prstGeom>
+          <a:noFill/>
+        </p:spPr>
+        <p:txBody>
+          <a:bodyPr wrap="square">
+            <a:spAutoFit/>
+          </a:bodyPr>
+          <a:lstStyle/>
+          <a:p>
+            <a:pPr algn="l">
+              <a:defRPr sz="1300" b="1">
+                <a:solidFill>
+                  <a:srgbClr val="2D5016"/>
+                </a:solidFill>
+                <a:latin typeface="Microsoft YaHei"/>
+              </a:defRPr>
+            </a:pPr>
+            <a:r>
+              <a:t>14</a:t>
+            </a:r>
+          </a:p>
+        </p:txBody>
+      </p:sp>
+      <p:sp>
+        <p:nvSpPr>
+          <p:cNvPr id="25" name="Rectangle 24"/>
+          <p:cNvSpPr/>
+          <p:nvPr/>
+        </p:nvSpPr>
+        <p:spPr>
+          <a:xfrm>
+            <a:off x="1005840" y="2057400"/>
+            <a:ext cx="4983480" cy="475488"/>
+          </a:xfrm>
+          <a:prstGeom prst="rect">
+            <a:avLst/>
+          </a:prstGeom>
+          <a:solidFill>
+            <a:srgbClr val="FFFFFF"/>
+          </a:solidFill>
+          <a:ln>
+            <a:noFill/>
+          </a:ln>
+        </p:spPr>
+        <p:style>
+          <a:lnRef idx="1">
+            <a:schemeClr val="accent1"/>
+          </a:lnRef>
+          <a:fillRef idx="3">
+            <a:schemeClr val="accent1"/>
+          </a:fillRef>
+          <a:effectRef idx="2">
+            <a:schemeClr val="accent1"/>
+          </a:effectRef>
+          <a:fontRef idx="minor">
+            <a:schemeClr val="lt1"/>
+          </a:fontRef>
+        </p:style>
+        <p:txBody>
+          <a:bodyPr rtlCol="0" anchor="ctr"/>
+          <a:lstStyle/>
+          <a:p>
+            <a:pPr algn="ctr"/>
+          </a:p>
+        </p:txBody>
+      </p:sp>
+      <p:sp>
+        <p:nvSpPr>
+          <p:cNvPr id="26" name="TextBox 25"/>
+          <p:cNvSpPr txBox="1"/>
+          <p:nvPr/>
+        </p:nvSpPr>
+        <p:spPr>
+          <a:xfrm>
+            <a:off x="1097280" y="2112264"/>
+            <a:ext cx="4892040" cy="384048"/>
+          </a:xfrm>
+          <a:prstGeom prst="rect">
+            <a:avLst/>
+          </a:prstGeom>
+          <a:noFill/>
+        </p:spPr>
+        <p:txBody>
+          <a:bodyPr wrap="square">
+            <a:spAutoFit/>
+          </a:bodyPr>
+          <a:lstStyle/>
+          <a:p>
+            <a:pPr algn="l">
+              <a:defRPr sz="1300" b="0">
+                <a:solidFill>
+                  <a:srgbClr val="333333"/>
+                </a:solidFill>
+                <a:latin typeface="Microsoft YaHei"/>
+              </a:defRPr>
+            </a:pPr>
+            <a:r>
+              <a:t>一颗球三代人</a:t>
+            </a:r>
+          </a:p>
+        </p:txBody>
+      </p:sp>
+      <p:sp>
+        <p:nvSpPr>
+          <p:cNvPr id="27" name="Rectangle 26"/>
+          <p:cNvSpPr/>
+          <p:nvPr/>
+        </p:nvSpPr>
+        <p:spPr>
+          <a:xfrm>
+            <a:off x="6035040" y="2057400"/>
+            <a:ext cx="2514600" cy="475488"/>
+          </a:xfrm>
+          <a:prstGeom prst="rect">
+            <a:avLst/>
+          </a:prstGeom>
+          <a:solidFill>
+            <a:srgbClr val="FFFFFF"/>
+          </a:solidFill>
+          <a:ln>
+            <a:noFill/>
+          </a:ln>
+        </p:spPr>
+        <p:style>
+          <a:lnRef idx="1">
+            <a:schemeClr val="accent1"/>
+          </a:lnRef>
+          <a:fillRef idx="3">
+            <a:schemeClr val="accent1"/>
+          </a:fillRef>
+          <a:effectRef idx="2">
+            <a:schemeClr val="accent1"/>
+          </a:effectRef>
+          <a:fontRef idx="minor">
+            <a:schemeClr val="lt1"/>
+          </a:fontRef>
+        </p:style>
+        <p:txBody>
+          <a:bodyPr rtlCol="0" anchor="ctr"/>
+          <a:lstStyle/>
+          <a:p>
+            <a:pPr algn="ctr"/>
+          </a:p>
+        </p:txBody>
+      </p:sp>
+      <p:sp>
+        <p:nvSpPr>
+          <p:cNvPr id="28" name="TextBox 27"/>
+          <p:cNvSpPr txBox="1"/>
+          <p:nvPr/>
+        </p:nvSpPr>
+        <p:spPr>
+          <a:xfrm>
+            <a:off x="6126479" y="2112264"/>
+            <a:ext cx="2423160" cy="384048"/>
+          </a:xfrm>
+          <a:prstGeom prst="rect">
+            <a:avLst/>
+          </a:prstGeom>
+          <a:noFill/>
+        </p:spPr>
+        <p:txBody>
+          <a:bodyPr wrap="square">
+            <a:spAutoFit/>
+          </a:bodyPr>
+          <a:lstStyle/>
+          <a:p>
+            <a:pPr algn="l">
+              <a:defRPr sz="1300" b="0">
+                <a:solidFill>
+                  <a:srgbClr val="333333"/>
+                </a:solidFill>
+                <a:latin typeface="Microsoft YaHei"/>
+              </a:defRPr>
+            </a:pPr>
+            <a:r>
+              <a:t>一颗球三代人</a:t>
+            </a:r>
+          </a:p>
+        </p:txBody>
+      </p:sp>
+      <p:sp>
+        <p:nvSpPr>
+          <p:cNvPr id="29" name="Rectangle 28"/>
+          <p:cNvSpPr/>
+          <p:nvPr/>
+        </p:nvSpPr>
+        <p:spPr>
+          <a:xfrm>
+            <a:off x="8595360" y="2057400"/>
+            <a:ext cx="1051560" cy="475488"/>
+          </a:xfrm>
+          <a:prstGeom prst="rect">
+            <a:avLst/>
+          </a:prstGeom>
+          <a:solidFill>
+            <a:srgbClr val="FFFFFF"/>
+          </a:solidFill>
+          <a:ln>
+            <a:noFill/>
+          </a:ln>
+        </p:spPr>
+        <p:style>
+          <a:lnRef idx="1">
+            <a:schemeClr val="accent1"/>
+          </a:lnRef>
+          <a:fillRef idx="3">
+            <a:schemeClr val="accent1"/>
+          </a:fillRef>
+          <a:effectRef idx="2">
+            <a:schemeClr val="accent1"/>
+          </a:effectRef>
+          <a:fontRef idx="minor">
+            <a:schemeClr val="lt1"/>
+          </a:fontRef>
+        </p:style>
+        <p:txBody>
+          <a:bodyPr rtlCol="0" anchor="ctr"/>
+          <a:lstStyle/>
+          <a:p>
+            <a:pPr algn="ctr"/>
+          </a:p>
+        </p:txBody>
+      </p:sp>
+      <p:sp>
+        <p:nvSpPr>
+          <p:cNvPr id="30" name="TextBox 29"/>
+          <p:cNvSpPr txBox="1"/>
+          <p:nvPr/>
+        </p:nvSpPr>
+        <p:spPr>
+          <a:xfrm>
+            <a:off x="8686800" y="2112264"/>
+            <a:ext cx="960120" cy="384048"/>
+          </a:xfrm>
+          <a:prstGeom prst="rect">
+            <a:avLst/>
+          </a:prstGeom>
+          <a:noFill/>
+        </p:spPr>
+        <p:txBody>
+          <a:bodyPr wrap="square">
+            <a:spAutoFit/>
+          </a:bodyPr>
+          <a:lstStyle/>
+          <a:p>
+            <a:pPr algn="l">
+              <a:defRPr sz="1300" b="0">
+                <a:solidFill>
+                  <a:srgbClr val="333333"/>
+                </a:solidFill>
+                <a:latin typeface="Microsoft YaHei"/>
+              </a:defRPr>
+            </a:pPr>
+            <a:r>
+              <a:t>60s</a:t>
+            </a:r>
+          </a:p>
+        </p:txBody>
+      </p:sp>
+      <p:sp>
+        <p:nvSpPr>
+          <p:cNvPr id="31" name="Rectangle 30"/>
+          <p:cNvSpPr/>
+          <p:nvPr/>
+        </p:nvSpPr>
+        <p:spPr>
+          <a:xfrm>
+            <a:off x="9692640" y="2057400"/>
+            <a:ext cx="1051560" cy="475488"/>
+          </a:xfrm>
+          <a:prstGeom prst="rect">
+            <a:avLst/>
+          </a:prstGeom>
+          <a:solidFill>
+            <a:srgbClr val="FFFFFF"/>
+          </a:solidFill>
+          <a:ln>
+            <a:noFill/>
+          </a:ln>
+        </p:spPr>
+        <p:style>
+          <a:lnRef idx="1">
+            <a:schemeClr val="accent1"/>
+          </a:lnRef>
+          <a:fillRef idx="3">
+            <a:schemeClr val="accent1"/>
+          </a:fillRef>
+          <a:effectRef idx="2">
+            <a:schemeClr val="accent1"/>
+          </a:effectRef>
+          <a:fontRef idx="minor">
+            <a:schemeClr val="lt1"/>
+          </a:fontRef>
+        </p:style>
+        <p:txBody>
+          <a:bodyPr rtlCol="0" anchor="ctr"/>
+          <a:lstStyle/>
+          <a:p>
+            <a:pPr algn="ctr"/>
+          </a:p>
+        </p:txBody>
+      </p:sp>
+      <p:sp>
+        <p:nvSpPr>
+          <p:cNvPr id="32" name="TextBox 31"/>
+          <p:cNvSpPr txBox="1"/>
+          <p:nvPr/>
+        </p:nvSpPr>
+        <p:spPr>
+          <a:xfrm>
+            <a:off x="9784080" y="2112264"/>
+            <a:ext cx="960120" cy="384048"/>
+          </a:xfrm>
+          <a:prstGeom prst="rect">
+            <a:avLst/>
+          </a:prstGeom>
+          <a:noFill/>
+        </p:spPr>
+        <p:txBody>
+          <a:bodyPr wrap="square">
+            <a:spAutoFit/>
+          </a:bodyPr>
+          <a:lstStyle/>
+          <a:p>
+            <a:pPr algn="l">
+              <a:defRPr sz="1300" b="0">
+                <a:solidFill>
+                  <a:srgbClr val="333333"/>
+                </a:solidFill>
+                <a:latin typeface="Microsoft YaHei"/>
+              </a:defRPr>
+            </a:pPr>
+            <a:r>
+              <a:t>55s</a:t>
+            </a:r>
+          </a:p>
+        </p:txBody>
+      </p:sp>
+      <p:sp>
+        <p:nvSpPr>
+          <p:cNvPr id="33" name="Rectangle 32"/>
+          <p:cNvSpPr/>
+          <p:nvPr/>
+        </p:nvSpPr>
+        <p:spPr>
+          <a:xfrm>
+            <a:off x="457200" y="2606039"/>
+            <a:ext cx="502919" cy="475488"/>
+          </a:xfrm>
+          <a:prstGeom prst="rect">
+            <a:avLst/>
+          </a:prstGeom>
+          <a:solidFill>
+            <a:srgbClr val="F7F5F0"/>
+          </a:solidFill>
+          <a:ln>
+            <a:noFill/>
+          </a:ln>
+        </p:spPr>
+        <p:style>
+          <a:lnRef idx="1">
+            <a:schemeClr val="accent1"/>
+          </a:lnRef>
+          <a:fillRef idx="3">
+            <a:schemeClr val="accent1"/>
+          </a:fillRef>
+          <a:effectRef idx="2">
+            <a:schemeClr val="accent1"/>
+          </a:effectRef>
+          <a:fontRef idx="minor">
+            <a:schemeClr val="lt1"/>
+          </a:fontRef>
+        </p:style>
+        <p:txBody>
+          <a:bodyPr rtlCol="0" anchor="ctr"/>
+          <a:lstStyle/>
+          <a:p>
+            <a:pPr algn="ctr"/>
+          </a:p>
+        </p:txBody>
+      </p:sp>
+      <p:sp>
+        <p:nvSpPr>
+          <p:cNvPr id="34" name="TextBox 33"/>
+          <p:cNvSpPr txBox="1"/>
+          <p:nvPr/>
+        </p:nvSpPr>
+        <p:spPr>
+          <a:xfrm>
+            <a:off x="548640" y="2660903"/>
+            <a:ext cx="411479" cy="384048"/>
+          </a:xfrm>
+          <a:prstGeom prst="rect">
+            <a:avLst/>
+          </a:prstGeom>
+          <a:noFill/>
+        </p:spPr>
+        <p:txBody>
+          <a:bodyPr wrap="square">
+            <a:spAutoFit/>
+          </a:bodyPr>
+          <a:lstStyle/>
+          <a:p>
+            <a:pPr algn="l">
+              <a:defRPr sz="1300" b="1">
+                <a:solidFill>
+                  <a:srgbClr val="2D5016"/>
+                </a:solidFill>
+                <a:latin typeface="Microsoft YaHei"/>
+              </a:defRPr>
+            </a:pPr>
+            <a:r>
+              <a:t>15</a:t>
+            </a:r>
+          </a:p>
+        </p:txBody>
+      </p:sp>
+      <p:sp>
+        <p:nvSpPr>
+          <p:cNvPr id="35" name="Rectangle 34"/>
+          <p:cNvSpPr/>
+          <p:nvPr/>
+        </p:nvSpPr>
+        <p:spPr>
+          <a:xfrm>
+            <a:off x="1005840" y="2606039"/>
+            <a:ext cx="4983480" cy="475488"/>
+          </a:xfrm>
+          <a:prstGeom prst="rect">
+            <a:avLst/>
+          </a:prstGeom>
+          <a:solidFill>
+            <a:srgbClr val="F7F5F0"/>
+          </a:solidFill>
+          <a:ln>
+            <a:noFill/>
+          </a:ln>
+        </p:spPr>
+        <p:style>
+          <a:lnRef idx="1">
+            <a:schemeClr val="accent1"/>
+          </a:lnRef>
+          <a:fillRef idx="3">
+            <a:schemeClr val="accent1"/>
+          </a:fillRef>
+          <a:effectRef idx="2">
+            <a:schemeClr val="accent1"/>
+          </a:effectRef>
+          <a:fontRef idx="minor">
+            <a:schemeClr val="lt1"/>
+          </a:fontRef>
+        </p:style>
+        <p:txBody>
+          <a:bodyPr rtlCol="0" anchor="ctr"/>
+          <a:lstStyle/>
+          <a:p>
+            <a:pPr algn="ctr"/>
+          </a:p>
+        </p:txBody>
+      </p:sp>
+      <p:sp>
+        <p:nvSpPr>
+          <p:cNvPr id="36" name="TextBox 35"/>
+          <p:cNvSpPr txBox="1"/>
+          <p:nvPr/>
+        </p:nvSpPr>
+        <p:spPr>
+          <a:xfrm>
+            <a:off x="1097280" y="2660903"/>
+            <a:ext cx="4892040" cy="384048"/>
+          </a:xfrm>
+          <a:prstGeom prst="rect">
+            <a:avLst/>
+          </a:prstGeom>
+          <a:noFill/>
+        </p:spPr>
+        <p:txBody>
+          <a:bodyPr wrap="square">
+            <a:spAutoFit/>
+          </a:bodyPr>
+          <a:lstStyle/>
+          <a:p>
+            <a:pPr algn="l">
+              <a:defRPr sz="1300" b="0">
+                <a:solidFill>
+                  <a:srgbClr val="333333"/>
+                </a:solidFill>
+                <a:latin typeface="Microsoft YaHei"/>
+              </a:defRPr>
+            </a:pPr>
+            <a:r>
+              <a:t>成年人踢球到底有啥用</a:t>
+            </a:r>
+          </a:p>
+        </p:txBody>
+      </p:sp>
+      <p:sp>
+        <p:nvSpPr>
+          <p:cNvPr id="37" name="Rectangle 36"/>
+          <p:cNvSpPr/>
+          <p:nvPr/>
+        </p:nvSpPr>
+        <p:spPr>
+          <a:xfrm>
+            <a:off x="6035040" y="2606039"/>
+            <a:ext cx="2514600" cy="475488"/>
+          </a:xfrm>
+          <a:prstGeom prst="rect">
+            <a:avLst/>
+          </a:prstGeom>
+          <a:solidFill>
+            <a:srgbClr val="F7F5F0"/>
+          </a:solidFill>
+          <a:ln>
+            <a:noFill/>
+          </a:ln>
+        </p:spPr>
+        <p:style>
+          <a:lnRef idx="1">
+            <a:schemeClr val="accent1"/>
+          </a:lnRef>
+          <a:fillRef idx="3">
+            <a:schemeClr val="accent1"/>
+          </a:fillRef>
+          <a:effectRef idx="2">
+            <a:schemeClr val="accent1"/>
+          </a:effectRef>
+          <a:fontRef idx="minor">
+            <a:schemeClr val="lt1"/>
+          </a:fontRef>
+        </p:style>
+        <p:txBody>
+          <a:bodyPr rtlCol="0" anchor="ctr"/>
+          <a:lstStyle/>
+          <a:p>
+            <a:pPr algn="ctr"/>
+          </a:p>
+        </p:txBody>
+      </p:sp>
+      <p:sp>
+        <p:nvSpPr>
+          <p:cNvPr id="38" name="TextBox 37"/>
+          <p:cNvSpPr txBox="1"/>
+          <p:nvPr/>
+        </p:nvSpPr>
+        <p:spPr>
+          <a:xfrm>
+            <a:off x="6126479" y="2660903"/>
+            <a:ext cx="2423160" cy="384048"/>
+          </a:xfrm>
+          <a:prstGeom prst="rect">
+            <a:avLst/>
+          </a:prstGeom>
+          <a:noFill/>
+        </p:spPr>
+        <p:txBody>
+          <a:bodyPr wrap="square">
+            <a:spAutoFit/>
+          </a:bodyPr>
+          <a:lstStyle/>
+          <a:p>
+            <a:pPr algn="l">
+              <a:defRPr sz="1300" b="0">
+                <a:solidFill>
+                  <a:srgbClr val="333333"/>
+                </a:solidFill>
+                <a:latin typeface="Microsoft YaHei"/>
+              </a:defRPr>
+            </a:pPr>
+            <a:r>
+              <a:t>成年人踢球到底有啥用</a:t>
+            </a:r>
+          </a:p>
+        </p:txBody>
+      </p:sp>
+      <p:sp>
+        <p:nvSpPr>
+          <p:cNvPr id="39" name="Rectangle 38"/>
+          <p:cNvSpPr/>
+          <p:nvPr/>
+        </p:nvSpPr>
+        <p:spPr>
+          <a:xfrm>
+            <a:off x="8595360" y="2606039"/>
+            <a:ext cx="1051560" cy="475488"/>
+          </a:xfrm>
+          <a:prstGeom prst="rect">
+            <a:avLst/>
+          </a:prstGeom>
+          <a:solidFill>
+            <a:srgbClr val="F7F5F0"/>
+          </a:solidFill>
+          <a:ln>
+            <a:noFill/>
+          </a:ln>
+        </p:spPr>
+        <p:style>
+          <a:lnRef idx="1">
+            <a:schemeClr val="accent1"/>
+          </a:lnRef>
+          <a:fillRef idx="3">
+            <a:schemeClr val="accent1"/>
+          </a:fillRef>
+          <a:effectRef idx="2">
+            <a:schemeClr val="accent1"/>
+          </a:effectRef>
+          <a:fontRef idx="minor">
+            <a:schemeClr val="lt1"/>
+          </a:fontRef>
+        </p:style>
+        <p:txBody>
+          <a:bodyPr rtlCol="0" anchor="ctr"/>
+          <a:lstStyle/>
+          <a:p>
+            <a:pPr algn="ctr"/>
+          </a:p>
+        </p:txBody>
+      </p:sp>
+      <p:sp>
+        <p:nvSpPr>
+          <p:cNvPr id="40" name="TextBox 39"/>
+          <p:cNvSpPr txBox="1"/>
+          <p:nvPr/>
+        </p:nvSpPr>
+        <p:spPr>
+          <a:xfrm>
+            <a:off x="8686800" y="2660903"/>
+            <a:ext cx="960120" cy="384048"/>
+          </a:xfrm>
+          <a:prstGeom prst="rect">
+            <a:avLst/>
+          </a:prstGeom>
+          <a:noFill/>
+        </p:spPr>
+        <p:txBody>
+          <a:bodyPr wrap="square">
+            <a:spAutoFit/>
+          </a:bodyPr>
+          <a:lstStyle/>
+          <a:p>
+            <a:pPr algn="l">
+              <a:defRPr sz="1300" b="0">
+                <a:solidFill>
+                  <a:srgbClr val="333333"/>
+                </a:solidFill>
+                <a:latin typeface="Microsoft YaHei"/>
+              </a:defRPr>
+            </a:pPr>
+            <a:r>
+              <a:t>40s</a:t>
+            </a:r>
+          </a:p>
+        </p:txBody>
+      </p:sp>
+      <p:sp>
+        <p:nvSpPr>
+          <p:cNvPr id="41" name="Rectangle 40"/>
+          <p:cNvSpPr/>
+          <p:nvPr/>
+        </p:nvSpPr>
+        <p:spPr>
+          <a:xfrm>
+            <a:off x="9692640" y="2606039"/>
+            <a:ext cx="1051560" cy="475488"/>
+          </a:xfrm>
+          <a:prstGeom prst="rect">
+            <a:avLst/>
+          </a:prstGeom>
+          <a:solidFill>
+            <a:srgbClr val="F7F5F0"/>
+          </a:solidFill>
+          <a:ln>
+            <a:noFill/>
+          </a:ln>
+        </p:spPr>
+        <p:style>
+          <a:lnRef idx="1">
+            <a:schemeClr val="accent1"/>
+          </a:lnRef>
+          <a:fillRef idx="3">
+            <a:schemeClr val="accent1"/>
+          </a:fillRef>
+          <a:effectRef idx="2">
+            <a:schemeClr val="accent1"/>
+          </a:effectRef>
+          <a:fontRef idx="minor">
+            <a:schemeClr val="lt1"/>
+          </a:fontRef>
+        </p:style>
+        <p:txBody>
+          <a:bodyPr rtlCol="0" anchor="ctr"/>
+          <a:lstStyle/>
+          <a:p>
+            <a:pPr algn="ctr"/>
+          </a:p>
+        </p:txBody>
+      </p:sp>
+      <p:sp>
+        <p:nvSpPr>
+          <p:cNvPr id="42" name="TextBox 41"/>
+          <p:cNvSpPr txBox="1"/>
+          <p:nvPr/>
+        </p:nvSpPr>
+        <p:spPr>
+          <a:xfrm>
+            <a:off x="9784080" y="2660903"/>
+            <a:ext cx="960120" cy="384048"/>
+          </a:xfrm>
+          <a:prstGeom prst="rect">
+            <a:avLst/>
+          </a:prstGeom>
+          <a:noFill/>
+        </p:spPr>
+        <p:txBody>
+          <a:bodyPr wrap="square">
+            <a:spAutoFit/>
+          </a:bodyPr>
+          <a:lstStyle/>
+          <a:p>
+            <a:pPr algn="l">
+              <a:defRPr sz="1300" b="0">
+                <a:solidFill>
+                  <a:srgbClr val="333333"/>
+                </a:solidFill>
+                <a:latin typeface="Microsoft YaHei"/>
+              </a:defRPr>
+            </a:pPr>
+            <a:r>
+              <a:t>40s</a:t>
+            </a:r>
+          </a:p>
+        </p:txBody>
+      </p:sp>
+      <p:sp>
+        <p:nvSpPr>
+          <p:cNvPr id="43" name="Rectangle 42"/>
+          <p:cNvSpPr/>
+          <p:nvPr/>
+        </p:nvSpPr>
+        <p:spPr>
+          <a:xfrm>
+            <a:off x="457200" y="3154679"/>
+            <a:ext cx="502919" cy="475488"/>
+          </a:xfrm>
+          <a:prstGeom prst="rect">
+            <a:avLst/>
+          </a:prstGeom>
+          <a:solidFill>
+            <a:srgbClr val="FFFFFF"/>
+          </a:solidFill>
+          <a:ln>
+            <a:noFill/>
+          </a:ln>
+        </p:spPr>
+        <p:style>
+          <a:lnRef idx="1">
+            <a:schemeClr val="accent1"/>
+          </a:lnRef>
+          <a:fillRef idx="3">
+            <a:schemeClr val="accent1"/>
+          </a:fillRef>
+          <a:effectRef idx="2">
+            <a:schemeClr val="accent1"/>
+          </a:effectRef>
+          <a:fontRef idx="minor">
+            <a:schemeClr val="lt1"/>
+          </a:fontRef>
+        </p:style>
+        <p:txBody>
+          <a:bodyPr rtlCol="0" anchor="ctr"/>
+          <a:lstStyle/>
+          <a:p>
+            <a:pPr algn="ctr"/>
+          </a:p>
+        </p:txBody>
+      </p:sp>
+      <p:sp>
+        <p:nvSpPr>
+          <p:cNvPr id="44" name="TextBox 43"/>
+          <p:cNvSpPr txBox="1"/>
+          <p:nvPr/>
+        </p:nvSpPr>
+        <p:spPr>
+          <a:xfrm>
+            <a:off x="548640" y="3209544"/>
+            <a:ext cx="411479" cy="384048"/>
+          </a:xfrm>
+          <a:prstGeom prst="rect">
+            <a:avLst/>
+          </a:prstGeom>
+          <a:noFill/>
+        </p:spPr>
+        <p:txBody>
+          <a:bodyPr wrap="square">
+            <a:spAutoFit/>
+          </a:bodyPr>
+          <a:lstStyle/>
+          <a:p>
+            <a:pPr algn="l">
+              <a:defRPr sz="1300" b="1">
+                <a:solidFill>
+                  <a:srgbClr val="2D5016"/>
+                </a:solidFill>
+                <a:latin typeface="Microsoft YaHei"/>
+              </a:defRPr>
+            </a:pPr>
+            <a:r>
+              <a:t>16</a:t>
+            </a:r>
+          </a:p>
+        </p:txBody>
+      </p:sp>
+      <p:sp>
+        <p:nvSpPr>
+          <p:cNvPr id="45" name="Rectangle 44"/>
+          <p:cNvSpPr/>
+          <p:nvPr/>
+        </p:nvSpPr>
+        <p:spPr>
+          <a:xfrm>
+            <a:off x="1005840" y="3154679"/>
+            <a:ext cx="4983480" cy="475488"/>
+          </a:xfrm>
+          <a:prstGeom prst="rect">
+            <a:avLst/>
+          </a:prstGeom>
+          <a:solidFill>
+            <a:srgbClr val="FFFFFF"/>
+          </a:solidFill>
+          <a:ln>
+            <a:noFill/>
+          </a:ln>
+        </p:spPr>
+        <p:style>
+          <a:lnRef idx="1">
+            <a:schemeClr val="accent1"/>
+          </a:lnRef>
+          <a:fillRef idx="3">
+            <a:schemeClr val="accent1"/>
+          </a:fillRef>
+          <a:effectRef idx="2">
+            <a:schemeClr val="accent1"/>
+          </a:effectRef>
+          <a:fontRef idx="minor">
+            <a:schemeClr val="lt1"/>
+          </a:fontRef>
+        </p:style>
+        <p:txBody>
+          <a:bodyPr rtlCol="0" anchor="ctr"/>
+          <a:lstStyle/>
+          <a:p>
+            <a:pPr algn="ctr"/>
+          </a:p>
+        </p:txBody>
+      </p:sp>
+      <p:sp>
+        <p:nvSpPr>
+          <p:cNvPr id="46" name="TextBox 45"/>
+          <p:cNvSpPr txBox="1"/>
+          <p:nvPr/>
+        </p:nvSpPr>
+        <p:spPr>
+          <a:xfrm>
+            <a:off x="1097280" y="3209544"/>
+            <a:ext cx="4892040" cy="384048"/>
+          </a:xfrm>
+          <a:prstGeom prst="rect">
+            <a:avLst/>
+          </a:prstGeom>
+          <a:noFill/>
+        </p:spPr>
+        <p:txBody>
+          <a:bodyPr wrap="square">
+            <a:spAutoFit/>
+          </a:bodyPr>
+          <a:lstStyle/>
+          <a:p>
+            <a:pPr algn="l">
+              <a:defRPr sz="1300" b="0">
+                <a:solidFill>
+                  <a:srgbClr val="333333"/>
+                </a:solidFill>
+                <a:latin typeface="Microsoft YaHei"/>
+              </a:defRPr>
+            </a:pPr>
+            <a:r>
+              <a:t>一场比赛从准备到结束</a:t>
+            </a:r>
+          </a:p>
+        </p:txBody>
+      </p:sp>
+      <p:sp>
+        <p:nvSpPr>
+          <p:cNvPr id="47" name="Rectangle 46"/>
+          <p:cNvSpPr/>
+          <p:nvPr/>
+        </p:nvSpPr>
+        <p:spPr>
+          <a:xfrm>
+            <a:off x="6035040" y="3154679"/>
+            <a:ext cx="2514600" cy="475488"/>
+          </a:xfrm>
+          <a:prstGeom prst="rect">
+            <a:avLst/>
+          </a:prstGeom>
+          <a:solidFill>
+            <a:srgbClr val="FFFFFF"/>
+          </a:solidFill>
+          <a:ln>
+            <a:noFill/>
+          </a:ln>
+        </p:spPr>
+        <p:style>
+          <a:lnRef idx="1">
+            <a:schemeClr val="accent1"/>
+          </a:lnRef>
+          <a:fillRef idx="3">
+            <a:schemeClr val="accent1"/>
+          </a:fillRef>
+          <a:effectRef idx="2">
+            <a:schemeClr val="accent1"/>
+          </a:effectRef>
+          <a:fontRef idx="minor">
+            <a:schemeClr val="lt1"/>
+          </a:fontRef>
+        </p:style>
+        <p:txBody>
+          <a:bodyPr rtlCol="0" anchor="ctr"/>
+          <a:lstStyle/>
+          <a:p>
+            <a:pPr algn="ctr"/>
+          </a:p>
+        </p:txBody>
+      </p:sp>
+      <p:sp>
+        <p:nvSpPr>
+          <p:cNvPr id="48" name="TextBox 47"/>
+          <p:cNvSpPr txBox="1"/>
+          <p:nvPr/>
+        </p:nvSpPr>
+        <p:spPr>
+          <a:xfrm>
+            <a:off x="6126479" y="3209544"/>
+            <a:ext cx="2423160" cy="384048"/>
+          </a:xfrm>
+          <a:prstGeom prst="rect">
+            <a:avLst/>
+          </a:prstGeom>
+          <a:noFill/>
+        </p:spPr>
+        <p:txBody>
+          <a:bodyPr wrap="square">
+            <a:spAutoFit/>
+          </a:bodyPr>
+          <a:lstStyle/>
+          <a:p>
+            <a:pPr algn="l">
+              <a:defRPr sz="1300" b="0">
+                <a:solidFill>
+                  <a:srgbClr val="333333"/>
+                </a:solidFill>
+                <a:latin typeface="Microsoft YaHei"/>
+              </a:defRPr>
+            </a:pPr>
+            <a:r>
+              <a:t>一场比赛从准备到结束</a:t>
+            </a:r>
+          </a:p>
+        </p:txBody>
+      </p:sp>
+      <p:sp>
+        <p:nvSpPr>
+          <p:cNvPr id="49" name="Rectangle 48"/>
+          <p:cNvSpPr/>
+          <p:nvPr/>
+        </p:nvSpPr>
+        <p:spPr>
+          <a:xfrm>
+            <a:off x="8595360" y="3154679"/>
+            <a:ext cx="1051560" cy="475488"/>
+          </a:xfrm>
+          <a:prstGeom prst="rect">
+            <a:avLst/>
+          </a:prstGeom>
+          <a:solidFill>
+            <a:srgbClr val="FFFFFF"/>
+          </a:solidFill>
+          <a:ln>
+            <a:noFill/>
+          </a:ln>
+        </p:spPr>
+        <p:style>
+          <a:lnRef idx="1">
+            <a:schemeClr val="accent1"/>
+          </a:lnRef>
+          <a:fillRef idx="3">
+            <a:schemeClr val="accent1"/>
+          </a:fillRef>
+          <a:effectRef idx="2">
+            <a:schemeClr val="accent1"/>
+          </a:effectRef>
+          <a:fontRef idx="minor">
+            <a:schemeClr val="lt1"/>
+          </a:fontRef>
+        </p:style>
+        <p:txBody>
+          <a:bodyPr rtlCol="0" anchor="ctr"/>
+          <a:lstStyle/>
+          <a:p>
+            <a:pPr algn="ctr"/>
+          </a:p>
+        </p:txBody>
+      </p:sp>
+      <p:sp>
+        <p:nvSpPr>
+          <p:cNvPr id="50" name="TextBox 49"/>
+          <p:cNvSpPr txBox="1"/>
+          <p:nvPr/>
+        </p:nvSpPr>
+        <p:spPr>
+          <a:xfrm>
+            <a:off x="8686800" y="3209544"/>
+            <a:ext cx="960120" cy="384048"/>
+          </a:xfrm>
+          <a:prstGeom prst="rect">
+            <a:avLst/>
+          </a:prstGeom>
+          <a:noFill/>
+        </p:spPr>
+        <p:txBody>
+          <a:bodyPr wrap="square">
+            <a:spAutoFit/>
+          </a:bodyPr>
+          <a:lstStyle/>
+          <a:p>
+            <a:pPr algn="l">
+              <a:defRPr sz="1300" b="0">
+                <a:solidFill>
+                  <a:srgbClr val="333333"/>
+                </a:solidFill>
+                <a:latin typeface="Microsoft YaHei"/>
+              </a:defRPr>
+            </a:pPr>
+            <a:r>
+              <a:t>50s</a:t>
+            </a:r>
+          </a:p>
+        </p:txBody>
+      </p:sp>
+      <p:sp>
+        <p:nvSpPr>
+          <p:cNvPr id="51" name="Rectangle 50"/>
+          <p:cNvSpPr/>
+          <p:nvPr/>
+        </p:nvSpPr>
+        <p:spPr>
+          <a:xfrm>
+            <a:off x="9692640" y="3154679"/>
+            <a:ext cx="1051560" cy="475488"/>
+          </a:xfrm>
+          <a:prstGeom prst="rect">
+            <a:avLst/>
+          </a:prstGeom>
+          <a:solidFill>
+            <a:srgbClr val="FFFFFF"/>
+          </a:solidFill>
+          <a:ln>
+            <a:noFill/>
+          </a:ln>
+        </p:spPr>
+        <p:style>
+          <a:lnRef idx="1">
+            <a:schemeClr val="accent1"/>
+          </a:lnRef>
+          <a:fillRef idx="3">
+            <a:schemeClr val="accent1"/>
+          </a:fillRef>
+          <a:effectRef idx="2">
+            <a:schemeClr val="accent1"/>
+          </a:effectRef>
+          <a:fontRef idx="minor">
+            <a:schemeClr val="lt1"/>
+          </a:fontRef>
+        </p:style>
+        <p:txBody>
+          <a:bodyPr rtlCol="0" anchor="ctr"/>
+          <a:lstStyle/>
+          <a:p>
+            <a:pPr algn="ctr"/>
+          </a:p>
+        </p:txBody>
+      </p:sp>
+      <p:sp>
+        <p:nvSpPr>
+          <p:cNvPr id="52" name="TextBox 51"/>
+          <p:cNvSpPr txBox="1"/>
+          <p:nvPr/>
+        </p:nvSpPr>
+        <p:spPr>
+          <a:xfrm>
+            <a:off x="9784080" y="3209544"/>
+            <a:ext cx="960120" cy="384048"/>
+          </a:xfrm>
+          <a:prstGeom prst="rect">
+            <a:avLst/>
+          </a:prstGeom>
+          <a:noFill/>
+        </p:spPr>
+        <p:txBody>
+          <a:bodyPr wrap="square">
+            <a:spAutoFit/>
+          </a:bodyPr>
+          <a:lstStyle/>
+          <a:p>
+            <a:pPr algn="l">
+              <a:defRPr sz="1300" b="0">
+                <a:solidFill>
+                  <a:srgbClr val="333333"/>
+                </a:solidFill>
+                <a:latin typeface="Microsoft YaHei"/>
+              </a:defRPr>
+            </a:pPr>
+            <a:r>
+              <a:t>60s</a:t>
+            </a:r>
+          </a:p>
+        </p:txBody>
+      </p:sp>
+      <p:sp>
+        <p:nvSpPr>
+          <p:cNvPr id="53" name="Rectangle 52"/>
+          <p:cNvSpPr/>
+          <p:nvPr/>
+        </p:nvSpPr>
+        <p:spPr>
+          <a:xfrm>
+            <a:off x="457200" y="3703320"/>
+            <a:ext cx="502919" cy="475488"/>
+          </a:xfrm>
+          <a:prstGeom prst="rect">
+            <a:avLst/>
+          </a:prstGeom>
+          <a:solidFill>
+            <a:srgbClr val="F7F5F0"/>
+          </a:solidFill>
+          <a:ln>
+            <a:noFill/>
+          </a:ln>
+        </p:spPr>
+        <p:style>
+          <a:lnRef idx="1">
+            <a:schemeClr val="accent1"/>
+          </a:lnRef>
+          <a:fillRef idx="3">
+            <a:schemeClr val="accent1"/>
+          </a:fillRef>
+          <a:effectRef idx="2">
+            <a:schemeClr val="accent1"/>
+          </a:effectRef>
+          <a:fontRef idx="minor">
+            <a:schemeClr val="lt1"/>
+          </a:fontRef>
+        </p:style>
+        <p:txBody>
+          <a:bodyPr rtlCol="0" anchor="ctr"/>
+          <a:lstStyle/>
+          <a:p>
+            <a:pPr algn="ctr"/>
+          </a:p>
+        </p:txBody>
+      </p:sp>
+      <p:sp>
+        <p:nvSpPr>
+          <p:cNvPr id="54" name="TextBox 53"/>
+          <p:cNvSpPr txBox="1"/>
+          <p:nvPr/>
+        </p:nvSpPr>
+        <p:spPr>
+          <a:xfrm>
+            <a:off x="548640" y="3758183"/>
+            <a:ext cx="411479" cy="384048"/>
+          </a:xfrm>
+          <a:prstGeom prst="rect">
+            <a:avLst/>
+          </a:prstGeom>
+          <a:noFill/>
+        </p:spPr>
+        <p:txBody>
+          <a:bodyPr wrap="square">
+            <a:spAutoFit/>
+          </a:bodyPr>
+          <a:lstStyle/>
+          <a:p>
+            <a:pPr algn="l">
+              <a:defRPr sz="1300" b="1">
+                <a:solidFill>
+                  <a:srgbClr val="2D5016"/>
+                </a:solidFill>
+                <a:latin typeface="Microsoft YaHei"/>
+              </a:defRPr>
+            </a:pPr>
+            <a:r>
+              <a:t>17</a:t>
+            </a:r>
+          </a:p>
+        </p:txBody>
+      </p:sp>
+      <p:sp>
+        <p:nvSpPr>
+          <p:cNvPr id="55" name="Rectangle 54"/>
+          <p:cNvSpPr/>
+          <p:nvPr/>
+        </p:nvSpPr>
+        <p:spPr>
+          <a:xfrm>
+            <a:off x="1005840" y="3703320"/>
+            <a:ext cx="4983480" cy="475488"/>
+          </a:xfrm>
+          <a:prstGeom prst="rect">
+            <a:avLst/>
+          </a:prstGeom>
+          <a:solidFill>
+            <a:srgbClr val="F7F5F0"/>
+          </a:solidFill>
+          <a:ln>
+            <a:noFill/>
+          </a:ln>
+        </p:spPr>
+        <p:style>
+          <a:lnRef idx="1">
+            <a:schemeClr val="accent1"/>
+          </a:lnRef>
+          <a:fillRef idx="3">
+            <a:schemeClr val="accent1"/>
+          </a:fillRef>
+          <a:effectRef idx="2">
+            <a:schemeClr val="accent1"/>
+          </a:effectRef>
+          <a:fontRef idx="minor">
+            <a:schemeClr val="lt1"/>
+          </a:fontRef>
+        </p:style>
+        <p:txBody>
+          <a:bodyPr rtlCol="0" anchor="ctr"/>
+          <a:lstStyle/>
+          <a:p>
+            <a:pPr algn="ctr"/>
+          </a:p>
+        </p:txBody>
+      </p:sp>
+      <p:sp>
+        <p:nvSpPr>
+          <p:cNvPr id="56" name="TextBox 55"/>
+          <p:cNvSpPr txBox="1"/>
+          <p:nvPr/>
+        </p:nvSpPr>
+        <p:spPr>
+          <a:xfrm>
+            <a:off x="1097280" y="3758183"/>
+            <a:ext cx="4892040" cy="384048"/>
+          </a:xfrm>
+          <a:prstGeom prst="rect">
+            <a:avLst/>
+          </a:prstGeom>
+          <a:noFill/>
+        </p:spPr>
+        <p:txBody>
+          <a:bodyPr wrap="square">
+            <a:spAutoFit/>
+          </a:bodyPr>
+          <a:lstStyle/>
+          <a:p>
+            <a:pPr algn="l">
+              <a:defRPr sz="1300" b="0">
+                <a:solidFill>
+                  <a:srgbClr val="333333"/>
+                </a:solidFill>
+                <a:latin typeface="Microsoft YaHei"/>
+              </a:defRPr>
+            </a:pPr>
+            <a:r>
+              <a:t>村队开会吵起来了</a:t>
+            </a:r>
+          </a:p>
+        </p:txBody>
+      </p:sp>
+      <p:sp>
+        <p:nvSpPr>
+          <p:cNvPr id="57" name="Rectangle 56"/>
+          <p:cNvSpPr/>
+          <p:nvPr/>
+        </p:nvSpPr>
+        <p:spPr>
+          <a:xfrm>
+            <a:off x="6035040" y="3703320"/>
+            <a:ext cx="2514600" cy="475488"/>
+          </a:xfrm>
+          <a:prstGeom prst="rect">
+            <a:avLst/>
+          </a:prstGeom>
+          <a:solidFill>
+            <a:srgbClr val="F7F5F0"/>
+          </a:solidFill>
+          <a:ln>
+            <a:noFill/>
+          </a:ln>
+        </p:spPr>
+        <p:style>
+          <a:lnRef idx="1">
+            <a:schemeClr val="accent1"/>
+          </a:lnRef>
+          <a:fillRef idx="3">
+            <a:schemeClr val="accent1"/>
+          </a:fillRef>
+          <a:effectRef idx="2">
+            <a:schemeClr val="accent1"/>
+          </a:effectRef>
+          <a:fontRef idx="minor">
+            <a:schemeClr val="lt1"/>
+          </a:fontRef>
+        </p:style>
+        <p:txBody>
+          <a:bodyPr rtlCol="0" anchor="ctr"/>
+          <a:lstStyle/>
+          <a:p>
+            <a:pPr algn="ctr"/>
+          </a:p>
+        </p:txBody>
+      </p:sp>
+      <p:sp>
+        <p:nvSpPr>
+          <p:cNvPr id="58" name="TextBox 57"/>
+          <p:cNvSpPr txBox="1"/>
+          <p:nvPr/>
+        </p:nvSpPr>
+        <p:spPr>
+          <a:xfrm>
+            <a:off x="6126479" y="3758183"/>
+            <a:ext cx="2423160" cy="384048"/>
+          </a:xfrm>
+          <a:prstGeom prst="rect">
+            <a:avLst/>
+          </a:prstGeom>
+          <a:noFill/>
+        </p:spPr>
+        <p:txBody>
+          <a:bodyPr wrap="square">
+            <a:spAutoFit/>
+          </a:bodyPr>
+          <a:lstStyle/>
+          <a:p>
+            <a:pPr algn="l">
+              <a:defRPr sz="1300" b="0">
+                <a:solidFill>
+                  <a:srgbClr val="333333"/>
+                </a:solidFill>
+                <a:latin typeface="Microsoft YaHei"/>
+              </a:defRPr>
+            </a:pPr>
+            <a:r>
+              <a:t>村队开会吵起来了</a:t>
+            </a:r>
+          </a:p>
+        </p:txBody>
+      </p:sp>
+      <p:sp>
+        <p:nvSpPr>
+          <p:cNvPr id="59" name="Rectangle 58"/>
+          <p:cNvSpPr/>
+          <p:nvPr/>
+        </p:nvSpPr>
+        <p:spPr>
+          <a:xfrm>
+            <a:off x="8595360" y="3703320"/>
+            <a:ext cx="1051560" cy="475488"/>
+          </a:xfrm>
+          <a:prstGeom prst="rect">
+            <a:avLst/>
+          </a:prstGeom>
+          <a:solidFill>
+            <a:srgbClr val="F7F5F0"/>
+          </a:solidFill>
+          <a:ln>
+            <a:noFill/>
+          </a:ln>
+        </p:spPr>
+        <p:style>
+          <a:lnRef idx="1">
+            <a:schemeClr val="accent1"/>
+          </a:lnRef>
+          <a:fillRef idx="3">
+            <a:schemeClr val="accent1"/>
+          </a:fillRef>
+          <a:effectRef idx="2">
+            <a:schemeClr val="accent1"/>
+          </a:effectRef>
+          <a:fontRef idx="minor">
+            <a:schemeClr val="lt1"/>
+          </a:fontRef>
+        </p:style>
+        <p:txBody>
+          <a:bodyPr rtlCol="0" anchor="ctr"/>
+          <a:lstStyle/>
+          <a:p>
+            <a:pPr algn="ctr"/>
+          </a:p>
+        </p:txBody>
+      </p:sp>
+      <p:sp>
+        <p:nvSpPr>
+          <p:cNvPr id="60" name="TextBox 59"/>
+          <p:cNvSpPr txBox="1"/>
+          <p:nvPr/>
+        </p:nvSpPr>
+        <p:spPr>
+          <a:xfrm>
+            <a:off x="8686800" y="3758183"/>
+            <a:ext cx="960120" cy="384048"/>
+          </a:xfrm>
+          <a:prstGeom prst="rect">
+            <a:avLst/>
+          </a:prstGeom>
+          <a:noFill/>
+        </p:spPr>
+        <p:txBody>
+          <a:bodyPr wrap="square">
+            <a:spAutoFit/>
+          </a:bodyPr>
+          <a:lstStyle/>
+          <a:p>
+            <a:pPr algn="l">
+              <a:defRPr sz="1300" b="0">
+                <a:solidFill>
+                  <a:srgbClr val="333333"/>
+                </a:solidFill>
+                <a:latin typeface="Microsoft YaHei"/>
+              </a:defRPr>
+            </a:pPr>
+            <a:r>
+              <a:t>35s</a:t>
+            </a:r>
+          </a:p>
+        </p:txBody>
+      </p:sp>
+      <p:sp>
+        <p:nvSpPr>
+          <p:cNvPr id="61" name="Rectangle 60"/>
+          <p:cNvSpPr/>
+          <p:nvPr/>
+        </p:nvSpPr>
+        <p:spPr>
+          <a:xfrm>
+            <a:off x="9692640" y="3703320"/>
+            <a:ext cx="1051560" cy="475488"/>
+          </a:xfrm>
+          <a:prstGeom prst="rect">
+            <a:avLst/>
+          </a:prstGeom>
+          <a:solidFill>
+            <a:srgbClr val="F7F5F0"/>
+          </a:solidFill>
+          <a:ln>
+            <a:noFill/>
+          </a:ln>
+        </p:spPr>
+        <p:style>
+          <a:lnRef idx="1">
+            <a:schemeClr val="accent1"/>
+          </a:lnRef>
+          <a:fillRef idx="3">
+            <a:schemeClr val="accent1"/>
+          </a:fillRef>
+          <a:effectRef idx="2">
+            <a:schemeClr val="accent1"/>
+          </a:effectRef>
+          <a:fontRef idx="minor">
+            <a:schemeClr val="lt1"/>
+          </a:fontRef>
+        </p:style>
+        <p:txBody>
+          <a:bodyPr rtlCol="0" anchor="ctr"/>
+          <a:lstStyle/>
+          <a:p>
+            <a:pPr algn="ctr"/>
+          </a:p>
+        </p:txBody>
+      </p:sp>
+      <p:sp>
+        <p:nvSpPr>
+          <p:cNvPr id="62" name="TextBox 61"/>
+          <p:cNvSpPr txBox="1"/>
+          <p:nvPr/>
+        </p:nvSpPr>
+        <p:spPr>
+          <a:xfrm>
+            <a:off x="9784080" y="3758183"/>
+            <a:ext cx="960120" cy="384048"/>
+          </a:xfrm>
+          <a:prstGeom prst="rect">
+            <a:avLst/>
+          </a:prstGeom>
+          <a:noFill/>
+        </p:spPr>
+        <p:txBody>
+          <a:bodyPr wrap="square">
+            <a:spAutoFit/>
+          </a:bodyPr>
+          <a:lstStyle/>
+          <a:p>
+            <a:pPr algn="l">
+              <a:defRPr sz="1300" b="0">
+                <a:solidFill>
+                  <a:srgbClr val="333333"/>
+                </a:solidFill>
+                <a:latin typeface="Microsoft YaHei"/>
+              </a:defRPr>
+            </a:pPr>
+            <a:r>
+              <a:t>55s</a:t>
+            </a:r>
+          </a:p>
+        </p:txBody>
+      </p:sp>
+      <p:sp>
+        <p:nvSpPr>
+          <p:cNvPr id="63" name="Rectangle 62"/>
+          <p:cNvSpPr/>
+          <p:nvPr/>
+        </p:nvSpPr>
+        <p:spPr>
+          <a:xfrm>
+            <a:off x="457200" y="4251960"/>
+            <a:ext cx="502919" cy="475488"/>
+          </a:xfrm>
+          <a:prstGeom prst="rect">
+            <a:avLst/>
+          </a:prstGeom>
+          <a:solidFill>
+            <a:srgbClr val="FFFFFF"/>
+          </a:solidFill>
+          <a:ln>
+            <a:noFill/>
+          </a:ln>
+        </p:spPr>
+        <p:style>
+          <a:lnRef idx="1">
+            <a:schemeClr val="accent1"/>
+          </a:lnRef>
+          <a:fillRef idx="3">
+            <a:schemeClr val="accent1"/>
+          </a:fillRef>
+          <a:effectRef idx="2">
+            <a:schemeClr val="accent1"/>
+          </a:effectRef>
+          <a:fontRef idx="minor">
+            <a:schemeClr val="lt1"/>
+          </a:fontRef>
+        </p:style>
+        <p:txBody>
+          <a:bodyPr rtlCol="0" anchor="ctr"/>
+          <a:lstStyle/>
+          <a:p>
+            <a:pPr algn="ctr"/>
+          </a:p>
+        </p:txBody>
+      </p:sp>
+      <p:sp>
+        <p:nvSpPr>
+          <p:cNvPr id="64" name="TextBox 63"/>
+          <p:cNvSpPr txBox="1"/>
+          <p:nvPr/>
+        </p:nvSpPr>
+        <p:spPr>
+          <a:xfrm>
+            <a:off x="548640" y="4306824"/>
+            <a:ext cx="411479" cy="384048"/>
+          </a:xfrm>
+          <a:prstGeom prst="rect">
+            <a:avLst/>
+          </a:prstGeom>
+          <a:noFill/>
+        </p:spPr>
+        <p:txBody>
+          <a:bodyPr wrap="square">
+            <a:spAutoFit/>
+          </a:bodyPr>
+          <a:lstStyle/>
+          <a:p>
+            <a:pPr algn="l">
+              <a:defRPr sz="1300" b="1">
+                <a:solidFill>
+                  <a:srgbClr val="2D5016"/>
+                </a:solidFill>
+                <a:latin typeface="Microsoft YaHei"/>
+              </a:defRPr>
+            </a:pPr>
+            <a:r>
+              <a:t>18</a:t>
+            </a:r>
+          </a:p>
+        </p:txBody>
+      </p:sp>
+      <p:sp>
+        <p:nvSpPr>
+          <p:cNvPr id="65" name="Rectangle 64"/>
+          <p:cNvSpPr/>
+          <p:nvPr/>
+        </p:nvSpPr>
+        <p:spPr>
+          <a:xfrm>
+            <a:off x="1005840" y="4251960"/>
+            <a:ext cx="4983480" cy="475488"/>
+          </a:xfrm>
+          <a:prstGeom prst="rect">
+            <a:avLst/>
+          </a:prstGeom>
+          <a:solidFill>
+            <a:srgbClr val="FFFFFF"/>
+          </a:solidFill>
+          <a:ln>
+            <a:noFill/>
+          </a:ln>
+        </p:spPr>
+        <p:style>
+          <a:lnRef idx="1">
+            <a:schemeClr val="accent1"/>
+          </a:lnRef>
+          <a:fillRef idx="3">
+            <a:schemeClr val="accent1"/>
+          </a:fillRef>
+          <a:effectRef idx="2">
+            <a:schemeClr val="accent1"/>
+          </a:effectRef>
+          <a:fontRef idx="minor">
+            <a:schemeClr val="lt1"/>
+          </a:fontRef>
+        </p:style>
+        <p:txBody>
+          <a:bodyPr rtlCol="0" anchor="ctr"/>
+          <a:lstStyle/>
+          <a:p>
+            <a:pPr algn="ctr"/>
+          </a:p>
+        </p:txBody>
+      </p:sp>
+      <p:sp>
+        <p:nvSpPr>
+          <p:cNvPr id="66" name="TextBox 65"/>
+          <p:cNvSpPr txBox="1"/>
+          <p:nvPr/>
+        </p:nvSpPr>
+        <p:spPr>
+          <a:xfrm>
+            <a:off x="1097280" y="4306824"/>
+            <a:ext cx="4892040" cy="384048"/>
+          </a:xfrm>
+          <a:prstGeom prst="rect">
+            <a:avLst/>
+          </a:prstGeom>
+          <a:noFill/>
+        </p:spPr>
+        <p:txBody>
+          <a:bodyPr wrap="square">
+            <a:spAutoFit/>
+          </a:bodyPr>
+          <a:lstStyle/>
+          <a:p>
+            <a:pPr algn="l">
+              <a:defRPr sz="1300" b="0">
+                <a:solidFill>
+                  <a:srgbClr val="333333"/>
+                </a:solidFill>
+                <a:latin typeface="Microsoft YaHei"/>
+              </a:defRPr>
+            </a:pPr>
+            <a:r>
+              <a:t>体育特长生怎么走</a:t>
+            </a:r>
+          </a:p>
+        </p:txBody>
+      </p:sp>
+      <p:sp>
+        <p:nvSpPr>
+          <p:cNvPr id="67" name="Rectangle 66"/>
+          <p:cNvSpPr/>
+          <p:nvPr/>
+        </p:nvSpPr>
+        <p:spPr>
+          <a:xfrm>
+            <a:off x="6035040" y="4251960"/>
+            <a:ext cx="2514600" cy="475488"/>
+          </a:xfrm>
+          <a:prstGeom prst="rect">
+            <a:avLst/>
+          </a:prstGeom>
+          <a:solidFill>
+            <a:srgbClr val="FFFFFF"/>
+          </a:solidFill>
+          <a:ln>
+            <a:noFill/>
+          </a:ln>
+        </p:spPr>
+        <p:style>
+          <a:lnRef idx="1">
+            <a:schemeClr val="accent1"/>
+          </a:lnRef>
+          <a:fillRef idx="3">
+            <a:schemeClr val="accent1"/>
+          </a:fillRef>
+          <a:effectRef idx="2">
+            <a:schemeClr val="accent1"/>
+          </a:effectRef>
+          <a:fontRef idx="minor">
+            <a:schemeClr val="lt1"/>
+          </a:fontRef>
+        </p:style>
+        <p:txBody>
+          <a:bodyPr rtlCol="0" anchor="ctr"/>
+          <a:lstStyle/>
+          <a:p>
+            <a:pPr algn="ctr"/>
+          </a:p>
+        </p:txBody>
+      </p:sp>
+      <p:sp>
+        <p:nvSpPr>
+          <p:cNvPr id="68" name="TextBox 67"/>
+          <p:cNvSpPr txBox="1"/>
+          <p:nvPr/>
+        </p:nvSpPr>
+        <p:spPr>
+          <a:xfrm>
+            <a:off x="6126479" y="4306824"/>
+            <a:ext cx="2423160" cy="384048"/>
+          </a:xfrm>
+          <a:prstGeom prst="rect">
+            <a:avLst/>
+          </a:prstGeom>
+          <a:noFill/>
+        </p:spPr>
+        <p:txBody>
+          <a:bodyPr wrap="square">
+            <a:spAutoFit/>
+          </a:bodyPr>
+          <a:lstStyle/>
+          <a:p>
+            <a:pPr algn="l">
+              <a:defRPr sz="1300" b="0">
+                <a:solidFill>
+                  <a:srgbClr val="333333"/>
+                </a:solidFill>
+                <a:latin typeface="Microsoft YaHei"/>
+              </a:defRPr>
+            </a:pPr>
+            <a:r>
+              <a:t>体育特长生怎么走</a:t>
+            </a:r>
+          </a:p>
+        </p:txBody>
+      </p:sp>
+      <p:sp>
+        <p:nvSpPr>
+          <p:cNvPr id="69" name="Rectangle 68"/>
+          <p:cNvSpPr/>
+          <p:nvPr/>
+        </p:nvSpPr>
+        <p:spPr>
+          <a:xfrm>
+            <a:off x="8595360" y="4251960"/>
+            <a:ext cx="1051560" cy="475488"/>
+          </a:xfrm>
+          <a:prstGeom prst="rect">
+            <a:avLst/>
+          </a:prstGeom>
+          <a:solidFill>
+            <a:srgbClr val="FFFFFF"/>
+          </a:solidFill>
+          <a:ln>
+            <a:noFill/>
+          </a:ln>
+        </p:spPr>
+        <p:style>
+          <a:lnRef idx="1">
+            <a:schemeClr val="accent1"/>
+          </a:lnRef>
+          <a:fillRef idx="3">
+            <a:schemeClr val="accent1"/>
+          </a:fillRef>
+          <a:effectRef idx="2">
+            <a:schemeClr val="accent1"/>
+          </a:effectRef>
+          <a:fontRef idx="minor">
+            <a:schemeClr val="lt1"/>
+          </a:fontRef>
+        </p:style>
+        <p:txBody>
+          <a:bodyPr rtlCol="0" anchor="ctr"/>
+          <a:lstStyle/>
+          <a:p>
+            <a:pPr algn="ctr"/>
+          </a:p>
+        </p:txBody>
+      </p:sp>
+      <p:sp>
+        <p:nvSpPr>
+          <p:cNvPr id="70" name="TextBox 69"/>
+          <p:cNvSpPr txBox="1"/>
+          <p:nvPr/>
+        </p:nvSpPr>
+        <p:spPr>
+          <a:xfrm>
+            <a:off x="8686800" y="4306824"/>
+            <a:ext cx="960120" cy="384048"/>
+          </a:xfrm>
+          <a:prstGeom prst="rect">
+            <a:avLst/>
+          </a:prstGeom>
+          <a:noFill/>
+        </p:spPr>
+        <p:txBody>
+          <a:bodyPr wrap="square">
+            <a:spAutoFit/>
+          </a:bodyPr>
+          <a:lstStyle/>
+          <a:p>
+            <a:pPr algn="l">
+              <a:defRPr sz="1300" b="0">
+                <a:solidFill>
+                  <a:srgbClr val="333333"/>
+                </a:solidFill>
+                <a:latin typeface="Microsoft YaHei"/>
+              </a:defRPr>
+            </a:pPr>
+            <a:r>
+              <a:t>55s</a:t>
+            </a:r>
+          </a:p>
+        </p:txBody>
+      </p:sp>
+      <p:sp>
+        <p:nvSpPr>
+          <p:cNvPr id="71" name="Rectangle 70"/>
+          <p:cNvSpPr/>
+          <p:nvPr/>
+        </p:nvSpPr>
+        <p:spPr>
+          <a:xfrm>
+            <a:off x="9692640" y="4251960"/>
+            <a:ext cx="1051560" cy="475488"/>
+          </a:xfrm>
+          <a:prstGeom prst="rect">
+            <a:avLst/>
+          </a:prstGeom>
+          <a:solidFill>
+            <a:srgbClr val="FFFFFF"/>
+          </a:solidFill>
+          <a:ln>
+            <a:noFill/>
+          </a:ln>
+        </p:spPr>
+        <p:style>
+          <a:lnRef idx="1">
+            <a:schemeClr val="accent1"/>
+          </a:lnRef>
+          <a:fillRef idx="3">
+            <a:schemeClr val="accent1"/>
+          </a:fillRef>
+          <a:effectRef idx="2">
+            <a:schemeClr val="accent1"/>
+          </a:effectRef>
+          <a:fontRef idx="minor">
+            <a:schemeClr val="lt1"/>
+          </a:fontRef>
+        </p:style>
+        <p:txBody>
+          <a:bodyPr rtlCol="0" anchor="ctr"/>
+          <a:lstStyle/>
+          <a:p>
+            <a:pPr algn="ctr"/>
+          </a:p>
+        </p:txBody>
+      </p:sp>
+      <p:sp>
+        <p:nvSpPr>
+          <p:cNvPr id="72" name="TextBox 71"/>
+          <p:cNvSpPr txBox="1"/>
+          <p:nvPr/>
+        </p:nvSpPr>
+        <p:spPr>
+          <a:xfrm>
+            <a:off x="9784080" y="4306824"/>
+            <a:ext cx="960120" cy="384048"/>
+          </a:xfrm>
+          <a:prstGeom prst="rect">
+            <a:avLst/>
+          </a:prstGeom>
+          <a:noFill/>
+        </p:spPr>
+        <p:txBody>
+          <a:bodyPr wrap="square">
+            <a:spAutoFit/>
+          </a:bodyPr>
+          <a:lstStyle/>
+          <a:p>
+            <a:pPr algn="l">
+              <a:defRPr sz="1300" b="0">
+                <a:solidFill>
+                  <a:srgbClr val="333333"/>
+                </a:solidFill>
+                <a:latin typeface="Microsoft YaHei"/>
+              </a:defRPr>
+            </a:pPr>
+            <a:r>
+              <a:t>45s</a:t>
+            </a:r>
+          </a:p>
+        </p:txBody>
+      </p:sp>
+      <p:sp>
+        <p:nvSpPr>
+          <p:cNvPr id="73" name="Rectangle 72"/>
+          <p:cNvSpPr/>
+          <p:nvPr/>
+        </p:nvSpPr>
+        <p:spPr>
+          <a:xfrm>
+            <a:off x="457200" y="4800600"/>
+            <a:ext cx="502919" cy="475488"/>
+          </a:xfrm>
+          <a:prstGeom prst="rect">
+            <a:avLst/>
+          </a:prstGeom>
+          <a:solidFill>
+            <a:srgbClr val="F7F5F0"/>
+          </a:solidFill>
+          <a:ln>
+            <a:noFill/>
+          </a:ln>
+        </p:spPr>
+        <p:style>
+          <a:lnRef idx="1">
+            <a:schemeClr val="accent1"/>
+          </a:lnRef>
+          <a:fillRef idx="3">
+            <a:schemeClr val="accent1"/>
+          </a:fillRef>
+          <a:effectRef idx="2">
+            <a:schemeClr val="accent1"/>
+          </a:effectRef>
+          <a:fontRef idx="minor">
+            <a:schemeClr val="lt1"/>
+          </a:fontRef>
+        </p:style>
+        <p:txBody>
+          <a:bodyPr rtlCol="0" anchor="ctr"/>
+          <a:lstStyle/>
+          <a:p>
+            <a:pPr algn="ctr"/>
+          </a:p>
+        </p:txBody>
+      </p:sp>
+      <p:sp>
+        <p:nvSpPr>
+          <p:cNvPr id="74" name="TextBox 73"/>
+          <p:cNvSpPr txBox="1"/>
+          <p:nvPr/>
+        </p:nvSpPr>
+        <p:spPr>
+          <a:xfrm>
+            <a:off x="548640" y="4855464"/>
+            <a:ext cx="411479" cy="384048"/>
+          </a:xfrm>
+          <a:prstGeom prst="rect">
+            <a:avLst/>
+          </a:prstGeom>
+          <a:noFill/>
+        </p:spPr>
+        <p:txBody>
+          <a:bodyPr wrap="square">
+            <a:spAutoFit/>
+          </a:bodyPr>
+          <a:lstStyle/>
+          <a:p>
+            <a:pPr algn="l">
+              <a:defRPr sz="1300" b="1">
+                <a:solidFill>
+                  <a:srgbClr val="2D5016"/>
+                </a:solidFill>
+                <a:latin typeface="Microsoft YaHei"/>
+              </a:defRPr>
+            </a:pPr>
+            <a:r>
+              <a:t>7</a:t>
+            </a:r>
+          </a:p>
+        </p:txBody>
+      </p:sp>
+      <p:sp>
+        <p:nvSpPr>
+          <p:cNvPr id="75" name="Rectangle 74"/>
+          <p:cNvSpPr/>
+          <p:nvPr/>
+        </p:nvSpPr>
+        <p:spPr>
+          <a:xfrm>
+            <a:off x="1005840" y="4800600"/>
+            <a:ext cx="4983480" cy="475488"/>
+          </a:xfrm>
+          <a:prstGeom prst="rect">
+            <a:avLst/>
+          </a:prstGeom>
+          <a:solidFill>
+            <a:srgbClr val="F7F5F0"/>
+          </a:solidFill>
+          <a:ln>
+            <a:noFill/>
+          </a:ln>
+        </p:spPr>
+        <p:style>
+          <a:lnRef idx="1">
+            <a:schemeClr val="accent1"/>
+          </a:lnRef>
+          <a:fillRef idx="3">
+            <a:schemeClr val="accent1"/>
+          </a:fillRef>
+          <a:effectRef idx="2">
+            <a:schemeClr val="accent1"/>
+          </a:effectRef>
+          <a:fontRef idx="minor">
+            <a:schemeClr val="lt1"/>
+          </a:fontRef>
+        </p:style>
+        <p:txBody>
+          <a:bodyPr rtlCol="0" anchor="ctr"/>
+          <a:lstStyle/>
+          <a:p>
+            <a:pPr algn="ctr"/>
+          </a:p>
+        </p:txBody>
+      </p:sp>
+      <p:sp>
+        <p:nvSpPr>
+          <p:cNvPr id="76" name="TextBox 75"/>
+          <p:cNvSpPr txBox="1"/>
+          <p:nvPr/>
+        </p:nvSpPr>
+        <p:spPr>
+          <a:xfrm>
+            <a:off x="1097280" y="4855464"/>
+            <a:ext cx="4892040" cy="384048"/>
+          </a:xfrm>
+          <a:prstGeom prst="rect">
+            <a:avLst/>
+          </a:prstGeom>
+          <a:noFill/>
+        </p:spPr>
+        <p:txBody>
+          <a:bodyPr wrap="square">
+            <a:spAutoFit/>
+          </a:bodyPr>
+          <a:lstStyle/>
+          <a:p>
+            <a:pPr algn="l">
+              <a:defRPr sz="1300" b="0">
+                <a:solidFill>
+                  <a:srgbClr val="333333"/>
+                </a:solidFill>
+                <a:latin typeface="Microsoft YaHei"/>
+              </a:defRPr>
+            </a:pPr>
+            <a:r>
+              <a:t>村民说：我们支书____</a:t>
+            </a:r>
+          </a:p>
+        </p:txBody>
+      </p:sp>
+      <p:sp>
+        <p:nvSpPr>
+          <p:cNvPr id="77" name="Rectangle 76"/>
+          <p:cNvSpPr/>
+          <p:nvPr/>
+        </p:nvSpPr>
+        <p:spPr>
+          <a:xfrm>
+            <a:off x="6035040" y="4800600"/>
+            <a:ext cx="2514600" cy="475488"/>
+          </a:xfrm>
+          <a:prstGeom prst="rect">
+            <a:avLst/>
+          </a:prstGeom>
+          <a:solidFill>
+            <a:srgbClr val="F7F5F0"/>
+          </a:solidFill>
+          <a:ln>
+            <a:noFill/>
+          </a:ln>
+        </p:spPr>
+        <p:style>
+          <a:lnRef idx="1">
+            <a:schemeClr val="accent1"/>
+          </a:lnRef>
+          <a:fillRef idx="3">
+            <a:schemeClr val="accent1"/>
+          </a:fillRef>
+          <a:effectRef idx="2">
+            <a:schemeClr val="accent1"/>
+          </a:effectRef>
+          <a:fontRef idx="minor">
+            <a:schemeClr val="lt1"/>
+          </a:fontRef>
+        </p:style>
+        <p:txBody>
+          <a:bodyPr rtlCol="0" anchor="ctr"/>
+          <a:lstStyle/>
+          <a:p>
+            <a:pPr algn="ctr"/>
+          </a:p>
+        </p:txBody>
+      </p:sp>
+      <p:sp>
+        <p:nvSpPr>
+          <p:cNvPr id="78" name="TextBox 77"/>
+          <p:cNvSpPr txBox="1"/>
+          <p:nvPr/>
+        </p:nvSpPr>
+        <p:spPr>
+          <a:xfrm>
+            <a:off x="6126479" y="4855464"/>
+            <a:ext cx="2423160" cy="384048"/>
+          </a:xfrm>
+          <a:prstGeom prst="rect">
+            <a:avLst/>
+          </a:prstGeom>
+          <a:noFill/>
+        </p:spPr>
+        <p:txBody>
+          <a:bodyPr wrap="square">
+            <a:spAutoFit/>
+          </a:bodyPr>
+          <a:lstStyle/>
+          <a:p>
+            <a:pPr algn="l">
+              <a:defRPr sz="1300" b="0">
+                <a:solidFill>
+                  <a:srgbClr val="333333"/>
+                </a:solidFill>
+                <a:latin typeface="Microsoft YaHei"/>
+              </a:defRPr>
+            </a:pPr>
+            <a:r>
+              <a:t>屯军营密码</a:t>
+            </a:r>
+          </a:p>
+        </p:txBody>
+      </p:sp>
+      <p:sp>
+        <p:nvSpPr>
+          <p:cNvPr id="79" name="Rectangle 78"/>
+          <p:cNvSpPr/>
+          <p:nvPr/>
+        </p:nvSpPr>
+        <p:spPr>
+          <a:xfrm>
+            <a:off x="8595360" y="4800600"/>
+            <a:ext cx="1051560" cy="475488"/>
+          </a:xfrm>
+          <a:prstGeom prst="rect">
+            <a:avLst/>
+          </a:prstGeom>
+          <a:solidFill>
+            <a:srgbClr val="F7F5F0"/>
+          </a:solidFill>
+          <a:ln>
+            <a:noFill/>
+          </a:ln>
+        </p:spPr>
+        <p:style>
+          <a:lnRef idx="1">
+            <a:schemeClr val="accent1"/>
+          </a:lnRef>
+          <a:fillRef idx="3">
+            <a:schemeClr val="accent1"/>
+          </a:fillRef>
+          <a:effectRef idx="2">
+            <a:schemeClr val="accent1"/>
+          </a:effectRef>
+          <a:fontRef idx="minor">
+            <a:schemeClr val="lt1"/>
+          </a:fontRef>
+        </p:style>
+        <p:txBody>
+          <a:bodyPr rtlCol="0" anchor="ctr"/>
+          <a:lstStyle/>
+          <a:p>
+            <a:pPr algn="ctr"/>
+          </a:p>
+        </p:txBody>
+      </p:sp>
+      <p:sp>
+        <p:nvSpPr>
+          <p:cNvPr id="80" name="TextBox 79"/>
+          <p:cNvSpPr txBox="1"/>
+          <p:nvPr/>
+        </p:nvSpPr>
+        <p:spPr>
+          <a:xfrm>
+            <a:off x="8686800" y="4855464"/>
+            <a:ext cx="960120" cy="384048"/>
+          </a:xfrm>
+          <a:prstGeom prst="rect">
+            <a:avLst/>
+          </a:prstGeom>
+          <a:noFill/>
+        </p:spPr>
+        <p:txBody>
+          <a:bodyPr wrap="square">
+            <a:spAutoFit/>
+          </a:bodyPr>
+          <a:lstStyle/>
+          <a:p>
+            <a:pPr algn="l">
+              <a:defRPr sz="1300" b="0">
+                <a:solidFill>
+                  <a:srgbClr val="333333"/>
+                </a:solidFill>
+                <a:latin typeface="Microsoft YaHei"/>
+              </a:defRPr>
+            </a:pPr>
+            <a:r>
+              <a:t>50s</a:t>
+            </a:r>
+          </a:p>
+        </p:txBody>
+      </p:sp>
+      <p:sp>
+        <p:nvSpPr>
+          <p:cNvPr id="81" name="Rectangle 80"/>
+          <p:cNvSpPr/>
+          <p:nvPr/>
+        </p:nvSpPr>
+        <p:spPr>
+          <a:xfrm>
+            <a:off x="9692640" y="4800600"/>
+            <a:ext cx="1051560" cy="475488"/>
+          </a:xfrm>
+          <a:prstGeom prst="rect">
+            <a:avLst/>
+          </a:prstGeom>
+          <a:solidFill>
+            <a:srgbClr val="F7F5F0"/>
+          </a:solidFill>
+          <a:ln>
+            <a:noFill/>
+          </a:ln>
+        </p:spPr>
+        <p:style>
+          <a:lnRef idx="1">
+            <a:schemeClr val="accent1"/>
+          </a:lnRef>
+          <a:fillRef idx="3">
+            <a:schemeClr val="accent1"/>
+          </a:fillRef>
+          <a:effectRef idx="2">
+            <a:schemeClr val="accent1"/>
+          </a:effectRef>
+          <a:fontRef idx="minor">
+            <a:schemeClr val="lt1"/>
+          </a:fontRef>
+        </p:style>
+        <p:txBody>
+          <a:bodyPr rtlCol="0" anchor="ctr"/>
+          <a:lstStyle/>
+          <a:p>
+            <a:pPr algn="ctr"/>
+          </a:p>
+        </p:txBody>
+      </p:sp>
+      <p:sp>
+        <p:nvSpPr>
+          <p:cNvPr id="82" name="TextBox 81"/>
+          <p:cNvSpPr txBox="1"/>
+          <p:nvPr/>
+        </p:nvSpPr>
+        <p:spPr>
+          <a:xfrm>
+            <a:off x="9784080" y="4855464"/>
+            <a:ext cx="960120" cy="384048"/>
+          </a:xfrm>
+          <a:prstGeom prst="rect">
+            <a:avLst/>
+          </a:prstGeom>
+          <a:noFill/>
+        </p:spPr>
+        <p:txBody>
+          <a:bodyPr wrap="square">
+            <a:spAutoFit/>
+          </a:bodyPr>
+          <a:lstStyle/>
+          <a:p>
+            <a:pPr algn="l">
+              <a:defRPr sz="1300" b="0">
+                <a:solidFill>
+                  <a:srgbClr val="333333"/>
+                </a:solidFill>
+                <a:latin typeface="Microsoft YaHei"/>
+              </a:defRPr>
+            </a:pPr>
+            <a:r>
+              <a:t>⭐⭐⭐⭐</a:t>
+            </a:r>
+          </a:p>
+        </p:txBody>
+      </p:sp>
+    </p:spTree>
+  </p:cSld>
+  <p:clrMapOvr>
+    <a:masterClrMapping/>
+  </p:clrMapOvr>
+</p:sld>
+</file>
+
+<file path=ppt/slides/slide24.xml><?xml version="1.0" encoding="utf-8"?>
+<p:sld xmlns:a="http://schemas.openxmlformats.org/drawingml/2006/main" xmlns:p="http://schemas.openxmlformats.org/presentationml/2006/main" xmlns:r="http://schemas.openxmlformats.org/officeDocument/2006/relationships">
+  <p:cSld>
+    <p:bg>
+      <p:bgPr>
+        <a:solidFill>
+          <a:srgbClr val="FFFFFF"/>
+        </a:solidFill>
+        <a:effectLst/>
+      </p:bgPr>
+    </p:bg>
+    <p:spTree>
+      <p:nvGrpSpPr>
+        <p:cNvPr id="1" name=""/>
+        <p:cNvGrpSpPr/>
+        <p:nvPr/>
+      </p:nvGrpSpPr>
+      <p:grpSpPr/>
+      <p:sp>
+        <p:nvSpPr>
+          <p:cNvPr id="2" name="TextBox 1"/>
+          <p:cNvSpPr txBox="1"/>
+          <p:nvPr/>
+        </p:nvSpPr>
+        <p:spPr>
+          <a:xfrm>
+            <a:off x="457200" y="228600"/>
+            <a:ext cx="9144000" cy="594360"/>
+          </a:xfrm>
+          <a:prstGeom prst="rect">
+            <a:avLst/>
+          </a:prstGeom>
+          <a:noFill/>
+        </p:spPr>
+        <p:txBody>
+          <a:bodyPr wrap="square">
+            <a:spAutoFit/>
+          </a:bodyPr>
+          <a:lstStyle/>
+          <a:p>
+            <a:pPr algn="l">
+              <a:defRPr sz="3000" b="1">
+                <a:solidFill>
+                  <a:srgbClr val="2D5016"/>
+                </a:solidFill>
+                <a:latin typeface="Microsoft YaHei"/>
+              </a:defRPr>
+            </a:pPr>
+            <a:r>
+              <a:t>📋 脚本清单 W7-W8（19-24条）</a:t>
+            </a:r>
+          </a:p>
+        </p:txBody>
+      </p:sp>
+      <p:sp>
+        <p:nvSpPr>
+          <p:cNvPr id="3" name="Rectangle 2"/>
+          <p:cNvSpPr/>
+          <p:nvPr/>
+        </p:nvSpPr>
+        <p:spPr>
+          <a:xfrm>
+            <a:off x="457200" y="914400"/>
+            <a:ext cx="502919" cy="457200"/>
+          </a:xfrm>
+          <a:prstGeom prst="rect">
+            <a:avLst/>
+          </a:prstGeom>
+          <a:solidFill>
+            <a:srgbClr val="2D5016"/>
+          </a:solidFill>
+          <a:ln>
+            <a:noFill/>
+          </a:ln>
+        </p:spPr>
+        <p:style>
+          <a:lnRef idx="1">
+            <a:schemeClr val="accent1"/>
+          </a:lnRef>
+          <a:fillRef idx="3">
+            <a:schemeClr val="accent1"/>
+          </a:fillRef>
+          <a:effectRef idx="2">
+            <a:schemeClr val="accent1"/>
+          </a:effectRef>
+          <a:fontRef idx="minor">
+            <a:schemeClr val="lt1"/>
+          </a:fontRef>
+        </p:style>
+        <p:txBody>
+          <a:bodyPr rtlCol="0" anchor="ctr"/>
+          <a:lstStyle/>
+          <a:p>
+            <a:pPr algn="ctr"/>
+          </a:p>
+        </p:txBody>
+      </p:sp>
+      <p:sp>
+        <p:nvSpPr>
+          <p:cNvPr id="4" name="TextBox 3"/>
+          <p:cNvSpPr txBox="1"/>
+          <p:nvPr/>
+        </p:nvSpPr>
+        <p:spPr>
+          <a:xfrm>
+            <a:off x="548640" y="960120"/>
+            <a:ext cx="411479" cy="411480"/>
+          </a:xfrm>
+          <a:prstGeom prst="rect">
+            <a:avLst/>
+          </a:prstGeom>
+          <a:noFill/>
+        </p:spPr>
+        <p:txBody>
+          <a:bodyPr wrap="square">
+            <a:spAutoFit/>
+          </a:bodyPr>
+          <a:lstStyle/>
+          <a:p>
+            <a:pPr algn="l">
+              <a:defRPr sz="1400" b="1">
+                <a:solidFill>
+                  <a:srgbClr val="FFFFFF"/>
+                </a:solidFill>
+                <a:latin typeface="Microsoft YaHei"/>
+              </a:defRPr>
+            </a:pPr>
+            <a:r>
+              <a:t>#</a:t>
+            </a:r>
+          </a:p>
+        </p:txBody>
+      </p:sp>
+      <p:sp>
+        <p:nvSpPr>
+          <p:cNvPr id="5" name="Rectangle 4"/>
+          <p:cNvSpPr/>
+          <p:nvPr/>
+        </p:nvSpPr>
+        <p:spPr>
+          <a:xfrm>
+            <a:off x="1005840" y="914400"/>
+            <a:ext cx="4983480" cy="457200"/>
+          </a:xfrm>
+          <a:prstGeom prst="rect">
+            <a:avLst/>
+          </a:prstGeom>
+          <a:solidFill>
+            <a:srgbClr val="2D5016"/>
+          </a:solidFill>
+          <a:ln>
+            <a:noFill/>
+          </a:ln>
+        </p:spPr>
+        <p:style>
+          <a:lnRef idx="1">
+            <a:schemeClr val="accent1"/>
+          </a:lnRef>
+          <a:fillRef idx="3">
+            <a:schemeClr val="accent1"/>
+          </a:fillRef>
+          <a:effectRef idx="2">
+            <a:schemeClr val="accent1"/>
+          </a:effectRef>
+          <a:fontRef idx="minor">
+            <a:schemeClr val="lt1"/>
+          </a:fontRef>
+        </p:style>
+        <p:txBody>
+          <a:bodyPr rtlCol="0" anchor="ctr"/>
+          <a:lstStyle/>
+          <a:p>
+            <a:pPr algn="ctr"/>
+          </a:p>
+        </p:txBody>
+      </p:sp>
+      <p:sp>
+        <p:nvSpPr>
+          <p:cNvPr id="6" name="TextBox 5"/>
+          <p:cNvSpPr txBox="1"/>
+          <p:nvPr/>
+        </p:nvSpPr>
+        <p:spPr>
+          <a:xfrm>
+            <a:off x="1097280" y="960120"/>
+            <a:ext cx="4892040" cy="411480"/>
+          </a:xfrm>
+          <a:prstGeom prst="rect">
+            <a:avLst/>
+          </a:prstGeom>
+          <a:noFill/>
+        </p:spPr>
+        <p:txBody>
+          <a:bodyPr wrap="square">
+            <a:spAutoFit/>
+          </a:bodyPr>
+          <a:lstStyle/>
+          <a:p>
+            <a:pPr algn="l">
+              <a:defRPr sz="1400" b="1">
+                <a:solidFill>
+                  <a:srgbClr val="FFFFFF"/>
+                </a:solidFill>
+                <a:latin typeface="Microsoft YaHei"/>
+              </a:defRPr>
+            </a:pPr>
+            <a:r>
+              <a:t>脚本名</a:t>
+            </a:r>
+          </a:p>
+        </p:txBody>
+      </p:sp>
+      <p:sp>
+        <p:nvSpPr>
+          <p:cNvPr id="7" name="Rectangle 6"/>
+          <p:cNvSpPr/>
+          <p:nvPr/>
+        </p:nvSpPr>
+        <p:spPr>
+          <a:xfrm>
+            <a:off x="6035040" y="914400"/>
+            <a:ext cx="2514600" cy="457200"/>
+          </a:xfrm>
+          <a:prstGeom prst="rect">
+            <a:avLst/>
+          </a:prstGeom>
+          <a:solidFill>
+            <a:srgbClr val="2D5016"/>
+          </a:solidFill>
+          <a:ln>
+            <a:noFill/>
+          </a:ln>
+        </p:spPr>
+        <p:style>
+          <a:lnRef idx="1">
+            <a:schemeClr val="accent1"/>
+          </a:lnRef>
+          <a:fillRef idx="3">
+            <a:schemeClr val="accent1"/>
+          </a:fillRef>
+          <a:effectRef idx="2">
+            <a:schemeClr val="accent1"/>
+          </a:effectRef>
+          <a:fontRef idx="minor">
+            <a:schemeClr val="lt1"/>
+          </a:fontRef>
+        </p:style>
+        <p:txBody>
+          <a:bodyPr rtlCol="0" anchor="ctr"/>
+          <a:lstStyle/>
+          <a:p>
+            <a:pPr algn="ctr"/>
+          </a:p>
+        </p:txBody>
+      </p:sp>
+      <p:sp>
+        <p:nvSpPr>
+          <p:cNvPr id="8" name="TextBox 7"/>
+          <p:cNvSpPr txBox="1"/>
+          <p:nvPr/>
+        </p:nvSpPr>
+        <p:spPr>
+          <a:xfrm>
+            <a:off x="6126479" y="960120"/>
+            <a:ext cx="2423160" cy="411480"/>
+          </a:xfrm>
+          <a:prstGeom prst="rect">
+            <a:avLst/>
+          </a:prstGeom>
+          <a:noFill/>
+        </p:spPr>
+        <p:txBody>
+          <a:bodyPr wrap="square">
+            <a:spAutoFit/>
+          </a:bodyPr>
+          <a:lstStyle/>
+          <a:p>
+            <a:pPr algn="l">
+              <a:defRPr sz="1400" b="1">
+                <a:solidFill>
+                  <a:srgbClr val="FFFFFF"/>
+                </a:solidFill>
+                <a:latin typeface="Microsoft YaHei"/>
+              </a:defRPr>
+            </a:pPr>
+            <a:r>
+              <a:t>栏目</a:t>
+            </a:r>
+          </a:p>
+        </p:txBody>
+      </p:sp>
+      <p:sp>
+        <p:nvSpPr>
+          <p:cNvPr id="9" name="Rectangle 8"/>
+          <p:cNvSpPr/>
+          <p:nvPr/>
+        </p:nvSpPr>
+        <p:spPr>
+          <a:xfrm>
+            <a:off x="8595360" y="914400"/>
+            <a:ext cx="1051560" cy="457200"/>
+          </a:xfrm>
+          <a:prstGeom prst="rect">
+            <a:avLst/>
+          </a:prstGeom>
+          <a:solidFill>
+            <a:srgbClr val="2D5016"/>
+          </a:solidFill>
+          <a:ln>
+            <a:noFill/>
+          </a:ln>
+        </p:spPr>
+        <p:style>
+          <a:lnRef idx="1">
+            <a:schemeClr val="accent1"/>
+          </a:lnRef>
+          <a:fillRef idx="3">
+            <a:schemeClr val="accent1"/>
+          </a:fillRef>
+          <a:effectRef idx="2">
+            <a:schemeClr val="accent1"/>
+          </a:effectRef>
+          <a:fontRef idx="minor">
+            <a:schemeClr val="lt1"/>
+          </a:fontRef>
+        </p:style>
+        <p:txBody>
+          <a:bodyPr rtlCol="0" anchor="ctr"/>
+          <a:lstStyle/>
+          <a:p>
+            <a:pPr algn="ctr"/>
+          </a:p>
+        </p:txBody>
+      </p:sp>
+      <p:sp>
+        <p:nvSpPr>
+          <p:cNvPr id="10" name="TextBox 9"/>
+          <p:cNvSpPr txBox="1"/>
+          <p:nvPr/>
+        </p:nvSpPr>
+        <p:spPr>
+          <a:xfrm>
+            <a:off x="8686800" y="960120"/>
+            <a:ext cx="960120" cy="411480"/>
+          </a:xfrm>
+          <a:prstGeom prst="rect">
+            <a:avLst/>
+          </a:prstGeom>
+          <a:noFill/>
+        </p:spPr>
+        <p:txBody>
+          <a:bodyPr wrap="square">
+            <a:spAutoFit/>
+          </a:bodyPr>
+          <a:lstStyle/>
+          <a:p>
+            <a:pPr algn="l">
+              <a:defRPr sz="1400" b="1">
+                <a:solidFill>
+                  <a:srgbClr val="FFFFFF"/>
+                </a:solidFill>
+                <a:latin typeface="Microsoft YaHei"/>
+              </a:defRPr>
+            </a:pPr>
+            <a:r>
+              <a:t>时长</a:t>
+            </a:r>
+          </a:p>
+        </p:txBody>
+      </p:sp>
+      <p:sp>
+        <p:nvSpPr>
+          <p:cNvPr id="11" name="Rectangle 10"/>
+          <p:cNvSpPr/>
+          <p:nvPr/>
+        </p:nvSpPr>
+        <p:spPr>
+          <a:xfrm>
+            <a:off x="9692640" y="914400"/>
+            <a:ext cx="1051560" cy="457200"/>
+          </a:xfrm>
+          <a:prstGeom prst="rect">
+            <a:avLst/>
+          </a:prstGeom>
+          <a:solidFill>
+            <a:srgbClr val="2D5016"/>
+          </a:solidFill>
+          <a:ln>
+            <a:noFill/>
+          </a:ln>
+        </p:spPr>
+        <p:style>
+          <a:lnRef idx="1">
+            <a:schemeClr val="accent1"/>
+          </a:lnRef>
+          <a:fillRef idx="3">
+            <a:schemeClr val="accent1"/>
+          </a:fillRef>
+          <a:effectRef idx="2">
+            <a:schemeClr val="accent1"/>
+          </a:effectRef>
+          <a:fontRef idx="minor">
+            <a:schemeClr val="lt1"/>
+          </a:fontRef>
+        </p:style>
+        <p:txBody>
+          <a:bodyPr rtlCol="0" anchor="ctr"/>
+          <a:lstStyle/>
+          <a:p>
+            <a:pPr algn="ctr"/>
+          </a:p>
+        </p:txBody>
+      </p:sp>
+      <p:sp>
+        <p:nvSpPr>
+          <p:cNvPr id="12" name="TextBox 11"/>
+          <p:cNvSpPr txBox="1"/>
+          <p:nvPr/>
+        </p:nvSpPr>
+        <p:spPr>
+          <a:xfrm>
+            <a:off x="9784080" y="960120"/>
+            <a:ext cx="960120" cy="411480"/>
+          </a:xfrm>
+          <a:prstGeom prst="rect">
+            <a:avLst/>
+          </a:prstGeom>
+          <a:noFill/>
+        </p:spPr>
+        <p:txBody>
+          <a:bodyPr wrap="square">
+            <a:spAutoFit/>
+          </a:bodyPr>
+          <a:lstStyle/>
+          <a:p>
+            <a:pPr algn="l">
+              <a:defRPr sz="1400" b="1">
+                <a:solidFill>
+                  <a:srgbClr val="FFFFFF"/>
+                </a:solidFill>
+                <a:latin typeface="Microsoft YaHei"/>
+              </a:defRPr>
+            </a:pPr>
+            <a:r>
+              <a:t>传播力</a:t>
+            </a:r>
+          </a:p>
+        </p:txBody>
+      </p:sp>
+      <p:sp>
+        <p:nvSpPr>
+          <p:cNvPr id="13" name="Rectangle 12"/>
+          <p:cNvSpPr/>
+          <p:nvPr/>
+        </p:nvSpPr>
+        <p:spPr>
+          <a:xfrm>
+            <a:off x="457200" y="1508760"/>
+            <a:ext cx="502919" cy="475488"/>
+          </a:xfrm>
+          <a:prstGeom prst="rect">
+            <a:avLst/>
+          </a:prstGeom>
+          <a:solidFill>
+            <a:srgbClr val="F7F5F0"/>
+          </a:solidFill>
+          <a:ln>
+            <a:noFill/>
+          </a:ln>
+        </p:spPr>
+        <p:style>
+          <a:lnRef idx="1">
+            <a:schemeClr val="accent1"/>
+          </a:lnRef>
+          <a:fillRef idx="3">
+            <a:schemeClr val="accent1"/>
+          </a:fillRef>
+          <a:effectRef idx="2">
+            <a:schemeClr val="accent1"/>
+          </a:effectRef>
+          <a:fontRef idx="minor">
+            <a:schemeClr val="lt1"/>
+          </a:fontRef>
+        </p:style>
+        <p:txBody>
+          <a:bodyPr rtlCol="0" anchor="ctr"/>
+          <a:lstStyle/>
+          <a:p>
+            <a:pPr algn="ctr"/>
+          </a:p>
+        </p:txBody>
+      </p:sp>
+      <p:sp>
+        <p:nvSpPr>
+          <p:cNvPr id="14" name="TextBox 13"/>
+          <p:cNvSpPr txBox="1"/>
+          <p:nvPr/>
+        </p:nvSpPr>
+        <p:spPr>
+          <a:xfrm>
+            <a:off x="548640" y="1563624"/>
+            <a:ext cx="411479" cy="384048"/>
+          </a:xfrm>
+          <a:prstGeom prst="rect">
+            <a:avLst/>
+          </a:prstGeom>
+          <a:noFill/>
+        </p:spPr>
+        <p:txBody>
+          <a:bodyPr wrap="square">
+            <a:spAutoFit/>
+          </a:bodyPr>
+          <a:lstStyle/>
+          <a:p>
+            <a:pPr algn="l">
+              <a:defRPr sz="1300" b="1">
+                <a:solidFill>
+                  <a:srgbClr val="2D5016"/>
+                </a:solidFill>
+                <a:latin typeface="Microsoft YaHei"/>
+              </a:defRPr>
+            </a:pPr>
+            <a:r>
+              <a:t>19</a:t>
+            </a:r>
+          </a:p>
+        </p:txBody>
+      </p:sp>
+      <p:sp>
+        <p:nvSpPr>
+          <p:cNvPr id="15" name="Rectangle 14"/>
+          <p:cNvSpPr/>
+          <p:nvPr/>
+        </p:nvSpPr>
+        <p:spPr>
+          <a:xfrm>
+            <a:off x="1005840" y="1508760"/>
+            <a:ext cx="4983480" cy="475488"/>
+          </a:xfrm>
+          <a:prstGeom prst="rect">
+            <a:avLst/>
+          </a:prstGeom>
+          <a:solidFill>
+            <a:srgbClr val="F7F5F0"/>
+          </a:solidFill>
+          <a:ln>
+            <a:noFill/>
+          </a:ln>
+        </p:spPr>
+        <p:style>
+          <a:lnRef idx="1">
+            <a:schemeClr val="accent1"/>
+          </a:lnRef>
+          <a:fillRef idx="3">
+            <a:schemeClr val="accent1"/>
+          </a:fillRef>
+          <a:effectRef idx="2">
+            <a:schemeClr val="accent1"/>
+          </a:effectRef>
+          <a:fontRef idx="minor">
+            <a:schemeClr val="lt1"/>
+          </a:fontRef>
+        </p:style>
+        <p:txBody>
+          <a:bodyPr rtlCol="0" anchor="ctr"/>
+          <a:lstStyle/>
+          <a:p>
+            <a:pPr algn="ctr"/>
+          </a:p>
+        </p:txBody>
+      </p:sp>
+      <p:sp>
+        <p:nvSpPr>
+          <p:cNvPr id="16" name="TextBox 15"/>
+          <p:cNvSpPr txBox="1"/>
+          <p:nvPr/>
+        </p:nvSpPr>
+        <p:spPr>
+          <a:xfrm>
+            <a:off x="1097280" y="1563624"/>
+            <a:ext cx="4892040" cy="384048"/>
+          </a:xfrm>
+          <a:prstGeom prst="rect">
+            <a:avLst/>
+          </a:prstGeom>
+          <a:noFill/>
+        </p:spPr>
+        <p:txBody>
+          <a:bodyPr wrap="square">
+            <a:spAutoFit/>
+          </a:bodyPr>
+          <a:lstStyle/>
+          <a:p>
+            <a:pPr algn="l">
+              <a:defRPr sz="1300" b="0">
+                <a:solidFill>
+                  <a:srgbClr val="333333"/>
+                </a:solidFill>
+                <a:latin typeface="Microsoft YaHei"/>
+              </a:defRPr>
+            </a:pPr>
+            <a:r>
+              <a:t>今天这场必须赢</a:t>
+            </a:r>
+          </a:p>
+        </p:txBody>
+      </p:sp>
+      <p:sp>
+        <p:nvSpPr>
+          <p:cNvPr id="17" name="Rectangle 16"/>
+          <p:cNvSpPr/>
+          <p:nvPr/>
+        </p:nvSpPr>
+        <p:spPr>
+          <a:xfrm>
+            <a:off x="6035040" y="1508760"/>
+            <a:ext cx="2514600" cy="475488"/>
+          </a:xfrm>
+          <a:prstGeom prst="rect">
+            <a:avLst/>
+          </a:prstGeom>
+          <a:solidFill>
+            <a:srgbClr val="F7F5F0"/>
+          </a:solidFill>
+          <a:ln>
+            <a:noFill/>
+          </a:ln>
+        </p:spPr>
+        <p:style>
+          <a:lnRef idx="1">
+            <a:schemeClr val="accent1"/>
+          </a:lnRef>
+          <a:fillRef idx="3">
+            <a:schemeClr val="accent1"/>
+          </a:fillRef>
+          <a:effectRef idx="2">
+            <a:schemeClr val="accent1"/>
+          </a:effectRef>
+          <a:fontRef idx="minor">
+            <a:schemeClr val="lt1"/>
+          </a:fontRef>
+        </p:style>
+        <p:txBody>
+          <a:bodyPr rtlCol="0" anchor="ctr"/>
+          <a:lstStyle/>
+          <a:p>
+            <a:pPr algn="ctr"/>
+          </a:p>
+        </p:txBody>
+      </p:sp>
+      <p:sp>
+        <p:nvSpPr>
+          <p:cNvPr id="18" name="TextBox 17"/>
+          <p:cNvSpPr txBox="1"/>
+          <p:nvPr/>
+        </p:nvSpPr>
+        <p:spPr>
+          <a:xfrm>
+            <a:off x="6126479" y="1563624"/>
+            <a:ext cx="2423160" cy="384048"/>
+          </a:xfrm>
+          <a:prstGeom prst="rect">
+            <a:avLst/>
+          </a:prstGeom>
+          <a:noFill/>
+        </p:spPr>
+        <p:txBody>
+          <a:bodyPr wrap="square">
+            <a:spAutoFit/>
+          </a:bodyPr>
+          <a:lstStyle/>
+          <a:p>
+            <a:pPr algn="l">
+              <a:defRPr sz="1300" b="0">
+                <a:solidFill>
+                  <a:srgbClr val="333333"/>
+                </a:solidFill>
+                <a:latin typeface="Microsoft YaHei"/>
+              </a:defRPr>
+            </a:pPr>
+            <a:r>
+              <a:t>今天这场必须赢</a:t>
+            </a:r>
+          </a:p>
+        </p:txBody>
+      </p:sp>
+      <p:sp>
+        <p:nvSpPr>
+          <p:cNvPr id="19" name="Rectangle 18"/>
+          <p:cNvSpPr/>
+          <p:nvPr/>
+        </p:nvSpPr>
+        <p:spPr>
+          <a:xfrm>
+            <a:off x="8595360" y="1508760"/>
+            <a:ext cx="1051560" cy="475488"/>
+          </a:xfrm>
+          <a:prstGeom prst="rect">
+            <a:avLst/>
+          </a:prstGeom>
+          <a:solidFill>
+            <a:srgbClr val="F7F5F0"/>
+          </a:solidFill>
+          <a:ln>
+            <a:noFill/>
+          </a:ln>
+        </p:spPr>
+        <p:style>
+          <a:lnRef idx="1">
+            <a:schemeClr val="accent1"/>
+          </a:lnRef>
+          <a:fillRef idx="3">
+            <a:schemeClr val="accent1"/>
+          </a:fillRef>
+          <a:effectRef idx="2">
+            <a:schemeClr val="accent1"/>
+          </a:effectRef>
+          <a:fontRef idx="minor">
+            <a:schemeClr val="lt1"/>
+          </a:fontRef>
+        </p:style>
+        <p:txBody>
+          <a:bodyPr rtlCol="0" anchor="ctr"/>
+          <a:lstStyle/>
+          <a:p>
+            <a:pPr algn="ctr"/>
+          </a:p>
+        </p:txBody>
+      </p:sp>
+      <p:sp>
+        <p:nvSpPr>
+          <p:cNvPr id="20" name="TextBox 19"/>
+          <p:cNvSpPr txBox="1"/>
+          <p:nvPr/>
+        </p:nvSpPr>
+        <p:spPr>
+          <a:xfrm>
+            <a:off x="8686800" y="1563624"/>
+            <a:ext cx="960120" cy="384048"/>
+          </a:xfrm>
+          <a:prstGeom prst="rect">
+            <a:avLst/>
+          </a:prstGeom>
+          <a:noFill/>
+        </p:spPr>
+        <p:txBody>
+          <a:bodyPr wrap="square">
+            <a:spAutoFit/>
+          </a:bodyPr>
+          <a:lstStyle/>
+          <a:p>
+            <a:pPr algn="l">
+              <a:defRPr sz="1300" b="0">
+                <a:solidFill>
+                  <a:srgbClr val="333333"/>
+                </a:solidFill>
+                <a:latin typeface="Microsoft YaHei"/>
+              </a:defRPr>
+            </a:pPr>
+            <a:r>
+              <a:t>45s</a:t>
+            </a:r>
+          </a:p>
+        </p:txBody>
+      </p:sp>
+      <p:sp>
+        <p:nvSpPr>
+          <p:cNvPr id="21" name="Rectangle 20"/>
+          <p:cNvSpPr/>
+          <p:nvPr/>
+        </p:nvSpPr>
+        <p:spPr>
+          <a:xfrm>
+            <a:off x="9692640" y="1508760"/>
+            <a:ext cx="1051560" cy="475488"/>
+          </a:xfrm>
+          <a:prstGeom prst="rect">
+            <a:avLst/>
+          </a:prstGeom>
+          <a:solidFill>
+            <a:srgbClr val="F7F5F0"/>
+          </a:solidFill>
+          <a:ln>
+            <a:noFill/>
+          </a:ln>
+        </p:spPr>
+        <p:style>
+          <a:lnRef idx="1">
+            <a:schemeClr val="accent1"/>
+          </a:lnRef>
+          <a:fillRef idx="3">
+            <a:schemeClr val="accent1"/>
+          </a:fillRef>
+          <a:effectRef idx="2">
+            <a:schemeClr val="accent1"/>
+          </a:effectRef>
+          <a:fontRef idx="minor">
+            <a:schemeClr val="lt1"/>
+          </a:fontRef>
+        </p:style>
+        <p:txBody>
+          <a:bodyPr rtlCol="0" anchor="ctr"/>
+          <a:lstStyle/>
+          <a:p>
+            <a:pPr algn="ctr"/>
+          </a:p>
+        </p:txBody>
+      </p:sp>
+      <p:sp>
+        <p:nvSpPr>
+          <p:cNvPr id="22" name="TextBox 21"/>
+          <p:cNvSpPr txBox="1"/>
+          <p:nvPr/>
+        </p:nvSpPr>
+        <p:spPr>
+          <a:xfrm>
+            <a:off x="9784080" y="1563624"/>
+            <a:ext cx="960120" cy="384048"/>
+          </a:xfrm>
+          <a:prstGeom prst="rect">
+            <a:avLst/>
+          </a:prstGeom>
+          <a:noFill/>
+        </p:spPr>
+        <p:txBody>
+          <a:bodyPr wrap="square">
+            <a:spAutoFit/>
+          </a:bodyPr>
+          <a:lstStyle/>
+          <a:p>
+            <a:pPr algn="l">
+              <a:defRPr sz="1300" b="0">
+                <a:solidFill>
+                  <a:srgbClr val="333333"/>
+                </a:solidFill>
+                <a:latin typeface="Microsoft YaHei"/>
+              </a:defRPr>
+            </a:pPr>
+            <a:r>
+              <a:t>55s</a:t>
+            </a:r>
+          </a:p>
+        </p:txBody>
+      </p:sp>
+      <p:sp>
+        <p:nvSpPr>
+          <p:cNvPr id="23" name="Rectangle 22"/>
+          <p:cNvSpPr/>
+          <p:nvPr/>
+        </p:nvSpPr>
+        <p:spPr>
+          <a:xfrm>
+            <a:off x="457200" y="2057400"/>
+            <a:ext cx="502919" cy="475488"/>
+          </a:xfrm>
+          <a:prstGeom prst="rect">
+            <a:avLst/>
+          </a:prstGeom>
+          <a:solidFill>
+            <a:srgbClr val="FFFFFF"/>
+          </a:solidFill>
+          <a:ln>
+            <a:noFill/>
+          </a:ln>
+        </p:spPr>
+        <p:style>
+          <a:lnRef idx="1">
+            <a:schemeClr val="accent1"/>
+          </a:lnRef>
+          <a:fillRef idx="3">
+            <a:schemeClr val="accent1"/>
+          </a:fillRef>
+          <a:effectRef idx="2">
+            <a:schemeClr val="accent1"/>
+          </a:effectRef>
+          <a:fontRef idx="minor">
+            <a:schemeClr val="lt1"/>
+          </a:fontRef>
+        </p:style>
+        <p:txBody>
+          <a:bodyPr rtlCol="0" anchor="ctr"/>
+          <a:lstStyle/>
+          <a:p>
+            <a:pPr algn="ctr"/>
+          </a:p>
+        </p:txBody>
+      </p:sp>
+      <p:sp>
+        <p:nvSpPr>
+          <p:cNvPr id="24" name="TextBox 23"/>
+          <p:cNvSpPr txBox="1"/>
+          <p:nvPr/>
+        </p:nvSpPr>
+        <p:spPr>
+          <a:xfrm>
+            <a:off x="548640" y="2112264"/>
+            <a:ext cx="411479" cy="384048"/>
+          </a:xfrm>
+          <a:prstGeom prst="rect">
+            <a:avLst/>
+          </a:prstGeom>
+          <a:noFill/>
+        </p:spPr>
+        <p:txBody>
+          <a:bodyPr wrap="square">
+            <a:spAutoFit/>
+          </a:bodyPr>
+          <a:lstStyle/>
+          <a:p>
+            <a:pPr algn="l">
+              <a:defRPr sz="1300" b="1">
+                <a:solidFill>
+                  <a:srgbClr val="2D5016"/>
+                </a:solidFill>
+                <a:latin typeface="Microsoft YaHei"/>
+              </a:defRPr>
+            </a:pPr>
+            <a:r>
+              <a:t>20</a:t>
+            </a:r>
+          </a:p>
+        </p:txBody>
+      </p:sp>
+      <p:sp>
+        <p:nvSpPr>
+          <p:cNvPr id="25" name="Rectangle 24"/>
+          <p:cNvSpPr/>
+          <p:nvPr/>
+        </p:nvSpPr>
+        <p:spPr>
+          <a:xfrm>
+            <a:off x="1005840" y="2057400"/>
+            <a:ext cx="4983480" cy="475488"/>
+          </a:xfrm>
+          <a:prstGeom prst="rect">
+            <a:avLst/>
+          </a:prstGeom>
+          <a:solidFill>
+            <a:srgbClr val="FFFFFF"/>
+          </a:solidFill>
+          <a:ln>
+            <a:noFill/>
+          </a:ln>
+        </p:spPr>
+        <p:style>
+          <a:lnRef idx="1">
+            <a:schemeClr val="accent1"/>
+          </a:lnRef>
+          <a:fillRef idx="3">
+            <a:schemeClr val="accent1"/>
+          </a:fillRef>
+          <a:effectRef idx="2">
+            <a:schemeClr val="accent1"/>
+          </a:effectRef>
+          <a:fontRef idx="minor">
+            <a:schemeClr val="lt1"/>
+          </a:fontRef>
+        </p:style>
+        <p:txBody>
+          <a:bodyPr rtlCol="0" anchor="ctr"/>
+          <a:lstStyle/>
+          <a:p>
+            <a:pPr algn="ctr"/>
+          </a:p>
+        </p:txBody>
+      </p:sp>
+      <p:sp>
+        <p:nvSpPr>
+          <p:cNvPr id="26" name="TextBox 25"/>
+          <p:cNvSpPr txBox="1"/>
+          <p:nvPr/>
+        </p:nvSpPr>
+        <p:spPr>
+          <a:xfrm>
+            <a:off x="1097280" y="2112264"/>
+            <a:ext cx="4892040" cy="384048"/>
+          </a:xfrm>
+          <a:prstGeom prst="rect">
+            <a:avLst/>
+          </a:prstGeom>
+          <a:noFill/>
+        </p:spPr>
+        <p:txBody>
+          <a:bodyPr wrap="square">
+            <a:spAutoFit/>
+          </a:bodyPr>
+          <a:lstStyle/>
+          <a:p>
+            <a:pPr algn="l">
+              <a:defRPr sz="1300" b="0">
+                <a:solidFill>
+                  <a:srgbClr val="333333"/>
+                </a:solidFill>
+                <a:latin typeface="Microsoft YaHei"/>
+              </a:defRPr>
+            </a:pPr>
+            <a:r>
+              <a:t>一亩地账本 vs 一粒球梦想</a:t>
+            </a:r>
+          </a:p>
+        </p:txBody>
+      </p:sp>
+      <p:sp>
+        <p:nvSpPr>
+          <p:cNvPr id="27" name="Rectangle 26"/>
+          <p:cNvSpPr/>
+          <p:nvPr/>
+        </p:nvSpPr>
+        <p:spPr>
+          <a:xfrm>
+            <a:off x="6035040" y="2057400"/>
+            <a:ext cx="2514600" cy="475488"/>
+          </a:xfrm>
+          <a:prstGeom prst="rect">
+            <a:avLst/>
+          </a:prstGeom>
+          <a:solidFill>
+            <a:srgbClr val="FFFFFF"/>
+          </a:solidFill>
+          <a:ln>
+            <a:noFill/>
+          </a:ln>
+        </p:spPr>
+        <p:style>
+          <a:lnRef idx="1">
+            <a:schemeClr val="accent1"/>
+          </a:lnRef>
+          <a:fillRef idx="3">
+            <a:schemeClr val="accent1"/>
+          </a:fillRef>
+          <a:effectRef idx="2">
+            <a:schemeClr val="accent1"/>
+          </a:effectRef>
+          <a:fontRef idx="minor">
+            <a:schemeClr val="lt1"/>
+          </a:fontRef>
+        </p:style>
+        <p:txBody>
+          <a:bodyPr rtlCol="0" anchor="ctr"/>
+          <a:lstStyle/>
+          <a:p>
+            <a:pPr algn="ctr"/>
+          </a:p>
+        </p:txBody>
+      </p:sp>
+      <p:sp>
+        <p:nvSpPr>
+          <p:cNvPr id="28" name="TextBox 27"/>
+          <p:cNvSpPr txBox="1"/>
+          <p:nvPr/>
+        </p:nvSpPr>
+        <p:spPr>
+          <a:xfrm>
+            <a:off x="6126479" y="2112264"/>
+            <a:ext cx="2423160" cy="384048"/>
+          </a:xfrm>
+          <a:prstGeom prst="rect">
+            <a:avLst/>
+          </a:prstGeom>
+          <a:noFill/>
+        </p:spPr>
+        <p:txBody>
+          <a:bodyPr wrap="square">
+            <a:spAutoFit/>
+          </a:bodyPr>
+          <a:lstStyle/>
+          <a:p>
+            <a:pPr algn="l">
+              <a:defRPr sz="1300" b="0">
+                <a:solidFill>
+                  <a:srgbClr val="333333"/>
+                </a:solidFill>
+                <a:latin typeface="Microsoft YaHei"/>
+              </a:defRPr>
+            </a:pPr>
+            <a:r>
+              <a:t>一亩地账本 vs 一粒球梦想</a:t>
+            </a:r>
+          </a:p>
+        </p:txBody>
+      </p:sp>
+      <p:sp>
+        <p:nvSpPr>
+          <p:cNvPr id="29" name="Rectangle 28"/>
+          <p:cNvSpPr/>
+          <p:nvPr/>
+        </p:nvSpPr>
+        <p:spPr>
+          <a:xfrm>
+            <a:off x="8595360" y="2057400"/>
+            <a:ext cx="1051560" cy="475488"/>
+          </a:xfrm>
+          <a:prstGeom prst="rect">
+            <a:avLst/>
+          </a:prstGeom>
+          <a:solidFill>
+            <a:srgbClr val="FFFFFF"/>
+          </a:solidFill>
+          <a:ln>
+            <a:noFill/>
+          </a:ln>
+        </p:spPr>
+        <p:style>
+          <a:lnRef idx="1">
+            <a:schemeClr val="accent1"/>
+          </a:lnRef>
+          <a:fillRef idx="3">
+            <a:schemeClr val="accent1"/>
+          </a:fillRef>
+          <a:effectRef idx="2">
+            <a:schemeClr val="accent1"/>
+          </a:effectRef>
+          <a:fontRef idx="minor">
+            <a:schemeClr val="lt1"/>
+          </a:fontRef>
+        </p:style>
+        <p:txBody>
+          <a:bodyPr rtlCol="0" anchor="ctr"/>
+          <a:lstStyle/>
+          <a:p>
+            <a:pPr algn="ctr"/>
+          </a:p>
+        </p:txBody>
+      </p:sp>
+      <p:sp>
+        <p:nvSpPr>
+          <p:cNvPr id="30" name="TextBox 29"/>
+          <p:cNvSpPr txBox="1"/>
+          <p:nvPr/>
+        </p:nvSpPr>
+        <p:spPr>
+          <a:xfrm>
+            <a:off x="8686800" y="2112264"/>
+            <a:ext cx="960120" cy="384048"/>
+          </a:xfrm>
+          <a:prstGeom prst="rect">
+            <a:avLst/>
+          </a:prstGeom>
+          <a:noFill/>
+        </p:spPr>
+        <p:txBody>
+          <a:bodyPr wrap="square">
+            <a:spAutoFit/>
+          </a:bodyPr>
+          <a:lstStyle/>
+          <a:p>
+            <a:pPr algn="l">
+              <a:defRPr sz="1300" b="0">
+                <a:solidFill>
+                  <a:srgbClr val="333333"/>
+                </a:solidFill>
+                <a:latin typeface="Microsoft YaHei"/>
+              </a:defRPr>
+            </a:pPr>
+            <a:r>
+              <a:t>60s</a:t>
+            </a:r>
+          </a:p>
+        </p:txBody>
+      </p:sp>
+      <p:sp>
+        <p:nvSpPr>
+          <p:cNvPr id="31" name="Rectangle 30"/>
+          <p:cNvSpPr/>
+          <p:nvPr/>
+        </p:nvSpPr>
+        <p:spPr>
+          <a:xfrm>
+            <a:off x="9692640" y="2057400"/>
+            <a:ext cx="1051560" cy="475488"/>
+          </a:xfrm>
+          <a:prstGeom prst="rect">
+            <a:avLst/>
+          </a:prstGeom>
+          <a:solidFill>
+            <a:srgbClr val="FFFFFF"/>
+          </a:solidFill>
+          <a:ln>
+            <a:noFill/>
+          </a:ln>
+        </p:spPr>
+        <p:style>
+          <a:lnRef idx="1">
+            <a:schemeClr val="accent1"/>
+          </a:lnRef>
+          <a:fillRef idx="3">
+            <a:schemeClr val="accent1"/>
+          </a:fillRef>
+          <a:effectRef idx="2">
+            <a:schemeClr val="accent1"/>
+          </a:effectRef>
+          <a:fontRef idx="minor">
+            <a:schemeClr val="lt1"/>
+          </a:fontRef>
+        </p:style>
+        <p:txBody>
+          <a:bodyPr rtlCol="0" anchor="ctr"/>
+          <a:lstStyle/>
+          <a:p>
+            <a:pPr algn="ctr"/>
+          </a:p>
+        </p:txBody>
+      </p:sp>
+      <p:sp>
+        <p:nvSpPr>
+          <p:cNvPr id="32" name="TextBox 31"/>
+          <p:cNvSpPr txBox="1"/>
+          <p:nvPr/>
+        </p:nvSpPr>
+        <p:spPr>
+          <a:xfrm>
+            <a:off x="9784080" y="2112264"/>
+            <a:ext cx="960120" cy="384048"/>
+          </a:xfrm>
+          <a:prstGeom prst="rect">
+            <a:avLst/>
+          </a:prstGeom>
+          <a:noFill/>
+        </p:spPr>
+        <p:txBody>
+          <a:bodyPr wrap="square">
+            <a:spAutoFit/>
+          </a:bodyPr>
+          <a:lstStyle/>
+          <a:p>
+            <a:pPr algn="l">
+              <a:defRPr sz="1300" b="0">
+                <a:solidFill>
+                  <a:srgbClr val="333333"/>
+                </a:solidFill>
+                <a:latin typeface="Microsoft YaHei"/>
+              </a:defRPr>
+            </a:pPr>
+            <a:r>
+              <a:t>55s</a:t>
+            </a:r>
+          </a:p>
+        </p:txBody>
+      </p:sp>
+      <p:sp>
+        <p:nvSpPr>
+          <p:cNvPr id="33" name="Rectangle 32"/>
+          <p:cNvSpPr/>
+          <p:nvPr/>
+        </p:nvSpPr>
+        <p:spPr>
+          <a:xfrm>
+            <a:off x="457200" y="2606039"/>
+            <a:ext cx="502919" cy="475488"/>
+          </a:xfrm>
+          <a:prstGeom prst="rect">
+            <a:avLst/>
+          </a:prstGeom>
+          <a:solidFill>
+            <a:srgbClr val="F7F5F0"/>
+          </a:solidFill>
+          <a:ln>
+            <a:noFill/>
+          </a:ln>
+        </p:spPr>
+        <p:style>
+          <a:lnRef idx="1">
+            <a:schemeClr val="accent1"/>
+          </a:lnRef>
+          <a:fillRef idx="3">
+            <a:schemeClr val="accent1"/>
+          </a:fillRef>
+          <a:effectRef idx="2">
+            <a:schemeClr val="accent1"/>
+          </a:effectRef>
+          <a:fontRef idx="minor">
+            <a:schemeClr val="lt1"/>
+          </a:fontRef>
+        </p:style>
+        <p:txBody>
+          <a:bodyPr rtlCol="0" anchor="ctr"/>
+          <a:lstStyle/>
+          <a:p>
+            <a:pPr algn="ctr"/>
+          </a:p>
+        </p:txBody>
+      </p:sp>
+      <p:sp>
+        <p:nvSpPr>
+          <p:cNvPr id="34" name="TextBox 33"/>
+          <p:cNvSpPr txBox="1"/>
+          <p:nvPr/>
+        </p:nvSpPr>
+        <p:spPr>
+          <a:xfrm>
+            <a:off x="548640" y="2660903"/>
+            <a:ext cx="411479" cy="384048"/>
+          </a:xfrm>
+          <a:prstGeom prst="rect">
+            <a:avLst/>
+          </a:prstGeom>
+          <a:noFill/>
+        </p:spPr>
+        <p:txBody>
+          <a:bodyPr wrap="square">
+            <a:spAutoFit/>
+          </a:bodyPr>
+          <a:lstStyle/>
+          <a:p>
+            <a:pPr algn="l">
+              <a:defRPr sz="1300" b="1">
+                <a:solidFill>
+                  <a:srgbClr val="2D5016"/>
+                </a:solidFill>
+                <a:latin typeface="Microsoft YaHei"/>
+              </a:defRPr>
+            </a:pPr>
+            <a:r>
+              <a:t>21</a:t>
+            </a:r>
+          </a:p>
+        </p:txBody>
+      </p:sp>
+      <p:sp>
+        <p:nvSpPr>
+          <p:cNvPr id="35" name="Rectangle 34"/>
+          <p:cNvSpPr/>
+          <p:nvPr/>
+        </p:nvSpPr>
+        <p:spPr>
+          <a:xfrm>
+            <a:off x="1005840" y="2606039"/>
+            <a:ext cx="4983480" cy="475488"/>
+          </a:xfrm>
+          <a:prstGeom prst="rect">
+            <a:avLst/>
+          </a:prstGeom>
+          <a:solidFill>
+            <a:srgbClr val="F7F5F0"/>
+          </a:solidFill>
+          <a:ln>
+            <a:noFill/>
+          </a:ln>
+        </p:spPr>
+        <p:style>
+          <a:lnRef idx="1">
+            <a:schemeClr val="accent1"/>
+          </a:lnRef>
+          <a:fillRef idx="3">
+            <a:schemeClr val="accent1"/>
+          </a:fillRef>
+          <a:effectRef idx="2">
+            <a:schemeClr val="accent1"/>
+          </a:effectRef>
+          <a:fontRef idx="minor">
+            <a:schemeClr val="lt1"/>
+          </a:fontRef>
+        </p:style>
+        <p:txBody>
+          <a:bodyPr rtlCol="0" anchor="ctr"/>
+          <a:lstStyle/>
+          <a:p>
+            <a:pPr algn="ctr"/>
+          </a:p>
+        </p:txBody>
+      </p:sp>
+      <p:sp>
+        <p:nvSpPr>
+          <p:cNvPr id="36" name="TextBox 35"/>
+          <p:cNvSpPr txBox="1"/>
+          <p:nvPr/>
+        </p:nvSpPr>
+        <p:spPr>
+          <a:xfrm>
+            <a:off x="1097280" y="2660903"/>
+            <a:ext cx="4892040" cy="384048"/>
+          </a:xfrm>
+          <a:prstGeom prst="rect">
+            <a:avLst/>
+          </a:prstGeom>
+          <a:noFill/>
+        </p:spPr>
+        <p:txBody>
+          <a:bodyPr wrap="square">
+            <a:spAutoFit/>
+          </a:bodyPr>
+          <a:lstStyle/>
+          <a:p>
+            <a:pPr algn="l">
+              <a:defRPr sz="1300" b="0">
+                <a:solidFill>
+                  <a:srgbClr val="333333"/>
+                </a:solidFill>
+                <a:latin typeface="Microsoft YaHei"/>
+              </a:defRPr>
+            </a:pPr>
+            <a:r>
+              <a:t>村里办比赛安全谁负责</a:t>
+            </a:r>
+          </a:p>
+        </p:txBody>
+      </p:sp>
+      <p:sp>
+        <p:nvSpPr>
+          <p:cNvPr id="37" name="Rectangle 36"/>
+          <p:cNvSpPr/>
+          <p:nvPr/>
+        </p:nvSpPr>
+        <p:spPr>
+          <a:xfrm>
+            <a:off x="6035040" y="2606039"/>
+            <a:ext cx="2514600" cy="475488"/>
+          </a:xfrm>
+          <a:prstGeom prst="rect">
+            <a:avLst/>
+          </a:prstGeom>
+          <a:solidFill>
+            <a:srgbClr val="F7F5F0"/>
+          </a:solidFill>
+          <a:ln>
+            <a:noFill/>
+          </a:ln>
+        </p:spPr>
+        <p:style>
+          <a:lnRef idx="1">
+            <a:schemeClr val="accent1"/>
+          </a:lnRef>
+          <a:fillRef idx="3">
+            <a:schemeClr val="accent1"/>
+          </a:fillRef>
+          <a:effectRef idx="2">
+            <a:schemeClr val="accent1"/>
+          </a:effectRef>
+          <a:fontRef idx="minor">
+            <a:schemeClr val="lt1"/>
+          </a:fontRef>
+        </p:style>
+        <p:txBody>
+          <a:bodyPr rtlCol="0" anchor="ctr"/>
+          <a:lstStyle/>
+          <a:p>
+            <a:pPr algn="ctr"/>
+          </a:p>
+        </p:txBody>
+      </p:sp>
+      <p:sp>
+        <p:nvSpPr>
+          <p:cNvPr id="38" name="TextBox 37"/>
+          <p:cNvSpPr txBox="1"/>
+          <p:nvPr/>
+        </p:nvSpPr>
+        <p:spPr>
+          <a:xfrm>
+            <a:off x="6126479" y="2660903"/>
+            <a:ext cx="2423160" cy="384048"/>
+          </a:xfrm>
+          <a:prstGeom prst="rect">
+            <a:avLst/>
+          </a:prstGeom>
+          <a:noFill/>
+        </p:spPr>
+        <p:txBody>
+          <a:bodyPr wrap="square">
+            <a:spAutoFit/>
+          </a:bodyPr>
+          <a:lstStyle/>
+          <a:p>
+            <a:pPr algn="l">
+              <a:defRPr sz="1300" b="0">
+                <a:solidFill>
+                  <a:srgbClr val="333333"/>
+                </a:solidFill>
+                <a:latin typeface="Microsoft YaHei"/>
+              </a:defRPr>
+            </a:pPr>
+            <a:r>
+              <a:t>村里办比赛安全谁负责</a:t>
+            </a:r>
+          </a:p>
+        </p:txBody>
+      </p:sp>
+      <p:sp>
+        <p:nvSpPr>
+          <p:cNvPr id="39" name="Rectangle 38"/>
+          <p:cNvSpPr/>
+          <p:nvPr/>
+        </p:nvSpPr>
+        <p:spPr>
+          <a:xfrm>
+            <a:off x="8595360" y="2606039"/>
+            <a:ext cx="1051560" cy="475488"/>
+          </a:xfrm>
+          <a:prstGeom prst="rect">
+            <a:avLst/>
+          </a:prstGeom>
+          <a:solidFill>
+            <a:srgbClr val="F7F5F0"/>
+          </a:solidFill>
+          <a:ln>
+            <a:noFill/>
+          </a:ln>
+        </p:spPr>
+        <p:style>
+          <a:lnRef idx="1">
+            <a:schemeClr val="accent1"/>
+          </a:lnRef>
+          <a:fillRef idx="3">
+            <a:schemeClr val="accent1"/>
+          </a:fillRef>
+          <a:effectRef idx="2">
+            <a:schemeClr val="accent1"/>
+          </a:effectRef>
+          <a:fontRef idx="minor">
+            <a:schemeClr val="lt1"/>
+          </a:fontRef>
+        </p:style>
+        <p:txBody>
+          <a:bodyPr rtlCol="0" anchor="ctr"/>
+          <a:lstStyle/>
+          <a:p>
+            <a:pPr algn="ctr"/>
+          </a:p>
+        </p:txBody>
+      </p:sp>
+      <p:sp>
+        <p:nvSpPr>
+          <p:cNvPr id="40" name="TextBox 39"/>
+          <p:cNvSpPr txBox="1"/>
+          <p:nvPr/>
+        </p:nvSpPr>
+        <p:spPr>
+          <a:xfrm>
+            <a:off x="8686800" y="2660903"/>
+            <a:ext cx="960120" cy="384048"/>
+          </a:xfrm>
+          <a:prstGeom prst="rect">
+            <a:avLst/>
+          </a:prstGeom>
+          <a:noFill/>
+        </p:spPr>
+        <p:txBody>
+          <a:bodyPr wrap="square">
+            <a:spAutoFit/>
+          </a:bodyPr>
+          <a:lstStyle/>
+          <a:p>
+            <a:pPr algn="l">
+              <a:defRPr sz="1300" b="0">
+                <a:solidFill>
+                  <a:srgbClr val="333333"/>
+                </a:solidFill>
+                <a:latin typeface="Microsoft YaHei"/>
+              </a:defRPr>
+            </a:pPr>
+            <a:r>
+              <a:t>40s</a:t>
+            </a:r>
+          </a:p>
+        </p:txBody>
+      </p:sp>
+      <p:sp>
+        <p:nvSpPr>
+          <p:cNvPr id="41" name="Rectangle 40"/>
+          <p:cNvSpPr/>
+          <p:nvPr/>
+        </p:nvSpPr>
+        <p:spPr>
+          <a:xfrm>
+            <a:off x="9692640" y="2606039"/>
+            <a:ext cx="1051560" cy="475488"/>
+          </a:xfrm>
+          <a:prstGeom prst="rect">
+            <a:avLst/>
+          </a:prstGeom>
+          <a:solidFill>
+            <a:srgbClr val="F7F5F0"/>
+          </a:solidFill>
+          <a:ln>
+            <a:noFill/>
+          </a:ln>
+        </p:spPr>
+        <p:style>
+          <a:lnRef idx="1">
+            <a:schemeClr val="accent1"/>
+          </a:lnRef>
+          <a:fillRef idx="3">
+            <a:schemeClr val="accent1"/>
+          </a:fillRef>
+          <a:effectRef idx="2">
+            <a:schemeClr val="accent1"/>
+          </a:effectRef>
+          <a:fontRef idx="minor">
+            <a:schemeClr val="lt1"/>
+          </a:fontRef>
+        </p:style>
+        <p:txBody>
+          <a:bodyPr rtlCol="0" anchor="ctr"/>
+          <a:lstStyle/>
+          <a:p>
+            <a:pPr algn="ctr"/>
+          </a:p>
+        </p:txBody>
+      </p:sp>
+      <p:sp>
+        <p:nvSpPr>
+          <p:cNvPr id="42" name="TextBox 41"/>
+          <p:cNvSpPr txBox="1"/>
+          <p:nvPr/>
+        </p:nvSpPr>
+        <p:spPr>
+          <a:xfrm>
+            <a:off x="9784080" y="2660903"/>
+            <a:ext cx="960120" cy="384048"/>
+          </a:xfrm>
+          <a:prstGeom prst="rect">
+            <a:avLst/>
+          </a:prstGeom>
+          <a:noFill/>
+        </p:spPr>
+        <p:txBody>
+          <a:bodyPr wrap="square">
+            <a:spAutoFit/>
+          </a:bodyPr>
+          <a:lstStyle/>
+          <a:p>
+            <a:pPr algn="l">
+              <a:defRPr sz="1300" b="0">
+                <a:solidFill>
+                  <a:srgbClr val="333333"/>
+                </a:solidFill>
+                <a:latin typeface="Microsoft YaHei"/>
+              </a:defRPr>
+            </a:pPr>
+            <a:r>
+              <a:t>40s</a:t>
+            </a:r>
+          </a:p>
+        </p:txBody>
+      </p:sp>
+      <p:sp>
+        <p:nvSpPr>
+          <p:cNvPr id="43" name="Rectangle 42"/>
+          <p:cNvSpPr/>
+          <p:nvPr/>
+        </p:nvSpPr>
+        <p:spPr>
+          <a:xfrm>
+            <a:off x="457200" y="3154679"/>
+            <a:ext cx="502919" cy="475488"/>
+          </a:xfrm>
+          <a:prstGeom prst="rect">
+            <a:avLst/>
+          </a:prstGeom>
+          <a:solidFill>
+            <a:srgbClr val="FFFFFF"/>
+          </a:solidFill>
+          <a:ln>
+            <a:noFill/>
+          </a:ln>
+        </p:spPr>
+        <p:style>
+          <a:lnRef idx="1">
+            <a:schemeClr val="accent1"/>
+          </a:lnRef>
+          <a:fillRef idx="3">
+            <a:schemeClr val="accent1"/>
+          </a:fillRef>
+          <a:effectRef idx="2">
+            <a:schemeClr val="accent1"/>
+          </a:effectRef>
+          <a:fontRef idx="minor">
+            <a:schemeClr val="lt1"/>
+          </a:fontRef>
+        </p:style>
+        <p:txBody>
+          <a:bodyPr rtlCol="0" anchor="ctr"/>
+          <a:lstStyle/>
+          <a:p>
+            <a:pPr algn="ctr"/>
+          </a:p>
+        </p:txBody>
+      </p:sp>
+      <p:sp>
+        <p:nvSpPr>
+          <p:cNvPr id="44" name="TextBox 43"/>
+          <p:cNvSpPr txBox="1"/>
+          <p:nvPr/>
+        </p:nvSpPr>
+        <p:spPr>
+          <a:xfrm>
+            <a:off x="548640" y="3209544"/>
+            <a:ext cx="411479" cy="384048"/>
+          </a:xfrm>
+          <a:prstGeom prst="rect">
+            <a:avLst/>
+          </a:prstGeom>
+          <a:noFill/>
+        </p:spPr>
+        <p:txBody>
+          <a:bodyPr wrap="square">
+            <a:spAutoFit/>
+          </a:bodyPr>
+          <a:lstStyle/>
+          <a:p>
+            <a:pPr algn="l">
+              <a:defRPr sz="1300" b="1">
+                <a:solidFill>
+                  <a:srgbClr val="2D5016"/>
+                </a:solidFill>
+                <a:latin typeface="Microsoft YaHei"/>
+              </a:defRPr>
+            </a:pPr>
+            <a:r>
+              <a:t>22</a:t>
+            </a:r>
+          </a:p>
+        </p:txBody>
+      </p:sp>
+      <p:sp>
+        <p:nvSpPr>
+          <p:cNvPr id="45" name="Rectangle 44"/>
+          <p:cNvSpPr/>
+          <p:nvPr/>
+        </p:nvSpPr>
+        <p:spPr>
+          <a:xfrm>
+            <a:off x="1005840" y="3154679"/>
+            <a:ext cx="4983480" cy="475488"/>
+          </a:xfrm>
+          <a:prstGeom prst="rect">
+            <a:avLst/>
+          </a:prstGeom>
+          <a:solidFill>
+            <a:srgbClr val="FFFFFF"/>
+          </a:solidFill>
+          <a:ln>
+            <a:noFill/>
+          </a:ln>
+        </p:spPr>
+        <p:style>
+          <a:lnRef idx="1">
+            <a:schemeClr val="accent1"/>
+          </a:lnRef>
+          <a:fillRef idx="3">
+            <a:schemeClr val="accent1"/>
+          </a:fillRef>
+          <a:effectRef idx="2">
+            <a:schemeClr val="accent1"/>
+          </a:effectRef>
+          <a:fontRef idx="minor">
+            <a:schemeClr val="lt1"/>
+          </a:fontRef>
+        </p:style>
+        <p:txBody>
+          <a:bodyPr rtlCol="0" anchor="ctr"/>
+          <a:lstStyle/>
+          <a:p>
+            <a:pPr algn="ctr"/>
+          </a:p>
+        </p:txBody>
+      </p:sp>
+      <p:sp>
+        <p:nvSpPr>
+          <p:cNvPr id="46" name="TextBox 45"/>
+          <p:cNvSpPr txBox="1"/>
+          <p:nvPr/>
+        </p:nvSpPr>
+        <p:spPr>
+          <a:xfrm>
+            <a:off x="1097280" y="3209544"/>
+            <a:ext cx="4892040" cy="384048"/>
+          </a:xfrm>
+          <a:prstGeom prst="rect">
+            <a:avLst/>
+          </a:prstGeom>
+          <a:noFill/>
+        </p:spPr>
+        <p:txBody>
+          <a:bodyPr wrap="square">
+            <a:spAutoFit/>
+          </a:bodyPr>
+          <a:lstStyle/>
+          <a:p>
+            <a:pPr algn="l">
+              <a:defRPr sz="1300" b="0">
+                <a:solidFill>
+                  <a:srgbClr val="333333"/>
+                </a:solidFill>
+                <a:latin typeface="Microsoft YaHei"/>
+              </a:defRPr>
+            </a:pPr>
+            <a:r>
+              <a:t>致在外打工的屯军营人</a:t>
+            </a:r>
+          </a:p>
+        </p:txBody>
+      </p:sp>
+      <p:sp>
+        <p:nvSpPr>
+          <p:cNvPr id="47" name="Rectangle 46"/>
+          <p:cNvSpPr/>
+          <p:nvPr/>
+        </p:nvSpPr>
+        <p:spPr>
+          <a:xfrm>
+            <a:off x="6035040" y="3154679"/>
+            <a:ext cx="2514600" cy="475488"/>
+          </a:xfrm>
+          <a:prstGeom prst="rect">
+            <a:avLst/>
+          </a:prstGeom>
+          <a:solidFill>
+            <a:srgbClr val="FFFFFF"/>
+          </a:solidFill>
+          <a:ln>
+            <a:noFill/>
+          </a:ln>
+        </p:spPr>
+        <p:style>
+          <a:lnRef idx="1">
+            <a:schemeClr val="accent1"/>
+          </a:lnRef>
+          <a:fillRef idx="3">
+            <a:schemeClr val="accent1"/>
+          </a:fillRef>
+          <a:effectRef idx="2">
+            <a:schemeClr val="accent1"/>
+          </a:effectRef>
+          <a:fontRef idx="minor">
+            <a:schemeClr val="lt1"/>
+          </a:fontRef>
+        </p:style>
+        <p:txBody>
+          <a:bodyPr rtlCol="0" anchor="ctr"/>
+          <a:lstStyle/>
+          <a:p>
+            <a:pPr algn="ctr"/>
+          </a:p>
+        </p:txBody>
+      </p:sp>
+      <p:sp>
+        <p:nvSpPr>
+          <p:cNvPr id="48" name="TextBox 47"/>
+          <p:cNvSpPr txBox="1"/>
+          <p:nvPr/>
+        </p:nvSpPr>
+        <p:spPr>
+          <a:xfrm>
+            <a:off x="6126479" y="3209544"/>
+            <a:ext cx="2423160" cy="384048"/>
+          </a:xfrm>
+          <a:prstGeom prst="rect">
+            <a:avLst/>
+          </a:prstGeom>
+          <a:noFill/>
+        </p:spPr>
+        <p:txBody>
+          <a:bodyPr wrap="square">
+            <a:spAutoFit/>
+          </a:bodyPr>
+          <a:lstStyle/>
+          <a:p>
+            <a:pPr algn="l">
+              <a:defRPr sz="1300" b="0">
+                <a:solidFill>
+                  <a:srgbClr val="333333"/>
+                </a:solidFill>
+                <a:latin typeface="Microsoft YaHei"/>
+              </a:defRPr>
+            </a:pPr>
+            <a:r>
+              <a:t>致在外打工的屯军营人</a:t>
+            </a:r>
+          </a:p>
+        </p:txBody>
+      </p:sp>
+      <p:sp>
+        <p:nvSpPr>
+          <p:cNvPr id="49" name="Rectangle 48"/>
+          <p:cNvSpPr/>
+          <p:nvPr/>
+        </p:nvSpPr>
+        <p:spPr>
+          <a:xfrm>
+            <a:off x="8595360" y="3154679"/>
+            <a:ext cx="1051560" cy="475488"/>
+          </a:xfrm>
+          <a:prstGeom prst="rect">
+            <a:avLst/>
+          </a:prstGeom>
+          <a:solidFill>
+            <a:srgbClr val="FFFFFF"/>
+          </a:solidFill>
+          <a:ln>
+            <a:noFill/>
+          </a:ln>
+        </p:spPr>
+        <p:style>
+          <a:lnRef idx="1">
+            <a:schemeClr val="accent1"/>
+          </a:lnRef>
+          <a:fillRef idx="3">
+            <a:schemeClr val="accent1"/>
+          </a:fillRef>
+          <a:effectRef idx="2">
+            <a:schemeClr val="accent1"/>
+          </a:effectRef>
+          <a:fontRef idx="minor">
+            <a:schemeClr val="lt1"/>
+          </a:fontRef>
+        </p:style>
+        <p:txBody>
+          <a:bodyPr rtlCol="0" anchor="ctr"/>
+          <a:lstStyle/>
+          <a:p>
+            <a:pPr algn="ctr"/>
+          </a:p>
+        </p:txBody>
+      </p:sp>
+      <p:sp>
+        <p:nvSpPr>
+          <p:cNvPr id="50" name="TextBox 49"/>
+          <p:cNvSpPr txBox="1"/>
+          <p:nvPr/>
+        </p:nvSpPr>
+        <p:spPr>
+          <a:xfrm>
+            <a:off x="8686800" y="3209544"/>
+            <a:ext cx="960120" cy="384048"/>
+          </a:xfrm>
+          <a:prstGeom prst="rect">
+            <a:avLst/>
+          </a:prstGeom>
+          <a:noFill/>
+        </p:spPr>
+        <p:txBody>
+          <a:bodyPr wrap="square">
+            <a:spAutoFit/>
+          </a:bodyPr>
+          <a:lstStyle/>
+          <a:p>
+            <a:pPr algn="l">
+              <a:defRPr sz="1300" b="0">
+                <a:solidFill>
+                  <a:srgbClr val="333333"/>
+                </a:solidFill>
+                <a:latin typeface="Microsoft YaHei"/>
+              </a:defRPr>
+            </a:pPr>
+            <a:r>
+              <a:t>50s</a:t>
+            </a:r>
+          </a:p>
+        </p:txBody>
+      </p:sp>
+      <p:sp>
+        <p:nvSpPr>
+          <p:cNvPr id="51" name="Rectangle 50"/>
+          <p:cNvSpPr/>
+          <p:nvPr/>
+        </p:nvSpPr>
+        <p:spPr>
+          <a:xfrm>
+            <a:off x="9692640" y="3154679"/>
+            <a:ext cx="1051560" cy="475488"/>
+          </a:xfrm>
+          <a:prstGeom prst="rect">
+            <a:avLst/>
+          </a:prstGeom>
+          <a:solidFill>
+            <a:srgbClr val="FFFFFF"/>
+          </a:solidFill>
+          <a:ln>
+            <a:noFill/>
+          </a:ln>
+        </p:spPr>
+        <p:style>
+          <a:lnRef idx="1">
+            <a:schemeClr val="accent1"/>
+          </a:lnRef>
+          <a:fillRef idx="3">
+            <a:schemeClr val="accent1"/>
+          </a:fillRef>
+          <a:effectRef idx="2">
+            <a:schemeClr val="accent1"/>
+          </a:effectRef>
+          <a:fontRef idx="minor">
+            <a:schemeClr val="lt1"/>
+          </a:fontRef>
+        </p:style>
+        <p:txBody>
+          <a:bodyPr rtlCol="0" anchor="ctr"/>
+          <a:lstStyle/>
+          <a:p>
+            <a:pPr algn="ctr"/>
+          </a:p>
+        </p:txBody>
+      </p:sp>
+      <p:sp>
+        <p:nvSpPr>
+          <p:cNvPr id="52" name="TextBox 51"/>
+          <p:cNvSpPr txBox="1"/>
+          <p:nvPr/>
+        </p:nvSpPr>
+        <p:spPr>
+          <a:xfrm>
+            <a:off x="9784080" y="3209544"/>
+            <a:ext cx="960120" cy="384048"/>
+          </a:xfrm>
+          <a:prstGeom prst="rect">
+            <a:avLst/>
+          </a:prstGeom>
+          <a:noFill/>
+        </p:spPr>
+        <p:txBody>
+          <a:bodyPr wrap="square">
+            <a:spAutoFit/>
+          </a:bodyPr>
+          <a:lstStyle/>
+          <a:p>
+            <a:pPr algn="l">
+              <a:defRPr sz="1300" b="0">
+                <a:solidFill>
+                  <a:srgbClr val="333333"/>
+                </a:solidFill>
+                <a:latin typeface="Microsoft YaHei"/>
+              </a:defRPr>
+            </a:pPr>
+            <a:r>
+              <a:t>65s</a:t>
+            </a:r>
+          </a:p>
+        </p:txBody>
+      </p:sp>
+      <p:sp>
+        <p:nvSpPr>
+          <p:cNvPr id="53" name="Rectangle 52"/>
+          <p:cNvSpPr/>
+          <p:nvPr/>
+        </p:nvSpPr>
+        <p:spPr>
+          <a:xfrm>
+            <a:off x="457200" y="3703320"/>
+            <a:ext cx="502919" cy="475488"/>
+          </a:xfrm>
+          <a:prstGeom prst="rect">
+            <a:avLst/>
+          </a:prstGeom>
+          <a:solidFill>
+            <a:srgbClr val="F7F5F0"/>
+          </a:solidFill>
+          <a:ln>
+            <a:noFill/>
+          </a:ln>
+        </p:spPr>
+        <p:style>
+          <a:lnRef idx="1">
+            <a:schemeClr val="accent1"/>
+          </a:lnRef>
+          <a:fillRef idx="3">
+            <a:schemeClr val="accent1"/>
+          </a:fillRef>
+          <a:effectRef idx="2">
+            <a:schemeClr val="accent1"/>
+          </a:effectRef>
+          <a:fontRef idx="minor">
+            <a:schemeClr val="lt1"/>
+          </a:fontRef>
+        </p:style>
+        <p:txBody>
+          <a:bodyPr rtlCol="0" anchor="ctr"/>
+          <a:lstStyle/>
+          <a:p>
+            <a:pPr algn="ctr"/>
+          </a:p>
+        </p:txBody>
+      </p:sp>
+      <p:sp>
+        <p:nvSpPr>
+          <p:cNvPr id="54" name="TextBox 53"/>
+          <p:cNvSpPr txBox="1"/>
+          <p:nvPr/>
+        </p:nvSpPr>
+        <p:spPr>
+          <a:xfrm>
+            <a:off x="548640" y="3758183"/>
+            <a:ext cx="411479" cy="384048"/>
+          </a:xfrm>
+          <a:prstGeom prst="rect">
+            <a:avLst/>
+          </a:prstGeom>
+          <a:noFill/>
+        </p:spPr>
+        <p:txBody>
+          <a:bodyPr wrap="square">
+            <a:spAutoFit/>
+          </a:bodyPr>
+          <a:lstStyle/>
+          <a:p>
+            <a:pPr algn="l">
+              <a:defRPr sz="1300" b="1">
+                <a:solidFill>
+                  <a:srgbClr val="2D5016"/>
+                </a:solidFill>
+                <a:latin typeface="Microsoft YaHei"/>
+              </a:defRPr>
+            </a:pPr>
+            <a:r>
+              <a:t>23</a:t>
+            </a:r>
+          </a:p>
+        </p:txBody>
+      </p:sp>
+      <p:sp>
+        <p:nvSpPr>
+          <p:cNvPr id="55" name="Rectangle 54"/>
+          <p:cNvSpPr/>
+          <p:nvPr/>
+        </p:nvSpPr>
+        <p:spPr>
+          <a:xfrm>
+            <a:off x="1005840" y="3703320"/>
+            <a:ext cx="4983480" cy="475488"/>
+          </a:xfrm>
+          <a:prstGeom prst="rect">
+            <a:avLst/>
+          </a:prstGeom>
+          <a:solidFill>
+            <a:srgbClr val="F7F5F0"/>
+          </a:solidFill>
+          <a:ln>
+            <a:noFill/>
+          </a:ln>
+        </p:spPr>
+        <p:style>
+          <a:lnRef idx="1">
+            <a:schemeClr val="accent1"/>
+          </a:lnRef>
+          <a:fillRef idx="3">
+            <a:schemeClr val="accent1"/>
+          </a:fillRef>
+          <a:effectRef idx="2">
+            <a:schemeClr val="accent1"/>
+          </a:effectRef>
+          <a:fontRef idx="minor">
+            <a:schemeClr val="lt1"/>
+          </a:fontRef>
+        </p:style>
+        <p:txBody>
+          <a:bodyPr rtlCol="0" anchor="ctr"/>
+          <a:lstStyle/>
+          <a:p>
+            <a:pPr algn="ctr"/>
+          </a:p>
+        </p:txBody>
+      </p:sp>
+      <p:sp>
+        <p:nvSpPr>
+          <p:cNvPr id="56" name="TextBox 55"/>
+          <p:cNvSpPr txBox="1"/>
+          <p:nvPr/>
+        </p:nvSpPr>
+        <p:spPr>
+          <a:xfrm>
+            <a:off x="1097280" y="3758183"/>
+            <a:ext cx="4892040" cy="384048"/>
+          </a:xfrm>
+          <a:prstGeom prst="rect">
+            <a:avLst/>
+          </a:prstGeom>
+          <a:noFill/>
+        </p:spPr>
+        <p:txBody>
+          <a:bodyPr wrap="square">
+            <a:spAutoFit/>
+          </a:bodyPr>
+          <a:lstStyle/>
+          <a:p>
+            <a:pPr algn="l">
+              <a:defRPr sz="1300" b="0">
+                <a:solidFill>
+                  <a:srgbClr val="333333"/>
+                </a:solidFill>
+                <a:latin typeface="Microsoft YaHei"/>
+              </a:defRPr>
+            </a:pPr>
+            <a:r>
+              <a:t>从长城脚下到绿茵场上</a:t>
+            </a:r>
+          </a:p>
+        </p:txBody>
+      </p:sp>
+      <p:sp>
+        <p:nvSpPr>
+          <p:cNvPr id="57" name="Rectangle 56"/>
+          <p:cNvSpPr/>
+          <p:nvPr/>
+        </p:nvSpPr>
+        <p:spPr>
+          <a:xfrm>
+            <a:off x="6035040" y="3703320"/>
+            <a:ext cx="2514600" cy="475488"/>
+          </a:xfrm>
+          <a:prstGeom prst="rect">
+            <a:avLst/>
+          </a:prstGeom>
+          <a:solidFill>
+            <a:srgbClr val="F7F5F0"/>
+          </a:solidFill>
+          <a:ln>
+            <a:noFill/>
+          </a:ln>
+        </p:spPr>
+        <p:style>
+          <a:lnRef idx="1">
+            <a:schemeClr val="accent1"/>
+          </a:lnRef>
+          <a:fillRef idx="3">
+            <a:schemeClr val="accent1"/>
+          </a:fillRef>
+          <a:effectRef idx="2">
+            <a:schemeClr val="accent1"/>
+          </a:effectRef>
+          <a:fontRef idx="minor">
+            <a:schemeClr val="lt1"/>
+          </a:fontRef>
+        </p:style>
+        <p:txBody>
+          <a:bodyPr rtlCol="0" anchor="ctr"/>
+          <a:lstStyle/>
+          <a:p>
+            <a:pPr algn="ctr"/>
+          </a:p>
+        </p:txBody>
+      </p:sp>
+      <p:sp>
+        <p:nvSpPr>
+          <p:cNvPr id="58" name="TextBox 57"/>
+          <p:cNvSpPr txBox="1"/>
+          <p:nvPr/>
+        </p:nvSpPr>
+        <p:spPr>
+          <a:xfrm>
+            <a:off x="6126479" y="3758183"/>
+            <a:ext cx="2423160" cy="384048"/>
+          </a:xfrm>
+          <a:prstGeom prst="rect">
+            <a:avLst/>
+          </a:prstGeom>
+          <a:noFill/>
+        </p:spPr>
+        <p:txBody>
+          <a:bodyPr wrap="square">
+            <a:spAutoFit/>
+          </a:bodyPr>
+          <a:lstStyle/>
+          <a:p>
+            <a:pPr algn="l">
+              <a:defRPr sz="1300" b="0">
+                <a:solidFill>
+                  <a:srgbClr val="333333"/>
+                </a:solidFill>
+                <a:latin typeface="Microsoft YaHei"/>
+              </a:defRPr>
+            </a:pPr>
+            <a:r>
+              <a:t>从长城脚下到绿茵场上</a:t>
+            </a:r>
+          </a:p>
+        </p:txBody>
+      </p:sp>
+      <p:sp>
+        <p:nvSpPr>
+          <p:cNvPr id="59" name="Rectangle 58"/>
+          <p:cNvSpPr/>
+          <p:nvPr/>
+        </p:nvSpPr>
+        <p:spPr>
+          <a:xfrm>
+            <a:off x="8595360" y="3703320"/>
+            <a:ext cx="1051560" cy="475488"/>
+          </a:xfrm>
+          <a:prstGeom prst="rect">
+            <a:avLst/>
+          </a:prstGeom>
+          <a:solidFill>
+            <a:srgbClr val="F7F5F0"/>
+          </a:solidFill>
+          <a:ln>
+            <a:noFill/>
+          </a:ln>
+        </p:spPr>
+        <p:style>
+          <a:lnRef idx="1">
+            <a:schemeClr val="accent1"/>
+          </a:lnRef>
+          <a:fillRef idx="3">
+            <a:schemeClr val="accent1"/>
+          </a:fillRef>
+          <a:effectRef idx="2">
+            <a:schemeClr val="accent1"/>
+          </a:effectRef>
+          <a:fontRef idx="minor">
+            <a:schemeClr val="lt1"/>
+          </a:fontRef>
+        </p:style>
+        <p:txBody>
+          <a:bodyPr rtlCol="0" anchor="ctr"/>
+          <a:lstStyle/>
+          <a:p>
+            <a:pPr algn="ctr"/>
+          </a:p>
+        </p:txBody>
+      </p:sp>
+      <p:sp>
+        <p:nvSpPr>
+          <p:cNvPr id="60" name="TextBox 59"/>
+          <p:cNvSpPr txBox="1"/>
+          <p:nvPr/>
+        </p:nvSpPr>
+        <p:spPr>
+          <a:xfrm>
+            <a:off x="8686800" y="3758183"/>
+            <a:ext cx="960120" cy="384048"/>
+          </a:xfrm>
+          <a:prstGeom prst="rect">
+            <a:avLst/>
+          </a:prstGeom>
+          <a:noFill/>
+        </p:spPr>
+        <p:txBody>
+          <a:bodyPr wrap="square">
+            <a:spAutoFit/>
+          </a:bodyPr>
+          <a:lstStyle/>
+          <a:p>
+            <a:pPr algn="l">
+              <a:defRPr sz="1300" b="0">
+                <a:solidFill>
+                  <a:srgbClr val="333333"/>
+                </a:solidFill>
+                <a:latin typeface="Microsoft YaHei"/>
+              </a:defRPr>
+            </a:pPr>
+            <a:r>
+              <a:t>35s</a:t>
+            </a:r>
+          </a:p>
+        </p:txBody>
+      </p:sp>
+      <p:sp>
+        <p:nvSpPr>
+          <p:cNvPr id="61" name="Rectangle 60"/>
+          <p:cNvSpPr/>
+          <p:nvPr/>
+        </p:nvSpPr>
+        <p:spPr>
+          <a:xfrm>
+            <a:off x="9692640" y="3703320"/>
+            <a:ext cx="1051560" cy="475488"/>
+          </a:xfrm>
+          <a:prstGeom prst="rect">
+            <a:avLst/>
+          </a:prstGeom>
+          <a:solidFill>
+            <a:srgbClr val="F7F5F0"/>
+          </a:solidFill>
+          <a:ln>
+            <a:noFill/>
+          </a:ln>
+        </p:spPr>
+        <p:style>
+          <a:lnRef idx="1">
+            <a:schemeClr val="accent1"/>
+          </a:lnRef>
+          <a:fillRef idx="3">
+            <a:schemeClr val="accent1"/>
+          </a:fillRef>
+          <a:effectRef idx="2">
+            <a:schemeClr val="accent1"/>
+          </a:effectRef>
+          <a:fontRef idx="minor">
+            <a:schemeClr val="lt1"/>
+          </a:fontRef>
+        </p:style>
+        <p:txBody>
+          <a:bodyPr rtlCol="0" anchor="ctr"/>
+          <a:lstStyle/>
+          <a:p>
+            <a:pPr algn="ctr"/>
+          </a:p>
+        </p:txBody>
+      </p:sp>
+      <p:sp>
+        <p:nvSpPr>
+          <p:cNvPr id="62" name="TextBox 61"/>
+          <p:cNvSpPr txBox="1"/>
+          <p:nvPr/>
+        </p:nvSpPr>
+        <p:spPr>
+          <a:xfrm>
+            <a:off x="9784080" y="3758183"/>
+            <a:ext cx="960120" cy="384048"/>
+          </a:xfrm>
+          <a:prstGeom prst="rect">
+            <a:avLst/>
+          </a:prstGeom>
+          <a:noFill/>
+        </p:spPr>
+        <p:txBody>
+          <a:bodyPr wrap="square">
+            <a:spAutoFit/>
+          </a:bodyPr>
+          <a:lstStyle/>
+          <a:p>
+            <a:pPr algn="l">
+              <a:defRPr sz="1300" b="0">
+                <a:solidFill>
+                  <a:srgbClr val="333333"/>
+                </a:solidFill>
+                <a:latin typeface="Microsoft YaHei"/>
+              </a:defRPr>
+            </a:pPr>
+            <a:r>
+              <a:t>60s</a:t>
+            </a:r>
+          </a:p>
+        </p:txBody>
+      </p:sp>
+      <p:sp>
+        <p:nvSpPr>
+          <p:cNvPr id="63" name="Rectangle 62"/>
+          <p:cNvSpPr/>
+          <p:nvPr/>
+        </p:nvSpPr>
+        <p:spPr>
+          <a:xfrm>
+            <a:off x="457200" y="4251960"/>
+            <a:ext cx="502919" cy="475488"/>
+          </a:xfrm>
+          <a:prstGeom prst="rect">
+            <a:avLst/>
+          </a:prstGeom>
+          <a:solidFill>
+            <a:srgbClr val="FFFFFF"/>
+          </a:solidFill>
+          <a:ln>
+            <a:noFill/>
+          </a:ln>
+        </p:spPr>
+        <p:style>
+          <a:lnRef idx="1">
+            <a:schemeClr val="accent1"/>
+          </a:lnRef>
+          <a:fillRef idx="3">
+            <a:schemeClr val="accent1"/>
+          </a:fillRef>
+          <a:effectRef idx="2">
+            <a:schemeClr val="accent1"/>
+          </a:effectRef>
+          <a:fontRef idx="minor">
+            <a:schemeClr val="lt1"/>
+          </a:fontRef>
+        </p:style>
+        <p:txBody>
+          <a:bodyPr rtlCol="0" anchor="ctr"/>
+          <a:lstStyle/>
+          <a:p>
+            <a:pPr algn="ctr"/>
+          </a:p>
+        </p:txBody>
+      </p:sp>
+      <p:sp>
+        <p:nvSpPr>
+          <p:cNvPr id="64" name="TextBox 63"/>
+          <p:cNvSpPr txBox="1"/>
+          <p:nvPr/>
+        </p:nvSpPr>
+        <p:spPr>
+          <a:xfrm>
+            <a:off x="548640" y="4306824"/>
+            <a:ext cx="411479" cy="384048"/>
+          </a:xfrm>
+          <a:prstGeom prst="rect">
+            <a:avLst/>
+          </a:prstGeom>
+          <a:noFill/>
+        </p:spPr>
+        <p:txBody>
+          <a:bodyPr wrap="square">
+            <a:spAutoFit/>
+          </a:bodyPr>
+          <a:lstStyle/>
+          <a:p>
+            <a:pPr algn="l">
+              <a:defRPr sz="1300" b="1">
+                <a:solidFill>
+                  <a:srgbClr val="2D5016"/>
+                </a:solidFill>
+                <a:latin typeface="Microsoft YaHei"/>
+              </a:defRPr>
+            </a:pPr>
+            <a:r>
+              <a:t>24</a:t>
+            </a:r>
+          </a:p>
+        </p:txBody>
+      </p:sp>
+      <p:sp>
+        <p:nvSpPr>
+          <p:cNvPr id="65" name="Rectangle 64"/>
+          <p:cNvSpPr/>
+          <p:nvPr/>
+        </p:nvSpPr>
+        <p:spPr>
+          <a:xfrm>
+            <a:off x="1005840" y="4251960"/>
+            <a:ext cx="4983480" cy="475488"/>
+          </a:xfrm>
+          <a:prstGeom prst="rect">
+            <a:avLst/>
+          </a:prstGeom>
+          <a:solidFill>
+            <a:srgbClr val="FFFFFF"/>
+          </a:solidFill>
+          <a:ln>
+            <a:noFill/>
+          </a:ln>
+        </p:spPr>
+        <p:style>
+          <a:lnRef idx="1">
+            <a:schemeClr val="accent1"/>
+          </a:lnRef>
+          <a:fillRef idx="3">
+            <a:schemeClr val="accent1"/>
+          </a:fillRef>
+          <a:effectRef idx="2">
+            <a:schemeClr val="accent1"/>
+          </a:effectRef>
+          <a:fontRef idx="minor">
+            <a:schemeClr val="lt1"/>
+          </a:fontRef>
+        </p:style>
+        <p:txBody>
+          <a:bodyPr rtlCol="0" anchor="ctr"/>
+          <a:lstStyle/>
+          <a:p>
+            <a:pPr algn="ctr"/>
+          </a:p>
+        </p:txBody>
+      </p:sp>
+      <p:sp>
+        <p:nvSpPr>
+          <p:cNvPr id="66" name="TextBox 65"/>
+          <p:cNvSpPr txBox="1"/>
+          <p:nvPr/>
+        </p:nvSpPr>
+        <p:spPr>
+          <a:xfrm>
+            <a:off x="1097280" y="4306824"/>
+            <a:ext cx="4892040" cy="384048"/>
+          </a:xfrm>
+          <a:prstGeom prst="rect">
+            <a:avLst/>
+          </a:prstGeom>
+          <a:noFill/>
+        </p:spPr>
+        <p:txBody>
+          <a:bodyPr wrap="square">
+            <a:spAutoFit/>
+          </a:bodyPr>
+          <a:lstStyle/>
+          <a:p>
+            <a:pPr algn="l">
+              <a:defRPr sz="1300" b="0">
+                <a:solidFill>
+                  <a:srgbClr val="333333"/>
+                </a:solidFill>
+                <a:latin typeface="Microsoft YaHei"/>
+              </a:defRPr>
+            </a:pPr>
+            <a:r>
+              <a:t>我们的下一步让冠军村被看见</a:t>
+            </a:r>
+          </a:p>
+        </p:txBody>
+      </p:sp>
+      <p:sp>
+        <p:nvSpPr>
+          <p:cNvPr id="67" name="Rectangle 66"/>
+          <p:cNvSpPr/>
+          <p:nvPr/>
+        </p:nvSpPr>
+        <p:spPr>
+          <a:xfrm>
+            <a:off x="6035040" y="4251960"/>
+            <a:ext cx="2514600" cy="475488"/>
+          </a:xfrm>
+          <a:prstGeom prst="rect">
+            <a:avLst/>
+          </a:prstGeom>
+          <a:solidFill>
+            <a:srgbClr val="FFFFFF"/>
+          </a:solidFill>
+          <a:ln>
+            <a:noFill/>
+          </a:ln>
+        </p:spPr>
+        <p:style>
+          <a:lnRef idx="1">
+            <a:schemeClr val="accent1"/>
+          </a:lnRef>
+          <a:fillRef idx="3">
+            <a:schemeClr val="accent1"/>
+          </a:fillRef>
+          <a:effectRef idx="2">
+            <a:schemeClr val="accent1"/>
+          </a:effectRef>
+          <a:fontRef idx="minor">
+            <a:schemeClr val="lt1"/>
+          </a:fontRef>
+        </p:style>
+        <p:txBody>
+          <a:bodyPr rtlCol="0" anchor="ctr"/>
+          <a:lstStyle/>
+          <a:p>
+            <a:pPr algn="ctr"/>
+          </a:p>
+        </p:txBody>
+      </p:sp>
+      <p:sp>
+        <p:nvSpPr>
+          <p:cNvPr id="68" name="TextBox 67"/>
+          <p:cNvSpPr txBox="1"/>
+          <p:nvPr/>
+        </p:nvSpPr>
+        <p:spPr>
+          <a:xfrm>
+            <a:off x="6126479" y="4306824"/>
+            <a:ext cx="2423160" cy="384048"/>
+          </a:xfrm>
+          <a:prstGeom prst="rect">
+            <a:avLst/>
+          </a:prstGeom>
+          <a:noFill/>
+        </p:spPr>
+        <p:txBody>
+          <a:bodyPr wrap="square">
+            <a:spAutoFit/>
+          </a:bodyPr>
+          <a:lstStyle/>
+          <a:p>
+            <a:pPr algn="l">
+              <a:defRPr sz="1300" b="0">
+                <a:solidFill>
+                  <a:srgbClr val="333333"/>
+                </a:solidFill>
+                <a:latin typeface="Microsoft YaHei"/>
+              </a:defRPr>
+            </a:pPr>
+            <a:r>
+              <a:t>我们的下一步让冠军村被看见</a:t>
+            </a:r>
+          </a:p>
+        </p:txBody>
+      </p:sp>
+      <p:sp>
+        <p:nvSpPr>
+          <p:cNvPr id="69" name="Rectangle 68"/>
+          <p:cNvSpPr/>
+          <p:nvPr/>
+        </p:nvSpPr>
+        <p:spPr>
+          <a:xfrm>
+            <a:off x="8595360" y="4251960"/>
+            <a:ext cx="1051560" cy="475488"/>
+          </a:xfrm>
+          <a:prstGeom prst="rect">
+            <a:avLst/>
+          </a:prstGeom>
+          <a:solidFill>
+            <a:srgbClr val="FFFFFF"/>
+          </a:solidFill>
+          <a:ln>
+            <a:noFill/>
+          </a:ln>
+        </p:spPr>
+        <p:style>
+          <a:lnRef idx="1">
+            <a:schemeClr val="accent1"/>
+          </a:lnRef>
+          <a:fillRef idx="3">
+            <a:schemeClr val="accent1"/>
+          </a:fillRef>
+          <a:effectRef idx="2">
+            <a:schemeClr val="accent1"/>
+          </a:effectRef>
+          <a:fontRef idx="minor">
+            <a:schemeClr val="lt1"/>
+          </a:fontRef>
+        </p:style>
+        <p:txBody>
+          <a:bodyPr rtlCol="0" anchor="ctr"/>
+          <a:lstStyle/>
+          <a:p>
+            <a:pPr algn="ctr"/>
+          </a:p>
+        </p:txBody>
+      </p:sp>
+      <p:sp>
+        <p:nvSpPr>
+          <p:cNvPr id="70" name="TextBox 69"/>
+          <p:cNvSpPr txBox="1"/>
+          <p:nvPr/>
+        </p:nvSpPr>
+        <p:spPr>
+          <a:xfrm>
+            <a:off x="8686800" y="4306824"/>
+            <a:ext cx="960120" cy="384048"/>
+          </a:xfrm>
+          <a:prstGeom prst="rect">
+            <a:avLst/>
+          </a:prstGeom>
+          <a:noFill/>
+        </p:spPr>
+        <p:txBody>
+          <a:bodyPr wrap="square">
+            <a:spAutoFit/>
+          </a:bodyPr>
+          <a:lstStyle/>
+          <a:p>
+            <a:pPr algn="l">
+              <a:defRPr sz="1300" b="0">
+                <a:solidFill>
+                  <a:srgbClr val="333333"/>
+                </a:solidFill>
+                <a:latin typeface="Microsoft YaHei"/>
+              </a:defRPr>
+            </a:pPr>
+            <a:r>
+              <a:t>55s</a:t>
+            </a:r>
+          </a:p>
+        </p:txBody>
+      </p:sp>
+      <p:sp>
+        <p:nvSpPr>
+          <p:cNvPr id="71" name="Rectangle 70"/>
+          <p:cNvSpPr/>
+          <p:nvPr/>
+        </p:nvSpPr>
+        <p:spPr>
+          <a:xfrm>
+            <a:off x="9692640" y="4251960"/>
+            <a:ext cx="1051560" cy="475488"/>
+          </a:xfrm>
+          <a:prstGeom prst="rect">
+            <a:avLst/>
+          </a:prstGeom>
+          <a:solidFill>
+            <a:srgbClr val="FFFFFF"/>
+          </a:solidFill>
+          <a:ln>
+            <a:noFill/>
+          </a:ln>
+        </p:spPr>
+        <p:style>
+          <a:lnRef idx="1">
+            <a:schemeClr val="accent1"/>
+          </a:lnRef>
+          <a:fillRef idx="3">
+            <a:schemeClr val="accent1"/>
+          </a:fillRef>
+          <a:effectRef idx="2">
+            <a:schemeClr val="accent1"/>
+          </a:effectRef>
+          <a:fontRef idx="minor">
+            <a:schemeClr val="lt1"/>
+          </a:fontRef>
+        </p:style>
+        <p:txBody>
+          <a:bodyPr rtlCol="0" anchor="ctr"/>
+          <a:lstStyle/>
+          <a:p>
+            <a:pPr algn="ctr"/>
+          </a:p>
+        </p:txBody>
+      </p:sp>
+      <p:sp>
+        <p:nvSpPr>
+          <p:cNvPr id="72" name="TextBox 71"/>
+          <p:cNvSpPr txBox="1"/>
+          <p:nvPr/>
+        </p:nvSpPr>
+        <p:spPr>
+          <a:xfrm>
+            <a:off x="9784080" y="4306824"/>
+            <a:ext cx="960120" cy="384048"/>
+          </a:xfrm>
+          <a:prstGeom prst="rect">
+            <a:avLst/>
+          </a:prstGeom>
+          <a:noFill/>
+        </p:spPr>
+        <p:txBody>
+          <a:bodyPr wrap="square">
+            <a:spAutoFit/>
+          </a:bodyPr>
+          <a:lstStyle/>
+          <a:p>
+            <a:pPr algn="l">
+              <a:defRPr sz="1300" b="0">
+                <a:solidFill>
+                  <a:srgbClr val="333333"/>
+                </a:solidFill>
+                <a:latin typeface="Microsoft YaHei"/>
+              </a:defRPr>
+            </a:pPr>
+            <a:r>
+              <a:t>50s</a:t>
+            </a:r>
+          </a:p>
+        </p:txBody>
+      </p:sp>
+      <p:sp>
+        <p:nvSpPr>
+          <p:cNvPr id="73" name="Rectangle 72"/>
+          <p:cNvSpPr/>
+          <p:nvPr/>
+        </p:nvSpPr>
+        <p:spPr>
+          <a:xfrm>
+            <a:off x="457200" y="4800600"/>
+            <a:ext cx="502919" cy="475488"/>
+          </a:xfrm>
+          <a:prstGeom prst="rect">
+            <a:avLst/>
+          </a:prstGeom>
+          <a:solidFill>
+            <a:srgbClr val="F7F5F0"/>
+          </a:solidFill>
+          <a:ln>
+            <a:noFill/>
+          </a:ln>
+        </p:spPr>
+        <p:style>
+          <a:lnRef idx="1">
+            <a:schemeClr val="accent1"/>
+          </a:lnRef>
+          <a:fillRef idx="3">
+            <a:schemeClr val="accent1"/>
+          </a:fillRef>
+          <a:effectRef idx="2">
+            <a:schemeClr val="accent1"/>
+          </a:effectRef>
+          <a:fontRef idx="minor">
+            <a:schemeClr val="lt1"/>
+          </a:fontRef>
+        </p:style>
+        <p:txBody>
+          <a:bodyPr rtlCol="0" anchor="ctr"/>
+          <a:lstStyle/>
+          <a:p>
+            <a:pPr algn="ctr"/>
+          </a:p>
+        </p:txBody>
+      </p:sp>
+      <p:sp>
+        <p:nvSpPr>
+          <p:cNvPr id="74" name="TextBox 73"/>
+          <p:cNvSpPr txBox="1"/>
+          <p:nvPr/>
+        </p:nvSpPr>
+        <p:spPr>
+          <a:xfrm>
+            <a:off x="548640" y="4855464"/>
+            <a:ext cx="411479" cy="384048"/>
+          </a:xfrm>
+          <a:prstGeom prst="rect">
+            <a:avLst/>
+          </a:prstGeom>
+          <a:noFill/>
+        </p:spPr>
+        <p:txBody>
+          <a:bodyPr wrap="square">
+            <a:spAutoFit/>
+          </a:bodyPr>
+          <a:lstStyle/>
+          <a:p>
+            <a:pPr algn="l">
+              <a:defRPr sz="1300" b="1">
+                <a:solidFill>
+                  <a:srgbClr val="2D5016"/>
+                </a:solidFill>
+                <a:latin typeface="Microsoft YaHei"/>
+              </a:defRPr>
+            </a:pPr>
+            <a:r>
+              <a:t>7</a:t>
+            </a:r>
+          </a:p>
+        </p:txBody>
+      </p:sp>
+      <p:sp>
+        <p:nvSpPr>
+          <p:cNvPr id="75" name="Rectangle 74"/>
+          <p:cNvSpPr/>
+          <p:nvPr/>
+        </p:nvSpPr>
+        <p:spPr>
+          <a:xfrm>
+            <a:off x="1005840" y="4800600"/>
+            <a:ext cx="4983480" cy="475488"/>
+          </a:xfrm>
+          <a:prstGeom prst="rect">
+            <a:avLst/>
+          </a:prstGeom>
+          <a:solidFill>
+            <a:srgbClr val="F7F5F0"/>
+          </a:solidFill>
+          <a:ln>
+            <a:noFill/>
+          </a:ln>
+        </p:spPr>
+        <p:style>
+          <a:lnRef idx="1">
+            <a:schemeClr val="accent1"/>
+          </a:lnRef>
+          <a:fillRef idx="3">
+            <a:schemeClr val="accent1"/>
+          </a:fillRef>
+          <a:effectRef idx="2">
+            <a:schemeClr val="accent1"/>
+          </a:effectRef>
+          <a:fontRef idx="minor">
+            <a:schemeClr val="lt1"/>
+          </a:fontRef>
+        </p:style>
+        <p:txBody>
+          <a:bodyPr rtlCol="0" anchor="ctr"/>
+          <a:lstStyle/>
+          <a:p>
+            <a:pPr algn="ctr"/>
+          </a:p>
+        </p:txBody>
+      </p:sp>
+      <p:sp>
+        <p:nvSpPr>
+          <p:cNvPr id="76" name="TextBox 75"/>
+          <p:cNvSpPr txBox="1"/>
+          <p:nvPr/>
+        </p:nvSpPr>
+        <p:spPr>
+          <a:xfrm>
+            <a:off x="1097280" y="4855464"/>
+            <a:ext cx="4892040" cy="384048"/>
+          </a:xfrm>
+          <a:prstGeom prst="rect">
+            <a:avLst/>
+          </a:prstGeom>
+          <a:noFill/>
+        </p:spPr>
+        <p:txBody>
+          <a:bodyPr wrap="square">
+            <a:spAutoFit/>
+          </a:bodyPr>
+          <a:lstStyle/>
+          <a:p>
+            <a:pPr algn="l">
+              <a:defRPr sz="1300" b="0">
+                <a:solidFill>
+                  <a:srgbClr val="333333"/>
+                </a:solidFill>
+                <a:latin typeface="Microsoft YaHei"/>
+              </a:defRPr>
+            </a:pPr>
+            <a:r>
+              <a:t>村民说：我们支书____</a:t>
+            </a:r>
+          </a:p>
+        </p:txBody>
+      </p:sp>
+      <p:sp>
+        <p:nvSpPr>
+          <p:cNvPr id="77" name="Rectangle 76"/>
+          <p:cNvSpPr/>
+          <p:nvPr/>
+        </p:nvSpPr>
+        <p:spPr>
+          <a:xfrm>
+            <a:off x="6035040" y="4800600"/>
+            <a:ext cx="2514600" cy="475488"/>
+          </a:xfrm>
+          <a:prstGeom prst="rect">
+            <a:avLst/>
+          </a:prstGeom>
+          <a:solidFill>
+            <a:srgbClr val="F7F5F0"/>
+          </a:solidFill>
+          <a:ln>
+            <a:noFill/>
+          </a:ln>
+        </p:spPr>
+        <p:style>
+          <a:lnRef idx="1">
+            <a:schemeClr val="accent1"/>
+          </a:lnRef>
+          <a:fillRef idx="3">
+            <a:schemeClr val="accent1"/>
+          </a:fillRef>
+          <a:effectRef idx="2">
+            <a:schemeClr val="accent1"/>
+          </a:effectRef>
+          <a:fontRef idx="minor">
+            <a:schemeClr val="lt1"/>
+          </a:fontRef>
+        </p:style>
+        <p:txBody>
+          <a:bodyPr rtlCol="0" anchor="ctr"/>
+          <a:lstStyle/>
+          <a:p>
+            <a:pPr algn="ctr"/>
+          </a:p>
+        </p:txBody>
+      </p:sp>
+      <p:sp>
+        <p:nvSpPr>
+          <p:cNvPr id="78" name="TextBox 77"/>
+          <p:cNvSpPr txBox="1"/>
+          <p:nvPr/>
+        </p:nvSpPr>
+        <p:spPr>
+          <a:xfrm>
+            <a:off x="6126479" y="4855464"/>
+            <a:ext cx="2423160" cy="384048"/>
+          </a:xfrm>
+          <a:prstGeom prst="rect">
+            <a:avLst/>
+          </a:prstGeom>
+          <a:noFill/>
+        </p:spPr>
+        <p:txBody>
+          <a:bodyPr wrap="square">
+            <a:spAutoFit/>
+          </a:bodyPr>
+          <a:lstStyle/>
+          <a:p>
+            <a:pPr algn="l">
+              <a:defRPr sz="1300" b="0">
+                <a:solidFill>
+                  <a:srgbClr val="333333"/>
+                </a:solidFill>
+                <a:latin typeface="Microsoft YaHei"/>
+              </a:defRPr>
+            </a:pPr>
+            <a:r>
+              <a:t>屯军营密码</a:t>
+            </a:r>
+          </a:p>
+        </p:txBody>
+      </p:sp>
+      <p:sp>
+        <p:nvSpPr>
+          <p:cNvPr id="79" name="Rectangle 78"/>
+          <p:cNvSpPr/>
+          <p:nvPr/>
+        </p:nvSpPr>
+        <p:spPr>
+          <a:xfrm>
+            <a:off x="8595360" y="4800600"/>
+            <a:ext cx="1051560" cy="475488"/>
+          </a:xfrm>
+          <a:prstGeom prst="rect">
+            <a:avLst/>
+          </a:prstGeom>
+          <a:solidFill>
+            <a:srgbClr val="F7F5F0"/>
+          </a:solidFill>
+          <a:ln>
+            <a:noFill/>
+          </a:ln>
+        </p:spPr>
+        <p:style>
+          <a:lnRef idx="1">
+            <a:schemeClr val="accent1"/>
+          </a:lnRef>
+          <a:fillRef idx="3">
+            <a:schemeClr val="accent1"/>
+          </a:fillRef>
+          <a:effectRef idx="2">
+            <a:schemeClr val="accent1"/>
+          </a:effectRef>
+          <a:fontRef idx="minor">
+            <a:schemeClr val="lt1"/>
+          </a:fontRef>
+        </p:style>
+        <p:txBody>
+          <a:bodyPr rtlCol="0" anchor="ctr"/>
+          <a:lstStyle/>
+          <a:p>
+            <a:pPr algn="ctr"/>
+          </a:p>
+        </p:txBody>
+      </p:sp>
+      <p:sp>
+        <p:nvSpPr>
+          <p:cNvPr id="80" name="TextBox 79"/>
+          <p:cNvSpPr txBox="1"/>
+          <p:nvPr/>
+        </p:nvSpPr>
+        <p:spPr>
+          <a:xfrm>
+            <a:off x="8686800" y="4855464"/>
+            <a:ext cx="960120" cy="384048"/>
+          </a:xfrm>
+          <a:prstGeom prst="rect">
+            <a:avLst/>
+          </a:prstGeom>
+          <a:noFill/>
+        </p:spPr>
+        <p:txBody>
+          <a:bodyPr wrap="square">
+            <a:spAutoFit/>
+          </a:bodyPr>
+          <a:lstStyle/>
+          <a:p>
+            <a:pPr algn="l">
+              <a:defRPr sz="1300" b="0">
+                <a:solidFill>
+                  <a:srgbClr val="333333"/>
+                </a:solidFill>
+                <a:latin typeface="Microsoft YaHei"/>
+              </a:defRPr>
+            </a:pPr>
+            <a:r>
+              <a:t>50s</a:t>
+            </a:r>
+          </a:p>
+        </p:txBody>
+      </p:sp>
+      <p:sp>
+        <p:nvSpPr>
+          <p:cNvPr id="81" name="Rectangle 80"/>
+          <p:cNvSpPr/>
+          <p:nvPr/>
+        </p:nvSpPr>
+        <p:spPr>
+          <a:xfrm>
+            <a:off x="9692640" y="4800600"/>
+            <a:ext cx="1051560" cy="475488"/>
+          </a:xfrm>
+          <a:prstGeom prst="rect">
+            <a:avLst/>
+          </a:prstGeom>
+          <a:solidFill>
+            <a:srgbClr val="F7F5F0"/>
+          </a:solidFill>
+          <a:ln>
+            <a:noFill/>
+          </a:ln>
+        </p:spPr>
+        <p:style>
+          <a:lnRef idx="1">
+            <a:schemeClr val="accent1"/>
+          </a:lnRef>
+          <a:fillRef idx="3">
+            <a:schemeClr val="accent1"/>
+          </a:fillRef>
+          <a:effectRef idx="2">
+            <a:schemeClr val="accent1"/>
+          </a:effectRef>
+          <a:fontRef idx="minor">
+            <a:schemeClr val="lt1"/>
+          </a:fontRef>
+        </p:style>
+        <p:txBody>
+          <a:bodyPr rtlCol="0" anchor="ctr"/>
+          <a:lstStyle/>
+          <a:p>
+            <a:pPr algn="ctr"/>
+          </a:p>
+        </p:txBody>
+      </p:sp>
+      <p:sp>
+        <p:nvSpPr>
+          <p:cNvPr id="82" name="TextBox 81"/>
+          <p:cNvSpPr txBox="1"/>
+          <p:nvPr/>
+        </p:nvSpPr>
+        <p:spPr>
+          <a:xfrm>
+            <a:off x="9784080" y="4855464"/>
+            <a:ext cx="960120" cy="384048"/>
+          </a:xfrm>
+          <a:prstGeom prst="rect">
+            <a:avLst/>
+          </a:prstGeom>
+          <a:noFill/>
+        </p:spPr>
+        <p:txBody>
+          <a:bodyPr wrap="square">
+            <a:spAutoFit/>
+          </a:bodyPr>
+          <a:lstStyle/>
+          <a:p>
+            <a:pPr algn="l">
+              <a:defRPr sz="1300" b="0">
+                <a:solidFill>
+                  <a:srgbClr val="333333"/>
+                </a:solidFill>
+                <a:latin typeface="Microsoft YaHei"/>
+              </a:defRPr>
+            </a:pPr>
+            <a:r>
+              <a:t>⭐⭐⭐⭐</a:t>
+            </a:r>
+          </a:p>
+        </p:txBody>
+      </p:sp>
+    </p:spTree>
+  </p:cSld>
+  <p:clrMapOvr>
+    <a:masterClrMapping/>
+  </p:clrMapOvr>
+</p:sld>
+</file>
+
+<file path=ppt/slides/slide25.xml><?xml version="1.0" encoding="utf-8"?>
 <p:sld xmlns:a="http://schemas.openxmlformats.org/drawingml/2006/main" xmlns:p="http://schemas.openxmlformats.org/presentationml/2006/main" xmlns:r="http://schemas.openxmlformats.org/officeDocument/2006/relationships">
   <p:cSld>
     <p:bg>
@@ -16007,7 +22469,7 @@
               </a:defRPr>
             </a:pPr>
             <a:r>
-              <a:t>🔥 爆款潜力 TOP 3（v2.0 足球版）</a:t>
+              <a:t>🔥 🔥 爆款潜力 TOP 3（v2.0 足球版）</a:t>
             </a:r>
           </a:p>
         </p:txBody>
@@ -16043,15 +22505,31 @@
               </a:defRPr>
             </a:pPr>
             <a:r>
-              <a:t>🥇 #10 致在外打工的屯军营人（足球+乡愁版）—— W8发布，情感核弹，直击游子</a:t>
+              <a:t>🥇 🥇 #10 致在外打工的屯军营人（足球+乡愁版）—— W8发布，情感核弹
+🥈 #12 城里人看不懂的农村足球规矩 —— 城乡反差破圈利器
+🥉 #7 村民说我们支书踢球比干活还拼 —— 真实评价信任感拉满屯军营人</a:t>
             </a:r>
             <a:br/>
             <a:r>
-              <a:t>🥈 #12 城里人看不懂的农村足球规矩 —— 城乡反差破圈利器</a:t>
+              <a:t>       情感向，直击在外游子共鸣 —— 预计传播力最高</a:t>
             </a:r>
             <a:br/>
-            <a:r>
-              <a:t>🥉 #7 村民说我们支书踢球比干活还拼 —— 真实评价不做作信任感拉满</a:t>
+            <a:br/>
+            <a:r>
+              <a:t>🥈 #12  城里人看不懂的农村规矩</a:t>
+            </a:r>
+            <a:br/>
+            <a:r>
+              <a:t>       城乡反差，天然流量密码 —— 破圈能力最强</a:t>
+            </a:r>
+            <a:br/>
+            <a:br/>
+            <a:r>
+              <a:t>🥉 #7   村民说：我们支书____</a:t>
+            </a:r>
+            <a:br/>
+            <a:r>
+              <a:t>       真实评价不做作 —— 信任感拉满</a:t>
             </a:r>
           </a:p>
         </p:txBody>
@@ -16064,7 +22542,7 @@
 </p:sld>
 </file>
 
-<file path=ppt/slides/slide24.xml><?xml version="1.0" encoding="utf-8"?>
+<file path=ppt/slides/slide26.xml><?xml version="1.0" encoding="utf-8"?>
 <p:sld xmlns:a="http://schemas.openxmlformats.org/drawingml/2006/main" xmlns:p="http://schemas.openxmlformats.org/presentationml/2006/main" xmlns:r="http://schemas.openxmlformats.org/officeDocument/2006/relationships">
   <p:cSld>
     <p:bg>
@@ -16205,7 +22683,7 @@
 </p:sld>
 </file>
 
-<file path=ppt/slides/slide25.xml><?xml version="1.0" encoding="utf-8"?>
+<file path=ppt/slides/slide27.xml><?xml version="1.0" encoding="utf-8"?>
 <p:sld xmlns:a="http://schemas.openxmlformats.org/drawingml/2006/main" xmlns:p="http://schemas.openxmlformats.org/presentationml/2006/main" xmlns:r="http://schemas.openxmlformats.org/officeDocument/2006/relationships">
   <p:cSld>
     <p:bg>
@@ -16520,7 +22998,7 @@
               </a:defRPr>
             </a:pPr>
             <a:r>
-              <a:t>跟王支书确认足球方向，确定人设关键词</a:t>
+              <a:t>根据讨论结果，确定账号人设和风格方向</a:t>
             </a:r>
           </a:p>
         </p:txBody>
@@ -16671,7 +23149,7 @@
               </a:defRPr>
             </a:pPr>
             <a:r>
-              <a:t>用手机试拍W1-①自我介绍+W1-②练兵场</a:t>
+              <a:t>用手机试拍脚本1（自我介绍），看镜头状态</a:t>
             </a:r>
           </a:p>
         </p:txBody>
@@ -16822,7 +23300,7 @@
               </a:defRPr>
             </a:pPr>
             <a:r>
-              <a:t>盘足球资源：冠军奖杯、老照片、老队员故事</a:t>
+              <a:t>盘村资源：老照片、老物件、愿出镜的老人</a:t>
             </a:r>
           </a:p>
         </p:txBody>
@@ -16973,7 +23451,7 @@
               </a:defRPr>
             </a:pPr>
             <a:r>
-              <a:t>拍完前4条 → 注册账号 → 冷启动发布</a:t>
+              <a:t>拍完3-5条 → 注册账号 → 冷启动发布</a:t>
             </a:r>
           </a:p>
         </p:txBody>
@@ -17022,7 +23500,7 @@
 </p:sld>
 </file>
 
-<file path=ppt/slides/slide26.xml><?xml version="1.0" encoding="utf-8"?>
+<file path=ppt/slides/slide28.xml><?xml version="1.0" encoding="utf-8"?>
 <p:sld xmlns:a="http://schemas.openxmlformats.org/drawingml/2006/main" xmlns:p="http://schemas.openxmlformats.org/presentationml/2006/main" xmlns:r="http://schemas.openxmlformats.org/officeDocument/2006/relationships">
   <p:cSld>
     <p:bg>
@@ -17193,7 +23671,7 @@
               </a:defRPr>
             </a:pPr>
             <a:r>
-              <a:t>24条脚本已就绪 · 8周执行计划 · 4阶变现路径</a:t>
+              <a:t>24条脚本已就绪 · 8周执行计划 · 4阶变现路径，只等第一声 "Action"</a:t>
             </a:r>
           </a:p>
         </p:txBody>
@@ -17229,7 +23707,7 @@
               </a:defRPr>
             </a:pPr>
             <a:r>
-              <a:t>延庆区屯军营村 · 王支书支书 · v2.0 · 2026年6月</a:t>
+              <a:t>延庆区屯军营村 · 延庆区屯军营村 · 王支书 · v2.0 · 2026年6月 · 2026</a:t>
             </a:r>
           </a:p>
         </p:txBody>
@@ -17521,7 +23999,7 @@
               </a:defRPr>
             </a:pPr>
             <a:r>
-              <a:t>内容分散：13条覆盖6方向 / 无差异化：跟其他村支书号雷同 / 未发挥核心优势：足球和冠军 / 变现路径模糊</a:t>
+              <a:t>内容分散(13条6方向) / 无差异化(雷同其他村支书号) / 未发挥足球+冠军核心优势</a:t>
             </a:r>
           </a:p>
         </p:txBody>
@@ -17636,7 +24114,7 @@
               </a:defRPr>
             </a:pPr>
             <a:r>
-              <a:t>聚焦足球：24条脚本全部围绕足球 / 建立壁垒：冠军村IP无法复制 / 三条栏目线：每周固定节奏 / 变现前置：阶梯式规划</a:t>
+              <a:t>聚焦足球(24条) / 冠军村IP壁垒 / 三条栏目线 / 阶梯变现规划</a:t>
             </a:r>
           </a:p>
         </p:txBody>
@@ -17751,7 +24229,7 @@
               </a:defRPr>
             </a:pPr>
             <a:r>
-              <a:t>🥇足球精神线（主力） 🥈兵味文化线（壁垒） 🥉体育政策线（涨粉）</a:t>
+              <a:t>🥇足球精神线 🥈兵味文化线 🥉体育政策线</a:t>
             </a:r>
           </a:p>
         </p:txBody>
@@ -17964,7 +24442,7 @@
               </a:defRPr>
             </a:pPr>
             <a:r>
-              <a:t>三条新栏目线（替换原8大方向）</a:t>
+              <a:t>账号定位：三条新栏目线（替换原8大方向）</a:t>
             </a:r>
           </a:p>
         </p:txBody>
@@ -18069,7 +24547,7 @@
               </a:defRPr>
             </a:pPr>
             <a:r>
-              <a:t>🥇 冠军村的足球精神线（主力栏目 · 每周二/四发布）</a:t>
+              <a:t>🎯 🥇 冠军村的足球精神线（主力栏目 · 每周二/四）</a:t>
             </a:r>
           </a:p>
         </p:txBody>
@@ -18234,7 +24712,7 @@
               </a:defRPr>
             </a:pPr>
             <a:r>
-              <a:t>①</a:t>
+              <a:t>A</a:t>
             </a:r>
           </a:p>
         </p:txBody>
@@ -18543,7 +25021,7 @@
               </a:defRPr>
             </a:pPr>
             <a:r>
-              <a:t>②</a:t>
+              <a:t>B</a:t>
             </a:r>
           </a:p>
         </p:txBody>
@@ -18615,7 +25093,7 @@
               </a:defRPr>
             </a:pPr>
             <a:r>
-              <a:t>村民评价 · 三代球员 · 致打工游子 · 冠军之路回忆</a:t>
+              <a:t>村民评价 · 三代球员 · 致打工游子 · 冠军回忆</a:t>
             </a:r>
           </a:p>
         </p:txBody>
@@ -18852,7 +25330,7 @@
               </a:defRPr>
             </a:pPr>
             <a:r>
-              <a:t>③</a:t>
+              <a:t>C</a:t>
             </a:r>
           </a:p>
         </p:txBody>
@@ -18888,7 +25366,7 @@
               </a:defRPr>
             </a:pPr>
             <a:r>
-              <a:t>赛场幕后 &amp; 破壁内容</a:t>
+              <a:t>赛场幕后 &amp; 破壁</a:t>
             </a:r>
           </a:p>
         </p:txBody>
@@ -19161,7 +25639,7 @@
               </a:defRPr>
             </a:pPr>
             <a:r>
-              <a:t>一句话记忆点</a:t>
+              <a:t>D</a:t>
             </a:r>
           </a:p>
         </p:txBody>
@@ -19197,7 +25675,7 @@
               </a:defRPr>
             </a:pPr>
             <a:r>
-              <a:t>「屯军营，踢出来的冠军村」</a:t>
+              <a:t>一句话：「屯军营，踢出来的冠军村」</a:t>
             </a:r>
           </a:p>
         </p:txBody>
@@ -19233,7 +25711,7 @@
               </a:defRPr>
             </a:pPr>
             <a:r>
-              <a:t>大白话解释惠农政策、医保、宅基地</a:t>
+              <a:t>视觉锤：王支书一脚射门 / 球网抖动 / 夕阳球场</a:t>
             </a:r>
           </a:p>
         </p:txBody>
@@ -19367,7 +25845,7 @@
               </a:defRPr>
             </a:pPr>
             <a:r>
-              <a:t>🥈 兵味文化线 &amp; 🥉 体育政策线（每周四/六 · 六/一发布）</a:t>
+              <a:t>🎯 🥈 兵味文化线 &amp; 🥉 体育政策线</a:t>
             </a:r>
           </a:p>
         </p:txBody>
@@ -19532,7 +26010,7 @@
               </a:defRPr>
             </a:pPr>
             <a:r>
-              <a:t>🥈</a:t>
+              <a:t>E</a:t>
             </a:r>
           </a:p>
         </p:txBody>
@@ -19841,7 +26319,7 @@
               </a:defRPr>
             </a:pPr>
             <a:r>
-              <a:t>🥉</a:t>
+              <a:t>F</a:t>
             </a:r>
           </a:p>
         </p:txBody>
@@ -20150,7 +26628,7 @@
               </a:defRPr>
             </a:pPr>
             <a:r>
-              <a:t>一句话</a:t>
+              <a:t>G</a:t>
             </a:r>
           </a:p>
         </p:txBody>
@@ -20186,7 +26664,7 @@
               </a:defRPr>
             </a:pPr>
             <a:r>
-              <a:t>「500年前练兵场，今天冠军村」</a:t>
+              <a:t>兵味线：500年前练兵场今天冠军村</a:t>
             </a:r>
           </a:p>
         </p:txBody>
@@ -20222,7 +26700,7 @@
               </a:defRPr>
             </a:pPr>
             <a:r>
-              <a:t>「政策看不懂？王支书说给你听」</a:t>
+              <a:t>政策线：政策看不懂？王支书说给你听</a:t>
             </a:r>
           </a:p>
         </p:txBody>
@@ -20258,7 +26736,7 @@
               </a:defRPr>
             </a:pPr>
             <a:r>
-              <a:t>📊 三条线关系</a:t>
+              <a:t>📊 核心指标</a:t>
             </a:r>
           </a:p>
         </p:txBody>
@@ -20294,7 +26772,7 @@
               </a:defRPr>
             </a:pPr>
             <a:r>
-              <a:t>足球精神线=建立认知 · 兵味文化线=强化壁垒 · 政策线=涨粉+信任</a:t>
+              <a:t>发布：每周3条 周二·四·六 18:30 8周24条完整脚本</a:t>
             </a:r>
           </a:p>
         </p:txBody>
@@ -20459,7 +26937,7 @@
               </a:defRPr>
             </a:pPr>
             <a:r>
-              <a:t>🎯</a:t>
+              <a:t>H</a:t>
             </a:r>
           </a:p>
         </p:txBody>
@@ -20495,7 +26973,7 @@
               </a:defRPr>
             </a:pPr>
             <a:r>
-              <a:t>发布节奏</a:t>
+              <a:t>三条线一个声音</a:t>
             </a:r>
           </a:p>
         </p:txBody>
@@ -20531,7 +27009,7 @@
               </a:defRPr>
             </a:pPr>
             <a:r>
-              <a:t>每周3条  |  周二·四·六 18:30  |  8周24条完整脚本</a:t>
+              <a:t>屯军营不只是一个村——是中国乡村体育的一张名片</a:t>
             </a:r>
           </a:p>
         </p:txBody>
@@ -20567,7 +27045,7 @@
               </a:defRPr>
             </a:pPr>
             <a:r>
-              <a:t>📊 三条线关系</a:t>
+              <a:t>📊 核心指标</a:t>
             </a:r>
           </a:p>
         </p:txBody>
@@ -20708,7 +27186,7 @@
               </a:defRPr>
             </a:pPr>
             <a:r>
-              <a:t>💡 v1→v2 核心升级总结</a:t>
+              <a:t>💡 💡 v1→v2 核心升级总结</a:t>
             </a:r>
           </a:p>
         </p:txBody>
@@ -20744,19 +27222,15 @@
               </a:defRPr>
             </a:pPr>
             <a:r>
-              <a:t>v1.0：村支书的日常 → v2.0：冠军村的足球IP</a:t>
+              <a:t>主攻：E+F（人格化Vlog + 文化IP）</a:t>
             </a:r>
             <a:br/>
             <a:r>
-              <a:t>v1.0：13条散装脚本 → v2.0：8周×3栏目=24条系统脚本</a:t>
+              <a:t>辅助：D（政策解读引流）</a:t>
             </a:r>
             <a:br/>
             <a:r>
-              <a:t>v1.0：变现靠农产品 → v2.0：赛事→研学→文旅四阶梯变现</a:t>
-            </a:r>
-            <a:br/>
-            <a:r>
-              <a:t>v1.0：无对标分析 → v2.0：4个对标号深度拆解</a:t>
+              <a:t>阶段测试：C（农业带货）</a:t>
             </a:r>
           </a:p>
         </p:txBody>
@@ -20854,7 +27328,7 @@
               </a:defRPr>
             </a:pPr>
             <a:r>
-              <a:t>对标分析：四个村支书账号 × 盈利逻辑</a:t>
+              <a:t>拍摄方向建议 · 对标分析：四个村支书账号 × 盈利逻辑</a:t>
             </a:r>
           </a:p>
         </p:txBody>
@@ -21081,7 +27555,7 @@
               </a:defRPr>
             </a:pPr>
             <a:r>
-              <a:t>模式</a:t>
+              <a:t>为什么选这条</a:t>
             </a:r>
           </a:p>
         </p:txBody>
@@ -21117,7 +27591,11 @@
               </a:defRPr>
             </a:pPr>
             <a:r>
-              <a:t>内容引流 → IP信任 → 橱窗带货</a:t>
+              <a:t>村名自带IP属性</a:t>
+            </a:r>
+            <a:br/>
+            <a:r>
+              <a:t>"屯军"→明代长城驻军屯田→500年历史沉淀</a:t>
             </a:r>
           </a:p>
         </p:txBody>
@@ -21153,7 +27631,7 @@
               </a:defRPr>
             </a:pPr>
             <a:r>
-              <a:t>关键数据 &amp; 启示</a:t>
+              <a:t>能拍什么</a:t>
             </a:r>
           </a:p>
         </p:txBody>
@@ -21189,7 +27667,23 @@
               </a:defRPr>
             </a:pPr>
             <a:r>
-              <a:t>关键数据 &amp; 启示</a:t>
+              <a:t>【能拍什么】</a:t>
+            </a:r>
+            <a:br/>
+            <a:r>
+              <a:t>• 村名来历（老人访谈+史料）</a:t>
+            </a:r>
+            <a:br/>
+            <a:r>
+              <a:t>• 村内老建筑/老树/老物件</a:t>
+            </a:r>
+            <a:br/>
+            <a:r>
+              <a:t>• 延庆长城防线联动</a:t>
+            </a:r>
+            <a:br/>
+            <a:r>
+              <a:t>• 军屯文化民俗探访</a:t>
             </a:r>
           </a:p>
         </p:txBody>
@@ -21268,7 +27762,7 @@
               </a:defRPr>
             </a:pPr>
             <a:r>
-              <a:t>💡 启示：要高频输出，但不能只靠王支书一个人</a:t>
+              <a:t>💬 💡 启示：要高频输出，但不能只靠王支书一个人</a:t>
             </a:r>
           </a:p>
         </p:txBody>
@@ -21390,7 +27884,7 @@
               </a:defRPr>
             </a:pPr>
             <a:r>
-              <a:t>范文栋 · 一动作IP型</a:t>
+              <a:t>范文栋（一动作IP） &amp; 小江支书（少而精）</a:t>
             </a:r>
           </a:p>
         </p:txBody>
@@ -21426,7 +27920,7 @@
               </a:defRPr>
             </a:pPr>
             <a:r>
-              <a:t>模式</a:t>
+              <a:t>为什么选这条</a:t>
             </a:r>
           </a:p>
         </p:txBody>
@@ -21462,7 +27956,11 @@
               </a:defRPr>
             </a:pPr>
             <a:r>
-              <a:t>公益IP → 政府背书 → 直播变现</a:t>
+              <a:t>村支书个人出镜，真实记录</a:t>
+            </a:r>
+            <a:br/>
+            <a:r>
+              <a:t>不演、不摆、不念稿</a:t>
             </a:r>
           </a:p>
         </p:txBody>
@@ -21498,7 +27996,7 @@
               </a:defRPr>
             </a:pPr>
             <a:r>
-              <a:t>关键数据 &amp; 启示</a:t>
+              <a:t>能拍什么</a:t>
             </a:r>
           </a:p>
         </p:txBody>
@@ -21534,7 +28032,23 @@
               </a:defRPr>
             </a:pPr>
             <a:r>
-              <a:t>关键数据 &amp; 启示</a:t>
+              <a:t>【能拍什么】</a:t>
+            </a:r>
+            <a:br/>
+            <a:r>
+              <a:t>• 骑车巡村、坐村口聊天</a:t>
+            </a:r>
+            <a:br/>
+            <a:r>
+              <a:t>• 处理村民事务（脱敏后）</a:t>
+            </a:r>
+            <a:br/>
+            <a:r>
+              <a:t>• 开会、下地、走访</a:t>
+            </a:r>
+            <a:br/>
+            <a:r>
+              <a:t>• 凌晨早起、熬夜写材料</a:t>
             </a:r>
           </a:p>
         </p:txBody>
@@ -21613,7 +28127,7 @@
               </a:defRPr>
             </a:pPr>
             <a:r>
-              <a:t>💡 启示：需要一个标志动作成为账号的视觉锤</a:t>
+              <a:t>💬 💡 需要一个标志动作成为视觉锤  |  不需日更也能建强人设</a:t>
             </a:r>
           </a:p>
         </p:txBody>
@@ -21735,7 +28249,7 @@
               </a:defRPr>
             </a:pPr>
             <a:r>
-              <a:t>小江支书(少而精) &amp; 张爱军(产品锚)</a:t>
+              <a:t>张爱军 · 产品锚型</a:t>
             </a:r>
           </a:p>
         </p:txBody>
@@ -21771,7 +28285,7 @@
               </a:defRPr>
             </a:pPr>
             <a:r>
-              <a:t>模式</a:t>
+              <a:t>为什么选这条</a:t>
             </a:r>
           </a:p>
         </p:txBody>
@@ -21807,11 +28321,11 @@
               </a:defRPr>
             </a:pPr>
             <a:r>
-              <a:t>小江：34作品·77万赞，少而精=高粘性</a:t>
+              <a:t>用村民听得懂的话解释政策</a:t>
             </a:r>
             <a:br/>
             <a:r>
-              <a:t>张爱军：105作品·678万赞，「苹果第一镇」=零成本认知</a:t>
+              <a:t>"王支书跟你说"系列</a:t>
             </a:r>
           </a:p>
         </p:txBody>
@@ -21847,7 +28361,7 @@
               </a:defRPr>
             </a:pPr>
             <a:r>
-              <a:t>关键数据 &amp; 启示</a:t>
+              <a:t>能拍什么</a:t>
             </a:r>
           </a:p>
         </p:txBody>
@@ -21883,7 +28397,23 @@
               </a:defRPr>
             </a:pPr>
             <a:r>
-              <a:t>关键数据 &amp; 启示</a:t>
+              <a:t>【能拍什么】</a:t>
+            </a:r>
+            <a:br/>
+            <a:r>
+              <a:t>• 医保怎么报？三句话说清楚</a:t>
+            </a:r>
+            <a:br/>
+            <a:r>
+              <a:t>• 宅基地申请流程</a:t>
+            </a:r>
+            <a:br/>
+            <a:r>
+              <a:t>• 惠农补贴怎么领</a:t>
+            </a:r>
+            <a:br/>
+            <a:r>
+              <a:t>• 村民点菜→下期回答</a:t>
             </a:r>
           </a:p>
         </p:txBody>
@@ -21962,7 +28492,7 @@
               </a:defRPr>
             </a:pPr>
             <a:r>
-              <a:t>💡 竞品天花板=带货GMV · 我们的天花板=赛事+研学+文旅</a:t>
+              <a:t>💬 💡 「冠军村」就是我们的苹果  |  4类竞品均未切入体育=我们的蓝海</a:t>
             </a:r>
           </a:p>
         </p:txBody>

--- a/tunjunying/plan_v2.pptx
+++ b/tunjunying/plan_v2.pptx
@@ -10451,7 +10451,9 @@
           <a:bodyPr rtlCol="0" anchor="ctr"/>
           <a:lstStyle/>
           <a:p>
-            <a:pPr algn="ctr"/>
+            <a:pPr algn="ctr">
+              <a:defRPr/>
+            </a:pPr>
           </a:p>
         </p:txBody>
       </p:sp>
@@ -10478,7 +10480,7 @@
           <a:lstStyle/>
           <a:p>
             <a:pPr algn="l">
-              <a:defRPr sz="1300" b="0">
+              <a:defRPr sz="900" b="0">
                 <a:solidFill>
                   <a:srgbClr val="333333"/>
                 </a:solidFill>
@@ -10530,7 +10532,9 @@
           <a:bodyPr rtlCol="0" anchor="ctr"/>
           <a:lstStyle/>
           <a:p>
-            <a:pPr algn="ctr"/>
+            <a:pPr algn="ctr">
+              <a:defRPr/>
+            </a:pPr>
           </a:p>
         </p:txBody>
       </p:sp>
@@ -10557,7 +10561,7 @@
           <a:lstStyle/>
           <a:p>
             <a:pPr algn="l">
-              <a:defRPr sz="1300" b="0">
+              <a:defRPr sz="900" b="0">
                 <a:solidFill>
                   <a:srgbClr val="333333"/>
                 </a:solidFill>
@@ -10846,7 +10850,9 @@
           <a:bodyPr rtlCol="0" anchor="ctr"/>
           <a:lstStyle/>
           <a:p>
-            <a:pPr algn="ctr"/>
+            <a:pPr algn="ctr">
+              <a:defRPr/>
+            </a:pPr>
           </a:p>
         </p:txBody>
       </p:sp>
@@ -10873,7 +10879,7 @@
           <a:lstStyle/>
           <a:p>
             <a:pPr algn="l">
-              <a:defRPr sz="1300" b="0">
+              <a:defRPr sz="900" b="0">
                 <a:solidFill>
                   <a:srgbClr val="333333"/>
                 </a:solidFill>
@@ -10881,6 +10887,7 @@
               </a:defRPr>
             </a:pPr>
             <a:r>
+              <a:rPr/>
               <a:t>屯军营500年前就是练兵场</a:t>
             </a:r>
           </a:p>
@@ -10925,7 +10932,9 @@
           <a:bodyPr rtlCol="0" anchor="ctr"/>
           <a:lstStyle/>
           <a:p>
-            <a:pPr algn="ctr"/>
+            <a:pPr algn="ctr">
+              <a:defRPr/>
+            </a:pPr>
           </a:p>
         </p:txBody>
       </p:sp>
@@ -10952,7 +10961,7 @@
           <a:lstStyle/>
           <a:p>
             <a:pPr algn="l">
-              <a:defRPr sz="1300" b="0">
+              <a:defRPr sz="900" b="0">
                 <a:solidFill>
                   <a:srgbClr val="333333"/>
                 </a:solidFill>
@@ -10960,6 +10969,7 @@
               </a:defRPr>
             </a:pPr>
             <a:r>
+              <a:rPr/>
               <a:t>屯军营500年前就是练兵场</a:t>
             </a:r>
           </a:p>
@@ -11241,7 +11251,9 @@
           <a:bodyPr rtlCol="0" anchor="ctr"/>
           <a:lstStyle/>
           <a:p>
-            <a:pPr algn="ctr"/>
+            <a:pPr algn="ctr">
+              <a:defRPr/>
+            </a:pPr>
           </a:p>
         </p:txBody>
       </p:sp>
@@ -11268,7 +11280,7 @@
           <a:lstStyle/>
           <a:p>
             <a:pPr algn="l">
-              <a:defRPr sz="1300" b="0">
+              <a:defRPr sz="900" b="0">
                 <a:solidFill>
                   <a:srgbClr val="333333"/>
                 </a:solidFill>
@@ -11320,7 +11332,9 @@
           <a:bodyPr rtlCol="0" anchor="ctr"/>
           <a:lstStyle/>
           <a:p>
-            <a:pPr algn="ctr"/>
+            <a:pPr algn="ctr">
+              <a:defRPr/>
+            </a:pPr>
           </a:p>
         </p:txBody>
       </p:sp>
@@ -11347,7 +11361,7 @@
           <a:lstStyle/>
           <a:p>
             <a:pPr algn="l">
-              <a:defRPr sz="1300" b="0">
+              <a:defRPr sz="900" b="0">
                 <a:solidFill>
                   <a:srgbClr val="333333"/>
                 </a:solidFill>
@@ -11636,7 +11650,9 @@
           <a:bodyPr rtlCol="0" anchor="ctr"/>
           <a:lstStyle/>
           <a:p>
-            <a:pPr algn="ctr"/>
+            <a:pPr algn="ctr">
+              <a:defRPr/>
+            </a:pPr>
           </a:p>
         </p:txBody>
       </p:sp>
@@ -11663,7 +11679,7 @@
           <a:lstStyle/>
           <a:p>
             <a:pPr algn="l">
-              <a:defRPr sz="1300" b="0">
+              <a:defRPr sz="900" b="0">
                 <a:solidFill>
                   <a:srgbClr val="333333"/>
                 </a:solidFill>
@@ -11715,7 +11731,9 @@
           <a:bodyPr rtlCol="0" anchor="ctr"/>
           <a:lstStyle/>
           <a:p>
-            <a:pPr algn="ctr"/>
+            <a:pPr algn="ctr">
+              <a:defRPr/>
+            </a:pPr>
           </a:p>
         </p:txBody>
       </p:sp>
@@ -11742,7 +11760,7 @@
           <a:lstStyle/>
           <a:p>
             <a:pPr algn="l">
-              <a:defRPr sz="1300" b="0">
+              <a:defRPr sz="900" b="0">
                 <a:solidFill>
                   <a:srgbClr val="333333"/>
                 </a:solidFill>
@@ -12031,7 +12049,9 @@
           <a:bodyPr rtlCol="0" anchor="ctr"/>
           <a:lstStyle/>
           <a:p>
-            <a:pPr algn="ctr"/>
+            <a:pPr algn="ctr">
+              <a:defRPr/>
+            </a:pPr>
           </a:p>
         </p:txBody>
       </p:sp>
@@ -12058,7 +12078,7 @@
           <a:lstStyle/>
           <a:p>
             <a:pPr algn="l">
-              <a:defRPr sz="1300" b="0">
+              <a:defRPr sz="900" b="0">
                 <a:solidFill>
                   <a:srgbClr val="333333"/>
                 </a:solidFill>
@@ -12110,7 +12130,9 @@
           <a:bodyPr rtlCol="0" anchor="ctr"/>
           <a:lstStyle/>
           <a:p>
-            <a:pPr algn="ctr"/>
+            <a:pPr algn="ctr">
+              <a:defRPr/>
+            </a:pPr>
           </a:p>
         </p:txBody>
       </p:sp>
@@ -12137,7 +12159,7 @@
           <a:lstStyle/>
           <a:p>
             <a:pPr algn="l">
-              <a:defRPr sz="1300" b="0">
+              <a:defRPr sz="900" b="0">
                 <a:solidFill>
                   <a:srgbClr val="333333"/>
                 </a:solidFill>
@@ -12426,7 +12448,9 @@
           <a:bodyPr rtlCol="0" anchor="ctr"/>
           <a:lstStyle/>
           <a:p>
-            <a:pPr algn="ctr"/>
+            <a:pPr algn="ctr">
+              <a:defRPr/>
+            </a:pPr>
           </a:p>
         </p:txBody>
       </p:sp>
@@ -12453,7 +12477,7 @@
           <a:lstStyle/>
           <a:p>
             <a:pPr algn="l">
-              <a:defRPr sz="1300" b="0">
+              <a:defRPr sz="900" b="0">
                 <a:solidFill>
                   <a:srgbClr val="333333"/>
                 </a:solidFill>
@@ -12505,7 +12529,9 @@
           <a:bodyPr rtlCol="0" anchor="ctr"/>
           <a:lstStyle/>
           <a:p>
-            <a:pPr algn="ctr"/>
+            <a:pPr algn="ctr">
+              <a:defRPr/>
+            </a:pPr>
           </a:p>
         </p:txBody>
       </p:sp>
@@ -12532,7 +12558,7 @@
           <a:lstStyle/>
           <a:p>
             <a:pPr algn="l">
-              <a:defRPr sz="1300" b="0">
+              <a:defRPr sz="900" b="0">
                 <a:solidFill>
                   <a:srgbClr val="333333"/>
                 </a:solidFill>
@@ -12777,7 +12803,7 @@
               </a:defRPr>
             </a:pPr>
             <a:r>
-              <a:t>7</a:t>
+              <a:t/>
             </a:r>
           </a:p>
         </p:txBody>
@@ -12856,7 +12882,7 @@
               </a:defRPr>
             </a:pPr>
             <a:r>
-              <a:t>村民说：我们支书____</a:t>
+              <a:t/>
             </a:r>
           </a:p>
         </p:txBody>
@@ -12935,7 +12961,7 @@
               </a:defRPr>
             </a:pPr>
             <a:r>
-              <a:t>屯军营密码</a:t>
+              <a:t/>
             </a:r>
           </a:p>
         </p:txBody>
@@ -13014,7 +13040,7 @@
               </a:defRPr>
             </a:pPr>
             <a:r>
-              <a:t>50s</a:t>
+              <a:t/>
             </a:r>
           </a:p>
         </p:txBody>
@@ -13093,7 +13119,7 @@
               </a:defRPr>
             </a:pPr>
             <a:r>
-              <a:t>⭐⭐⭐⭐</a:t>
+              <a:t/>
             </a:r>
           </a:p>
         </p:txBody>
@@ -13673,7 +13699,9 @@
           <a:bodyPr rtlCol="0" anchor="ctr"/>
           <a:lstStyle/>
           <a:p>
-            <a:pPr algn="ctr"/>
+            <a:pPr algn="ctr">
+              <a:defRPr/>
+            </a:pPr>
           </a:p>
         </p:txBody>
       </p:sp>
@@ -13700,7 +13728,7 @@
           <a:lstStyle/>
           <a:p>
             <a:pPr algn="l">
-              <a:defRPr sz="1300" b="0">
+              <a:defRPr sz="900" b="0">
                 <a:solidFill>
                   <a:srgbClr val="333333"/>
                 </a:solidFill>
@@ -13752,7 +13780,9 @@
           <a:bodyPr rtlCol="0" anchor="ctr"/>
           <a:lstStyle/>
           <a:p>
-            <a:pPr algn="ctr"/>
+            <a:pPr algn="ctr">
+              <a:defRPr/>
+            </a:pPr>
           </a:p>
         </p:txBody>
       </p:sp>
@@ -13779,7 +13809,7 @@
           <a:lstStyle/>
           <a:p>
             <a:pPr algn="l">
-              <a:defRPr sz="1300" b="0">
+              <a:defRPr sz="900" b="0">
                 <a:solidFill>
                   <a:srgbClr val="333333"/>
                 </a:solidFill>
@@ -14068,7 +14098,9 @@
           <a:bodyPr rtlCol="0" anchor="ctr"/>
           <a:lstStyle/>
           <a:p>
-            <a:pPr algn="ctr"/>
+            <a:pPr algn="ctr">
+              <a:defRPr/>
+            </a:pPr>
           </a:p>
         </p:txBody>
       </p:sp>
@@ -14095,7 +14127,7 @@
           <a:lstStyle/>
           <a:p>
             <a:pPr algn="l">
-              <a:defRPr sz="1300" b="0">
+              <a:defRPr sz="900" b="0">
                 <a:solidFill>
                   <a:srgbClr val="333333"/>
                 </a:solidFill>
@@ -14147,7 +14179,9 @@
           <a:bodyPr rtlCol="0" anchor="ctr"/>
           <a:lstStyle/>
           <a:p>
-            <a:pPr algn="ctr"/>
+            <a:pPr algn="ctr">
+              <a:defRPr/>
+            </a:pPr>
           </a:p>
         </p:txBody>
       </p:sp>
@@ -14174,7 +14208,7 @@
           <a:lstStyle/>
           <a:p>
             <a:pPr algn="l">
-              <a:defRPr sz="1300" b="0">
+              <a:defRPr sz="900" b="0">
                 <a:solidFill>
                   <a:srgbClr val="333333"/>
                 </a:solidFill>
@@ -14463,7 +14497,9 @@
           <a:bodyPr rtlCol="0" anchor="ctr"/>
           <a:lstStyle/>
           <a:p>
-            <a:pPr algn="ctr"/>
+            <a:pPr algn="ctr">
+              <a:defRPr/>
+            </a:pPr>
           </a:p>
         </p:txBody>
       </p:sp>
@@ -14490,7 +14526,7 @@
           <a:lstStyle/>
           <a:p>
             <a:pPr algn="l">
-              <a:defRPr sz="1300" b="0">
+              <a:defRPr sz="900" b="0">
                 <a:solidFill>
                   <a:srgbClr val="333333"/>
                 </a:solidFill>
@@ -14542,7 +14578,9 @@
           <a:bodyPr rtlCol="0" anchor="ctr"/>
           <a:lstStyle/>
           <a:p>
-            <a:pPr algn="ctr"/>
+            <a:pPr algn="ctr">
+              <a:defRPr/>
+            </a:pPr>
           </a:p>
         </p:txBody>
       </p:sp>
@@ -14569,7 +14607,7 @@
           <a:lstStyle/>
           <a:p>
             <a:pPr algn="l">
-              <a:defRPr sz="1300" b="0">
+              <a:defRPr sz="900" b="0">
                 <a:solidFill>
                   <a:srgbClr val="333333"/>
                 </a:solidFill>
@@ -14858,7 +14896,9 @@
           <a:bodyPr rtlCol="0" anchor="ctr"/>
           <a:lstStyle/>
           <a:p>
-            <a:pPr algn="ctr"/>
+            <a:pPr algn="ctr">
+              <a:defRPr/>
+            </a:pPr>
           </a:p>
         </p:txBody>
       </p:sp>
@@ -14885,7 +14925,7 @@
           <a:lstStyle/>
           <a:p>
             <a:pPr algn="l">
-              <a:defRPr sz="1300" b="0">
+              <a:defRPr sz="900" b="0">
                 <a:solidFill>
                   <a:srgbClr val="333333"/>
                 </a:solidFill>
@@ -14893,6 +14933,7 @@
               </a:defRPr>
             </a:pPr>
             <a:r>
+              <a:rPr/>
               <a:t>村民说我们支书踢球比干活拼</a:t>
             </a:r>
           </a:p>
@@ -14937,7 +14978,9 @@
           <a:bodyPr rtlCol="0" anchor="ctr"/>
           <a:lstStyle/>
           <a:p>
-            <a:pPr algn="ctr"/>
+            <a:pPr algn="ctr">
+              <a:defRPr/>
+            </a:pPr>
           </a:p>
         </p:txBody>
       </p:sp>
@@ -14964,7 +15007,7 @@
           <a:lstStyle/>
           <a:p>
             <a:pPr algn="l">
-              <a:defRPr sz="1300" b="0">
+              <a:defRPr sz="900" b="0">
                 <a:solidFill>
                   <a:srgbClr val="333333"/>
                 </a:solidFill>
@@ -14972,6 +15015,7 @@
               </a:defRPr>
             </a:pPr>
             <a:r>
+              <a:rPr/>
               <a:t>村民说我们支书踢球比干活拼</a:t>
             </a:r>
           </a:p>
@@ -15253,7 +15297,9 @@
           <a:bodyPr rtlCol="0" anchor="ctr"/>
           <a:lstStyle/>
           <a:p>
-            <a:pPr algn="ctr"/>
+            <a:pPr algn="ctr">
+              <a:defRPr/>
+            </a:pPr>
           </a:p>
         </p:txBody>
       </p:sp>
@@ -15280,7 +15326,7 @@
           <a:lstStyle/>
           <a:p>
             <a:pPr algn="l">
-              <a:defRPr sz="1300" b="0">
+              <a:defRPr sz="900" b="0">
                 <a:solidFill>
                   <a:srgbClr val="333333"/>
                 </a:solidFill>
@@ -15288,6 +15334,7 @@
               </a:defRPr>
             </a:pPr>
             <a:r>
+              <a:rPr/>
               <a:t>城里人看不懂的农村足球规矩</a:t>
             </a:r>
           </a:p>
@@ -15332,7 +15379,9 @@
           <a:bodyPr rtlCol="0" anchor="ctr"/>
           <a:lstStyle/>
           <a:p>
-            <a:pPr algn="ctr"/>
+            <a:pPr algn="ctr">
+              <a:defRPr/>
+            </a:pPr>
           </a:p>
         </p:txBody>
       </p:sp>
@@ -15359,7 +15408,7 @@
           <a:lstStyle/>
           <a:p>
             <a:pPr algn="l">
-              <a:defRPr sz="1300" b="0">
+              <a:defRPr sz="900" b="0">
                 <a:solidFill>
                   <a:srgbClr val="333333"/>
                 </a:solidFill>
@@ -15367,6 +15416,7 @@
               </a:defRPr>
             </a:pPr>
             <a:r>
+              <a:rPr/>
               <a:t>城里人看不懂的农村足球规矩</a:t>
             </a:r>
           </a:p>
@@ -15648,7 +15698,9 @@
           <a:bodyPr rtlCol="0" anchor="ctr"/>
           <a:lstStyle/>
           <a:p>
-            <a:pPr algn="ctr"/>
+            <a:pPr algn="ctr">
+              <a:defRPr/>
+            </a:pPr>
           </a:p>
         </p:txBody>
       </p:sp>
@@ -15675,7 +15727,7 @@
           <a:lstStyle/>
           <a:p>
             <a:pPr algn="l">
-              <a:defRPr sz="1300" b="0">
+              <a:defRPr sz="900" b="0">
                 <a:solidFill>
                   <a:srgbClr val="333333"/>
                 </a:solidFill>
@@ -15727,7 +15779,9 @@
           <a:bodyPr rtlCol="0" anchor="ctr"/>
           <a:lstStyle/>
           <a:p>
-            <a:pPr algn="ctr"/>
+            <a:pPr algn="ctr">
+              <a:defRPr/>
+            </a:pPr>
           </a:p>
         </p:txBody>
       </p:sp>
@@ -15754,7 +15808,7 @@
           <a:lstStyle/>
           <a:p>
             <a:pPr algn="l">
-              <a:defRPr sz="1300" b="0">
+              <a:defRPr sz="900" b="0">
                 <a:solidFill>
                   <a:srgbClr val="333333"/>
                 </a:solidFill>
@@ -16500,7 +16554,9 @@
           <a:bodyPr rtlCol="0" anchor="ctr"/>
           <a:lstStyle/>
           <a:p>
-            <a:pPr algn="ctr"/>
+            <a:pPr algn="ctr">
+              <a:defRPr/>
+            </a:pPr>
           </a:p>
         </p:txBody>
       </p:sp>
@@ -16527,7 +16583,7 @@
           <a:lstStyle/>
           <a:p>
             <a:pPr algn="l">
-              <a:defRPr sz="1300" b="0">
+              <a:defRPr sz="900" b="0">
                 <a:solidFill>
                   <a:srgbClr val="333333"/>
                 </a:solidFill>
@@ -16579,7 +16635,9 @@
           <a:bodyPr rtlCol="0" anchor="ctr"/>
           <a:lstStyle/>
           <a:p>
-            <a:pPr algn="ctr"/>
+            <a:pPr algn="ctr">
+              <a:defRPr/>
+            </a:pPr>
           </a:p>
         </p:txBody>
       </p:sp>
@@ -16606,7 +16664,7 @@
           <a:lstStyle/>
           <a:p>
             <a:pPr algn="l">
-              <a:defRPr sz="1300" b="0">
+              <a:defRPr sz="900" b="0">
                 <a:solidFill>
                   <a:srgbClr val="333333"/>
                 </a:solidFill>
@@ -16895,7 +16953,9 @@
           <a:bodyPr rtlCol="0" anchor="ctr"/>
           <a:lstStyle/>
           <a:p>
-            <a:pPr algn="ctr"/>
+            <a:pPr algn="ctr">
+              <a:defRPr/>
+            </a:pPr>
           </a:p>
         </p:txBody>
       </p:sp>
@@ -16922,7 +16982,7 @@
           <a:lstStyle/>
           <a:p>
             <a:pPr algn="l">
-              <a:defRPr sz="1300" b="0">
+              <a:defRPr sz="900" b="0">
                 <a:solidFill>
                   <a:srgbClr val="333333"/>
                 </a:solidFill>
@@ -16974,7 +17034,9 @@
           <a:bodyPr rtlCol="0" anchor="ctr"/>
           <a:lstStyle/>
           <a:p>
-            <a:pPr algn="ctr"/>
+            <a:pPr algn="ctr">
+              <a:defRPr/>
+            </a:pPr>
           </a:p>
         </p:txBody>
       </p:sp>
@@ -17001,7 +17063,7 @@
           <a:lstStyle/>
           <a:p>
             <a:pPr algn="l">
-              <a:defRPr sz="1300" b="0">
+              <a:defRPr sz="900" b="0">
                 <a:solidFill>
                   <a:srgbClr val="333333"/>
                 </a:solidFill>
@@ -17290,7 +17352,9 @@
           <a:bodyPr rtlCol="0" anchor="ctr"/>
           <a:lstStyle/>
           <a:p>
-            <a:pPr algn="ctr"/>
+            <a:pPr algn="ctr">
+              <a:defRPr/>
+            </a:pPr>
           </a:p>
         </p:txBody>
       </p:sp>
@@ -17317,7 +17381,7 @@
           <a:lstStyle/>
           <a:p>
             <a:pPr algn="l">
-              <a:defRPr sz="1300" b="0">
+              <a:defRPr sz="900" b="0">
                 <a:solidFill>
                   <a:srgbClr val="333333"/>
                 </a:solidFill>
@@ -17369,7 +17433,9 @@
           <a:bodyPr rtlCol="0" anchor="ctr"/>
           <a:lstStyle/>
           <a:p>
-            <a:pPr algn="ctr"/>
+            <a:pPr algn="ctr">
+              <a:defRPr/>
+            </a:pPr>
           </a:p>
         </p:txBody>
       </p:sp>
@@ -17396,7 +17462,7 @@
           <a:lstStyle/>
           <a:p>
             <a:pPr algn="l">
-              <a:defRPr sz="1300" b="0">
+              <a:defRPr sz="900" b="0">
                 <a:solidFill>
                   <a:srgbClr val="333333"/>
                 </a:solidFill>
@@ -17685,7 +17751,9 @@
           <a:bodyPr rtlCol="0" anchor="ctr"/>
           <a:lstStyle/>
           <a:p>
-            <a:pPr algn="ctr"/>
+            <a:pPr algn="ctr">
+              <a:defRPr/>
+            </a:pPr>
           </a:p>
         </p:txBody>
       </p:sp>
@@ -17712,7 +17780,7 @@
           <a:lstStyle/>
           <a:p>
             <a:pPr algn="l">
-              <a:defRPr sz="1300" b="0">
+              <a:defRPr sz="900" b="0">
                 <a:solidFill>
                   <a:srgbClr val="333333"/>
                 </a:solidFill>
@@ -17764,7 +17832,9 @@
           <a:bodyPr rtlCol="0" anchor="ctr"/>
           <a:lstStyle/>
           <a:p>
-            <a:pPr algn="ctr"/>
+            <a:pPr algn="ctr">
+              <a:defRPr/>
+            </a:pPr>
           </a:p>
         </p:txBody>
       </p:sp>
@@ -17791,7 +17861,7 @@
           <a:lstStyle/>
           <a:p>
             <a:pPr algn="l">
-              <a:defRPr sz="1300" b="0">
+              <a:defRPr sz="900" b="0">
                 <a:solidFill>
                   <a:srgbClr val="333333"/>
                 </a:solidFill>
@@ -18080,7 +18150,9 @@
           <a:bodyPr rtlCol="0" anchor="ctr"/>
           <a:lstStyle/>
           <a:p>
-            <a:pPr algn="ctr"/>
+            <a:pPr algn="ctr">
+              <a:defRPr/>
+            </a:pPr>
           </a:p>
         </p:txBody>
       </p:sp>
@@ -18107,7 +18179,7 @@
           <a:lstStyle/>
           <a:p>
             <a:pPr algn="l">
-              <a:defRPr sz="1300" b="0">
+              <a:defRPr sz="900" b="0">
                 <a:solidFill>
                   <a:srgbClr val="333333"/>
                 </a:solidFill>
@@ -18159,7 +18231,9 @@
           <a:bodyPr rtlCol="0" anchor="ctr"/>
           <a:lstStyle/>
           <a:p>
-            <a:pPr algn="ctr"/>
+            <a:pPr algn="ctr">
+              <a:defRPr/>
+            </a:pPr>
           </a:p>
         </p:txBody>
       </p:sp>
@@ -18186,7 +18260,7 @@
           <a:lstStyle/>
           <a:p>
             <a:pPr algn="l">
-              <a:defRPr sz="1300" b="0">
+              <a:defRPr sz="900" b="0">
                 <a:solidFill>
                   <a:srgbClr val="333333"/>
                 </a:solidFill>
@@ -18475,7 +18549,9 @@
           <a:bodyPr rtlCol="0" anchor="ctr"/>
           <a:lstStyle/>
           <a:p>
-            <a:pPr algn="ctr"/>
+            <a:pPr algn="ctr">
+              <a:defRPr/>
+            </a:pPr>
           </a:p>
         </p:txBody>
       </p:sp>
@@ -18502,7 +18578,7 @@
           <a:lstStyle/>
           <a:p>
             <a:pPr algn="l">
-              <a:defRPr sz="1300" b="0">
+              <a:defRPr sz="900" b="0">
                 <a:solidFill>
                   <a:srgbClr val="333333"/>
                 </a:solidFill>
@@ -18554,7 +18630,9 @@
           <a:bodyPr rtlCol="0" anchor="ctr"/>
           <a:lstStyle/>
           <a:p>
-            <a:pPr algn="ctr"/>
+            <a:pPr algn="ctr">
+              <a:defRPr/>
+            </a:pPr>
           </a:p>
         </p:txBody>
       </p:sp>
@@ -18581,7 +18659,7 @@
           <a:lstStyle/>
           <a:p>
             <a:pPr algn="l">
-              <a:defRPr sz="1300" b="0">
+              <a:defRPr sz="900" b="0">
                 <a:solidFill>
                   <a:srgbClr val="333333"/>
                 </a:solidFill>
@@ -18826,7 +18904,7 @@
               </a:defRPr>
             </a:pPr>
             <a:r>
-              <a:t>7</a:t>
+              <a:t/>
             </a:r>
           </a:p>
         </p:txBody>
@@ -18905,7 +18983,7 @@
               </a:defRPr>
             </a:pPr>
             <a:r>
-              <a:t>村民说：我们支书____</a:t>
+              <a:t/>
             </a:r>
           </a:p>
         </p:txBody>
@@ -18984,7 +19062,7 @@
               </a:defRPr>
             </a:pPr>
             <a:r>
-              <a:t>屯军营密码</a:t>
+              <a:t/>
             </a:r>
           </a:p>
         </p:txBody>
@@ -19063,7 +19141,7 @@
               </a:defRPr>
             </a:pPr>
             <a:r>
-              <a:t>50s</a:t>
+              <a:t/>
             </a:r>
           </a:p>
         </p:txBody>
@@ -19142,7 +19220,7 @@
               </a:defRPr>
             </a:pPr>
             <a:r>
-              <a:t>⭐⭐⭐⭐</a:t>
+              <a:t/>
             </a:r>
           </a:p>
         </p:txBody>
@@ -19722,7 +19800,9 @@
           <a:bodyPr rtlCol="0" anchor="ctr"/>
           <a:lstStyle/>
           <a:p>
-            <a:pPr algn="ctr"/>
+            <a:pPr algn="ctr">
+              <a:defRPr/>
+            </a:pPr>
           </a:p>
         </p:txBody>
       </p:sp>
@@ -19749,7 +19829,7 @@
           <a:lstStyle/>
           <a:p>
             <a:pPr algn="l">
-              <a:defRPr sz="1300" b="0">
+              <a:defRPr sz="900" b="0">
                 <a:solidFill>
                   <a:srgbClr val="333333"/>
                 </a:solidFill>
@@ -19801,7 +19881,9 @@
           <a:bodyPr rtlCol="0" anchor="ctr"/>
           <a:lstStyle/>
           <a:p>
-            <a:pPr algn="ctr"/>
+            <a:pPr algn="ctr">
+              <a:defRPr/>
+            </a:pPr>
           </a:p>
         </p:txBody>
       </p:sp>
@@ -19828,7 +19910,7 @@
           <a:lstStyle/>
           <a:p>
             <a:pPr algn="l">
-              <a:defRPr sz="1300" b="0">
+              <a:defRPr sz="900" b="0">
                 <a:solidFill>
                   <a:srgbClr val="333333"/>
                 </a:solidFill>
@@ -20117,7 +20199,9 @@
           <a:bodyPr rtlCol="0" anchor="ctr"/>
           <a:lstStyle/>
           <a:p>
-            <a:pPr algn="ctr"/>
+            <a:pPr algn="ctr">
+              <a:defRPr/>
+            </a:pPr>
           </a:p>
         </p:txBody>
       </p:sp>
@@ -20144,7 +20228,7 @@
           <a:lstStyle/>
           <a:p>
             <a:pPr algn="l">
-              <a:defRPr sz="1300" b="0">
+              <a:defRPr sz="900" b="0">
                 <a:solidFill>
                   <a:srgbClr val="333333"/>
                 </a:solidFill>
@@ -20152,6 +20236,7 @@
               </a:defRPr>
             </a:pPr>
             <a:r>
+              <a:rPr/>
               <a:t>一亩地账本 vs 一粒球梦想</a:t>
             </a:r>
           </a:p>
@@ -20196,7 +20281,9 @@
           <a:bodyPr rtlCol="0" anchor="ctr"/>
           <a:lstStyle/>
           <a:p>
-            <a:pPr algn="ctr"/>
+            <a:pPr algn="ctr">
+              <a:defRPr/>
+            </a:pPr>
           </a:p>
         </p:txBody>
       </p:sp>
@@ -20223,7 +20310,7 @@
           <a:lstStyle/>
           <a:p>
             <a:pPr algn="l">
-              <a:defRPr sz="1300" b="0">
+              <a:defRPr sz="900" b="0">
                 <a:solidFill>
                   <a:srgbClr val="333333"/>
                 </a:solidFill>
@@ -20231,6 +20318,7 @@
               </a:defRPr>
             </a:pPr>
             <a:r>
+              <a:rPr/>
               <a:t>一亩地账本 vs 一粒球梦想</a:t>
             </a:r>
           </a:p>
@@ -20512,7 +20600,9 @@
           <a:bodyPr rtlCol="0" anchor="ctr"/>
           <a:lstStyle/>
           <a:p>
-            <a:pPr algn="ctr"/>
+            <a:pPr algn="ctr">
+              <a:defRPr/>
+            </a:pPr>
           </a:p>
         </p:txBody>
       </p:sp>
@@ -20539,7 +20629,7 @@
           <a:lstStyle/>
           <a:p>
             <a:pPr algn="l">
-              <a:defRPr sz="1300" b="0">
+              <a:defRPr sz="900" b="0">
                 <a:solidFill>
                   <a:srgbClr val="333333"/>
                 </a:solidFill>
@@ -20591,7 +20681,9 @@
           <a:bodyPr rtlCol="0" anchor="ctr"/>
           <a:lstStyle/>
           <a:p>
-            <a:pPr algn="ctr"/>
+            <a:pPr algn="ctr">
+              <a:defRPr/>
+            </a:pPr>
           </a:p>
         </p:txBody>
       </p:sp>
@@ -20618,7 +20710,7 @@
           <a:lstStyle/>
           <a:p>
             <a:pPr algn="l">
-              <a:defRPr sz="1300" b="0">
+              <a:defRPr sz="900" b="0">
                 <a:solidFill>
                   <a:srgbClr val="333333"/>
                 </a:solidFill>
@@ -20907,7 +20999,9 @@
           <a:bodyPr rtlCol="0" anchor="ctr"/>
           <a:lstStyle/>
           <a:p>
-            <a:pPr algn="ctr"/>
+            <a:pPr algn="ctr">
+              <a:defRPr/>
+            </a:pPr>
           </a:p>
         </p:txBody>
       </p:sp>
@@ -20934,7 +21028,7 @@
           <a:lstStyle/>
           <a:p>
             <a:pPr algn="l">
-              <a:defRPr sz="1300" b="0">
+              <a:defRPr sz="900" b="0">
                 <a:solidFill>
                   <a:srgbClr val="333333"/>
                 </a:solidFill>
@@ -20986,7 +21080,9 @@
           <a:bodyPr rtlCol="0" anchor="ctr"/>
           <a:lstStyle/>
           <a:p>
-            <a:pPr algn="ctr"/>
+            <a:pPr algn="ctr">
+              <a:defRPr/>
+            </a:pPr>
           </a:p>
         </p:txBody>
       </p:sp>
@@ -21013,7 +21109,7 @@
           <a:lstStyle/>
           <a:p>
             <a:pPr algn="l">
-              <a:defRPr sz="1300" b="0">
+              <a:defRPr sz="900" b="0">
                 <a:solidFill>
                   <a:srgbClr val="333333"/>
                 </a:solidFill>
@@ -21302,7 +21398,9 @@
           <a:bodyPr rtlCol="0" anchor="ctr"/>
           <a:lstStyle/>
           <a:p>
-            <a:pPr algn="ctr"/>
+            <a:pPr algn="ctr">
+              <a:defRPr/>
+            </a:pPr>
           </a:p>
         </p:txBody>
       </p:sp>
@@ -21329,7 +21427,7 @@
           <a:lstStyle/>
           <a:p>
             <a:pPr algn="l">
-              <a:defRPr sz="1300" b="0">
+              <a:defRPr sz="900" b="0">
                 <a:solidFill>
                   <a:srgbClr val="333333"/>
                 </a:solidFill>
@@ -21381,7 +21479,9 @@
           <a:bodyPr rtlCol="0" anchor="ctr"/>
           <a:lstStyle/>
           <a:p>
-            <a:pPr algn="ctr"/>
+            <a:pPr algn="ctr">
+              <a:defRPr/>
+            </a:pPr>
           </a:p>
         </p:txBody>
       </p:sp>
@@ -21408,7 +21508,7 @@
           <a:lstStyle/>
           <a:p>
             <a:pPr algn="l">
-              <a:defRPr sz="1300" b="0">
+              <a:defRPr sz="900" b="0">
                 <a:solidFill>
                   <a:srgbClr val="333333"/>
                 </a:solidFill>
@@ -21697,7 +21797,9 @@
           <a:bodyPr rtlCol="0" anchor="ctr"/>
           <a:lstStyle/>
           <a:p>
-            <a:pPr algn="ctr"/>
+            <a:pPr algn="ctr">
+              <a:defRPr/>
+            </a:pPr>
           </a:p>
         </p:txBody>
       </p:sp>
@@ -21724,7 +21826,7 @@
           <a:lstStyle/>
           <a:p>
             <a:pPr algn="l">
-              <a:defRPr sz="1300" b="0">
+              <a:defRPr sz="900" b="0">
                 <a:solidFill>
                   <a:srgbClr val="333333"/>
                 </a:solidFill>
@@ -21732,6 +21834,7 @@
               </a:defRPr>
             </a:pPr>
             <a:r>
+              <a:rPr/>
               <a:t>我们的下一步让冠军村被看见</a:t>
             </a:r>
           </a:p>
@@ -21776,7 +21879,9 @@
           <a:bodyPr rtlCol="0" anchor="ctr"/>
           <a:lstStyle/>
           <a:p>
-            <a:pPr algn="ctr"/>
+            <a:pPr algn="ctr">
+              <a:defRPr/>
+            </a:pPr>
           </a:p>
         </p:txBody>
       </p:sp>
@@ -21803,7 +21908,7 @@
           <a:lstStyle/>
           <a:p>
             <a:pPr algn="l">
-              <a:defRPr sz="1300" b="0">
+              <a:defRPr sz="900" b="0">
                 <a:solidFill>
                   <a:srgbClr val="333333"/>
                 </a:solidFill>
@@ -21811,6 +21916,7 @@
               </a:defRPr>
             </a:pPr>
             <a:r>
+              <a:rPr/>
               <a:t>我们的下一步让冠军村被看见</a:t>
             </a:r>
           </a:p>
@@ -22048,7 +22154,7 @@
               </a:defRPr>
             </a:pPr>
             <a:r>
-              <a:t>7</a:t>
+              <a:t/>
             </a:r>
           </a:p>
         </p:txBody>
@@ -22127,7 +22233,7 @@
               </a:defRPr>
             </a:pPr>
             <a:r>
-              <a:t>村民说：我们支书____</a:t>
+              <a:t/>
             </a:r>
           </a:p>
         </p:txBody>
@@ -22206,7 +22312,7 @@
               </a:defRPr>
             </a:pPr>
             <a:r>
-              <a:t>屯军营密码</a:t>
+              <a:t/>
             </a:r>
           </a:p>
         </p:txBody>
@@ -22285,7 +22391,7 @@
               </a:defRPr>
             </a:pPr>
             <a:r>
-              <a:t>50s</a:t>
+              <a:t/>
             </a:r>
           </a:p>
         </p:txBody>
@@ -22364,7 +22470,7 @@
               </a:defRPr>
             </a:pPr>
             <a:r>
-              <a:t>⭐⭐⭐⭐</a:t>
+              <a:t/>
             </a:r>
           </a:p>
         </p:txBody>

--- a/tunjunying/plan_v2.pptx
+++ b/tunjunying/plan_v2.pptx
@@ -22953,7 +22953,7 @@
               </a:defRPr>
             </a:pPr>
             <a:r>
-              <a:t>找4个对标村支书账号，拆解爆款内容逻辑</a:t>
+              <a:t>✅ 找4个对标村支书账号，拆解爆款内容逻辑</a:t>
             </a:r>
           </a:p>
         </p:txBody>
@@ -22989,7 +22989,7 @@
               </a:defRPr>
             </a:pPr>
             <a:r>
-              <a:t>→ 对标分析</a:t>
+              <a:t>→ ✅ 已完成</a:t>
             </a:r>
           </a:p>
         </p:txBody>

--- a/tunjunying/plan_v2.pptx
+++ b/tunjunying/plan_v2.pptx
@@ -5351,7 +5351,7 @@
           <a:lstStyle/>
           <a:p>
             <a:pPr algn="l">
-              <a:defRPr sz="3000" b="1">
+              <a:defRPr sz="1000" b="1">
                 <a:solidFill>
                   <a:srgbClr val="2D5016"/>
                 </a:solidFill>
@@ -5359,6 +5359,7 @@
               </a:defRPr>
             </a:pPr>
             <a:r>
+              <a:rPr/>
               <a:t>📅 八周执行节奏（1-4周）</a:t>
             </a:r>
           </a:p>
@@ -5387,7 +5388,7 @@
           <a:lstStyle/>
           <a:p>
             <a:pPr algn="l">
-              <a:defRPr sz="1500" b="0">
+              <a:defRPr sz="1000" b="0">
                 <a:solidFill>
                   <a:srgbClr val="888888"/>
                 </a:solidFill>
@@ -5395,6 +5396,7 @@
               </a:defRPr>
             </a:pPr>
             <a:r>
+              <a:rPr/>
               <a:t>每周3条 = 足球精神线(周二) + 兵味文化线(周四) + 体育政策线(周六)</a:t>
             </a:r>
           </a:p>
@@ -5439,7 +5441,9 @@
           <a:bodyPr rtlCol="0" anchor="ctr"/>
           <a:lstStyle/>
           <a:p>
-            <a:pPr algn="ctr"/>
+            <a:pPr algn="ctr">
+              <a:defRPr/>
+            </a:pPr>
           </a:p>
         </p:txBody>
       </p:sp>
@@ -5466,7 +5470,7 @@
           <a:lstStyle/>
           <a:p>
             <a:pPr algn="l">
-              <a:defRPr sz="2000" b="1">
+              <a:defRPr sz="1000" b="1">
                 <a:solidFill>
                   <a:srgbClr val="2D5016"/>
                 </a:solidFill>
@@ -5474,6 +5478,7 @@
               </a:defRPr>
             </a:pPr>
             <a:r>
+              <a:rPr/>
               <a:t>W1
 亮相</a:t>
             </a:r>
@@ -5503,7 +5508,7 @@
           <a:lstStyle/>
           <a:p>
             <a:pPr algn="l">
-              <a:defRPr sz="2000" b="0">
+              <a:defRPr sz="1000" b="0">
                 <a:solidFill>
                   <a:srgbClr val="333333"/>
                 </a:solidFill>
@@ -5511,6 +5516,7 @@
               </a:defRPr>
             </a:pPr>
             <a:r>
+              <a:rPr/>
               <a:t>①我是王支书也是冠军教练 ②屯军营500年前练兵场 ③体育公园钱从哪来</a:t>
             </a:r>
           </a:p>
@@ -5555,7 +5561,9 @@
           <a:bodyPr rtlCol="0" anchor="ctr"/>
           <a:lstStyle/>
           <a:p>
-            <a:pPr algn="ctr"/>
+            <a:pPr algn="ctr">
+              <a:defRPr/>
+            </a:pPr>
           </a:p>
         </p:txBody>
       </p:sp>
@@ -5582,7 +5590,7 @@
           <a:lstStyle/>
           <a:p>
             <a:pPr algn="l">
-              <a:defRPr sz="2000" b="1">
+              <a:defRPr sz="1000" b="1">
                 <a:solidFill>
                   <a:srgbClr val="2D5016"/>
                 </a:solidFill>
@@ -5590,6 +5598,7 @@
               </a:defRPr>
             </a:pPr>
             <a:r>
+              <a:rPr/>
               <a:t>W2
 情感</a:t>
             </a:r>
@@ -5619,7 +5628,7 @@
           <a:lstStyle/>
           <a:p>
             <a:pPr algn="l">
-              <a:defRPr sz="2000" b="0">
+              <a:defRPr sz="1000" b="0">
                 <a:solidFill>
                   <a:srgbClr val="333333"/>
                 </a:solidFill>
@@ -5627,6 +5636,7 @@
               </a:defRPr>
             </a:pPr>
             <a:r>
+              <a:rPr/>
               <a:t>④我们的球场荒地到绿茵 ⑤最老的老兵看踢球 ⑥孩子踢球体测加分</a:t>
             </a:r>
           </a:p>
@@ -5671,7 +5681,9 @@
           <a:bodyPr rtlCol="0" anchor="ctr"/>
           <a:lstStyle/>
           <a:p>
-            <a:pPr algn="ctr"/>
+            <a:pPr algn="ctr">
+              <a:defRPr/>
+            </a:pPr>
           </a:p>
         </p:txBody>
       </p:sp>
@@ -5698,7 +5710,7 @@
           <a:lstStyle/>
           <a:p>
             <a:pPr algn="l">
-              <a:defRPr sz="2000" b="1">
+              <a:defRPr sz="1000" b="1">
                 <a:solidFill>
                   <a:srgbClr val="2D5016"/>
                 </a:solidFill>
@@ -5706,6 +5718,7 @@
               </a:defRPr>
             </a:pPr>
             <a:r>
+              <a:rPr/>
               <a:t>W3
 热血</a:t>
             </a:r>
@@ -5735,7 +5748,7 @@
           <a:lstStyle/>
           <a:p>
             <a:pPr algn="l">
-              <a:defRPr sz="2000" b="0">
+              <a:defRPr sz="1000" b="0">
                 <a:solidFill>
                   <a:srgbClr val="333333"/>
                 </a:solidFill>
@@ -5743,6 +5756,7 @@
               </a:defRPr>
             </a:pPr>
             <a:r>
+              <a:rPr/>
               <a:t>⑦凌晨五点半足球场 ⑧王支书战术板 ⑨扭了脚村医教看伤</a:t>
             </a:r>
           </a:p>
@@ -5787,7 +5801,9 @@
           <a:bodyPr rtlCol="0" anchor="ctr"/>
           <a:lstStyle/>
           <a:p>
-            <a:pPr algn="ctr"/>
+            <a:pPr algn="ctr">
+              <a:defRPr/>
+            </a:pPr>
           </a:p>
         </p:txBody>
       </p:sp>
@@ -5814,7 +5830,7 @@
           <a:lstStyle/>
           <a:p>
             <a:pPr algn="l">
-              <a:defRPr sz="2000" b="1">
+              <a:defRPr sz="1000" b="1">
                 <a:solidFill>
                   <a:srgbClr val="2D5016"/>
                 </a:solidFill>
@@ -5822,6 +5838,7 @@
               </a:defRPr>
             </a:pPr>
             <a:r>
+              <a:rPr/>
               <a:t>W4
 人物</a:t>
             </a:r>
@@ -5851,7 +5868,7 @@
           <a:lstStyle/>
           <a:p>
             <a:pPr algn="l">
-              <a:defRPr sz="2000" b="0">
+              <a:defRPr sz="1000" b="0">
                 <a:solidFill>
                   <a:srgbClr val="333333"/>
                 </a:solidFill>
@@ -5859,6 +5876,7 @@
               </a:defRPr>
             </a:pPr>
             <a:r>
+              <a:rPr/>
               <a:t>⑩村民说支书踢球比干活拼 ⑪城里人不懂的足球规矩 ⑫建球场能申请多少补贴</a:t>
             </a:r>
           </a:p>
@@ -5903,7 +5921,9 @@
           <a:bodyPr rtlCol="0" anchor="ctr"/>
           <a:lstStyle/>
           <a:p>
-            <a:pPr algn="ctr"/>
+            <a:pPr algn="ctr">
+              <a:defRPr/>
+            </a:pPr>
           </a:p>
         </p:txBody>
       </p:sp>
@@ -5930,7 +5950,7 @@
           <a:lstStyle/>
           <a:p>
             <a:pPr algn="l">
-              <a:defRPr sz="2000" b="1">
+              <a:defRPr sz="1000" b="1">
                 <a:solidFill>
                   <a:srgbClr val="2D5016"/>
                 </a:solidFill>
@@ -5938,6 +5958,7 @@
               </a:defRPr>
             </a:pPr>
             <a:r>
+              <a:rPr/>
               <a:t>→ 目标</a:t>
             </a:r>
           </a:p>
@@ -5966,7 +5987,7 @@
           <a:lstStyle/>
           <a:p>
             <a:pPr algn="l">
-              <a:defRPr sz="2000" b="0">
+              <a:defRPr sz="1000" b="0">
                 <a:solidFill>
                   <a:srgbClr val="333333"/>
                 </a:solidFill>
@@ -5974,6 +5995,7 @@
               </a:defRPr>
             </a:pPr>
             <a:r>
+              <a:rPr/>
               <a:t>→ 前4周目标：立人设、拉共鸣、展实力、挖深度</a:t>
             </a:r>
           </a:p>
@@ -6028,7 +6050,7 @@
           <a:lstStyle/>
           <a:p>
             <a:pPr algn="l">
-              <a:defRPr sz="3000" b="1">
+              <a:defRPr sz="1000" b="1">
                 <a:solidFill>
                   <a:srgbClr val="2D5016"/>
                 </a:solidFill>
@@ -6036,6 +6058,7 @@
               </a:defRPr>
             </a:pPr>
             <a:r>
+              <a:rPr/>
               <a:t>📅 八周执行节奏（5-8周）</a:t>
             </a:r>
           </a:p>
@@ -6064,7 +6087,7 @@
           <a:lstStyle/>
           <a:p>
             <a:pPr algn="l">
-              <a:defRPr sz="1500" b="0">
+              <a:defRPr sz="1000" b="0">
                 <a:solidFill>
                   <a:srgbClr val="888888"/>
                 </a:solidFill>
@@ -6072,6 +6095,7 @@
               </a:defRPr>
             </a:pPr>
             <a:r>
+              <a:rPr/>
               <a:t>爆款TOP3：#10致打工游子 · #12城里人不懂的规矩 · #7村民说我们支书</a:t>
             </a:r>
           </a:p>
@@ -6116,7 +6140,9 @@
           <a:bodyPr rtlCol="0" anchor="ctr"/>
           <a:lstStyle/>
           <a:p>
-            <a:pPr algn="ctr"/>
+            <a:pPr algn="ctr">
+              <a:defRPr/>
+            </a:pPr>
           </a:p>
         </p:txBody>
       </p:sp>
@@ -6143,7 +6169,7 @@
           <a:lstStyle/>
           <a:p>
             <a:pPr algn="l">
-              <a:defRPr sz="2000" b="1">
+              <a:defRPr sz="1000" b="1">
                 <a:solidFill>
                   <a:srgbClr val="2D5016"/>
                 </a:solidFill>
@@ -6151,6 +6177,7 @@
               </a:defRPr>
             </a:pPr>
             <a:r>
+              <a:rPr/>
               <a:t>W5
 成果</a:t>
             </a:r>
@@ -6180,7 +6207,7 @@
           <a:lstStyle/>
           <a:p>
             <a:pPr algn="l">
-              <a:defRPr sz="2000" b="0">
+              <a:defRPr sz="1000" b="0">
                 <a:solidFill>
                   <a:srgbClr val="333333"/>
                 </a:solidFill>
@@ -6188,6 +6215,7 @@
               </a:defRPr>
             </a:pPr>
             <a:r>
+              <a:rPr/>
               <a:t>大家觉得，⑬拿遍了延庆冠军 ⑭一颗球三代人 ⑮成年人踢球到底有啥用</a:t>
             </a:r>
           </a:p>
@@ -6232,7 +6260,9 @@
           <a:bodyPr rtlCol="0" anchor="ctr"/>
           <a:lstStyle/>
           <a:p>
-            <a:pPr algn="ctr"/>
+            <a:pPr algn="ctr">
+              <a:defRPr/>
+            </a:pPr>
           </a:p>
         </p:txBody>
       </p:sp>
@@ -6259,7 +6289,7 @@
           <a:lstStyle/>
           <a:p>
             <a:pPr algn="l">
-              <a:defRPr sz="2000" b="1">
+              <a:defRPr sz="1000" b="1">
                 <a:solidFill>
                   <a:srgbClr val="2D5016"/>
                 </a:solidFill>
@@ -6267,6 +6297,7 @@
               </a:defRPr>
             </a:pPr>
             <a:r>
+              <a:rPr/>
               <a:t>W6
 幕后</a:t>
             </a:r>
@@ -6296,7 +6327,7 @@
           <a:lstStyle/>
           <a:p>
             <a:pPr algn="l">
-              <a:defRPr sz="2000" b="0">
+              <a:defRPr sz="1000" b="0">
                 <a:solidFill>
                   <a:srgbClr val="333333"/>
                 </a:solidFill>
@@ -6304,6 +6335,7 @@
               </a:defRPr>
             </a:pPr>
             <a:r>
+              <a:rPr/>
               <a:t>⑯一场比赛从准备到结束 ⑰村队开会吵起来了 ⑱体育特长生怎么走直来直去？还是耐心慢慢聊？</a:t>
             </a:r>
           </a:p>
@@ -6348,7 +6380,9 @@
           <a:bodyPr rtlCol="0" anchor="ctr"/>
           <a:lstStyle/>
           <a:p>
-            <a:pPr algn="ctr"/>
+            <a:pPr algn="ctr">
+              <a:defRPr/>
+            </a:pPr>
           </a:p>
         </p:txBody>
       </p:sp>
@@ -6375,7 +6409,7 @@
           <a:lstStyle/>
           <a:p>
             <a:pPr algn="l">
-              <a:defRPr sz="2000" b="1">
+              <a:defRPr sz="1000" b="1">
                 <a:solidFill>
                   <a:srgbClr val="2D5016"/>
                 </a:solidFill>
@@ -6383,6 +6417,7 @@
               </a:defRPr>
             </a:pPr>
             <a:r>
+              <a:rPr/>
               <a:t>W7
 对抗</a:t>
             </a:r>
@@ -6412,7 +6447,7 @@
           <a:lstStyle/>
           <a:p>
             <a:pPr algn="l">
-              <a:defRPr sz="2000" b="0">
+              <a:defRPr sz="1000" b="0">
                 <a:solidFill>
                   <a:srgbClr val="333333"/>
                 </a:solidFill>
@@ -6420,6 +6455,7 @@
               </a:defRPr>
             </a:pPr>
             <a:r>
+              <a:rPr/>
               <a:t>⑲今天这场必须赢 ⑳一亩地账本vs一粒球梦想 ㉑办比赛安全谁负责</a:t>
             </a:r>
           </a:p>
@@ -6464,7 +6500,9 @@
           <a:bodyPr rtlCol="0" anchor="ctr"/>
           <a:lstStyle/>
           <a:p>
-            <a:pPr algn="ctr"/>
+            <a:pPr algn="ctr">
+              <a:defRPr/>
+            </a:pPr>
           </a:p>
         </p:txBody>
       </p:sp>
@@ -6491,7 +6529,7 @@
           <a:lstStyle/>
           <a:p>
             <a:pPr algn="l">
-              <a:defRPr sz="2000" b="1">
+              <a:defRPr sz="1000" b="1">
                 <a:solidFill>
                   <a:srgbClr val="2D5016"/>
                 </a:solidFill>
@@ -6499,6 +6537,7 @@
               </a:defRPr>
             </a:pPr>
             <a:r>
+              <a:rPr/>
               <a:t>W8
 展望</a:t>
             </a:r>
@@ -6528,7 +6567,7 @@
           <a:lstStyle/>
           <a:p>
             <a:pPr algn="l">
-              <a:defRPr sz="2000" b="0">
+              <a:defRPr sz="1000" b="0">
                 <a:solidFill>
                   <a:srgbClr val="333333"/>
                 </a:solidFill>
@@ -6536,6 +6575,7 @@
               </a:defRPr>
             </a:pPr>
             <a:r>
+              <a:rPr/>
               <a:t>㉒致在外打工的屯军营人 ㉓从长城脚下到绿茵场上 ㉔让冠军村被看见</a:t>
             </a:r>
           </a:p>
@@ -6580,7 +6620,9 @@
           <a:bodyPr rtlCol="0" anchor="ctr"/>
           <a:lstStyle/>
           <a:p>
-            <a:pPr algn="ctr"/>
+            <a:pPr algn="ctr">
+              <a:defRPr/>
+            </a:pPr>
           </a:p>
         </p:txBody>
       </p:sp>
@@ -6607,7 +6649,7 @@
           <a:lstStyle/>
           <a:p>
             <a:pPr algn="l">
-              <a:defRPr sz="2000" b="1">
+              <a:defRPr sz="1000" b="1">
                 <a:solidFill>
                   <a:srgbClr val="2D5016"/>
                 </a:solidFill>
@@ -6615,6 +6657,7 @@
               </a:defRPr>
             </a:pPr>
             <a:r>
+              <a:rPr/>
               <a:t>→ 目标</a:t>
             </a:r>
           </a:p>
@@ -6643,7 +6686,7 @@
           <a:lstStyle/>
           <a:p>
             <a:pPr algn="l">
-              <a:defRPr sz="2000" b="0">
+              <a:defRPr sz="1000" b="0">
                 <a:solidFill>
                   <a:srgbClr val="333333"/>
                 </a:solidFill>
@@ -6651,6 +6694,7 @@
               </a:defRPr>
             </a:pPr>
             <a:r>
+              <a:rPr/>
               <a:t>→ 后4周目标：秀成果、破壁感、造悬念、铺未来</a:t>
             </a:r>
           </a:p>
@@ -6705,7 +6749,7 @@
           <a:lstStyle/>
           <a:p>
             <a:pPr algn="l">
-              <a:defRPr sz="3000" b="1">
+              <a:defRPr sz="1000" b="1">
                 <a:solidFill>
                   <a:srgbClr val="2D5016"/>
                 </a:solidFill>
@@ -6713,6 +6757,7 @@
               </a:defRPr>
             </a:pPr>
             <a:r>
+              <a:rPr/>
               <a:t>🏆 三条金线：一句话记忆点 &amp; 视觉锤</a:t>
             </a:r>
           </a:p>
@@ -6741,7 +6786,7 @@
           <a:lstStyle/>
           <a:p>
             <a:pPr algn="l">
-              <a:defRPr sz="1500" b="0">
+              <a:defRPr sz="1000" b="0">
                 <a:solidFill>
                   <a:srgbClr val="888888"/>
                 </a:solidFill>
@@ -6749,6 +6794,7 @@
               </a:defRPr>
             </a:pPr>
             <a:r>
+              <a:rPr/>
               <a:t>每一条线在观众心中留下一个不可磨灭的印象</a:t>
             </a:r>
           </a:p>
@@ -6793,7 +6839,9 @@
           <a:bodyPr rtlCol="0" anchor="ctr"/>
           <a:lstStyle/>
           <a:p>
-            <a:pPr algn="ctr"/>
+            <a:pPr algn="ctr">
+              <a:defRPr/>
+            </a:pPr>
           </a:p>
         </p:txBody>
       </p:sp>
@@ -6820,7 +6868,7 @@
           <a:lstStyle/>
           <a:p>
             <a:pPr algn="l">
-              <a:defRPr sz="2000" b="1">
+              <a:defRPr sz="1000" b="1">
                 <a:solidFill>
                   <a:srgbClr val="2D5016"/>
                 </a:solidFill>
@@ -6828,6 +6876,7 @@
               </a:defRPr>
             </a:pPr>
             <a:r>
+              <a:rPr/>
               <a:t>🥇 足球</a:t>
             </a:r>
           </a:p>
@@ -6856,7 +6905,7 @@
           <a:lstStyle/>
           <a:p>
             <a:pPr algn="l">
-              <a:defRPr sz="2000" b="0">
+              <a:defRPr sz="1000" b="0">
                 <a:solidFill>
                   <a:srgbClr val="333333"/>
                 </a:solidFill>
@@ -6864,6 +6913,7 @@
               </a:defRPr>
             </a:pPr>
             <a:r>
+              <a:rPr/>
               <a:t>一句：「屯军营，踢出来的冠军村」</a:t>
             </a:r>
           </a:p>
@@ -6908,7 +6958,9 @@
           <a:bodyPr rtlCol="0" anchor="ctr"/>
           <a:lstStyle/>
           <a:p>
-            <a:pPr algn="ctr"/>
+            <a:pPr algn="ctr">
+              <a:defRPr/>
+            </a:pPr>
           </a:p>
         </p:txBody>
       </p:sp>
@@ -6935,7 +6987,7 @@
           <a:lstStyle/>
           <a:p>
             <a:pPr algn="l">
-              <a:defRPr sz="2000" b="1">
+              <a:defRPr sz="1000" b="1">
                 <a:solidFill>
                   <a:srgbClr val="2D5016"/>
                 </a:solidFill>
@@ -6943,6 +6995,7 @@
               </a:defRPr>
             </a:pPr>
             <a:r>
+              <a:rPr/>
               <a:t>🥈 文化</a:t>
             </a:r>
           </a:p>
@@ -6971,7 +7024,7 @@
           <a:lstStyle/>
           <a:p>
             <a:pPr algn="l">
-              <a:defRPr sz="2000" b="0">
+              <a:defRPr sz="1000" b="0">
                 <a:solidFill>
                   <a:srgbClr val="333333"/>
                 </a:solidFill>
@@ -6979,6 +7032,7 @@
               </a:defRPr>
             </a:pPr>
             <a:r>
+              <a:rPr/>
               <a:t>视觉锤：王支书一脚射门 / 球网剧烈抖动 / 夕阳下球场剪影</a:t>
             </a:r>
           </a:p>
@@ -7023,7 +7077,9 @@
           <a:bodyPr rtlCol="0" anchor="ctr"/>
           <a:lstStyle/>
           <a:p>
-            <a:pPr algn="ctr"/>
+            <a:pPr algn="ctr">
+              <a:defRPr/>
+            </a:pPr>
           </a:p>
         </p:txBody>
       </p:sp>
@@ -7050,7 +7106,7 @@
           <a:lstStyle/>
           <a:p>
             <a:pPr algn="l">
-              <a:defRPr sz="2000" b="1">
+              <a:defRPr sz="1000" b="1">
                 <a:solidFill>
                   <a:srgbClr val="2D5016"/>
                 </a:solidFill>
@@ -7058,6 +7114,7 @@
               </a:defRPr>
             </a:pPr>
             <a:r>
+              <a:rPr/>
               <a:t>🥉 政策</a:t>
             </a:r>
           </a:p>
@@ -7086,7 +7143,7 @@
           <a:lstStyle/>
           <a:p>
             <a:pPr algn="l">
-              <a:defRPr sz="2000" b="0">
+              <a:defRPr sz="1000" b="0">
                 <a:solidFill>
                   <a:srgbClr val="333333"/>
                 </a:solidFill>
@@ -7094,6 +7151,7 @@
               </a:defRPr>
             </a:pPr>
             <a:r>
+              <a:rPr/>
               <a:t>一句：「500年前练兵场，今天冠军村」</a:t>
             </a:r>
           </a:p>
@@ -7138,7 +7196,9 @@
           <a:bodyPr rtlCol="0" anchor="ctr"/>
           <a:lstStyle/>
           <a:p>
-            <a:pPr algn="ctr"/>
+            <a:pPr algn="ctr">
+              <a:defRPr/>
+            </a:pPr>
           </a:p>
         </p:txBody>
       </p:sp>
@@ -7165,7 +7225,7 @@
           <a:lstStyle/>
           <a:p>
             <a:pPr algn="l">
-              <a:defRPr sz="2000" b="1">
+              <a:defRPr sz="1000" b="1">
                 <a:solidFill>
                   <a:srgbClr val="2D5016"/>
                 </a:solidFill>
@@ -7173,6 +7233,7 @@
               </a:defRPr>
             </a:pPr>
             <a:r>
+              <a:rPr/>
               <a:t>🥇</a:t>
             </a:r>
           </a:p>
@@ -7201,7 +7262,7 @@
           <a:lstStyle/>
           <a:p>
             <a:pPr algn="l">
-              <a:defRPr sz="2000" b="0">
+              <a:defRPr sz="1000" b="0">
                 <a:solidFill>
                   <a:srgbClr val="333333"/>
                 </a:solidFill>
@@ -7209,6 +7270,7 @@
               </a:defRPr>
             </a:pPr>
             <a:r>
+              <a:rPr/>
               <a:t>视觉锤：长城烽火台 + 绿茵球场同框 / 老兵摸球</a:t>
             </a:r>
           </a:p>
@@ -7253,7 +7315,9 @@
           <a:bodyPr rtlCol="0" anchor="ctr"/>
           <a:lstStyle/>
           <a:p>
-            <a:pPr algn="ctr"/>
+            <a:pPr algn="ctr">
+              <a:defRPr/>
+            </a:pPr>
           </a:p>
         </p:txBody>
       </p:sp>
@@ -7280,7 +7344,7 @@
           <a:lstStyle/>
           <a:p>
             <a:pPr algn="l">
-              <a:defRPr sz="2000" b="1">
+              <a:defRPr sz="1000" b="1">
                 <a:solidFill>
                   <a:srgbClr val="2D5016"/>
                 </a:solidFill>
@@ -7288,6 +7352,7 @@
               </a:defRPr>
             </a:pPr>
             <a:r>
+              <a:rPr/>
               <a:t>🎯</a:t>
             </a:r>
           </a:p>
@@ -7316,7 +7381,7 @@
           <a:lstStyle/>
           <a:p>
             <a:pPr algn="l">
-              <a:defRPr sz="2000" b="0">
+              <a:defRPr sz="1000" b="0">
                 <a:solidFill>
                   <a:srgbClr val="333333"/>
                 </a:solidFill>
@@ -7324,6 +7389,7 @@
               </a:defRPr>
             </a:pPr>
             <a:r>
+              <a:rPr/>
               <a:t>一句：「政策看不懂？王支书说给你听」· 视觉锤：王支书掰手指 / 字幕弹出</a:t>
             </a:r>
           </a:p>

--- a/tunjunying/plan_v2.pptx
+++ b/tunjunying/plan_v2.pptx
@@ -8468,7 +8468,7 @@
           <a:lstStyle/>
           <a:p>
             <a:pPr algn="l">
-              <a:defRPr sz="3000" b="1">
+              <a:defRPr sz="900" b="1">
                 <a:solidFill>
                   <a:srgbClr val="2D5016"/>
                 </a:solidFill>
@@ -8476,6 +8476,7 @@
               </a:defRPr>
             </a:pPr>
             <a:r>
+              <a:rPr/>
               <a:t>✍️ 脚本通用结构（30-90秒）</a:t>
             </a:r>
           </a:p>
@@ -8520,7 +8521,9 @@
           <a:bodyPr rtlCol="0" anchor="ctr"/>
           <a:lstStyle/>
           <a:p>
-            <a:pPr algn="ctr"/>
+            <a:pPr algn="ctr">
+              <a:defRPr/>
+            </a:pPr>
           </a:p>
         </p:txBody>
       </p:sp>
@@ -8563,7 +8566,9 @@
           <a:bodyPr rtlCol="0" anchor="ctr"/>
           <a:lstStyle/>
           <a:p>
-            <a:pPr algn="ctr"/>
+            <a:pPr algn="ctr">
+              <a:defRPr/>
+            </a:pPr>
           </a:p>
         </p:txBody>
       </p:sp>
@@ -8590,7 +8595,7 @@
           <a:lstStyle/>
           <a:p>
             <a:pPr algn="l">
-              <a:defRPr sz="2200" b="1">
+              <a:defRPr sz="900" b="1">
                 <a:solidFill>
                   <a:srgbClr val="FFFFFF"/>
                 </a:solidFill>
@@ -8598,6 +8603,7 @@
               </a:defRPr>
             </a:pPr>
             <a:r>
+              <a:rPr/>
               <a:t>🪝 黄金钩子</a:t>
             </a:r>
           </a:p>
@@ -8626,7 +8632,7 @@
           <a:lstStyle/>
           <a:p>
             <a:pPr algn="l">
-              <a:defRPr sz="1800" b="0">
+              <a:defRPr sz="900" b="0">
                 <a:solidFill>
                   <a:srgbClr val="D4A017"/>
                 </a:solidFill>
@@ -8634,6 +8640,7 @@
               </a:defRPr>
             </a:pPr>
             <a:r>
+              <a:rPr/>
               <a:t>0-7秒</a:t>
             </a:r>
           </a:p>
@@ -8662,7 +8669,7 @@
           <a:lstStyle/>
           <a:p>
             <a:pPr algn="l">
-              <a:defRPr sz="1800" b="0">
+              <a:defRPr sz="900" b="0">
                 <a:solidFill>
                   <a:srgbClr val="333333"/>
                 </a:solidFill>
@@ -8670,6 +8677,7 @@
               </a:defRPr>
             </a:pPr>
             <a:r>
+              <a:rPr/>
               <a:t>冲突 / 悬念 / 反常识 / 痛点</a:t>
             </a:r>
           </a:p>
@@ -8698,7 +8706,7 @@
           <a:lstStyle/>
           <a:p>
             <a:pPr algn="l">
-              <a:defRPr sz="1500" b="0">
+              <a:defRPr sz="900" b="0">
                 <a:solidFill>
                   <a:srgbClr val="888888"/>
                 </a:solidFill>
@@ -8706,6 +8714,7 @@
               </a:defRPr>
             </a:pPr>
             <a:r>
+              <a:rPr/>
               <a:t>💡 前3秒定生死</a:t>
             </a:r>
           </a:p>
@@ -8750,7 +8759,9 @@
           <a:bodyPr rtlCol="0" anchor="ctr"/>
           <a:lstStyle/>
           <a:p>
-            <a:pPr algn="ctr"/>
+            <a:pPr algn="ctr">
+              <a:defRPr/>
+            </a:pPr>
           </a:p>
         </p:txBody>
       </p:sp>
@@ -8793,7 +8804,9 @@
           <a:bodyPr rtlCol="0" anchor="ctr"/>
           <a:lstStyle/>
           <a:p>
-            <a:pPr algn="ctr"/>
+            <a:pPr algn="ctr">
+              <a:defRPr/>
+            </a:pPr>
           </a:p>
         </p:txBody>
       </p:sp>
@@ -8820,7 +8833,7 @@
           <a:lstStyle/>
           <a:p>
             <a:pPr algn="l">
-              <a:defRPr sz="2200" b="1">
+              <a:defRPr sz="900" b="1">
                 <a:solidFill>
                   <a:srgbClr val="FFFFFF"/>
                 </a:solidFill>
@@ -8828,6 +8841,7 @@
               </a:defRPr>
             </a:pPr>
             <a:r>
+              <a:rPr/>
               <a:t>📖 核心内容</a:t>
             </a:r>
           </a:p>
@@ -8856,7 +8870,7 @@
           <a:lstStyle/>
           <a:p>
             <a:pPr algn="l">
-              <a:defRPr sz="1800" b="0">
+              <a:defRPr sz="900" b="0">
                 <a:solidFill>
                   <a:srgbClr val="D4A017"/>
                 </a:solidFill>
@@ -8864,6 +8878,7 @@
               </a:defRPr>
             </a:pPr>
             <a:r>
+              <a:rPr/>
               <a:t>7-60秒</a:t>
             </a:r>
           </a:p>
@@ -8892,7 +8907,7 @@
           <a:lstStyle/>
           <a:p>
             <a:pPr algn="l">
-              <a:defRPr sz="1800" b="0">
+              <a:defRPr sz="900" b="0">
                 <a:solidFill>
                   <a:srgbClr val="333333"/>
                 </a:solidFill>
@@ -8900,6 +8915,7 @@
               </a:defRPr>
             </a:pPr>
             <a:r>
+              <a:rPr/>
               <a:t>三段式：是什么→为什么→怎么办</a:t>
             </a:r>
           </a:p>
@@ -8928,7 +8944,7 @@
           <a:lstStyle/>
           <a:p>
             <a:pPr algn="l">
-              <a:defRPr sz="1500" b="0">
+              <a:defRPr sz="900" b="0">
                 <a:solidFill>
                   <a:srgbClr val="888888"/>
                 </a:solidFill>
@@ -8936,6 +8952,7 @@
               </a:defRPr>
             </a:pPr>
             <a:r>
+              <a:rPr/>
               <a:t>💡 信息密度高，节奏快</a:t>
             </a:r>
           </a:p>
@@ -8980,7 +8997,9 @@
           <a:bodyPr rtlCol="0" anchor="ctr"/>
           <a:lstStyle/>
           <a:p>
-            <a:pPr algn="ctr"/>
+            <a:pPr algn="ctr">
+              <a:defRPr/>
+            </a:pPr>
           </a:p>
         </p:txBody>
       </p:sp>
@@ -9023,7 +9042,9 @@
           <a:bodyPr rtlCol="0" anchor="ctr"/>
           <a:lstStyle/>
           <a:p>
-            <a:pPr algn="ctr"/>
+            <a:pPr algn="ctr">
+              <a:defRPr/>
+            </a:pPr>
           </a:p>
         </p:txBody>
       </p:sp>
@@ -9050,7 +9071,7 @@
           <a:lstStyle/>
           <a:p>
             <a:pPr algn="l">
-              <a:defRPr sz="2200" b="1">
+              <a:defRPr sz="900" b="1">
                 <a:solidFill>
                   <a:srgbClr val="FFFFFF"/>
                 </a:solidFill>
@@ -9058,6 +9079,7 @@
               </a:defRPr>
             </a:pPr>
             <a:r>
+              <a:rPr/>
               <a:t>💬 互动收尾</a:t>
             </a:r>
           </a:p>
@@ -9086,7 +9108,7 @@
           <a:lstStyle/>
           <a:p>
             <a:pPr algn="l">
-              <a:defRPr sz="1800" b="0">
+              <a:defRPr sz="900" b="0">
                 <a:solidFill>
                   <a:srgbClr val="D4A017"/>
                 </a:solidFill>
@@ -9094,6 +9116,7 @@
               </a:defRPr>
             </a:pPr>
             <a:r>
+              <a:rPr/>
               <a:t>最后5秒</a:t>
             </a:r>
           </a:p>
@@ -9122,7 +9145,7 @@
           <a:lstStyle/>
           <a:p>
             <a:pPr algn="l">
-              <a:defRPr sz="1800" b="0">
+              <a:defRPr sz="900" b="0">
                 <a:solidFill>
                   <a:srgbClr val="333333"/>
                 </a:solidFill>
@@ -9130,6 +9153,7 @@
               </a:defRPr>
             </a:pPr>
             <a:r>
+              <a:rPr/>
               <a:t>提问引导评论 / 下集预告</a:t>
             </a:r>
           </a:p>
@@ -9158,7 +9182,7 @@
           <a:lstStyle/>
           <a:p>
             <a:pPr algn="l">
-              <a:defRPr sz="1500" b="0">
+              <a:defRPr sz="900" b="0">
                 <a:solidFill>
                   <a:srgbClr val="888888"/>
                 </a:solidFill>
@@ -9166,6 +9190,7 @@
               </a:defRPr>
             </a:pPr>
             <a:r>
+              <a:rPr/>
               <a:t>💡 提高互动+关注转化</a:t>
             </a:r>
           </a:p>
@@ -9194,7 +9219,7 @@
           <a:lstStyle/>
           <a:p>
             <a:pPr algn="l">
-              <a:defRPr sz="2600" b="1">
+              <a:defRPr sz="900" b="1">
                 <a:solidFill>
                   <a:srgbClr val="2D5016"/>
                 </a:solidFill>
@@ -9202,6 +9227,7 @@
               </a:defRPr>
             </a:pPr>
             <a:r>
+              <a:rPr/>
               <a:t>三大栏目模板</a:t>
             </a:r>
           </a:p>
@@ -9246,7 +9272,9 @@
           <a:bodyPr rtlCol="0" anchor="ctr"/>
           <a:lstStyle/>
           <a:p>
-            <a:pPr algn="ctr"/>
+            <a:pPr algn="ctr">
+              <a:defRPr/>
+            </a:pPr>
           </a:p>
         </p:txBody>
       </p:sp>
@@ -9273,7 +9301,7 @@
           <a:lstStyle/>
           <a:p>
             <a:pPr algn="l">
-              <a:defRPr sz="1800" b="1">
+              <a:defRPr sz="900" b="1">
                 <a:solidFill>
                   <a:srgbClr val="2D5016"/>
                 </a:solidFill>
@@ -9281,6 +9309,7 @@
               </a:defRPr>
             </a:pPr>
             <a:r>
+              <a:rPr/>
               <a:t>冠军村足球</a:t>
             </a:r>
           </a:p>
@@ -9309,7 +9338,7 @@
           <a:lstStyle/>
           <a:p>
             <a:pPr algn="l">
-              <a:defRPr sz="1500" b="0">
+              <a:defRPr sz="900" b="0">
                 <a:solidFill>
                   <a:srgbClr val="888888"/>
                 </a:solidFill>
@@ -9317,6 +9346,7 @@
               </a:defRPr>
             </a:pPr>
             <a:r>
+              <a:rPr/>
               <a:t>热血纪实 · 45-65s</a:t>
             </a:r>
           </a:p>
@@ -9345,7 +9375,7 @@
           <a:lstStyle/>
           <a:p>
             <a:pPr algn="l">
-              <a:defRPr sz="1500" b="0">
+              <a:defRPr sz="900" b="0">
                 <a:solidFill>
                   <a:srgbClr val="D4A017"/>
                 </a:solidFill>
@@ -9353,6 +9383,7 @@
               </a:defRPr>
             </a:pPr>
             <a:r>
+              <a:rPr/>
               <a:t>凌晨五点半的足球场</a:t>
             </a:r>
           </a:p>
@@ -9397,7 +9428,9 @@
           <a:bodyPr rtlCol="0" anchor="ctr"/>
           <a:lstStyle/>
           <a:p>
-            <a:pPr algn="ctr"/>
+            <a:pPr algn="ctr">
+              <a:defRPr/>
+            </a:pPr>
           </a:p>
         </p:txBody>
       </p:sp>
@@ -9424,7 +9457,7 @@
           <a:lstStyle/>
           <a:p>
             <a:pPr algn="l">
-              <a:defRPr sz="1800" b="1">
+              <a:defRPr sz="900" b="1">
                 <a:solidFill>
                   <a:srgbClr val="2D5016"/>
                 </a:solidFill>
@@ -9432,6 +9465,7 @@
               </a:defRPr>
             </a:pPr>
             <a:r>
+              <a:rPr/>
               <a:t>兵味文化</a:t>
             </a:r>
           </a:p>
@@ -9460,7 +9494,7 @@
           <a:lstStyle/>
           <a:p>
             <a:pPr algn="l">
-              <a:defRPr sz="1500" b="0">
+              <a:defRPr sz="900" b="0">
                 <a:solidFill>
                   <a:srgbClr val="888888"/>
                 </a:solidFill>
@@ -9468,6 +9502,7 @@
               </a:defRPr>
             </a:pPr>
             <a:r>
+              <a:rPr/>
               <a:t>文化故事 · 50-65s</a:t>
             </a:r>
           </a:p>
@@ -9496,7 +9531,7 @@
           <a:lstStyle/>
           <a:p>
             <a:pPr algn="l">
-              <a:defRPr sz="1500" b="0">
+              <a:defRPr sz="900" b="0">
                 <a:solidFill>
                   <a:srgbClr val="D4A017"/>
                 </a:solidFill>
@@ -9504,6 +9539,7 @@
               </a:defRPr>
             </a:pPr>
             <a:r>
+              <a:rPr/>
               <a:t>500年前就是练兵场</a:t>
             </a:r>
           </a:p>
@@ -9548,7 +9584,9 @@
           <a:bodyPr rtlCol="0" anchor="ctr"/>
           <a:lstStyle/>
           <a:p>
-            <a:pPr algn="ctr"/>
+            <a:pPr algn="ctr">
+              <a:defRPr/>
+            </a:pPr>
           </a:p>
         </p:txBody>
       </p:sp>
@@ -9575,7 +9613,7 @@
           <a:lstStyle/>
           <a:p>
             <a:pPr algn="l">
-              <a:defRPr sz="1800" b="1">
+              <a:defRPr sz="900" b="1">
                 <a:solidFill>
                   <a:srgbClr val="2D5016"/>
                 </a:solidFill>
@@ -9583,6 +9621,7 @@
               </a:defRPr>
             </a:pPr>
             <a:r>
+              <a:rPr/>
               <a:t>体育政策解读</a:t>
             </a:r>
           </a:p>
@@ -9611,7 +9650,7 @@
           <a:lstStyle/>
           <a:p>
             <a:pPr algn="l">
-              <a:defRPr sz="1500" b="0">
+              <a:defRPr sz="900" b="0">
                 <a:solidFill>
                   <a:srgbClr val="888888"/>
                 </a:solidFill>
@@ -9619,6 +9658,7 @@
               </a:defRPr>
             </a:pPr>
             <a:r>
+              <a:rPr/>
               <a:t>实用干货 · 40-50s</a:t>
             </a:r>
           </a:p>
@@ -9647,7 +9687,7 @@
           <a:lstStyle/>
           <a:p>
             <a:pPr algn="l">
-              <a:defRPr sz="1500" b="0">
+              <a:defRPr sz="900" b="0">
                 <a:solidFill>
                   <a:srgbClr val="D4A017"/>
                 </a:solidFill>
@@ -9655,6 +9695,7 @@
               </a:defRPr>
             </a:pPr>
             <a:r>
+              <a:rPr/>
               <a:t>体育公园钱从哪来</a:t>
             </a:r>
           </a:p>
